--- a/docs/MaiMate_開發手冊.pptx
+++ b/docs/MaiMate_開發手冊.pptx
@@ -17405,9 +17405,10 @@
             <a:tbl>
               <a:tblPr/>
               <a:tblGrid>
-                <a:gridCol w="2103120"/>
-                <a:gridCol w="1188720"/>
-                <a:gridCol w="7799832"/>
+                <a:gridCol w="1920240"/>
+                <a:gridCol w="1600200"/>
+                <a:gridCol w="1051560"/>
+                <a:gridCol w="6519672"/>
               </a:tblGrid>
               <a:tr h="443484">
                 <a:tc>
@@ -17428,6 +17429,74 @@
                           <a:cs typeface="Microsoft JhengHei" pitchFamily="34" charset="-120"/>
                         </a:rPr>
                         <a:t>驗收組</a:t>
+                      </a:r>
+                      <a:endParaRPr lang="en-US" sz="1050" dirty="0">
+                        <a:latin typeface="Microsoft JhengHei" charset="0"/>
+                        <a:ea typeface="Microsoft JhengHei" charset="0"/>
+                        <a:cs typeface="Microsoft JhengHei" charset="0"/>
+                      </a:endParaRPr>
+                    </a:p>
+                  </a:txBody>
+                  <a:tcPr marL="54864" marR="54864" marT="54864" marB="54864" anchor="ctr">
+                    <a:lnL w="9525" cap="flat" cmpd="sng" algn="ctr">
+                      <a:solidFill>
+                        <a:srgbClr val="D5DEF0"/>
+                      </a:solidFill>
+                      <a:prstDash val="solid"/>
+                      <a:round/>
+                      <a:headEnd type="none" w="med" len="med"/>
+                      <a:tailEnd type="none" w="med" len="med"/>
+                    </a:lnL>
+                    <a:lnR w="9525" cap="flat" cmpd="sng" algn="ctr">
+                      <a:solidFill>
+                        <a:srgbClr val="D5DEF0"/>
+                      </a:solidFill>
+                      <a:prstDash val="solid"/>
+                      <a:round/>
+                      <a:headEnd type="none" w="med" len="med"/>
+                      <a:tailEnd type="none" w="med" len="med"/>
+                    </a:lnR>
+                    <a:lnT w="9525" cap="flat" cmpd="sng" algn="ctr">
+                      <a:solidFill>
+                        <a:srgbClr val="D5DEF0"/>
+                      </a:solidFill>
+                      <a:prstDash val="solid"/>
+                      <a:round/>
+                      <a:headEnd type="none" w="med" len="med"/>
+                      <a:tailEnd type="none" w="med" len="med"/>
+                    </a:lnT>
+                    <a:lnB w="9525" cap="flat" cmpd="sng" algn="ctr">
+                      <a:solidFill>
+                        <a:srgbClr val="D5DEF0"/>
+                      </a:solidFill>
+                      <a:prstDash val="solid"/>
+                      <a:round/>
+                      <a:headEnd type="none" w="med" len="med"/>
+                      <a:tailEnd type="none" w="med" len="med"/>
+                    </a:lnB>
+                    <a:solidFill>
+                      <a:srgbClr val="16224D"/>
+                    </a:solidFill>
+                  </a:tcPr>
+                </a:tc>
+                <a:tc>
+                  <a:txBody>
+                    <a:bodyPr/>
+                    <a:lstStyle/>
+                    <a:p>
+                      <a:pPr indent="0" marL="0">
+                        <a:buNone/>
+                      </a:pPr>
+                      <a:r>
+                        <a:rPr lang="en-US" sz="1050" b="1" dirty="0">
+                          <a:solidFill>
+                            <a:srgbClr val="FFFFFF"/>
+                          </a:solidFill>
+                          <a:latin typeface="Microsoft JhengHei" pitchFamily="34" charset="0"/>
+                          <a:ea typeface="Microsoft JhengHei" pitchFamily="34" charset="-122"/>
+                          <a:cs typeface="Microsoft JhengHei" pitchFamily="34" charset="-120"/>
+                        </a:rPr>
+                        <a:t>負責包</a:t>
                       </a:r>
                       <a:endParaRPr lang="en-US" sz="1050" dirty="0">
                         <a:latin typeface="Microsoft JhengHei" charset="0"/>
@@ -17692,6 +17761,71 @@
                       <a:r>
                         <a:rPr lang="en-US" sz="1050" b="1" dirty="0">
                           <a:solidFill>
+                            <a:srgbClr val="16224D"/>
+                          </a:solidFill>
+                          <a:latin typeface="Microsoft JhengHei" pitchFamily="34" charset="0"/>
+                          <a:ea typeface="Microsoft JhengHei" pitchFamily="34" charset="-122"/>
+                          <a:cs typeface="Microsoft JhengHei" pitchFamily="34" charset="-120"/>
+                        </a:rPr>
+                        <a:t>B（已完）</a:t>
+                      </a:r>
+                      <a:endParaRPr lang="en-US" sz="1050" dirty="0">
+                        <a:latin typeface="Microsoft JhengHei" charset="0"/>
+                        <a:ea typeface="Microsoft JhengHei" charset="0"/>
+                        <a:cs typeface="Microsoft JhengHei" charset="0"/>
+                      </a:endParaRPr>
+                    </a:p>
+                  </a:txBody>
+                  <a:tcPr marL="54864" marR="54864" marT="54864" marB="54864" anchor="ctr">
+                    <a:lnL w="9525" cap="flat" cmpd="sng" algn="ctr">
+                      <a:solidFill>
+                        <a:srgbClr val="D5DEF0"/>
+                      </a:solidFill>
+                      <a:prstDash val="solid"/>
+                      <a:round/>
+                      <a:headEnd type="none" w="med" len="med"/>
+                      <a:tailEnd type="none" w="med" len="med"/>
+                    </a:lnL>
+                    <a:lnR w="9525" cap="flat" cmpd="sng" algn="ctr">
+                      <a:solidFill>
+                        <a:srgbClr val="D5DEF0"/>
+                      </a:solidFill>
+                      <a:prstDash val="solid"/>
+                      <a:round/>
+                      <a:headEnd type="none" w="med" len="med"/>
+                      <a:tailEnd type="none" w="med" len="med"/>
+                    </a:lnR>
+                    <a:lnT w="9525" cap="flat" cmpd="sng" algn="ctr">
+                      <a:solidFill>
+                        <a:srgbClr val="D5DEF0"/>
+                      </a:solidFill>
+                      <a:prstDash val="solid"/>
+                      <a:round/>
+                      <a:headEnd type="none" w="med" len="med"/>
+                      <a:tailEnd type="none" w="med" len="med"/>
+                    </a:lnT>
+                    <a:lnB w="9525" cap="flat" cmpd="sng" algn="ctr">
+                      <a:solidFill>
+                        <a:srgbClr val="D5DEF0"/>
+                      </a:solidFill>
+                      <a:prstDash val="solid"/>
+                      <a:round/>
+                      <a:headEnd type="none" w="med" len="med"/>
+                      <a:tailEnd type="none" w="med" len="med"/>
+                    </a:lnB>
+                  </a:tcPr>
+                </a:tc>
+                <a:tc>
+                  <a:txBody>
+                    <a:bodyPr/>
+                    <a:lstStyle/>
+                    <a:p>
+                      <a:pPr indent="0" marL="0">
+                        <a:buNone/>
+                      </a:pPr>
+                      <a:r>
+                        <a:rPr lang="en-US" sz="1050" b="1" dirty="0">
+                          <a:solidFill>
                             <a:srgbClr val="1F9D66"/>
                           </a:solidFill>
                           <a:latin typeface="Microsoft JhengHei" pitchFamily="34" charset="0"/>
@@ -17889,6 +18023,71 @@
                       <a:r>
                         <a:rPr lang="en-US" sz="1050" b="1" dirty="0">
                           <a:solidFill>
+                            <a:srgbClr val="16224D"/>
+                          </a:solidFill>
+                          <a:latin typeface="Microsoft JhengHei" pitchFamily="34" charset="0"/>
+                          <a:ea typeface="Microsoft JhengHei" pitchFamily="34" charset="-122"/>
+                          <a:cs typeface="Microsoft JhengHei" pitchFamily="34" charset="-120"/>
+                        </a:rPr>
+                        <a:t>A（E2E:D）</a:t>
+                      </a:r>
+                      <a:endParaRPr lang="en-US" sz="1050" dirty="0">
+                        <a:latin typeface="Microsoft JhengHei" charset="0"/>
+                        <a:ea typeface="Microsoft JhengHei" charset="0"/>
+                        <a:cs typeface="Microsoft JhengHei" charset="0"/>
+                      </a:endParaRPr>
+                    </a:p>
+                  </a:txBody>
+                  <a:tcPr marL="54864" marR="54864" marT="54864" marB="54864" anchor="ctr">
+                    <a:lnL w="9525" cap="flat" cmpd="sng" algn="ctr">
+                      <a:solidFill>
+                        <a:srgbClr val="D5DEF0"/>
+                      </a:solidFill>
+                      <a:prstDash val="solid"/>
+                      <a:round/>
+                      <a:headEnd type="none" w="med" len="med"/>
+                      <a:tailEnd type="none" w="med" len="med"/>
+                    </a:lnL>
+                    <a:lnR w="9525" cap="flat" cmpd="sng" algn="ctr">
+                      <a:solidFill>
+                        <a:srgbClr val="D5DEF0"/>
+                      </a:solidFill>
+                      <a:prstDash val="solid"/>
+                      <a:round/>
+                      <a:headEnd type="none" w="med" len="med"/>
+                      <a:tailEnd type="none" w="med" len="med"/>
+                    </a:lnR>
+                    <a:lnT w="9525" cap="flat" cmpd="sng" algn="ctr">
+                      <a:solidFill>
+                        <a:srgbClr val="D5DEF0"/>
+                      </a:solidFill>
+                      <a:prstDash val="solid"/>
+                      <a:round/>
+                      <a:headEnd type="none" w="med" len="med"/>
+                      <a:tailEnd type="none" w="med" len="med"/>
+                    </a:lnT>
+                    <a:lnB w="9525" cap="flat" cmpd="sng" algn="ctr">
+                      <a:solidFill>
+                        <a:srgbClr val="D5DEF0"/>
+                      </a:solidFill>
+                      <a:prstDash val="solid"/>
+                      <a:round/>
+                      <a:headEnd type="none" w="med" len="med"/>
+                      <a:tailEnd type="none" w="med" len="med"/>
+                    </a:lnB>
+                  </a:tcPr>
+                </a:tc>
+                <a:tc>
+                  <a:txBody>
+                    <a:bodyPr/>
+                    <a:lstStyle/>
+                    <a:p>
+                      <a:pPr indent="0" marL="0">
+                        <a:buNone/>
+                      </a:pPr>
+                      <a:r>
+                        <a:rPr lang="en-US" sz="1050" b="1" dirty="0">
+                          <a:solidFill>
                             <a:srgbClr val="E8A13A"/>
                           </a:solidFill>
                           <a:latin typeface="Microsoft JhengHei" pitchFamily="34" charset="0"/>
@@ -18086,6 +18285,71 @@
                       <a:r>
                         <a:rPr lang="en-US" sz="1050" b="1" dirty="0">
                           <a:solidFill>
+                            <a:srgbClr val="16224D"/>
+                          </a:solidFill>
+                          <a:latin typeface="Microsoft JhengHei" pitchFamily="34" charset="0"/>
+                          <a:ea typeface="Microsoft JhengHei" pitchFamily="34" charset="-122"/>
+                          <a:cs typeface="Microsoft JhengHei" pitchFamily="34" charset="-120"/>
+                        </a:rPr>
+                        <a:t>A（卡片:C）</a:t>
+                      </a:r>
+                      <a:endParaRPr lang="en-US" sz="1050" dirty="0">
+                        <a:latin typeface="Microsoft JhengHei" charset="0"/>
+                        <a:ea typeface="Microsoft JhengHei" charset="0"/>
+                        <a:cs typeface="Microsoft JhengHei" charset="0"/>
+                      </a:endParaRPr>
+                    </a:p>
+                  </a:txBody>
+                  <a:tcPr marL="54864" marR="54864" marT="54864" marB="54864" anchor="ctr">
+                    <a:lnL w="9525" cap="flat" cmpd="sng" algn="ctr">
+                      <a:solidFill>
+                        <a:srgbClr val="D5DEF0"/>
+                      </a:solidFill>
+                      <a:prstDash val="solid"/>
+                      <a:round/>
+                      <a:headEnd type="none" w="med" len="med"/>
+                      <a:tailEnd type="none" w="med" len="med"/>
+                    </a:lnL>
+                    <a:lnR w="9525" cap="flat" cmpd="sng" algn="ctr">
+                      <a:solidFill>
+                        <a:srgbClr val="D5DEF0"/>
+                      </a:solidFill>
+                      <a:prstDash val="solid"/>
+                      <a:round/>
+                      <a:headEnd type="none" w="med" len="med"/>
+                      <a:tailEnd type="none" w="med" len="med"/>
+                    </a:lnR>
+                    <a:lnT w="9525" cap="flat" cmpd="sng" algn="ctr">
+                      <a:solidFill>
+                        <a:srgbClr val="D5DEF0"/>
+                      </a:solidFill>
+                      <a:prstDash val="solid"/>
+                      <a:round/>
+                      <a:headEnd type="none" w="med" len="med"/>
+                      <a:tailEnd type="none" w="med" len="med"/>
+                    </a:lnT>
+                    <a:lnB w="9525" cap="flat" cmpd="sng" algn="ctr">
+                      <a:solidFill>
+                        <a:srgbClr val="D5DEF0"/>
+                      </a:solidFill>
+                      <a:prstDash val="solid"/>
+                      <a:round/>
+                      <a:headEnd type="none" w="med" len="med"/>
+                      <a:tailEnd type="none" w="med" len="med"/>
+                    </a:lnB>
+                  </a:tcPr>
+                </a:tc>
+                <a:tc>
+                  <a:txBody>
+                    <a:bodyPr/>
+                    <a:lstStyle/>
+                    <a:p>
+                      <a:pPr indent="0" marL="0">
+                        <a:buNone/>
+                      </a:pPr>
+                      <a:r>
+                        <a:rPr lang="en-US" sz="1050" b="1" dirty="0">
+                          <a:solidFill>
                             <a:srgbClr val="D64550"/>
                           </a:solidFill>
                           <a:latin typeface="Microsoft JhengHei" pitchFamily="34" charset="0"/>
@@ -18283,6 +18547,71 @@
                       <a:r>
                         <a:rPr lang="en-US" sz="1050" b="1" dirty="0">
                           <a:solidFill>
+                            <a:srgbClr val="16224D"/>
+                          </a:solidFill>
+                          <a:latin typeface="Microsoft JhengHei" pitchFamily="34" charset="0"/>
+                          <a:ea typeface="Microsoft JhengHei" pitchFamily="34" charset="-122"/>
+                          <a:cs typeface="Microsoft JhengHei" pitchFamily="34" charset="-120"/>
+                        </a:rPr>
+                        <a:t>A（UI:C）</a:t>
+                      </a:r>
+                      <a:endParaRPr lang="en-US" sz="1050" dirty="0">
+                        <a:latin typeface="Microsoft JhengHei" charset="0"/>
+                        <a:ea typeface="Microsoft JhengHei" charset="0"/>
+                        <a:cs typeface="Microsoft JhengHei" charset="0"/>
+                      </a:endParaRPr>
+                    </a:p>
+                  </a:txBody>
+                  <a:tcPr marL="54864" marR="54864" marT="54864" marB="54864" anchor="ctr">
+                    <a:lnL w="9525" cap="flat" cmpd="sng" algn="ctr">
+                      <a:solidFill>
+                        <a:srgbClr val="D5DEF0"/>
+                      </a:solidFill>
+                      <a:prstDash val="solid"/>
+                      <a:round/>
+                      <a:headEnd type="none" w="med" len="med"/>
+                      <a:tailEnd type="none" w="med" len="med"/>
+                    </a:lnL>
+                    <a:lnR w="9525" cap="flat" cmpd="sng" algn="ctr">
+                      <a:solidFill>
+                        <a:srgbClr val="D5DEF0"/>
+                      </a:solidFill>
+                      <a:prstDash val="solid"/>
+                      <a:round/>
+                      <a:headEnd type="none" w="med" len="med"/>
+                      <a:tailEnd type="none" w="med" len="med"/>
+                    </a:lnR>
+                    <a:lnT w="9525" cap="flat" cmpd="sng" algn="ctr">
+                      <a:solidFill>
+                        <a:srgbClr val="D5DEF0"/>
+                      </a:solidFill>
+                      <a:prstDash val="solid"/>
+                      <a:round/>
+                      <a:headEnd type="none" w="med" len="med"/>
+                      <a:tailEnd type="none" w="med" len="med"/>
+                    </a:lnT>
+                    <a:lnB w="9525" cap="flat" cmpd="sng" algn="ctr">
+                      <a:solidFill>
+                        <a:srgbClr val="D5DEF0"/>
+                      </a:solidFill>
+                      <a:prstDash val="solid"/>
+                      <a:round/>
+                      <a:headEnd type="none" w="med" len="med"/>
+                      <a:tailEnd type="none" w="med" len="med"/>
+                    </a:lnB>
+                  </a:tcPr>
+                </a:tc>
+                <a:tc>
+                  <a:txBody>
+                    <a:bodyPr/>
+                    <a:lstStyle/>
+                    <a:p>
+                      <a:pPr indent="0" marL="0">
+                        <a:buNone/>
+                      </a:pPr>
+                      <a:r>
+                        <a:rPr lang="en-US" sz="1050" b="1" dirty="0">
+                          <a:solidFill>
                             <a:srgbClr val="D64550"/>
                           </a:solidFill>
                           <a:latin typeface="Microsoft JhengHei" pitchFamily="34" charset="0"/>
@@ -18480,6 +18809,71 @@
                       <a:r>
                         <a:rPr lang="en-US" sz="1050" b="1" dirty="0">
                           <a:solidFill>
+                            <a:srgbClr val="16224D"/>
+                          </a:solidFill>
+                          <a:latin typeface="Microsoft JhengHei" pitchFamily="34" charset="0"/>
+                          <a:ea typeface="Microsoft JhengHei" pitchFamily="34" charset="-122"/>
+                          <a:cs typeface="Microsoft JhengHei" pitchFamily="34" charset="-120"/>
+                        </a:rPr>
+                        <a:t>D（單元:A）</a:t>
+                      </a:r>
+                      <a:endParaRPr lang="en-US" sz="1050" dirty="0">
+                        <a:latin typeface="Microsoft JhengHei" charset="0"/>
+                        <a:ea typeface="Microsoft JhengHei" charset="0"/>
+                        <a:cs typeface="Microsoft JhengHei" charset="0"/>
+                      </a:endParaRPr>
+                    </a:p>
+                  </a:txBody>
+                  <a:tcPr marL="54864" marR="54864" marT="54864" marB="54864" anchor="ctr">
+                    <a:lnL w="9525" cap="flat" cmpd="sng" algn="ctr">
+                      <a:solidFill>
+                        <a:srgbClr val="D5DEF0"/>
+                      </a:solidFill>
+                      <a:prstDash val="solid"/>
+                      <a:round/>
+                      <a:headEnd type="none" w="med" len="med"/>
+                      <a:tailEnd type="none" w="med" len="med"/>
+                    </a:lnL>
+                    <a:lnR w="9525" cap="flat" cmpd="sng" algn="ctr">
+                      <a:solidFill>
+                        <a:srgbClr val="D5DEF0"/>
+                      </a:solidFill>
+                      <a:prstDash val="solid"/>
+                      <a:round/>
+                      <a:headEnd type="none" w="med" len="med"/>
+                      <a:tailEnd type="none" w="med" len="med"/>
+                    </a:lnR>
+                    <a:lnT w="9525" cap="flat" cmpd="sng" algn="ctr">
+                      <a:solidFill>
+                        <a:srgbClr val="D5DEF0"/>
+                      </a:solidFill>
+                      <a:prstDash val="solid"/>
+                      <a:round/>
+                      <a:headEnd type="none" w="med" len="med"/>
+                      <a:tailEnd type="none" w="med" len="med"/>
+                    </a:lnT>
+                    <a:lnB w="9525" cap="flat" cmpd="sng" algn="ctr">
+                      <a:solidFill>
+                        <a:srgbClr val="D5DEF0"/>
+                      </a:solidFill>
+                      <a:prstDash val="solid"/>
+                      <a:round/>
+                      <a:headEnd type="none" w="med" len="med"/>
+                      <a:tailEnd type="none" w="med" len="med"/>
+                    </a:lnB>
+                  </a:tcPr>
+                </a:tc>
+                <a:tc>
+                  <a:txBody>
+                    <a:bodyPr/>
+                    <a:lstStyle/>
+                    <a:p>
+                      <a:pPr indent="0" marL="0">
+                        <a:buNone/>
+                      </a:pPr>
+                      <a:r>
+                        <a:rPr lang="en-US" sz="1050" b="1" dirty="0">
+                          <a:solidFill>
                             <a:srgbClr val="E8A13A"/>
                           </a:solidFill>
                           <a:latin typeface="Microsoft JhengHei" pitchFamily="34" charset="0"/>
@@ -18677,6 +19071,71 @@
                       <a:r>
                         <a:rPr lang="en-US" sz="1050" b="1" dirty="0">
                           <a:solidFill>
+                            <a:srgbClr val="16224D"/>
+                          </a:solidFill>
+                          <a:latin typeface="Microsoft JhengHei" pitchFamily="34" charset="0"/>
+                          <a:ea typeface="Microsoft JhengHei" pitchFamily="34" charset="-122"/>
+                          <a:cs typeface="Microsoft JhengHei" pitchFamily="34" charset="-120"/>
+                        </a:rPr>
+                        <a:t>B（註冊:A）</a:t>
+                      </a:r>
+                      <a:endParaRPr lang="en-US" sz="1050" dirty="0">
+                        <a:latin typeface="Microsoft JhengHei" charset="0"/>
+                        <a:ea typeface="Microsoft JhengHei" charset="0"/>
+                        <a:cs typeface="Microsoft JhengHei" charset="0"/>
+                      </a:endParaRPr>
+                    </a:p>
+                  </a:txBody>
+                  <a:tcPr marL="54864" marR="54864" marT="54864" marB="54864" anchor="ctr">
+                    <a:lnL w="9525" cap="flat" cmpd="sng" algn="ctr">
+                      <a:solidFill>
+                        <a:srgbClr val="D5DEF0"/>
+                      </a:solidFill>
+                      <a:prstDash val="solid"/>
+                      <a:round/>
+                      <a:headEnd type="none" w="med" len="med"/>
+                      <a:tailEnd type="none" w="med" len="med"/>
+                    </a:lnL>
+                    <a:lnR w="9525" cap="flat" cmpd="sng" algn="ctr">
+                      <a:solidFill>
+                        <a:srgbClr val="D5DEF0"/>
+                      </a:solidFill>
+                      <a:prstDash val="solid"/>
+                      <a:round/>
+                      <a:headEnd type="none" w="med" len="med"/>
+                      <a:tailEnd type="none" w="med" len="med"/>
+                    </a:lnR>
+                    <a:lnT w="9525" cap="flat" cmpd="sng" algn="ctr">
+                      <a:solidFill>
+                        <a:srgbClr val="D5DEF0"/>
+                      </a:solidFill>
+                      <a:prstDash val="solid"/>
+                      <a:round/>
+                      <a:headEnd type="none" w="med" len="med"/>
+                      <a:tailEnd type="none" w="med" len="med"/>
+                    </a:lnT>
+                    <a:lnB w="9525" cap="flat" cmpd="sng" algn="ctr">
+                      <a:solidFill>
+                        <a:srgbClr val="D5DEF0"/>
+                      </a:solidFill>
+                      <a:prstDash val="solid"/>
+                      <a:round/>
+                      <a:headEnd type="none" w="med" len="med"/>
+                      <a:tailEnd type="none" w="med" len="med"/>
+                    </a:lnB>
+                  </a:tcPr>
+                </a:tc>
+                <a:tc>
+                  <a:txBody>
+                    <a:bodyPr/>
+                    <a:lstStyle/>
+                    <a:p>
+                      <a:pPr indent="0" marL="0">
+                        <a:buNone/>
+                      </a:pPr>
+                      <a:r>
+                        <a:rPr lang="en-US" sz="1050" b="1" dirty="0">
+                          <a:solidFill>
                             <a:srgbClr val="D64550"/>
                           </a:solidFill>
                           <a:latin typeface="Microsoft JhengHei" pitchFamily="34" charset="0"/>
@@ -18874,6 +19333,71 @@
                       <a:r>
                         <a:rPr lang="en-US" sz="1050" b="1" dirty="0">
                           <a:solidFill>
+                            <a:srgbClr val="16224D"/>
+                          </a:solidFill>
+                          <a:latin typeface="Microsoft JhengHei" pitchFamily="34" charset="0"/>
+                          <a:ea typeface="Microsoft JhengHei" pitchFamily="34" charset="-122"/>
+                          <a:cs typeface="Microsoft JhengHei" pitchFamily="34" charset="-120"/>
+                        </a:rPr>
+                        <a:t>B（埋點:A 面板:C）</a:t>
+                      </a:r>
+                      <a:endParaRPr lang="en-US" sz="1050" dirty="0">
+                        <a:latin typeface="Microsoft JhengHei" charset="0"/>
+                        <a:ea typeface="Microsoft JhengHei" charset="0"/>
+                        <a:cs typeface="Microsoft JhengHei" charset="0"/>
+                      </a:endParaRPr>
+                    </a:p>
+                  </a:txBody>
+                  <a:tcPr marL="54864" marR="54864" marT="54864" marB="54864" anchor="ctr">
+                    <a:lnL w="9525" cap="flat" cmpd="sng" algn="ctr">
+                      <a:solidFill>
+                        <a:srgbClr val="D5DEF0"/>
+                      </a:solidFill>
+                      <a:prstDash val="solid"/>
+                      <a:round/>
+                      <a:headEnd type="none" w="med" len="med"/>
+                      <a:tailEnd type="none" w="med" len="med"/>
+                    </a:lnL>
+                    <a:lnR w="9525" cap="flat" cmpd="sng" algn="ctr">
+                      <a:solidFill>
+                        <a:srgbClr val="D5DEF0"/>
+                      </a:solidFill>
+                      <a:prstDash val="solid"/>
+                      <a:round/>
+                      <a:headEnd type="none" w="med" len="med"/>
+                      <a:tailEnd type="none" w="med" len="med"/>
+                    </a:lnR>
+                    <a:lnT w="9525" cap="flat" cmpd="sng" algn="ctr">
+                      <a:solidFill>
+                        <a:srgbClr val="D5DEF0"/>
+                      </a:solidFill>
+                      <a:prstDash val="solid"/>
+                      <a:round/>
+                      <a:headEnd type="none" w="med" len="med"/>
+                      <a:tailEnd type="none" w="med" len="med"/>
+                    </a:lnT>
+                    <a:lnB w="9525" cap="flat" cmpd="sng" algn="ctr">
+                      <a:solidFill>
+                        <a:srgbClr val="D5DEF0"/>
+                      </a:solidFill>
+                      <a:prstDash val="solid"/>
+                      <a:round/>
+                      <a:headEnd type="none" w="med" len="med"/>
+                      <a:tailEnd type="none" w="med" len="med"/>
+                    </a:lnB>
+                  </a:tcPr>
+                </a:tc>
+                <a:tc>
+                  <a:txBody>
+                    <a:bodyPr/>
+                    <a:lstStyle/>
+                    <a:p>
+                      <a:pPr indent="0" marL="0">
+                        <a:buNone/>
+                      </a:pPr>
+                      <a:r>
+                        <a:rPr lang="en-US" sz="1050" b="1" dirty="0">
+                          <a:solidFill>
                             <a:srgbClr val="D64550"/>
                           </a:solidFill>
                           <a:latin typeface="Microsoft JhengHei" pitchFamily="34" charset="0"/>
@@ -19071,6 +19595,71 @@
                       <a:r>
                         <a:rPr lang="en-US" sz="1050" b="1" dirty="0">
                           <a:solidFill>
+                            <a:srgbClr val="16224D"/>
+                          </a:solidFill>
+                          <a:latin typeface="Microsoft JhengHei" pitchFamily="34" charset="0"/>
+                          <a:ea typeface="Microsoft JhengHei" pitchFamily="34" charset="-122"/>
+                          <a:cs typeface="Microsoft JhengHei" pitchFamily="34" charset="-120"/>
+                        </a:rPr>
+                        <a:t>C</a:t>
+                      </a:r>
+                      <a:endParaRPr lang="en-US" sz="1050" dirty="0">
+                        <a:latin typeface="Microsoft JhengHei" charset="0"/>
+                        <a:ea typeface="Microsoft JhengHei" charset="0"/>
+                        <a:cs typeface="Microsoft JhengHei" charset="0"/>
+                      </a:endParaRPr>
+                    </a:p>
+                  </a:txBody>
+                  <a:tcPr marL="54864" marR="54864" marT="54864" marB="54864" anchor="ctr">
+                    <a:lnL w="9525" cap="flat" cmpd="sng" algn="ctr">
+                      <a:solidFill>
+                        <a:srgbClr val="D5DEF0"/>
+                      </a:solidFill>
+                      <a:prstDash val="solid"/>
+                      <a:round/>
+                      <a:headEnd type="none" w="med" len="med"/>
+                      <a:tailEnd type="none" w="med" len="med"/>
+                    </a:lnL>
+                    <a:lnR w="9525" cap="flat" cmpd="sng" algn="ctr">
+                      <a:solidFill>
+                        <a:srgbClr val="D5DEF0"/>
+                      </a:solidFill>
+                      <a:prstDash val="solid"/>
+                      <a:round/>
+                      <a:headEnd type="none" w="med" len="med"/>
+                      <a:tailEnd type="none" w="med" len="med"/>
+                    </a:lnR>
+                    <a:lnT w="9525" cap="flat" cmpd="sng" algn="ctr">
+                      <a:solidFill>
+                        <a:srgbClr val="D5DEF0"/>
+                      </a:solidFill>
+                      <a:prstDash val="solid"/>
+                      <a:round/>
+                      <a:headEnd type="none" w="med" len="med"/>
+                      <a:tailEnd type="none" w="med" len="med"/>
+                    </a:lnT>
+                    <a:lnB w="9525" cap="flat" cmpd="sng" algn="ctr">
+                      <a:solidFill>
+                        <a:srgbClr val="D5DEF0"/>
+                      </a:solidFill>
+                      <a:prstDash val="solid"/>
+                      <a:round/>
+                      <a:headEnd type="none" w="med" len="med"/>
+                      <a:tailEnd type="none" w="med" len="med"/>
+                    </a:lnB>
+                  </a:tcPr>
+                </a:tc>
+                <a:tc>
+                  <a:txBody>
+                    <a:bodyPr/>
+                    <a:lstStyle/>
+                    <a:p>
+                      <a:pPr indent="0" marL="0">
+                        <a:buNone/>
+                      </a:pPr>
+                      <a:r>
+                        <a:rPr lang="en-US" sz="1050" b="1" dirty="0">
+                          <a:solidFill>
                             <a:srgbClr val="D64550"/>
                           </a:solidFill>
                           <a:latin typeface="Microsoft JhengHei" pitchFamily="34" charset="0"/>
@@ -19268,6 +19857,71 @@
                       <a:r>
                         <a:rPr lang="en-US" sz="1050" b="1" dirty="0">
                           <a:solidFill>
+                            <a:srgbClr val="16224D"/>
+                          </a:solidFill>
+                          <a:latin typeface="Microsoft JhengHei" pitchFamily="34" charset="0"/>
+                          <a:ea typeface="Microsoft JhengHei" pitchFamily="34" charset="-122"/>
+                          <a:cs typeface="Microsoft JhengHei" pitchFamily="34" charset="-120"/>
+                        </a:rPr>
+                        <a:t>D（掛載:A）</a:t>
+                      </a:r>
+                      <a:endParaRPr lang="en-US" sz="1050" dirty="0">
+                        <a:latin typeface="Microsoft JhengHei" charset="0"/>
+                        <a:ea typeface="Microsoft JhengHei" charset="0"/>
+                        <a:cs typeface="Microsoft JhengHei" charset="0"/>
+                      </a:endParaRPr>
+                    </a:p>
+                  </a:txBody>
+                  <a:tcPr marL="54864" marR="54864" marT="54864" marB="54864" anchor="ctr">
+                    <a:lnL w="9525" cap="flat" cmpd="sng" algn="ctr">
+                      <a:solidFill>
+                        <a:srgbClr val="D5DEF0"/>
+                      </a:solidFill>
+                      <a:prstDash val="solid"/>
+                      <a:round/>
+                      <a:headEnd type="none" w="med" len="med"/>
+                      <a:tailEnd type="none" w="med" len="med"/>
+                    </a:lnL>
+                    <a:lnR w="9525" cap="flat" cmpd="sng" algn="ctr">
+                      <a:solidFill>
+                        <a:srgbClr val="D5DEF0"/>
+                      </a:solidFill>
+                      <a:prstDash val="solid"/>
+                      <a:round/>
+                      <a:headEnd type="none" w="med" len="med"/>
+                      <a:tailEnd type="none" w="med" len="med"/>
+                    </a:lnR>
+                    <a:lnT w="9525" cap="flat" cmpd="sng" algn="ctr">
+                      <a:solidFill>
+                        <a:srgbClr val="D5DEF0"/>
+                      </a:solidFill>
+                      <a:prstDash val="solid"/>
+                      <a:round/>
+                      <a:headEnd type="none" w="med" len="med"/>
+                      <a:tailEnd type="none" w="med" len="med"/>
+                    </a:lnT>
+                    <a:lnB w="9525" cap="flat" cmpd="sng" algn="ctr">
+                      <a:solidFill>
+                        <a:srgbClr val="D5DEF0"/>
+                      </a:solidFill>
+                      <a:prstDash val="solid"/>
+                      <a:round/>
+                      <a:headEnd type="none" w="med" len="med"/>
+                      <a:tailEnd type="none" w="med" len="med"/>
+                    </a:lnB>
+                  </a:tcPr>
+                </a:tc>
+                <a:tc>
+                  <a:txBody>
+                    <a:bodyPr/>
+                    <a:lstStyle/>
+                    <a:p>
+                      <a:pPr indent="0" marL="0">
+                        <a:buNone/>
+                      </a:pPr>
+                      <a:r>
+                        <a:rPr lang="en-US" sz="1050" b="1" dirty="0">
+                          <a:solidFill>
                             <a:srgbClr val="E8A13A"/>
                           </a:solidFill>
                           <a:latin typeface="Microsoft JhengHei" pitchFamily="34" charset="0"/>
@@ -19407,6 +20061,71 @@
                           <a:cs typeface="Microsoft JhengHei" pitchFamily="34" charset="-120"/>
                         </a:rPr>
                         <a:t>4.10 部署與交付</a:t>
+                      </a:r>
+                      <a:endParaRPr lang="en-US" sz="1050" dirty="0">
+                        <a:latin typeface="Microsoft JhengHei" charset="0"/>
+                        <a:ea typeface="Microsoft JhengHei" charset="0"/>
+                        <a:cs typeface="Microsoft JhengHei" charset="0"/>
+                      </a:endParaRPr>
+                    </a:p>
+                  </a:txBody>
+                  <a:tcPr marL="54864" marR="54864" marT="54864" marB="54864" anchor="ctr">
+                    <a:lnL w="9525" cap="flat" cmpd="sng" algn="ctr">
+                      <a:solidFill>
+                        <a:srgbClr val="D5DEF0"/>
+                      </a:solidFill>
+                      <a:prstDash val="solid"/>
+                      <a:round/>
+                      <a:headEnd type="none" w="med" len="med"/>
+                      <a:tailEnd type="none" w="med" len="med"/>
+                    </a:lnL>
+                    <a:lnR w="9525" cap="flat" cmpd="sng" algn="ctr">
+                      <a:solidFill>
+                        <a:srgbClr val="D5DEF0"/>
+                      </a:solidFill>
+                      <a:prstDash val="solid"/>
+                      <a:round/>
+                      <a:headEnd type="none" w="med" len="med"/>
+                      <a:tailEnd type="none" w="med" len="med"/>
+                    </a:lnR>
+                    <a:lnT w="9525" cap="flat" cmpd="sng" algn="ctr">
+                      <a:solidFill>
+                        <a:srgbClr val="D5DEF0"/>
+                      </a:solidFill>
+                      <a:prstDash val="solid"/>
+                      <a:round/>
+                      <a:headEnd type="none" w="med" len="med"/>
+                      <a:tailEnd type="none" w="med" len="med"/>
+                    </a:lnT>
+                    <a:lnB w="9525" cap="flat" cmpd="sng" algn="ctr">
+                      <a:solidFill>
+                        <a:srgbClr val="D5DEF0"/>
+                      </a:solidFill>
+                      <a:prstDash val="solid"/>
+                      <a:round/>
+                      <a:headEnd type="none" w="med" len="med"/>
+                      <a:tailEnd type="none" w="med" len="med"/>
+                    </a:lnB>
+                  </a:tcPr>
+                </a:tc>
+                <a:tc>
+                  <a:txBody>
+                    <a:bodyPr/>
+                    <a:lstStyle/>
+                    <a:p>
+                      <a:pPr indent="0" marL="0">
+                        <a:buNone/>
+                      </a:pPr>
+                      <a:r>
+                        <a:rPr lang="en-US" sz="1050" b="1" dirty="0">
+                          <a:solidFill>
+                            <a:srgbClr val="16224D"/>
+                          </a:solidFill>
+                          <a:latin typeface="Microsoft JhengHei" pitchFamily="34" charset="0"/>
+                          <a:ea typeface="Microsoft JhengHei" pitchFamily="34" charset="-122"/>
+                          <a:cs typeface="Microsoft JhengHei" pitchFamily="34" charset="-120"/>
+                        </a:rPr>
+                        <a:t>D</a:t>
                       </a:r>
                       <a:endParaRPr lang="en-US" sz="1050" dirty="0">
                         <a:latin typeface="Microsoft JhengHei" charset="0"/>
@@ -20966,7 +21685,7 @@
                 <a:ea typeface="Microsoft JhengHei" pitchFamily="34" charset="-122"/>
                 <a:cs typeface="Microsoft JhengHei" pitchFamily="34" charset="-120"/>
               </a:rPr>
-              <a:t>Agent 核心（10 項）</a:t>
+              <a:t>Agent 核心（10 項）｜主責 A</a:t>
             </a:r>
             <a:endParaRPr lang="en-US" sz="2700" dirty="0"/>
           </a:p>
@@ -24002,7 +24721,7 @@
                 <a:ea typeface="Microsoft JhengHei" pitchFamily="34" charset="-122"/>
                 <a:cs typeface="Microsoft JhengHei" pitchFamily="34" charset="-120"/>
               </a:rPr>
-              <a:t>資料・RAG・API 整合（11 項）</a:t>
+              <a:t>資料・RAG・API 整合（11 項）｜主責 B（Private E2E:D、KYC:全員）</a:t>
             </a:r>
             <a:endParaRPr lang="en-US" sz="2700" dirty="0"/>
           </a:p>
@@ -27261,7 +27980,7 @@
                 <a:ea typeface="Microsoft JhengHei" pitchFamily="34" charset="-122"/>
                 <a:cs typeface="Microsoft JhengHei" pitchFamily="34" charset="-120"/>
               </a:rPr>
-              <a:t>前端・部署・交付物（12 項）</a:t>
+              <a:t>前端・部署・交付物（12 項）｜前端 C／部署交付 D</a:t>
             </a:r>
             <a:endParaRPr lang="en-US" sz="2700" dirty="0"/>
           </a:p>
@@ -30782,7 +31501,7 @@
                 <a:ea typeface="Microsoft JhengHei" pitchFamily="34" charset="-122"/>
                 <a:cs typeface="Microsoft JhengHei" pitchFamily="34" charset="-120"/>
               </a:rPr>
-              <a:t>測試清單（6 項）— 需要一位「測試主導」認領</a:t>
+              <a:t>測試清單（6 項）｜主責 D（E2E 全員配合）</a:t>
             </a:r>
             <a:endParaRPr lang="en-US" sz="2700" dirty="0"/>
           </a:p>

--- a/docs/MaiMate_開發手冊.pptx
+++ b/docs/MaiMate_開發手冊.pptx
@@ -27,9 +27,10 @@
     <p:sldId id="275" r:id="rId21"/>
     <p:sldId id="276" r:id="rId22"/>
     <p:sldId id="277" r:id="rId23"/>
+    <p:sldId id="278" r:id="rId24"/>
   </p:sldIdLst>
   <p:notesMasterIdLst>
-    <p:notesMasterId r:id="rId24"/>
+    <p:notesMasterId r:id="rId25"/>
   </p:notesMasterIdLst>
   <p:sldSz cx="12192000" cy="6858000"/>
   <p:notesSz cx="6858000" cy="12192000"/>
@@ -1797,6 +1798,94 @@
 </p:notes>
 </file>
 
+<file path=ppt/notesSlides/notesSlide23.xml><?xml version="1.0" encoding="utf-8"?>
+<p:notes xmlns:a="http://schemas.openxmlformats.org/drawingml/2006/main" xmlns:r="http://schemas.openxmlformats.org/officeDocument/2006/relationships" xmlns:p="http://schemas.openxmlformats.org/presentationml/2006/main">
+  <p:cSld>
+    <p:spTree>
+      <p:nvGrpSpPr>
+        <p:cNvPr id="1" name=""/>
+        <p:cNvGrpSpPr/>
+        <p:nvPr/>
+      </p:nvGrpSpPr>
+      <p:grpSpPr>
+        <a:xfrm>
+          <a:off x="0" y="0"/>
+          <a:ext cx="0" cy="0"/>
+          <a:chOff x="0" y="0"/>
+          <a:chExt cx="0" cy="0"/>
+        </a:xfrm>
+      </p:grpSpPr>
+      <p:sp>
+        <p:nvSpPr>
+          <p:cNvPr id="2" name="Slide Image Placeholder 1"/>
+          <p:cNvSpPr>
+            <a:spLocks noGrp="1" noRot="1" noChangeAspect="1"/>
+          </p:cNvSpPr>
+          <p:nvPr>
+            <p:ph type="sldImg"/>
+          </p:nvPr>
+        </p:nvSpPr>
+        <p:spPr/>
+      </p:sp>
+      <p:sp>
+        <p:nvSpPr>
+          <p:cNvPr id="3" name="Notes Placeholder 2"/>
+          <p:cNvSpPr>
+            <a:spLocks noGrp="1"/>
+          </p:cNvSpPr>
+          <p:nvPr>
+            <p:ph type="body" idx="1"/>
+          </p:nvPr>
+        </p:nvSpPr>
+        <p:spPr/>
+        <p:txBody>
+          <a:bodyPr/>
+          <a:lstStyle/>
+          <a:p>
+            <a:r>
+              <a:rPr lang="en-US" dirty="0"/>
+              <a:t/>
+            </a:r>
+            <a:endParaRPr lang="en-US" dirty="0"/>
+          </a:p>
+        </p:txBody>
+      </p:sp>
+      <p:sp>
+        <p:nvSpPr>
+          <p:cNvPr id="4" name="Slide Number Placeholder 3"/>
+          <p:cNvSpPr>
+            <a:spLocks noGrp="1"/>
+          </p:cNvSpPr>
+          <p:nvPr>
+            <p:ph type="sldNum" sz="quarter" idx="10"/>
+          </p:nvPr>
+        </p:nvSpPr>
+        <p:spPr/>
+        <p:txBody>
+          <a:bodyPr/>
+          <a:lstStyle/>
+          <a:p>
+            <a:fld id="{F7021451-1387-4CA6-816F-3879F97B5CBC}" type="slidenum">
+              <a:rPr lang="en-US"/>
+              <a:t>23</a:t>
+            </a:fld>
+            <a:endParaRPr lang="en-US"/>
+          </a:p>
+        </p:txBody>
+      </p:sp>
+    </p:spTree>
+    <p:extLst>
+      <p:ext uri="{BB962C8B-B14F-4D97-AF65-F5344CB8AC3E}">
+        <p14:creationId xmlns:p14="http://schemas.microsoft.com/office/powerpoint/2010/main" val="1024086991"/>
+      </p:ext>
+    </p:extLst>
+  </p:cSld>
+  <p:clrMapOvr>
+    <a:masterClrMapping/>
+  </p:clrMapOvr>
+</p:notes>
+</file>
+
 <file path=ppt/notesSlides/notesSlide3.xml><?xml version="1.0" encoding="utf-8"?>
 <p:notes xmlns:a="http://schemas.openxmlformats.org/drawingml/2006/main" xmlns:r="http://schemas.openxmlformats.org/officeDocument/2006/relationships" xmlns:p="http://schemas.openxmlformats.org/presentationml/2006/main">
   <p:cSld>
@@ -2985,6 +3074,762 @@
                 <a:ea typeface="Microsoft JhengHei" pitchFamily="34" charset="-122"/>
                 <a:cs typeface="Microsoft JhengHei" pitchFamily="34" charset="-120"/>
               </a:rPr>
+              <a:t>交接不打架的五條規則</a:t>
+            </a:r>
+            <a:endParaRPr lang="en-US" sz="2700" dirty="0"/>
+          </a:p>
+        </p:txBody>
+      </p:sp>
+      <p:sp>
+        <p:nvSpPr>
+          <p:cNvPr id="3" name="Shape 1"/>
+          <p:cNvSpPr/>
+          <p:nvPr/>
+        </p:nvSpPr>
+        <p:spPr>
+          <a:xfrm>
+            <a:off x="548640" y="1645920"/>
+            <a:ext cx="502920" cy="502920"/>
+          </a:xfrm>
+          <a:prstGeom prst="ellipse">
+            <a:avLst/>
+          </a:prstGeom>
+          <a:solidFill>
+            <a:srgbClr val="16224D"/>
+          </a:solidFill>
+          <a:ln/>
+        </p:spPr>
+      </p:sp>
+      <p:sp>
+        <p:nvSpPr>
+          <p:cNvPr id="4" name="Text 2"/>
+          <p:cNvSpPr/>
+          <p:nvPr/>
+        </p:nvSpPr>
+        <p:spPr>
+          <a:xfrm>
+            <a:off x="548640" y="1645920"/>
+            <a:ext cx="502920" cy="502920"/>
+          </a:xfrm>
+          <a:prstGeom prst="rect">
+            <a:avLst/>
+          </a:prstGeom>
+          <a:noFill/>
+          <a:ln/>
+        </p:spPr>
+        <p:txBody>
+          <a:bodyPr wrap="square" lIns="0" tIns="0" rIns="0" bIns="0" rtlCol="0" anchor="ctr"/>
+          <a:lstStyle/>
+          <a:p>
+            <a:pPr algn="ctr" indent="0" marL="0">
+              <a:buNone/>
+            </a:pPr>
+            <a:r>
+              <a:rPr lang="en-US" sz="1600" b="1" dirty="0">
+                <a:solidFill>
+                  <a:srgbClr val="FFFFFF"/>
+                </a:solidFill>
+                <a:latin typeface="Microsoft JhengHei" pitchFamily="34" charset="0"/>
+                <a:ea typeface="Microsoft JhengHei" pitchFamily="34" charset="-122"/>
+                <a:cs typeface="Microsoft JhengHei" pitchFamily="34" charset="-120"/>
+              </a:rPr>
+              <a:t>1</a:t>
+            </a:r>
+            <a:endParaRPr lang="en-US" sz="1600" dirty="0"/>
+          </a:p>
+        </p:txBody>
+      </p:sp>
+      <p:sp>
+        <p:nvSpPr>
+          <p:cNvPr id="5" name="Text 3"/>
+          <p:cNvSpPr/>
+          <p:nvPr/>
+        </p:nvSpPr>
+        <p:spPr>
+          <a:xfrm>
+            <a:off x="1280160" y="1554480"/>
+            <a:ext cx="2194560" cy="777240"/>
+          </a:xfrm>
+          <a:prstGeom prst="rect">
+            <a:avLst/>
+          </a:prstGeom>
+          <a:noFill/>
+          <a:ln/>
+        </p:spPr>
+        <p:txBody>
+          <a:bodyPr wrap="square" lIns="0" tIns="0" rIns="0" bIns="0" rtlCol="0" anchor="ctr"/>
+          <a:lstStyle/>
+          <a:p>
+            <a:pPr indent="0" marL="0">
+              <a:buNone/>
+            </a:pPr>
+            <a:r>
+              <a:rPr lang="en-US" sz="1550" b="1" dirty="0">
+                <a:solidFill>
+                  <a:srgbClr val="16224D"/>
+                </a:solidFill>
+                <a:latin typeface="Microsoft JhengHei" pitchFamily="34" charset="0"/>
+                <a:ea typeface="Microsoft JhengHei" pitchFamily="34" charset="-122"/>
+                <a:cs typeface="Microsoft JhengHei" pitchFamily="34" charset="-120"/>
+              </a:rPr>
+              <a:t>地盤制</a:t>
+            </a:r>
+            <a:endParaRPr lang="en-US" sz="1550" dirty="0"/>
+          </a:p>
+        </p:txBody>
+      </p:sp>
+      <p:sp>
+        <p:nvSpPr>
+          <p:cNvPr id="6" name="Text 4"/>
+          <p:cNvSpPr/>
+          <p:nvPr/>
+        </p:nvSpPr>
+        <p:spPr>
+          <a:xfrm>
+            <a:off x="3566160" y="1554480"/>
+            <a:ext cx="8138160" cy="777240"/>
+          </a:xfrm>
+          <a:prstGeom prst="rect">
+            <a:avLst/>
+          </a:prstGeom>
+          <a:noFill/>
+          <a:ln/>
+        </p:spPr>
+        <p:txBody>
+          <a:bodyPr wrap="square" lIns="0" tIns="0" rIns="0" bIns="0" rtlCol="0" anchor="ctr"/>
+          <a:lstStyle/>
+          <a:p>
+            <a:pPr indent="0" marL="0">
+              <a:buNone/>
+            </a:pPr>
+            <a:r>
+              <a:rPr lang="en-US" sz="1250" dirty="0">
+                <a:solidFill>
+                  <a:srgbClr val="1F2937"/>
+                </a:solidFill>
+                <a:latin typeface="Microsoft JhengHei" pitchFamily="34" charset="0"/>
+                <a:ea typeface="Microsoft JhengHei" pitchFamily="34" charset="-122"/>
+                <a:cs typeface="Microsoft JhengHei" pitchFamily="34" charset="-120"/>
+              </a:rPr>
+              <a:t>每包只 commit 自己的目錄。要動別人的地盤 → 開 issue 給對方包，不直接改</a:t>
+            </a:r>
+            <a:endParaRPr lang="en-US" sz="1250" dirty="0"/>
+          </a:p>
+        </p:txBody>
+      </p:sp>
+      <p:sp>
+        <p:nvSpPr>
+          <p:cNvPr id="7" name="Shape 5"/>
+          <p:cNvSpPr/>
+          <p:nvPr/>
+        </p:nvSpPr>
+        <p:spPr>
+          <a:xfrm>
+            <a:off x="548640" y="2578608"/>
+            <a:ext cx="502920" cy="502920"/>
+          </a:xfrm>
+          <a:prstGeom prst="ellipse">
+            <a:avLst/>
+          </a:prstGeom>
+          <a:solidFill>
+            <a:srgbClr val="E8A13A"/>
+          </a:solidFill>
+          <a:ln/>
+        </p:spPr>
+      </p:sp>
+      <p:sp>
+        <p:nvSpPr>
+          <p:cNvPr id="8" name="Text 6"/>
+          <p:cNvSpPr/>
+          <p:nvPr/>
+        </p:nvSpPr>
+        <p:spPr>
+          <a:xfrm>
+            <a:off x="548640" y="2578608"/>
+            <a:ext cx="502920" cy="502920"/>
+          </a:xfrm>
+          <a:prstGeom prst="rect">
+            <a:avLst/>
+          </a:prstGeom>
+          <a:noFill/>
+          <a:ln/>
+        </p:spPr>
+        <p:txBody>
+          <a:bodyPr wrap="square" lIns="0" tIns="0" rIns="0" bIns="0" rtlCol="0" anchor="ctr"/>
+          <a:lstStyle/>
+          <a:p>
+            <a:pPr algn="ctr" indent="0" marL="0">
+              <a:buNone/>
+            </a:pPr>
+            <a:r>
+              <a:rPr lang="en-US" sz="1600" b="1" dirty="0">
+                <a:solidFill>
+                  <a:srgbClr val="FFFFFF"/>
+                </a:solidFill>
+                <a:latin typeface="Microsoft JhengHei" pitchFamily="34" charset="0"/>
+                <a:ea typeface="Microsoft JhengHei" pitchFamily="34" charset="-122"/>
+                <a:cs typeface="Microsoft JhengHei" pitchFamily="34" charset="-120"/>
+              </a:rPr>
+              <a:t>2</a:t>
+            </a:r>
+            <a:endParaRPr lang="en-US" sz="1600" dirty="0"/>
+          </a:p>
+        </p:txBody>
+      </p:sp>
+      <p:sp>
+        <p:nvSpPr>
+          <p:cNvPr id="9" name="Text 7"/>
+          <p:cNvSpPr/>
+          <p:nvPr/>
+        </p:nvSpPr>
+        <p:spPr>
+          <a:xfrm>
+            <a:off x="1280160" y="2487168"/>
+            <a:ext cx="2194560" cy="777240"/>
+          </a:xfrm>
+          <a:prstGeom prst="rect">
+            <a:avLst/>
+          </a:prstGeom>
+          <a:noFill/>
+          <a:ln/>
+        </p:spPr>
+        <p:txBody>
+          <a:bodyPr wrap="square" lIns="0" tIns="0" rIns="0" bIns="0" rtlCol="0" anchor="ctr"/>
+          <a:lstStyle/>
+          <a:p>
+            <a:pPr indent="0" marL="0">
+              <a:buNone/>
+            </a:pPr>
+            <a:r>
+              <a:rPr lang="en-US" sz="1550" b="1" dirty="0">
+                <a:solidFill>
+                  <a:srgbClr val="16224D"/>
+                </a:solidFill>
+                <a:latin typeface="Microsoft JhengHei" pitchFamily="34" charset="0"/>
+                <a:ea typeface="Microsoft JhengHei" pitchFamily="34" charset="-122"/>
+                <a:cs typeface="Microsoft JhengHei" pitchFamily="34" charset="-120"/>
+              </a:rPr>
+              <a:t>介面契約先行</a:t>
+            </a:r>
+            <a:endParaRPr lang="en-US" sz="1550" dirty="0"/>
+          </a:p>
+        </p:txBody>
+      </p:sp>
+      <p:sp>
+        <p:nvSpPr>
+          <p:cNvPr id="10" name="Text 8"/>
+          <p:cNvSpPr/>
+          <p:nvPr/>
+        </p:nvSpPr>
+        <p:spPr>
+          <a:xfrm>
+            <a:off x="3566160" y="2487168"/>
+            <a:ext cx="8138160" cy="777240"/>
+          </a:xfrm>
+          <a:prstGeom prst="rect">
+            <a:avLst/>
+          </a:prstGeom>
+          <a:noFill/>
+          <a:ln/>
+        </p:spPr>
+        <p:txBody>
+          <a:bodyPr wrap="square" lIns="0" tIns="0" rIns="0" bIns="0" rtlCol="0" anchor="ctr"/>
+          <a:lstStyle/>
+          <a:p>
+            <a:pPr indent="0" marL="0">
+              <a:buNone/>
+            </a:pPr>
+            <a:r>
+              <a:rPr lang="en-US" sz="1250" dirty="0">
+                <a:solidFill>
+                  <a:srgbClr val="1F2937"/>
+                </a:solidFill>
+                <a:latin typeface="Microsoft JhengHei" pitchFamily="34" charset="0"/>
+                <a:ea typeface="Microsoft JhengHei" pitchFamily="34" charset="-122"/>
+                <a:cs typeface="Microsoft JhengHei" pitchFamily="34" charset="-120"/>
+              </a:rPr>
+              <a:t>四支 API 格式寫死在 README §3——C 包照契約用假資料先做，不用等後端</a:t>
+            </a:r>
+            <a:endParaRPr lang="en-US" sz="1250" dirty="0"/>
+          </a:p>
+        </p:txBody>
+      </p:sp>
+      <p:sp>
+        <p:nvSpPr>
+          <p:cNvPr id="11" name="Shape 9"/>
+          <p:cNvSpPr/>
+          <p:nvPr/>
+        </p:nvSpPr>
+        <p:spPr>
+          <a:xfrm>
+            <a:off x="548640" y="3511296"/>
+            <a:ext cx="502920" cy="502920"/>
+          </a:xfrm>
+          <a:prstGeom prst="ellipse">
+            <a:avLst/>
+          </a:prstGeom>
+          <a:solidFill>
+            <a:srgbClr val="1F9D66"/>
+          </a:solidFill>
+          <a:ln/>
+        </p:spPr>
+      </p:sp>
+      <p:sp>
+        <p:nvSpPr>
+          <p:cNvPr id="12" name="Text 10"/>
+          <p:cNvSpPr/>
+          <p:nvPr/>
+        </p:nvSpPr>
+        <p:spPr>
+          <a:xfrm>
+            <a:off x="548640" y="3511296"/>
+            <a:ext cx="502920" cy="502920"/>
+          </a:xfrm>
+          <a:prstGeom prst="rect">
+            <a:avLst/>
+          </a:prstGeom>
+          <a:noFill/>
+          <a:ln/>
+        </p:spPr>
+        <p:txBody>
+          <a:bodyPr wrap="square" lIns="0" tIns="0" rIns="0" bIns="0" rtlCol="0" anchor="ctr"/>
+          <a:lstStyle/>
+          <a:p>
+            <a:pPr algn="ctr" indent="0" marL="0">
+              <a:buNone/>
+            </a:pPr>
+            <a:r>
+              <a:rPr lang="en-US" sz="1600" b="1" dirty="0">
+                <a:solidFill>
+                  <a:srgbClr val="FFFFFF"/>
+                </a:solidFill>
+                <a:latin typeface="Microsoft JhengHei" pitchFamily="34" charset="0"/>
+                <a:ea typeface="Microsoft JhengHei" pitchFamily="34" charset="-122"/>
+                <a:cs typeface="Microsoft JhengHei" pitchFamily="34" charset="-120"/>
+              </a:rPr>
+              <a:t>3</a:t>
+            </a:r>
+            <a:endParaRPr lang="en-US" sz="1600" dirty="0"/>
+          </a:p>
+        </p:txBody>
+      </p:sp>
+      <p:sp>
+        <p:nvSpPr>
+          <p:cNvPr id="13" name="Text 11"/>
+          <p:cNvSpPr/>
+          <p:nvPr/>
+        </p:nvSpPr>
+        <p:spPr>
+          <a:xfrm>
+            <a:off x="1280160" y="3419856"/>
+            <a:ext cx="2194560" cy="777240"/>
+          </a:xfrm>
+          <a:prstGeom prst="rect">
+            <a:avLst/>
+          </a:prstGeom>
+          <a:noFill/>
+          <a:ln/>
+        </p:spPr>
+        <p:txBody>
+          <a:bodyPr wrap="square" lIns="0" tIns="0" rIns="0" bIns="0" rtlCol="0" anchor="ctr"/>
+          <a:lstStyle/>
+          <a:p>
+            <a:pPr indent="0" marL="0">
+              <a:buNone/>
+            </a:pPr>
+            <a:r>
+              <a:rPr lang="en-US" sz="1550" b="1" dirty="0">
+                <a:solidFill>
+                  <a:srgbClr val="16224D"/>
+                </a:solidFill>
+                <a:latin typeface="Microsoft JhengHei" pitchFamily="34" charset="0"/>
+                <a:ea typeface="Microsoft JhengHei" pitchFamily="34" charset="-122"/>
+                <a:cs typeface="Microsoft JhengHei" pitchFamily="34" charset="-120"/>
+              </a:rPr>
+              <a:t>共用檔單一 owner</a:t>
+            </a:r>
+            <a:endParaRPr lang="en-US" sz="1550" dirty="0"/>
+          </a:p>
+        </p:txBody>
+      </p:sp>
+      <p:sp>
+        <p:nvSpPr>
+          <p:cNvPr id="14" name="Text 12"/>
+          <p:cNvSpPr/>
+          <p:nvPr/>
+        </p:nvSpPr>
+        <p:spPr>
+          <a:xfrm>
+            <a:off x="3566160" y="3419856"/>
+            <a:ext cx="8138160" cy="777240"/>
+          </a:xfrm>
+          <a:prstGeom prst="rect">
+            <a:avLst/>
+          </a:prstGeom>
+          <a:noFill/>
+          <a:ln/>
+        </p:spPr>
+        <p:txBody>
+          <a:bodyPr wrap="square" lIns="0" tIns="0" rIns="0" bIns="0" rtlCol="0" anchor="ctr"/>
+          <a:lstStyle/>
+          <a:p>
+            <a:pPr indent="0" marL="0">
+              <a:buNone/>
+            </a:pPr>
+            <a:r>
+              <a:rPr lang="en-US" sz="1250" dirty="0">
+                <a:solidFill>
+                  <a:srgbClr val="1F2937"/>
+                </a:solidFill>
+                <a:latin typeface="Microsoft JhengHei" pitchFamily="34" charset="0"/>
+                <a:ea typeface="Microsoft JhengHei" pitchFamily="34" charset="-122"/>
+                <a:cs typeface="Microsoft JhengHei" pitchFamily="34" charset="-120"/>
+              </a:rPr>
+              <a:t>tools.py／loop.py 歸 A；B 寫好函式由 A 註冊。infra 歸 D。誰的檔誰合</a:t>
+            </a:r>
+            <a:endParaRPr lang="en-US" sz="1250" dirty="0"/>
+          </a:p>
+        </p:txBody>
+      </p:sp>
+      <p:sp>
+        <p:nvSpPr>
+          <p:cNvPr id="15" name="Shape 13"/>
+          <p:cNvSpPr/>
+          <p:nvPr/>
+        </p:nvSpPr>
+        <p:spPr>
+          <a:xfrm>
+            <a:off x="548640" y="4443984"/>
+            <a:ext cx="502920" cy="502920"/>
+          </a:xfrm>
+          <a:prstGeom prst="ellipse">
+            <a:avLst/>
+          </a:prstGeom>
+          <a:solidFill>
+            <a:srgbClr val="2B6CB0"/>
+          </a:solidFill>
+          <a:ln/>
+        </p:spPr>
+      </p:sp>
+      <p:sp>
+        <p:nvSpPr>
+          <p:cNvPr id="16" name="Text 14"/>
+          <p:cNvSpPr/>
+          <p:nvPr/>
+        </p:nvSpPr>
+        <p:spPr>
+          <a:xfrm>
+            <a:off x="548640" y="4443984"/>
+            <a:ext cx="502920" cy="502920"/>
+          </a:xfrm>
+          <a:prstGeom prst="rect">
+            <a:avLst/>
+          </a:prstGeom>
+          <a:noFill/>
+          <a:ln/>
+        </p:spPr>
+        <p:txBody>
+          <a:bodyPr wrap="square" lIns="0" tIns="0" rIns="0" bIns="0" rtlCol="0" anchor="ctr"/>
+          <a:lstStyle/>
+          <a:p>
+            <a:pPr algn="ctr" indent="0" marL="0">
+              <a:buNone/>
+            </a:pPr>
+            <a:r>
+              <a:rPr lang="en-US" sz="1600" b="1" dirty="0">
+                <a:solidFill>
+                  <a:srgbClr val="FFFFFF"/>
+                </a:solidFill>
+                <a:latin typeface="Microsoft JhengHei" pitchFamily="34" charset="0"/>
+                <a:ea typeface="Microsoft JhengHei" pitchFamily="34" charset="-122"/>
+                <a:cs typeface="Microsoft JhengHei" pitchFamily="34" charset="-120"/>
+              </a:rPr>
+              <a:t>4</a:t>
+            </a:r>
+            <a:endParaRPr lang="en-US" sz="1600" dirty="0"/>
+          </a:p>
+        </p:txBody>
+      </p:sp>
+      <p:sp>
+        <p:nvSpPr>
+          <p:cNvPr id="17" name="Text 15"/>
+          <p:cNvSpPr/>
+          <p:nvPr/>
+        </p:nvSpPr>
+        <p:spPr>
+          <a:xfrm>
+            <a:off x="1280160" y="4352544"/>
+            <a:ext cx="2194560" cy="777240"/>
+          </a:xfrm>
+          <a:prstGeom prst="rect">
+            <a:avLst/>
+          </a:prstGeom>
+          <a:noFill/>
+          <a:ln/>
+        </p:spPr>
+        <p:txBody>
+          <a:bodyPr wrap="square" lIns="0" tIns="0" rIns="0" bIns="0" rtlCol="0" anchor="ctr"/>
+          <a:lstStyle/>
+          <a:p>
+            <a:pPr indent="0" marL="0">
+              <a:buNone/>
+            </a:pPr>
+            <a:r>
+              <a:rPr lang="en-US" sz="1550" b="1" dirty="0">
+                <a:solidFill>
+                  <a:srgbClr val="16224D"/>
+                </a:solidFill>
+                <a:latin typeface="Microsoft JhengHei" pitchFamily="34" charset="0"/>
+                <a:ea typeface="Microsoft JhengHei" pitchFamily="34" charset="-122"/>
+                <a:cs typeface="Microsoft JhengHei" pitchFamily="34" charset="-120"/>
+              </a:rPr>
+              <a:t>每日回合</a:t>
+            </a:r>
+            <a:endParaRPr lang="en-US" sz="1550" dirty="0"/>
+          </a:p>
+        </p:txBody>
+      </p:sp>
+      <p:sp>
+        <p:nvSpPr>
+          <p:cNvPr id="18" name="Text 16"/>
+          <p:cNvSpPr/>
+          <p:nvPr/>
+        </p:nvSpPr>
+        <p:spPr>
+          <a:xfrm>
+            <a:off x="3566160" y="4352544"/>
+            <a:ext cx="8138160" cy="777240"/>
+          </a:xfrm>
+          <a:prstGeom prst="rect">
+            <a:avLst/>
+          </a:prstGeom>
+          <a:noFill/>
+          <a:ln/>
+        </p:spPr>
+        <p:txBody>
+          <a:bodyPr wrap="square" lIns="0" tIns="0" rIns="0" bIns="0" rtlCol="0" anchor="ctr"/>
+          <a:lstStyle/>
+          <a:p>
+            <a:pPr indent="0" marL="0">
+              <a:buNone/>
+            </a:pPr>
+            <a:r>
+              <a:rPr lang="en-US" sz="1250" dirty="0">
+                <a:solidFill>
+                  <a:srgbClr val="1F2937"/>
+                </a:solidFill>
+                <a:latin typeface="Microsoft JhengHei" pitchFamily="34" charset="0"/>
+                <a:ea typeface="Microsoft JhengHei" pitchFamily="34" charset="-122"/>
+                <a:cs typeface="Microsoft JhengHei" pitchFamily="34" charset="-120"/>
+              </a:rPr>
+              <a:t>每天至少一次 pull --rebase ＋合回 main。衝突當天解，不隔夜</a:t>
+            </a:r>
+            <a:endParaRPr lang="en-US" sz="1250" dirty="0"/>
+          </a:p>
+        </p:txBody>
+      </p:sp>
+      <p:sp>
+        <p:nvSpPr>
+          <p:cNvPr id="19" name="Shape 17"/>
+          <p:cNvSpPr/>
+          <p:nvPr/>
+        </p:nvSpPr>
+        <p:spPr>
+          <a:xfrm>
+            <a:off x="548640" y="5376672"/>
+            <a:ext cx="502920" cy="502920"/>
+          </a:xfrm>
+          <a:prstGeom prst="ellipse">
+            <a:avLst/>
+          </a:prstGeom>
+          <a:solidFill>
+            <a:srgbClr val="D64550"/>
+          </a:solidFill>
+          <a:ln/>
+        </p:spPr>
+      </p:sp>
+      <p:sp>
+        <p:nvSpPr>
+          <p:cNvPr id="20" name="Text 18"/>
+          <p:cNvSpPr/>
+          <p:nvPr/>
+        </p:nvSpPr>
+        <p:spPr>
+          <a:xfrm>
+            <a:off x="548640" y="5376672"/>
+            <a:ext cx="502920" cy="502920"/>
+          </a:xfrm>
+          <a:prstGeom prst="rect">
+            <a:avLst/>
+          </a:prstGeom>
+          <a:noFill/>
+          <a:ln/>
+        </p:spPr>
+        <p:txBody>
+          <a:bodyPr wrap="square" lIns="0" tIns="0" rIns="0" bIns="0" rtlCol="0" anchor="ctr"/>
+          <a:lstStyle/>
+          <a:p>
+            <a:pPr algn="ctr" indent="0" marL="0">
+              <a:buNone/>
+            </a:pPr>
+            <a:r>
+              <a:rPr lang="en-US" sz="1600" b="1" dirty="0">
+                <a:solidFill>
+                  <a:srgbClr val="FFFFFF"/>
+                </a:solidFill>
+                <a:latin typeface="Microsoft JhengHei" pitchFamily="34" charset="0"/>
+                <a:ea typeface="Microsoft JhengHei" pitchFamily="34" charset="-122"/>
+                <a:cs typeface="Microsoft JhengHei" pitchFamily="34" charset="-120"/>
+              </a:rPr>
+              <a:t>5</a:t>
+            </a:r>
+            <a:endParaRPr lang="en-US" sz="1600" dirty="0"/>
+          </a:p>
+        </p:txBody>
+      </p:sp>
+      <p:sp>
+        <p:nvSpPr>
+          <p:cNvPr id="21" name="Text 19"/>
+          <p:cNvSpPr/>
+          <p:nvPr/>
+        </p:nvSpPr>
+        <p:spPr>
+          <a:xfrm>
+            <a:off x="1280160" y="5285232"/>
+            <a:ext cx="2194560" cy="777240"/>
+          </a:xfrm>
+          <a:prstGeom prst="rect">
+            <a:avLst/>
+          </a:prstGeom>
+          <a:noFill/>
+          <a:ln/>
+        </p:spPr>
+        <p:txBody>
+          <a:bodyPr wrap="square" lIns="0" tIns="0" rIns="0" bIns="0" rtlCol="0" anchor="ctr"/>
+          <a:lstStyle/>
+          <a:p>
+            <a:pPr indent="0" marL="0">
+              <a:buNone/>
+            </a:pPr>
+            <a:r>
+              <a:rPr lang="en-US" sz="1550" b="1" dirty="0">
+                <a:solidFill>
+                  <a:srgbClr val="16224D"/>
+                </a:solidFill>
+                <a:latin typeface="Microsoft JhengHei" pitchFamily="34" charset="0"/>
+                <a:ea typeface="Microsoft JhengHei" pitchFamily="34" charset="-122"/>
+                <a:cs typeface="Microsoft JhengHei" pitchFamily="34" charset="-120"/>
+              </a:rPr>
+              <a:t>改介面要廣播</a:t>
+            </a:r>
+            <a:endParaRPr lang="en-US" sz="1550" dirty="0"/>
+          </a:p>
+        </p:txBody>
+      </p:sp>
+      <p:sp>
+        <p:nvSpPr>
+          <p:cNvPr id="22" name="Text 20"/>
+          <p:cNvSpPr/>
+          <p:nvPr/>
+        </p:nvSpPr>
+        <p:spPr>
+          <a:xfrm>
+            <a:off x="3566160" y="5285232"/>
+            <a:ext cx="8138160" cy="777240"/>
+          </a:xfrm>
+          <a:prstGeom prst="rect">
+            <a:avLst/>
+          </a:prstGeom>
+          <a:noFill/>
+          <a:ln/>
+        </p:spPr>
+        <p:txBody>
+          <a:bodyPr wrap="square" lIns="0" tIns="0" rIns="0" bIns="0" rtlCol="0" anchor="ctr"/>
+          <a:lstStyle/>
+          <a:p>
+            <a:pPr indent="0" marL="0">
+              <a:buNone/>
+            </a:pPr>
+            <a:r>
+              <a:rPr lang="en-US" sz="1250" dirty="0">
+                <a:solidFill>
+                  <a:srgbClr val="1F2937"/>
+                </a:solidFill>
+                <a:latin typeface="Microsoft JhengHei" pitchFamily="34" charset="0"/>
+                <a:ea typeface="Microsoft JhengHei" pitchFamily="34" charset="-122"/>
+                <a:cs typeface="Microsoft JhengHei" pitchFamily="34" charset="-120"/>
+              </a:rPr>
+              <a:t>要改 README §3 先在 #dev 說，受影響的包點頭才動</a:t>
+            </a:r>
+            <a:endParaRPr lang="en-US" sz="1250" dirty="0"/>
+          </a:p>
+        </p:txBody>
+      </p:sp>
+    </p:spTree>
+  </p:cSld>
+  <p:clrMapOvr>
+    <a:masterClrMapping/>
+  </p:clrMapOvr>
+</p:sld>
+</file>
+
+<file path=ppt/slides/slide11.xml><?xml version="1.0" encoding="utf-8"?>
+<p:sld xmlns:a="http://schemas.openxmlformats.org/drawingml/2006/main" xmlns:r="http://schemas.openxmlformats.org/officeDocument/2006/relationships" xmlns:p="http://schemas.openxmlformats.org/presentationml/2006/main">
+  <p:cSld name="Slide 11">
+    <p:bg>
+      <p:bgPr>
+        <a:solidFill>
+          <a:srgbClr val="FFFFFF"/>
+        </a:solidFill>
+      </p:bgPr>
+    </p:bg>
+    <p:spTree>
+      <p:nvGrpSpPr>
+        <p:cNvPr id="1" name=""/>
+        <p:cNvGrpSpPr/>
+        <p:nvPr/>
+      </p:nvGrpSpPr>
+      <p:grpSpPr>
+        <a:xfrm>
+          <a:off x="0" y="0"/>
+          <a:ext cx="0" cy="0"/>
+          <a:chOff x="0" y="0"/>
+          <a:chExt cx="0" cy="0"/>
+        </a:xfrm>
+      </p:grpSpPr>
+      <p:sp>
+        <p:nvSpPr>
+          <p:cNvPr id="2" name="Text 0"/>
+          <p:cNvSpPr/>
+          <p:nvPr/>
+        </p:nvSpPr>
+        <p:spPr>
+          <a:xfrm>
+            <a:off x="548640" y="411480"/>
+            <a:ext cx="11091672" cy="640080"/>
+          </a:xfrm>
+          <a:prstGeom prst="rect">
+            <a:avLst/>
+          </a:prstGeom>
+          <a:noFill/>
+          <a:ln/>
+        </p:spPr>
+        <p:txBody>
+          <a:bodyPr wrap="square" lIns="0" tIns="0" rIns="0" bIns="0" rtlCol="0" anchor="ctr"/>
+          <a:lstStyle/>
+          <a:p>
+            <a:pPr indent="0" marL="0">
+              <a:buNone/>
+            </a:pPr>
+            <a:r>
+              <a:rPr lang="en-US" sz="2700" b="1" dirty="0">
+                <a:solidFill>
+                  <a:srgbClr val="16224D"/>
+                </a:solidFill>
+                <a:latin typeface="Microsoft JhengHei" pitchFamily="34" charset="0"/>
+                <a:ea typeface="Microsoft JhengHei" pitchFamily="34" charset="-122"/>
+                <a:cs typeface="Microsoft JhengHei" pitchFamily="34" charset="-120"/>
+              </a:rPr>
               <a:t>功能 × 評分對應：你做的東西扛哪幾分</a:t>
             </a:r>
             <a:endParaRPr lang="en-US" sz="2700" dirty="0"/>
@@ -3032,7 +3877,7 @@
       </p:sp>
       <p:graphicFrame>
         <p:nvGraphicFramePr>
-          <p:cNvPr id="11" name="Table 0"/>
+          <p:cNvPr id="12" name="Table 0"/>
           <p:cNvGraphicFramePr>
             <a:graphicFrameLocks noGrp="1"/>
           </p:cNvGraphicFramePr>
@@ -5245,9 +6090,9 @@
 </p:sld>
 </file>
 
-<file path=ppt/slides/slide11.xml><?xml version="1.0" encoding="utf-8"?>
+<file path=ppt/slides/slide12.xml><?xml version="1.0" encoding="utf-8"?>
 <p:sld xmlns:a="http://schemas.openxmlformats.org/drawingml/2006/main" xmlns:r="http://schemas.openxmlformats.org/officeDocument/2006/relationships" xmlns:p="http://schemas.openxmlformats.org/presentationml/2006/main">
-  <p:cSld name="Slide 11">
+  <p:cSld name="Slide 12">
     <p:bg>
       <p:bgPr>
         <a:solidFill>
@@ -5701,7 +6546,7 @@
       </p:sp>
       <p:graphicFrame>
         <p:nvGraphicFramePr>
-          <p:cNvPr id="12" name="Table 0"/>
+          <p:cNvPr id="13" name="Table 0"/>
           <p:cNvGraphicFramePr>
             <a:graphicFrameLocks noGrp="1"/>
           </p:cNvGraphicFramePr>
@@ -7559,9 +8404,9 @@
 </p:sld>
 </file>
 
-<file path=ppt/slides/slide12.xml><?xml version="1.0" encoding="utf-8"?>
+<file path=ppt/slides/slide13.xml><?xml version="1.0" encoding="utf-8"?>
 <p:sld xmlns:a="http://schemas.openxmlformats.org/drawingml/2006/main" xmlns:r="http://schemas.openxmlformats.org/officeDocument/2006/relationships" xmlns:p="http://schemas.openxmlformats.org/presentationml/2006/main">
-  <p:cSld name="Slide 12">
+  <p:cSld name="Slide 13">
     <p:bg>
       <p:bgPr>
         <a:solidFill>
@@ -7975,9 +8820,9 @@
 </p:sld>
 </file>
 
-<file path=ppt/slides/slide13.xml><?xml version="1.0" encoding="utf-8"?>
+<file path=ppt/slides/slide14.xml><?xml version="1.0" encoding="utf-8"?>
 <p:sld xmlns:a="http://schemas.openxmlformats.org/drawingml/2006/main" xmlns:r="http://schemas.openxmlformats.org/officeDocument/2006/relationships" xmlns:p="http://schemas.openxmlformats.org/presentationml/2006/main">
-  <p:cSld name="Slide 13">
+  <p:cSld name="Slide 14">
     <p:bg>
       <p:bgPr>
         <a:solidFill>
@@ -8040,7 +8885,7 @@
       </p:sp>
       <p:graphicFrame>
         <p:nvGraphicFramePr>
-          <p:cNvPr id="14" name="Table 0"/>
+          <p:cNvPr id="15" name="Table 0"/>
           <p:cNvGraphicFramePr>
             <a:graphicFrameLocks noGrp="1"/>
           </p:cNvGraphicFramePr>
@@ -10225,9 +11070,9 @@
 </p:sld>
 </file>
 
-<file path=ppt/slides/slide14.xml><?xml version="1.0" encoding="utf-8"?>
+<file path=ppt/slides/slide15.xml><?xml version="1.0" encoding="utf-8"?>
 <p:sld xmlns:a="http://schemas.openxmlformats.org/drawingml/2006/main" xmlns:r="http://schemas.openxmlformats.org/officeDocument/2006/relationships" xmlns:p="http://schemas.openxmlformats.org/presentationml/2006/main">
-  <p:cSld name="Slide 14">
+  <p:cSld name="Slide 15">
     <p:bg>
       <p:bgPr>
         <a:solidFill>
@@ -10329,7 +11174,7 @@
       </p:sp>
       <p:graphicFrame>
         <p:nvGraphicFramePr>
-          <p:cNvPr id="15" name="Table 0"/>
+          <p:cNvPr id="16" name="Table 0"/>
           <p:cNvGraphicFramePr>
             <a:graphicFrameLocks noGrp="1"/>
           </p:cNvGraphicFramePr>
@@ -13074,9 +13919,9 @@
 </p:sld>
 </file>
 
-<file path=ppt/slides/slide15.xml><?xml version="1.0" encoding="utf-8"?>
+<file path=ppt/slides/slide16.xml><?xml version="1.0" encoding="utf-8"?>
 <p:sld xmlns:a="http://schemas.openxmlformats.org/drawingml/2006/main" xmlns:r="http://schemas.openxmlformats.org/officeDocument/2006/relationships" xmlns:p="http://schemas.openxmlformats.org/presentationml/2006/main">
-  <p:cSld name="Slide 15">
+  <p:cSld name="Slide 16">
     <p:bg>
       <p:bgPr>
         <a:solidFill>
@@ -13631,9 +14476,9 @@
 </p:sld>
 </file>
 
-<file path=ppt/slides/slide16.xml><?xml version="1.0" encoding="utf-8"?>
+<file path=ppt/slides/slide17.xml><?xml version="1.0" encoding="utf-8"?>
 <p:sld xmlns:a="http://schemas.openxmlformats.org/drawingml/2006/main" xmlns:r="http://schemas.openxmlformats.org/officeDocument/2006/relationships" xmlns:p="http://schemas.openxmlformats.org/presentationml/2006/main">
-  <p:cSld name="Slide 16">
+  <p:cSld name="Slide 17">
     <p:bg>
       <p:bgPr>
         <a:solidFill>
@@ -14465,9 +15310,9 @@
 </p:sld>
 </file>
 
-<file path=ppt/slides/slide17.xml><?xml version="1.0" encoding="utf-8"?>
+<file path=ppt/slides/slide18.xml><?xml version="1.0" encoding="utf-8"?>
 <p:sld xmlns:a="http://schemas.openxmlformats.org/drawingml/2006/main" xmlns:r="http://schemas.openxmlformats.org/officeDocument/2006/relationships" xmlns:p="http://schemas.openxmlformats.org/presentationml/2006/main">
-  <p:cSld name="Slide 17">
+  <p:cSld name="Slide 18">
     <p:bg>
       <p:bgPr>
         <a:solidFill>
@@ -15031,9 +15876,9 @@
 </p:sld>
 </file>
 
-<file path=ppt/slides/slide18.xml><?xml version="1.0" encoding="utf-8"?>
+<file path=ppt/slides/slide19.xml><?xml version="1.0" encoding="utf-8"?>
 <p:sld xmlns:a="http://schemas.openxmlformats.org/drawingml/2006/main" xmlns:r="http://schemas.openxmlformats.org/officeDocument/2006/relationships" xmlns:p="http://schemas.openxmlformats.org/presentationml/2006/main">
-  <p:cSld name="Slide 18">
+  <p:cSld name="Slide 19">
     <p:bg>
       <p:bgPr>
         <a:solidFill>
@@ -15862,683 +16707,6 @@
 </p:sld>
 </file>
 
-<file path=ppt/slides/slide19.xml><?xml version="1.0" encoding="utf-8"?>
-<p:sld xmlns:a="http://schemas.openxmlformats.org/drawingml/2006/main" xmlns:r="http://schemas.openxmlformats.org/officeDocument/2006/relationships" xmlns:p="http://schemas.openxmlformats.org/presentationml/2006/main">
-  <p:cSld name="Slide 19">
-    <p:bg>
-      <p:bgPr>
-        <a:solidFill>
-          <a:srgbClr val="FFFFFF"/>
-        </a:solidFill>
-      </p:bgPr>
-    </p:bg>
-    <p:spTree>
-      <p:nvGrpSpPr>
-        <p:cNvPr id="1" name=""/>
-        <p:cNvGrpSpPr/>
-        <p:nvPr/>
-      </p:nvGrpSpPr>
-      <p:grpSpPr>
-        <a:xfrm>
-          <a:off x="0" y="0"/>
-          <a:ext cx="0" cy="0"/>
-          <a:chOff x="0" y="0"/>
-          <a:chExt cx="0" cy="0"/>
-        </a:xfrm>
-      </p:grpSpPr>
-      <p:sp>
-        <p:nvSpPr>
-          <p:cNvPr id="2" name="Text 0"/>
-          <p:cNvSpPr/>
-          <p:nvPr/>
-        </p:nvSpPr>
-        <p:spPr>
-          <a:xfrm>
-            <a:off x="548640" y="411480"/>
-            <a:ext cx="11091672" cy="640080"/>
-          </a:xfrm>
-          <a:prstGeom prst="rect">
-            <a:avLst/>
-          </a:prstGeom>
-          <a:noFill/>
-          <a:ln/>
-        </p:spPr>
-        <p:txBody>
-          <a:bodyPr wrap="square" lIns="0" tIns="0" rIns="0" bIns="0" rtlCol="0" anchor="ctr"/>
-          <a:lstStyle/>
-          <a:p>
-            <a:pPr indent="0" marL="0">
-              <a:buNone/>
-            </a:pPr>
-            <a:r>
-              <a:rPr lang="en-US" sz="2700" b="1" dirty="0">
-                <a:solidFill>
-                  <a:srgbClr val="16224D"/>
-                </a:solidFill>
-                <a:latin typeface="Microsoft JhengHei" pitchFamily="34" charset="0"/>
-                <a:ea typeface="Microsoft JhengHei" pitchFamily="34" charset="-122"/>
-                <a:cs typeface="Microsoft JhengHei" pitchFamily="34" charset="-120"/>
-              </a:rPr>
-              <a:t>Kiro｜Credit 紀律與雷區</a:t>
-            </a:r>
-            <a:endParaRPr lang="en-US" sz="2700" dirty="0"/>
-          </a:p>
-        </p:txBody>
-      </p:sp>
-      <p:sp>
-        <p:nvSpPr>
-          <p:cNvPr id="3" name="Text 1"/>
-          <p:cNvSpPr/>
-          <p:nvPr/>
-        </p:nvSpPr>
-        <p:spPr>
-          <a:xfrm>
-            <a:off x="548640" y="1024128"/>
-            <a:ext cx="11091672" cy="320040"/>
-          </a:xfrm>
-          <a:prstGeom prst="rect">
-            <a:avLst/>
-          </a:prstGeom>
-          <a:noFill/>
-          <a:ln/>
-        </p:spPr>
-        <p:txBody>
-          <a:bodyPr wrap="square" lIns="0" tIns="0" rIns="0" bIns="0" rtlCol="0" anchor="ctr"/>
-          <a:lstStyle/>
-          <a:p>
-            <a:pPr indent="0" marL="0">
-              <a:buNone/>
-            </a:pPr>
-            <a:r>
-              <a:rPr lang="en-US" sz="1250" dirty="0">
-                <a:solidFill>
-                  <a:srgbClr val="6B7280"/>
-                </a:solidFill>
-                <a:latin typeface="Microsoft JhengHei" pitchFamily="34" charset="0"/>
-                <a:ea typeface="Microsoft JhengHei" pitchFamily="34" charset="-122"/>
-                <a:cs typeface="Microsoft JhengHei" pitchFamily="34" charset="-120"/>
-              </a:rPr>
-              <a:t>2000 點只發一次、用完不補——全隊共同資產</a:t>
-            </a:r>
-            <a:endParaRPr lang="en-US" sz="1250" dirty="0"/>
-          </a:p>
-        </p:txBody>
-      </p:sp>
-      <p:sp>
-        <p:nvSpPr>
-          <p:cNvPr id="4" name="Shape 2"/>
-          <p:cNvSpPr/>
-          <p:nvPr/>
-        </p:nvSpPr>
-        <p:spPr>
-          <a:xfrm>
-            <a:off x="548640" y="1554480"/>
-            <a:ext cx="5394960" cy="4023360"/>
-          </a:xfrm>
-          <a:prstGeom prst="roundRect">
-            <a:avLst>
-              <a:gd name="adj" fmla="val 2045"/>
-            </a:avLst>
-          </a:prstGeom>
-          <a:solidFill>
-            <a:srgbClr val="EAF0FB"/>
-          </a:solidFill>
-          <a:ln/>
-        </p:spPr>
-      </p:sp>
-      <p:sp>
-        <p:nvSpPr>
-          <p:cNvPr id="5" name="Text 3"/>
-          <p:cNvSpPr/>
-          <p:nvPr/>
-        </p:nvSpPr>
-        <p:spPr>
-          <a:xfrm>
-            <a:off x="868680" y="1783080"/>
-            <a:ext cx="4754880" cy="411480"/>
-          </a:xfrm>
-          <a:prstGeom prst="rect">
-            <a:avLst/>
-          </a:prstGeom>
-          <a:noFill/>
-          <a:ln/>
-        </p:spPr>
-        <p:txBody>
-          <a:bodyPr wrap="square" lIns="0" tIns="0" rIns="0" bIns="0" rtlCol="0" anchor="ctr"/>
-          <a:lstStyle/>
-          <a:p>
-            <a:pPr indent="0" marL="0">
-              <a:buNone/>
-            </a:pPr>
-            <a:r>
-              <a:rPr lang="en-US" sz="1600" b="1" dirty="0">
-                <a:solidFill>
-                  <a:srgbClr val="16224D"/>
-                </a:solidFill>
-                <a:latin typeface="Microsoft JhengHei" pitchFamily="34" charset="0"/>
-                <a:ea typeface="Microsoft JhengHei" pitchFamily="34" charset="-122"/>
-                <a:cs typeface="Microsoft JhengHei" pitchFamily="34" charset="-120"/>
-              </a:rPr>
-              <a:t>預算分配（每人）</a:t>
-            </a:r>
-            <a:endParaRPr lang="en-US" sz="1600" dirty="0"/>
-          </a:p>
-        </p:txBody>
-      </p:sp>
-      <p:sp>
-        <p:nvSpPr>
-          <p:cNvPr id="6" name="Shape 4"/>
-          <p:cNvSpPr/>
-          <p:nvPr/>
-        </p:nvSpPr>
-        <p:spPr>
-          <a:xfrm>
-            <a:off x="868680" y="2331720"/>
-            <a:ext cx="4754880" cy="822960"/>
-          </a:xfrm>
-          <a:prstGeom prst="roundRect">
-            <a:avLst>
-              <a:gd name="adj" fmla="val 10000"/>
-            </a:avLst>
-          </a:prstGeom>
-          <a:solidFill>
-            <a:srgbClr val="FFFFFF"/>
-          </a:solidFill>
-          <a:ln/>
-        </p:spPr>
-      </p:sp>
-      <p:sp>
-        <p:nvSpPr>
-          <p:cNvPr id="7" name="Text 5"/>
-          <p:cNvSpPr/>
-          <p:nvPr/>
-        </p:nvSpPr>
-        <p:spPr>
-          <a:xfrm>
-            <a:off x="1097280" y="2404872"/>
-            <a:ext cx="2834640" cy="685800"/>
-          </a:xfrm>
-          <a:prstGeom prst="rect">
-            <a:avLst/>
-          </a:prstGeom>
-          <a:noFill/>
-          <a:ln/>
-        </p:spPr>
-        <p:txBody>
-          <a:bodyPr wrap="square" lIns="0" tIns="0" rIns="0" bIns="0" rtlCol="0" anchor="ctr"/>
-          <a:lstStyle/>
-          <a:p>
-            <a:pPr indent="0" marL="0">
-              <a:buNone/>
-            </a:pPr>
-            <a:r>
-              <a:rPr lang="en-US" sz="1350" dirty="0">
-                <a:solidFill>
-                  <a:srgbClr val="1F2937"/>
-                </a:solidFill>
-                <a:latin typeface="Microsoft JhengHei" pitchFamily="34" charset="0"/>
-                <a:ea typeface="Microsoft JhengHei" pitchFamily="34" charset="-122"/>
-                <a:cs typeface="Microsoft JhengHei" pitchFamily="34" charset="-120"/>
-              </a:rPr>
-              <a:t>練習期（～7/22）</a:t>
-            </a:r>
-            <a:endParaRPr lang="en-US" sz="1350" dirty="0"/>
-          </a:p>
-        </p:txBody>
-      </p:sp>
-      <p:sp>
-        <p:nvSpPr>
-          <p:cNvPr id="8" name="Text 6"/>
-          <p:cNvSpPr/>
-          <p:nvPr/>
-        </p:nvSpPr>
-        <p:spPr>
-          <a:xfrm>
-            <a:off x="3931920" y="2404872"/>
-            <a:ext cx="1554480" cy="685800"/>
-          </a:xfrm>
-          <a:prstGeom prst="rect">
-            <a:avLst/>
-          </a:prstGeom>
-          <a:noFill/>
-          <a:ln/>
-        </p:spPr>
-        <p:txBody>
-          <a:bodyPr wrap="square" lIns="0" tIns="0" rIns="0" bIns="0" rtlCol="0" anchor="ctr"/>
-          <a:lstStyle/>
-          <a:p>
-            <a:pPr indent="0" marL="0">
-              <a:buNone/>
-            </a:pPr>
-            <a:r>
-              <a:rPr lang="en-US" sz="2000" b="1" dirty="0">
-                <a:solidFill>
-                  <a:srgbClr val="E8A13A"/>
-                </a:solidFill>
-                <a:latin typeface="Microsoft JhengHei" pitchFamily="34" charset="0"/>
-                <a:ea typeface="Microsoft JhengHei" pitchFamily="34" charset="-122"/>
-                <a:cs typeface="Microsoft JhengHei" pitchFamily="34" charset="-120"/>
-              </a:rPr>
-              <a:t>≤ 300</a:t>
-            </a:r>
-            <a:endParaRPr lang="en-US" sz="2000" dirty="0"/>
-          </a:p>
-        </p:txBody>
-      </p:sp>
-      <p:sp>
-        <p:nvSpPr>
-          <p:cNvPr id="9" name="Shape 7"/>
-          <p:cNvSpPr/>
-          <p:nvPr/>
-        </p:nvSpPr>
-        <p:spPr>
-          <a:xfrm>
-            <a:off x="868680" y="3291840"/>
-            <a:ext cx="4754880" cy="822960"/>
-          </a:xfrm>
-          <a:prstGeom prst="roundRect">
-            <a:avLst>
-              <a:gd name="adj" fmla="val 10000"/>
-            </a:avLst>
-          </a:prstGeom>
-          <a:solidFill>
-            <a:srgbClr val="FFFFFF"/>
-          </a:solidFill>
-          <a:ln/>
-        </p:spPr>
-      </p:sp>
-      <p:sp>
-        <p:nvSpPr>
-          <p:cNvPr id="10" name="Text 8"/>
-          <p:cNvSpPr/>
-          <p:nvPr/>
-        </p:nvSpPr>
-        <p:spPr>
-          <a:xfrm>
-            <a:off x="1097280" y="3364992"/>
-            <a:ext cx="2834640" cy="685800"/>
-          </a:xfrm>
-          <a:prstGeom prst="rect">
-            <a:avLst/>
-          </a:prstGeom>
-          <a:noFill/>
-          <a:ln/>
-        </p:spPr>
-        <p:txBody>
-          <a:bodyPr wrap="square" lIns="0" tIns="0" rIns="0" bIns="0" rtlCol="0" anchor="ctr"/>
-          <a:lstStyle/>
-          <a:p>
-            <a:pPr indent="0" marL="0">
-              <a:buNone/>
-            </a:pPr>
-            <a:r>
-              <a:rPr lang="en-US" sz="1350" dirty="0">
-                <a:solidFill>
-                  <a:srgbClr val="1F2937"/>
-                </a:solidFill>
-                <a:latin typeface="Microsoft JhengHei" pitchFamily="34" charset="0"/>
-                <a:ea typeface="Microsoft JhengHei" pitchFamily="34" charset="-122"/>
-                <a:cs typeface="Microsoft JhengHei" pitchFamily="34" charset="-120"/>
-              </a:rPr>
-              <a:t>開發期（7/23–31）</a:t>
-            </a:r>
-            <a:endParaRPr lang="en-US" sz="1350" dirty="0"/>
-          </a:p>
-        </p:txBody>
-      </p:sp>
-      <p:sp>
-        <p:nvSpPr>
-          <p:cNvPr id="11" name="Text 9"/>
-          <p:cNvSpPr/>
-          <p:nvPr/>
-        </p:nvSpPr>
-        <p:spPr>
-          <a:xfrm>
-            <a:off x="3931920" y="3364992"/>
-            <a:ext cx="1554480" cy="685800"/>
-          </a:xfrm>
-          <a:prstGeom prst="rect">
-            <a:avLst/>
-          </a:prstGeom>
-          <a:noFill/>
-          <a:ln/>
-        </p:spPr>
-        <p:txBody>
-          <a:bodyPr wrap="square" lIns="0" tIns="0" rIns="0" bIns="0" rtlCol="0" anchor="ctr"/>
-          <a:lstStyle/>
-          <a:p>
-            <a:pPr indent="0" marL="0">
-              <a:buNone/>
-            </a:pPr>
-            <a:r>
-              <a:rPr lang="en-US" sz="2000" b="1" dirty="0">
-                <a:solidFill>
-                  <a:srgbClr val="16224D"/>
-                </a:solidFill>
-                <a:latin typeface="Microsoft JhengHei" pitchFamily="34" charset="0"/>
-                <a:ea typeface="Microsoft JhengHei" pitchFamily="34" charset="-122"/>
-                <a:cs typeface="Microsoft JhengHei" pitchFamily="34" charset="-120"/>
-              </a:rPr>
-              <a:t>~ 1000</a:t>
-            </a:r>
-            <a:endParaRPr lang="en-US" sz="2000" dirty="0"/>
-          </a:p>
-        </p:txBody>
-      </p:sp>
-      <p:sp>
-        <p:nvSpPr>
-          <p:cNvPr id="12" name="Shape 10"/>
-          <p:cNvSpPr/>
-          <p:nvPr/>
-        </p:nvSpPr>
-        <p:spPr>
-          <a:xfrm>
-            <a:off x="868680" y="4251960"/>
-            <a:ext cx="4754880" cy="822960"/>
-          </a:xfrm>
-          <a:prstGeom prst="roundRect">
-            <a:avLst>
-              <a:gd name="adj" fmla="val 10000"/>
-            </a:avLst>
-          </a:prstGeom>
-          <a:solidFill>
-            <a:srgbClr val="FFFFFF"/>
-          </a:solidFill>
-          <a:ln/>
-        </p:spPr>
-      </p:sp>
-      <p:sp>
-        <p:nvSpPr>
-          <p:cNvPr id="13" name="Text 11"/>
-          <p:cNvSpPr/>
-          <p:nvPr/>
-        </p:nvSpPr>
-        <p:spPr>
-          <a:xfrm>
-            <a:off x="1097280" y="4325112"/>
-            <a:ext cx="2834640" cy="685800"/>
-          </a:xfrm>
-          <a:prstGeom prst="rect">
-            <a:avLst/>
-          </a:prstGeom>
-          <a:noFill/>
-          <a:ln/>
-        </p:spPr>
-        <p:txBody>
-          <a:bodyPr wrap="square" lIns="0" tIns="0" rIns="0" bIns="0" rtlCol="0" anchor="ctr"/>
-          <a:lstStyle/>
-          <a:p>
-            <a:pPr indent="0" marL="0">
-              <a:buNone/>
-            </a:pPr>
-            <a:r>
-              <a:rPr lang="en-US" sz="1350" dirty="0">
-                <a:solidFill>
-                  <a:srgbClr val="1F2937"/>
-                </a:solidFill>
-                <a:latin typeface="Microsoft JhengHei" pitchFamily="34" charset="0"/>
-                <a:ea typeface="Microsoft JhengHei" pitchFamily="34" charset="-122"/>
-                <a:cs typeface="Microsoft JhengHei" pitchFamily="34" charset="-120"/>
-              </a:rPr>
-              <a:t>決賽保底（8/1–2）</a:t>
-            </a:r>
-            <a:endParaRPr lang="en-US" sz="1350" dirty="0"/>
-          </a:p>
-        </p:txBody>
-      </p:sp>
-      <p:sp>
-        <p:nvSpPr>
-          <p:cNvPr id="14" name="Text 12"/>
-          <p:cNvSpPr/>
-          <p:nvPr/>
-        </p:nvSpPr>
-        <p:spPr>
-          <a:xfrm>
-            <a:off x="3931920" y="4325112"/>
-            <a:ext cx="1554480" cy="685800"/>
-          </a:xfrm>
-          <a:prstGeom prst="rect">
-            <a:avLst/>
-          </a:prstGeom>
-          <a:noFill/>
-          <a:ln/>
-        </p:spPr>
-        <p:txBody>
-          <a:bodyPr wrap="square" lIns="0" tIns="0" rIns="0" bIns="0" rtlCol="0" anchor="ctr"/>
-          <a:lstStyle/>
-          <a:p>
-            <a:pPr indent="0" marL="0">
-              <a:buNone/>
-            </a:pPr>
-            <a:r>
-              <a:rPr lang="en-US" sz="2000" b="1" dirty="0">
-                <a:solidFill>
-                  <a:srgbClr val="D64550"/>
-                </a:solidFill>
-                <a:latin typeface="Microsoft JhengHei" pitchFamily="34" charset="0"/>
-                <a:ea typeface="Microsoft JhengHei" pitchFamily="34" charset="-122"/>
-                <a:cs typeface="Microsoft JhengHei" pitchFamily="34" charset="-120"/>
-              </a:rPr>
-              <a:t>≥ 700</a:t>
-            </a:r>
-            <a:endParaRPr lang="en-US" sz="2000" dirty="0"/>
-          </a:p>
-        </p:txBody>
-      </p:sp>
-      <p:sp>
-        <p:nvSpPr>
-          <p:cNvPr id="15" name="Shape 13"/>
-          <p:cNvSpPr/>
-          <p:nvPr/>
-        </p:nvSpPr>
-        <p:spPr>
-          <a:xfrm>
-            <a:off x="6263640" y="1554480"/>
-            <a:ext cx="5394960" cy="4023360"/>
-          </a:xfrm>
-          <a:prstGeom prst="roundRect">
-            <a:avLst>
-              <a:gd name="adj" fmla="val 2045"/>
-            </a:avLst>
-          </a:prstGeom>
-          <a:solidFill>
-            <a:srgbClr val="FDF0EF"/>
-          </a:solidFill>
-          <a:ln/>
-        </p:spPr>
-      </p:sp>
-      <p:sp>
-        <p:nvSpPr>
-          <p:cNvPr id="16" name="Text 14"/>
-          <p:cNvSpPr/>
-          <p:nvPr/>
-        </p:nvSpPr>
-        <p:spPr>
-          <a:xfrm>
-            <a:off x="6583680" y="1783080"/>
-            <a:ext cx="4754880" cy="411480"/>
-          </a:xfrm>
-          <a:prstGeom prst="rect">
-            <a:avLst/>
-          </a:prstGeom>
-          <a:noFill/>
-          <a:ln/>
-        </p:spPr>
-        <p:txBody>
-          <a:bodyPr wrap="square" lIns="0" tIns="0" rIns="0" bIns="0" rtlCol="0" anchor="ctr"/>
-          <a:lstStyle/>
-          <a:p>
-            <a:pPr indent="0" marL="0">
-              <a:buNone/>
-            </a:pPr>
-            <a:r>
-              <a:rPr lang="en-US" sz="1600" b="1" dirty="0">
-                <a:solidFill>
-                  <a:srgbClr val="D64550"/>
-                </a:solidFill>
-                <a:latin typeface="Microsoft JhengHei" pitchFamily="34" charset="0"/>
-                <a:ea typeface="Microsoft JhengHei" pitchFamily="34" charset="-122"/>
-                <a:cs typeface="Microsoft JhengHei" pitchFamily="34" charset="-120"/>
-              </a:rPr>
-              <a:t>四個雷區</a:t>
-            </a:r>
-            <a:endParaRPr lang="en-US" sz="1600" dirty="0"/>
-          </a:p>
-        </p:txBody>
-      </p:sp>
-      <p:sp>
-        <p:nvSpPr>
-          <p:cNvPr id="17" name="Text 15"/>
-          <p:cNvSpPr/>
-          <p:nvPr/>
-        </p:nvSpPr>
-        <p:spPr>
-          <a:xfrm>
-            <a:off x="6583680" y="2331720"/>
-            <a:ext cx="4846320" cy="3017520"/>
-          </a:xfrm>
-          <a:prstGeom prst="rect">
-            <a:avLst/>
-          </a:prstGeom>
-          <a:noFill/>
-          <a:ln/>
-        </p:spPr>
-        <p:txBody>
-          <a:bodyPr wrap="square" lIns="0" tIns="0" rIns="0" bIns="0" rtlCol="0" anchor="ctr"/>
-          <a:lstStyle/>
-          <a:p>
-            <a:pPr marL="342900" indent="-342900">
-              <a:spcAft>
-                <a:spcPts val="1000"/>
-              </a:spcAft>
-              <a:buSzPct val="100000"/>
-              <a:buChar char="•"/>
-            </a:pPr>
-            <a:r>
-              <a:rPr lang="en-US" sz="1250" dirty="0">
-                <a:solidFill>
-                  <a:srgbClr val="1F2937"/>
-                </a:solidFill>
-                <a:latin typeface="Microsoft JhengHei" pitchFamily="34" charset="0"/>
-                <a:ea typeface="Microsoft JhengHei" pitchFamily="34" charset="-122"/>
-                <a:cs typeface="Microsoft JhengHei" pitchFamily="34" charset="-120"/>
-              </a:rPr>
-              <a:t>Autopilot 只在跑定義好的 task 時開——探索、跟課、隨便問問一律關，它會自主連跑燒點數</a:t>
-            </a:r>
-            <a:endParaRPr lang="en-US" sz="1250" dirty="0"/>
-          </a:p>
-          <a:p>
-            <a:pPr marL="342900" indent="-342900">
-              <a:spcAft>
-                <a:spcPts val="1000"/>
-              </a:spcAft>
-              <a:buSzPct val="100000"/>
-              <a:buChar char="•"/>
-            </a:pPr>
-            <a:r>
-              <a:rPr lang="en-US" sz="1250" dirty="0">
-                <a:solidFill>
-                  <a:srgbClr val="1F2937"/>
-                </a:solidFill>
-                <a:latin typeface="Microsoft JhengHei" pitchFamily="34" charset="0"/>
-                <a:ea typeface="Microsoft JhengHei" pitchFamily="34" charset="-122"/>
-                <a:cs typeface="Microsoft JhengHei" pitchFamily="34" charset="-120"/>
-              </a:rPr>
-              <a:t>小改動自己動手改，讓 Kiro 做「一個 task 一次到位」的活</a:t>
-            </a:r>
-            <a:endParaRPr lang="en-US" sz="1250" dirty="0"/>
-          </a:p>
-          <a:p>
-            <a:pPr marL="342900" indent="-342900">
-              <a:spcAft>
-                <a:spcPts val="1000"/>
-              </a:spcAft>
-              <a:buSzPct val="100000"/>
-              <a:buChar char="•"/>
-            </a:pPr>
-            <a:r>
-              <a:rPr lang="en-US" sz="1250" dirty="0">
-                <a:solidFill>
-                  <a:srgbClr val="1F2937"/>
-                </a:solidFill>
-                <a:latin typeface="Microsoft JhengHei" pitchFamily="34" charset="0"/>
-                <a:ea typeface="Microsoft JhengHei" pitchFamily="34" charset="-122"/>
-                <a:cs typeface="Microsoft JhengHei" pitchFamily="34" charset="-120"/>
-              </a:rPr>
-              <a:t>同一個問題別在 Kiro 裡反覆重試——換個問法前先想清楚要什麼</a:t>
-            </a:r>
-            <a:endParaRPr lang="en-US" sz="1250" dirty="0"/>
-          </a:p>
-          <a:p>
-            <a:pPr marL="342900" indent="-342900">
-              <a:spcAft>
-                <a:spcPts val="1000"/>
-              </a:spcAft>
-              <a:buSzPct val="100000"/>
-              <a:buChar char="•"/>
-            </a:pPr>
-            <a:r>
-              <a:rPr lang="en-US" sz="1250" dirty="0">
-                <a:solidFill>
-                  <a:srgbClr val="1F2937"/>
-                </a:solidFill>
-                <a:latin typeface="Microsoft JhengHei" pitchFamily="34" charset="0"/>
-                <a:ea typeface="Microsoft JhengHei" pitchFamily="34" charset="-122"/>
-                <a:cs typeface="Microsoft JhengHei" pitchFamily="34" charset="-120"/>
-              </a:rPr>
-              <a:t>頭像選單隨時看剩餘點數；低於個人決賽保底就停手回報</a:t>
-            </a:r>
-            <a:endParaRPr lang="en-US" sz="1250" dirty="0"/>
-          </a:p>
-        </p:txBody>
-      </p:sp>
-      <p:sp>
-        <p:nvSpPr>
-          <p:cNvPr id="18" name="Text 16"/>
-          <p:cNvSpPr/>
-          <p:nvPr/>
-        </p:nvSpPr>
-        <p:spPr>
-          <a:xfrm>
-            <a:off x="548640" y="5852160"/>
-            <a:ext cx="11091672" cy="411480"/>
-          </a:xfrm>
-          <a:prstGeom prst="rect">
-            <a:avLst/>
-          </a:prstGeom>
-          <a:noFill/>
-          <a:ln/>
-        </p:spPr>
-        <p:txBody>
-          <a:bodyPr wrap="square" lIns="0" tIns="0" rIns="0" bIns="0" rtlCol="0" anchor="ctr"/>
-          <a:lstStyle/>
-          <a:p>
-            <a:pPr indent="0" marL="0">
-              <a:buNone/>
-            </a:pPr>
-            <a:r>
-              <a:rPr lang="en-US" sz="1200" dirty="0">
-                <a:solidFill>
-                  <a:srgbClr val="6B7280"/>
-                </a:solidFill>
-                <a:latin typeface="Microsoft JhengHei" pitchFamily="34" charset="0"/>
-                <a:ea typeface="Microsoft JhengHei" pitchFamily="34" charset="-122"/>
-                <a:cs typeface="Microsoft JhengHei" pitchFamily="34" charset="-120"/>
-              </a:rPr>
-              <a:t>加分項證據：過程隨手截 Specs 面板／task 執行／MCP 查行情畫面，丟 Drive「Kiro證據」資料夾。</a:t>
-            </a:r>
-            <a:endParaRPr lang="en-US" sz="1200" dirty="0"/>
-          </a:p>
-        </p:txBody>
-      </p:sp>
-    </p:spTree>
-  </p:cSld>
-  <p:clrMapOvr>
-    <a:masterClrMapping/>
-  </p:clrMapOvr>
-</p:sld>
-</file>
-
 <file path=ppt/slides/slide2.xml><?xml version="1.0" encoding="utf-8"?>
 <p:sld xmlns:a="http://schemas.openxmlformats.org/drawingml/2006/main" xmlns:r="http://schemas.openxmlformats.org/officeDocument/2006/relationships" xmlns:p="http://schemas.openxmlformats.org/presentationml/2006/main">
   <p:cSld name="Slide 2">
@@ -17337,6 +17505,683 @@
                 <a:ea typeface="Microsoft JhengHei" pitchFamily="34" charset="-122"/>
                 <a:cs typeface="Microsoft JhengHei" pitchFamily="34" charset="-120"/>
               </a:rPr>
+              <a:t>Kiro｜Credit 紀律與雷區</a:t>
+            </a:r>
+            <a:endParaRPr lang="en-US" sz="2700" dirty="0"/>
+          </a:p>
+        </p:txBody>
+      </p:sp>
+      <p:sp>
+        <p:nvSpPr>
+          <p:cNvPr id="3" name="Text 1"/>
+          <p:cNvSpPr/>
+          <p:nvPr/>
+        </p:nvSpPr>
+        <p:spPr>
+          <a:xfrm>
+            <a:off x="548640" y="1024128"/>
+            <a:ext cx="11091672" cy="320040"/>
+          </a:xfrm>
+          <a:prstGeom prst="rect">
+            <a:avLst/>
+          </a:prstGeom>
+          <a:noFill/>
+          <a:ln/>
+        </p:spPr>
+        <p:txBody>
+          <a:bodyPr wrap="square" lIns="0" tIns="0" rIns="0" bIns="0" rtlCol="0" anchor="ctr"/>
+          <a:lstStyle/>
+          <a:p>
+            <a:pPr indent="0" marL="0">
+              <a:buNone/>
+            </a:pPr>
+            <a:r>
+              <a:rPr lang="en-US" sz="1250" dirty="0">
+                <a:solidFill>
+                  <a:srgbClr val="6B7280"/>
+                </a:solidFill>
+                <a:latin typeface="Microsoft JhengHei" pitchFamily="34" charset="0"/>
+                <a:ea typeface="Microsoft JhengHei" pitchFamily="34" charset="-122"/>
+                <a:cs typeface="Microsoft JhengHei" pitchFamily="34" charset="-120"/>
+              </a:rPr>
+              <a:t>2000 點只發一次、用完不補——全隊共同資產</a:t>
+            </a:r>
+            <a:endParaRPr lang="en-US" sz="1250" dirty="0"/>
+          </a:p>
+        </p:txBody>
+      </p:sp>
+      <p:sp>
+        <p:nvSpPr>
+          <p:cNvPr id="4" name="Shape 2"/>
+          <p:cNvSpPr/>
+          <p:nvPr/>
+        </p:nvSpPr>
+        <p:spPr>
+          <a:xfrm>
+            <a:off x="548640" y="1554480"/>
+            <a:ext cx="5394960" cy="4023360"/>
+          </a:xfrm>
+          <a:prstGeom prst="roundRect">
+            <a:avLst>
+              <a:gd name="adj" fmla="val 2045"/>
+            </a:avLst>
+          </a:prstGeom>
+          <a:solidFill>
+            <a:srgbClr val="EAF0FB"/>
+          </a:solidFill>
+          <a:ln/>
+        </p:spPr>
+      </p:sp>
+      <p:sp>
+        <p:nvSpPr>
+          <p:cNvPr id="5" name="Text 3"/>
+          <p:cNvSpPr/>
+          <p:nvPr/>
+        </p:nvSpPr>
+        <p:spPr>
+          <a:xfrm>
+            <a:off x="868680" y="1783080"/>
+            <a:ext cx="4754880" cy="411480"/>
+          </a:xfrm>
+          <a:prstGeom prst="rect">
+            <a:avLst/>
+          </a:prstGeom>
+          <a:noFill/>
+          <a:ln/>
+        </p:spPr>
+        <p:txBody>
+          <a:bodyPr wrap="square" lIns="0" tIns="0" rIns="0" bIns="0" rtlCol="0" anchor="ctr"/>
+          <a:lstStyle/>
+          <a:p>
+            <a:pPr indent="0" marL="0">
+              <a:buNone/>
+            </a:pPr>
+            <a:r>
+              <a:rPr lang="en-US" sz="1600" b="1" dirty="0">
+                <a:solidFill>
+                  <a:srgbClr val="16224D"/>
+                </a:solidFill>
+                <a:latin typeface="Microsoft JhengHei" pitchFamily="34" charset="0"/>
+                <a:ea typeface="Microsoft JhengHei" pitchFamily="34" charset="-122"/>
+                <a:cs typeface="Microsoft JhengHei" pitchFamily="34" charset="-120"/>
+              </a:rPr>
+              <a:t>預算分配（每人）</a:t>
+            </a:r>
+            <a:endParaRPr lang="en-US" sz="1600" dirty="0"/>
+          </a:p>
+        </p:txBody>
+      </p:sp>
+      <p:sp>
+        <p:nvSpPr>
+          <p:cNvPr id="6" name="Shape 4"/>
+          <p:cNvSpPr/>
+          <p:nvPr/>
+        </p:nvSpPr>
+        <p:spPr>
+          <a:xfrm>
+            <a:off x="868680" y="2331720"/>
+            <a:ext cx="4754880" cy="822960"/>
+          </a:xfrm>
+          <a:prstGeom prst="roundRect">
+            <a:avLst>
+              <a:gd name="adj" fmla="val 10000"/>
+            </a:avLst>
+          </a:prstGeom>
+          <a:solidFill>
+            <a:srgbClr val="FFFFFF"/>
+          </a:solidFill>
+          <a:ln/>
+        </p:spPr>
+      </p:sp>
+      <p:sp>
+        <p:nvSpPr>
+          <p:cNvPr id="7" name="Text 5"/>
+          <p:cNvSpPr/>
+          <p:nvPr/>
+        </p:nvSpPr>
+        <p:spPr>
+          <a:xfrm>
+            <a:off x="1097280" y="2404872"/>
+            <a:ext cx="2834640" cy="685800"/>
+          </a:xfrm>
+          <a:prstGeom prst="rect">
+            <a:avLst/>
+          </a:prstGeom>
+          <a:noFill/>
+          <a:ln/>
+        </p:spPr>
+        <p:txBody>
+          <a:bodyPr wrap="square" lIns="0" tIns="0" rIns="0" bIns="0" rtlCol="0" anchor="ctr"/>
+          <a:lstStyle/>
+          <a:p>
+            <a:pPr indent="0" marL="0">
+              <a:buNone/>
+            </a:pPr>
+            <a:r>
+              <a:rPr lang="en-US" sz="1350" dirty="0">
+                <a:solidFill>
+                  <a:srgbClr val="1F2937"/>
+                </a:solidFill>
+                <a:latin typeface="Microsoft JhengHei" pitchFamily="34" charset="0"/>
+                <a:ea typeface="Microsoft JhengHei" pitchFamily="34" charset="-122"/>
+                <a:cs typeface="Microsoft JhengHei" pitchFamily="34" charset="-120"/>
+              </a:rPr>
+              <a:t>練習期（～7/22）</a:t>
+            </a:r>
+            <a:endParaRPr lang="en-US" sz="1350" dirty="0"/>
+          </a:p>
+        </p:txBody>
+      </p:sp>
+      <p:sp>
+        <p:nvSpPr>
+          <p:cNvPr id="8" name="Text 6"/>
+          <p:cNvSpPr/>
+          <p:nvPr/>
+        </p:nvSpPr>
+        <p:spPr>
+          <a:xfrm>
+            <a:off x="3931920" y="2404872"/>
+            <a:ext cx="1554480" cy="685800"/>
+          </a:xfrm>
+          <a:prstGeom prst="rect">
+            <a:avLst/>
+          </a:prstGeom>
+          <a:noFill/>
+          <a:ln/>
+        </p:spPr>
+        <p:txBody>
+          <a:bodyPr wrap="square" lIns="0" tIns="0" rIns="0" bIns="0" rtlCol="0" anchor="ctr"/>
+          <a:lstStyle/>
+          <a:p>
+            <a:pPr indent="0" marL="0">
+              <a:buNone/>
+            </a:pPr>
+            <a:r>
+              <a:rPr lang="en-US" sz="2000" b="1" dirty="0">
+                <a:solidFill>
+                  <a:srgbClr val="E8A13A"/>
+                </a:solidFill>
+                <a:latin typeface="Microsoft JhengHei" pitchFamily="34" charset="0"/>
+                <a:ea typeface="Microsoft JhengHei" pitchFamily="34" charset="-122"/>
+                <a:cs typeface="Microsoft JhengHei" pitchFamily="34" charset="-120"/>
+              </a:rPr>
+              <a:t>≤ 300</a:t>
+            </a:r>
+            <a:endParaRPr lang="en-US" sz="2000" dirty="0"/>
+          </a:p>
+        </p:txBody>
+      </p:sp>
+      <p:sp>
+        <p:nvSpPr>
+          <p:cNvPr id="9" name="Shape 7"/>
+          <p:cNvSpPr/>
+          <p:nvPr/>
+        </p:nvSpPr>
+        <p:spPr>
+          <a:xfrm>
+            <a:off x="868680" y="3291840"/>
+            <a:ext cx="4754880" cy="822960"/>
+          </a:xfrm>
+          <a:prstGeom prst="roundRect">
+            <a:avLst>
+              <a:gd name="adj" fmla="val 10000"/>
+            </a:avLst>
+          </a:prstGeom>
+          <a:solidFill>
+            <a:srgbClr val="FFFFFF"/>
+          </a:solidFill>
+          <a:ln/>
+        </p:spPr>
+      </p:sp>
+      <p:sp>
+        <p:nvSpPr>
+          <p:cNvPr id="10" name="Text 8"/>
+          <p:cNvSpPr/>
+          <p:nvPr/>
+        </p:nvSpPr>
+        <p:spPr>
+          <a:xfrm>
+            <a:off x="1097280" y="3364992"/>
+            <a:ext cx="2834640" cy="685800"/>
+          </a:xfrm>
+          <a:prstGeom prst="rect">
+            <a:avLst/>
+          </a:prstGeom>
+          <a:noFill/>
+          <a:ln/>
+        </p:spPr>
+        <p:txBody>
+          <a:bodyPr wrap="square" lIns="0" tIns="0" rIns="0" bIns="0" rtlCol="0" anchor="ctr"/>
+          <a:lstStyle/>
+          <a:p>
+            <a:pPr indent="0" marL="0">
+              <a:buNone/>
+            </a:pPr>
+            <a:r>
+              <a:rPr lang="en-US" sz="1350" dirty="0">
+                <a:solidFill>
+                  <a:srgbClr val="1F2937"/>
+                </a:solidFill>
+                <a:latin typeface="Microsoft JhengHei" pitchFamily="34" charset="0"/>
+                <a:ea typeface="Microsoft JhengHei" pitchFamily="34" charset="-122"/>
+                <a:cs typeface="Microsoft JhengHei" pitchFamily="34" charset="-120"/>
+              </a:rPr>
+              <a:t>開發期（7/23–31）</a:t>
+            </a:r>
+            <a:endParaRPr lang="en-US" sz="1350" dirty="0"/>
+          </a:p>
+        </p:txBody>
+      </p:sp>
+      <p:sp>
+        <p:nvSpPr>
+          <p:cNvPr id="11" name="Text 9"/>
+          <p:cNvSpPr/>
+          <p:nvPr/>
+        </p:nvSpPr>
+        <p:spPr>
+          <a:xfrm>
+            <a:off x="3931920" y="3364992"/>
+            <a:ext cx="1554480" cy="685800"/>
+          </a:xfrm>
+          <a:prstGeom prst="rect">
+            <a:avLst/>
+          </a:prstGeom>
+          <a:noFill/>
+          <a:ln/>
+        </p:spPr>
+        <p:txBody>
+          <a:bodyPr wrap="square" lIns="0" tIns="0" rIns="0" bIns="0" rtlCol="0" anchor="ctr"/>
+          <a:lstStyle/>
+          <a:p>
+            <a:pPr indent="0" marL="0">
+              <a:buNone/>
+            </a:pPr>
+            <a:r>
+              <a:rPr lang="en-US" sz="2000" b="1" dirty="0">
+                <a:solidFill>
+                  <a:srgbClr val="16224D"/>
+                </a:solidFill>
+                <a:latin typeface="Microsoft JhengHei" pitchFamily="34" charset="0"/>
+                <a:ea typeface="Microsoft JhengHei" pitchFamily="34" charset="-122"/>
+                <a:cs typeface="Microsoft JhengHei" pitchFamily="34" charset="-120"/>
+              </a:rPr>
+              <a:t>~ 1000</a:t>
+            </a:r>
+            <a:endParaRPr lang="en-US" sz="2000" dirty="0"/>
+          </a:p>
+        </p:txBody>
+      </p:sp>
+      <p:sp>
+        <p:nvSpPr>
+          <p:cNvPr id="12" name="Shape 10"/>
+          <p:cNvSpPr/>
+          <p:nvPr/>
+        </p:nvSpPr>
+        <p:spPr>
+          <a:xfrm>
+            <a:off x="868680" y="4251960"/>
+            <a:ext cx="4754880" cy="822960"/>
+          </a:xfrm>
+          <a:prstGeom prst="roundRect">
+            <a:avLst>
+              <a:gd name="adj" fmla="val 10000"/>
+            </a:avLst>
+          </a:prstGeom>
+          <a:solidFill>
+            <a:srgbClr val="FFFFFF"/>
+          </a:solidFill>
+          <a:ln/>
+        </p:spPr>
+      </p:sp>
+      <p:sp>
+        <p:nvSpPr>
+          <p:cNvPr id="13" name="Text 11"/>
+          <p:cNvSpPr/>
+          <p:nvPr/>
+        </p:nvSpPr>
+        <p:spPr>
+          <a:xfrm>
+            <a:off x="1097280" y="4325112"/>
+            <a:ext cx="2834640" cy="685800"/>
+          </a:xfrm>
+          <a:prstGeom prst="rect">
+            <a:avLst/>
+          </a:prstGeom>
+          <a:noFill/>
+          <a:ln/>
+        </p:spPr>
+        <p:txBody>
+          <a:bodyPr wrap="square" lIns="0" tIns="0" rIns="0" bIns="0" rtlCol="0" anchor="ctr"/>
+          <a:lstStyle/>
+          <a:p>
+            <a:pPr indent="0" marL="0">
+              <a:buNone/>
+            </a:pPr>
+            <a:r>
+              <a:rPr lang="en-US" sz="1350" dirty="0">
+                <a:solidFill>
+                  <a:srgbClr val="1F2937"/>
+                </a:solidFill>
+                <a:latin typeface="Microsoft JhengHei" pitchFamily="34" charset="0"/>
+                <a:ea typeface="Microsoft JhengHei" pitchFamily="34" charset="-122"/>
+                <a:cs typeface="Microsoft JhengHei" pitchFamily="34" charset="-120"/>
+              </a:rPr>
+              <a:t>決賽保底（8/1–2）</a:t>
+            </a:r>
+            <a:endParaRPr lang="en-US" sz="1350" dirty="0"/>
+          </a:p>
+        </p:txBody>
+      </p:sp>
+      <p:sp>
+        <p:nvSpPr>
+          <p:cNvPr id="14" name="Text 12"/>
+          <p:cNvSpPr/>
+          <p:nvPr/>
+        </p:nvSpPr>
+        <p:spPr>
+          <a:xfrm>
+            <a:off x="3931920" y="4325112"/>
+            <a:ext cx="1554480" cy="685800"/>
+          </a:xfrm>
+          <a:prstGeom prst="rect">
+            <a:avLst/>
+          </a:prstGeom>
+          <a:noFill/>
+          <a:ln/>
+        </p:spPr>
+        <p:txBody>
+          <a:bodyPr wrap="square" lIns="0" tIns="0" rIns="0" bIns="0" rtlCol="0" anchor="ctr"/>
+          <a:lstStyle/>
+          <a:p>
+            <a:pPr indent="0" marL="0">
+              <a:buNone/>
+            </a:pPr>
+            <a:r>
+              <a:rPr lang="en-US" sz="2000" b="1" dirty="0">
+                <a:solidFill>
+                  <a:srgbClr val="D64550"/>
+                </a:solidFill>
+                <a:latin typeface="Microsoft JhengHei" pitchFamily="34" charset="0"/>
+                <a:ea typeface="Microsoft JhengHei" pitchFamily="34" charset="-122"/>
+                <a:cs typeface="Microsoft JhengHei" pitchFamily="34" charset="-120"/>
+              </a:rPr>
+              <a:t>≥ 700</a:t>
+            </a:r>
+            <a:endParaRPr lang="en-US" sz="2000" dirty="0"/>
+          </a:p>
+        </p:txBody>
+      </p:sp>
+      <p:sp>
+        <p:nvSpPr>
+          <p:cNvPr id="15" name="Shape 13"/>
+          <p:cNvSpPr/>
+          <p:nvPr/>
+        </p:nvSpPr>
+        <p:spPr>
+          <a:xfrm>
+            <a:off x="6263640" y="1554480"/>
+            <a:ext cx="5394960" cy="4023360"/>
+          </a:xfrm>
+          <a:prstGeom prst="roundRect">
+            <a:avLst>
+              <a:gd name="adj" fmla="val 2045"/>
+            </a:avLst>
+          </a:prstGeom>
+          <a:solidFill>
+            <a:srgbClr val="FDF0EF"/>
+          </a:solidFill>
+          <a:ln/>
+        </p:spPr>
+      </p:sp>
+      <p:sp>
+        <p:nvSpPr>
+          <p:cNvPr id="16" name="Text 14"/>
+          <p:cNvSpPr/>
+          <p:nvPr/>
+        </p:nvSpPr>
+        <p:spPr>
+          <a:xfrm>
+            <a:off x="6583680" y="1783080"/>
+            <a:ext cx="4754880" cy="411480"/>
+          </a:xfrm>
+          <a:prstGeom prst="rect">
+            <a:avLst/>
+          </a:prstGeom>
+          <a:noFill/>
+          <a:ln/>
+        </p:spPr>
+        <p:txBody>
+          <a:bodyPr wrap="square" lIns="0" tIns="0" rIns="0" bIns="0" rtlCol="0" anchor="ctr"/>
+          <a:lstStyle/>
+          <a:p>
+            <a:pPr indent="0" marL="0">
+              <a:buNone/>
+            </a:pPr>
+            <a:r>
+              <a:rPr lang="en-US" sz="1600" b="1" dirty="0">
+                <a:solidFill>
+                  <a:srgbClr val="D64550"/>
+                </a:solidFill>
+                <a:latin typeface="Microsoft JhengHei" pitchFamily="34" charset="0"/>
+                <a:ea typeface="Microsoft JhengHei" pitchFamily="34" charset="-122"/>
+                <a:cs typeface="Microsoft JhengHei" pitchFamily="34" charset="-120"/>
+              </a:rPr>
+              <a:t>四個雷區</a:t>
+            </a:r>
+            <a:endParaRPr lang="en-US" sz="1600" dirty="0"/>
+          </a:p>
+        </p:txBody>
+      </p:sp>
+      <p:sp>
+        <p:nvSpPr>
+          <p:cNvPr id="17" name="Text 15"/>
+          <p:cNvSpPr/>
+          <p:nvPr/>
+        </p:nvSpPr>
+        <p:spPr>
+          <a:xfrm>
+            <a:off x="6583680" y="2331720"/>
+            <a:ext cx="4846320" cy="3017520"/>
+          </a:xfrm>
+          <a:prstGeom prst="rect">
+            <a:avLst/>
+          </a:prstGeom>
+          <a:noFill/>
+          <a:ln/>
+        </p:spPr>
+        <p:txBody>
+          <a:bodyPr wrap="square" lIns="0" tIns="0" rIns="0" bIns="0" rtlCol="0" anchor="ctr"/>
+          <a:lstStyle/>
+          <a:p>
+            <a:pPr marL="342900" indent="-342900">
+              <a:spcAft>
+                <a:spcPts val="1000"/>
+              </a:spcAft>
+              <a:buSzPct val="100000"/>
+              <a:buChar char="•"/>
+            </a:pPr>
+            <a:r>
+              <a:rPr lang="en-US" sz="1250" dirty="0">
+                <a:solidFill>
+                  <a:srgbClr val="1F2937"/>
+                </a:solidFill>
+                <a:latin typeface="Microsoft JhengHei" pitchFamily="34" charset="0"/>
+                <a:ea typeface="Microsoft JhengHei" pitchFamily="34" charset="-122"/>
+                <a:cs typeface="Microsoft JhengHei" pitchFamily="34" charset="-120"/>
+              </a:rPr>
+              <a:t>Autopilot 只在跑定義好的 task 時開——探索、跟課、隨便問問一律關，它會自主連跑燒點數</a:t>
+            </a:r>
+            <a:endParaRPr lang="en-US" sz="1250" dirty="0"/>
+          </a:p>
+          <a:p>
+            <a:pPr marL="342900" indent="-342900">
+              <a:spcAft>
+                <a:spcPts val="1000"/>
+              </a:spcAft>
+              <a:buSzPct val="100000"/>
+              <a:buChar char="•"/>
+            </a:pPr>
+            <a:r>
+              <a:rPr lang="en-US" sz="1250" dirty="0">
+                <a:solidFill>
+                  <a:srgbClr val="1F2937"/>
+                </a:solidFill>
+                <a:latin typeface="Microsoft JhengHei" pitchFamily="34" charset="0"/>
+                <a:ea typeface="Microsoft JhengHei" pitchFamily="34" charset="-122"/>
+                <a:cs typeface="Microsoft JhengHei" pitchFamily="34" charset="-120"/>
+              </a:rPr>
+              <a:t>小改動自己動手改，讓 Kiro 做「一個 task 一次到位」的活</a:t>
+            </a:r>
+            <a:endParaRPr lang="en-US" sz="1250" dirty="0"/>
+          </a:p>
+          <a:p>
+            <a:pPr marL="342900" indent="-342900">
+              <a:spcAft>
+                <a:spcPts val="1000"/>
+              </a:spcAft>
+              <a:buSzPct val="100000"/>
+              <a:buChar char="•"/>
+            </a:pPr>
+            <a:r>
+              <a:rPr lang="en-US" sz="1250" dirty="0">
+                <a:solidFill>
+                  <a:srgbClr val="1F2937"/>
+                </a:solidFill>
+                <a:latin typeface="Microsoft JhengHei" pitchFamily="34" charset="0"/>
+                <a:ea typeface="Microsoft JhengHei" pitchFamily="34" charset="-122"/>
+                <a:cs typeface="Microsoft JhengHei" pitchFamily="34" charset="-120"/>
+              </a:rPr>
+              <a:t>同一個問題別在 Kiro 裡反覆重試——換個問法前先想清楚要什麼</a:t>
+            </a:r>
+            <a:endParaRPr lang="en-US" sz="1250" dirty="0"/>
+          </a:p>
+          <a:p>
+            <a:pPr marL="342900" indent="-342900">
+              <a:spcAft>
+                <a:spcPts val="1000"/>
+              </a:spcAft>
+              <a:buSzPct val="100000"/>
+              <a:buChar char="•"/>
+            </a:pPr>
+            <a:r>
+              <a:rPr lang="en-US" sz="1250" dirty="0">
+                <a:solidFill>
+                  <a:srgbClr val="1F2937"/>
+                </a:solidFill>
+                <a:latin typeface="Microsoft JhengHei" pitchFamily="34" charset="0"/>
+                <a:ea typeface="Microsoft JhengHei" pitchFamily="34" charset="-122"/>
+                <a:cs typeface="Microsoft JhengHei" pitchFamily="34" charset="-120"/>
+              </a:rPr>
+              <a:t>頭像選單隨時看剩餘點數；低於個人決賽保底就停手回報</a:t>
+            </a:r>
+            <a:endParaRPr lang="en-US" sz="1250" dirty="0"/>
+          </a:p>
+        </p:txBody>
+      </p:sp>
+      <p:sp>
+        <p:nvSpPr>
+          <p:cNvPr id="18" name="Text 16"/>
+          <p:cNvSpPr/>
+          <p:nvPr/>
+        </p:nvSpPr>
+        <p:spPr>
+          <a:xfrm>
+            <a:off x="548640" y="5852160"/>
+            <a:ext cx="11091672" cy="411480"/>
+          </a:xfrm>
+          <a:prstGeom prst="rect">
+            <a:avLst/>
+          </a:prstGeom>
+          <a:noFill/>
+          <a:ln/>
+        </p:spPr>
+        <p:txBody>
+          <a:bodyPr wrap="square" lIns="0" tIns="0" rIns="0" bIns="0" rtlCol="0" anchor="ctr"/>
+          <a:lstStyle/>
+          <a:p>
+            <a:pPr indent="0" marL="0">
+              <a:buNone/>
+            </a:pPr>
+            <a:r>
+              <a:rPr lang="en-US" sz="1200" dirty="0">
+                <a:solidFill>
+                  <a:srgbClr val="6B7280"/>
+                </a:solidFill>
+                <a:latin typeface="Microsoft JhengHei" pitchFamily="34" charset="0"/>
+                <a:ea typeface="Microsoft JhengHei" pitchFamily="34" charset="-122"/>
+                <a:cs typeface="Microsoft JhengHei" pitchFamily="34" charset="-120"/>
+              </a:rPr>
+              <a:t>加分項證據：過程隨手截 Specs 面板／task 執行／MCP 查行情畫面，丟 Drive「Kiro證據」資料夾。</a:t>
+            </a:r>
+            <a:endParaRPr lang="en-US" sz="1200" dirty="0"/>
+          </a:p>
+        </p:txBody>
+      </p:sp>
+    </p:spTree>
+  </p:cSld>
+  <p:clrMapOvr>
+    <a:masterClrMapping/>
+  </p:clrMapOvr>
+</p:sld>
+</file>
+
+<file path=ppt/slides/slide21.xml><?xml version="1.0" encoding="utf-8"?>
+<p:sld xmlns:a="http://schemas.openxmlformats.org/drawingml/2006/main" xmlns:r="http://schemas.openxmlformats.org/officeDocument/2006/relationships" xmlns:p="http://schemas.openxmlformats.org/presentationml/2006/main">
+  <p:cSld name="Slide 21">
+    <p:bg>
+      <p:bgPr>
+        <a:solidFill>
+          <a:srgbClr val="FFFFFF"/>
+        </a:solidFill>
+      </p:bgPr>
+    </p:bg>
+    <p:spTree>
+      <p:nvGrpSpPr>
+        <p:cNvPr id="1" name=""/>
+        <p:cNvGrpSpPr/>
+        <p:nvPr/>
+      </p:nvGrpSpPr>
+      <p:grpSpPr>
+        <a:xfrm>
+          <a:off x="0" y="0"/>
+          <a:ext cx="0" cy="0"/>
+          <a:chOff x="0" y="0"/>
+          <a:chExt cx="0" cy="0"/>
+        </a:xfrm>
+      </p:grpSpPr>
+      <p:sp>
+        <p:nvSpPr>
+          <p:cNvPr id="2" name="Text 0"/>
+          <p:cNvSpPr/>
+          <p:nvPr/>
+        </p:nvSpPr>
+        <p:spPr>
+          <a:xfrm>
+            <a:off x="548640" y="411480"/>
+            <a:ext cx="11091672" cy="640080"/>
+          </a:xfrm>
+          <a:prstGeom prst="rect">
+            <a:avLst/>
+          </a:prstGeom>
+          <a:noFill/>
+          <a:ln/>
+        </p:spPr>
+        <p:txBody>
+          <a:bodyPr wrap="square" lIns="0" tIns="0" rIns="0" bIns="0" rtlCol="0" anchor="ctr"/>
+          <a:lstStyle/>
+          <a:p>
+            <a:pPr indent="0" marL="0">
+              <a:buNone/>
+            </a:pPr>
+            <a:r>
+              <a:rPr lang="en-US" sz="2700" b="1" dirty="0">
+                <a:solidFill>
+                  <a:srgbClr val="16224D"/>
+                </a:solidFill>
+                <a:latin typeface="Microsoft JhengHei" pitchFamily="34" charset="0"/>
+                <a:ea typeface="Microsoft JhengHei" pitchFamily="34" charset="-122"/>
+                <a:cs typeface="Microsoft JhengHei" pitchFamily="34" charset="-120"/>
+              </a:rPr>
               <a:t>驗收總覽：十組清單，打勾才算數</a:t>
             </a:r>
             <a:endParaRPr lang="en-US" sz="2700" dirty="0"/>
@@ -17384,7 +18229,7 @@
       </p:sp>
       <p:graphicFrame>
         <p:nvGraphicFramePr>
-          <p:cNvPr id="21" name="Table 0"/>
+          <p:cNvPr id="22" name="Table 0"/>
           <p:cNvGraphicFramePr>
             <a:graphicFrameLocks noGrp="1"/>
           </p:cNvGraphicFramePr>
@@ -20316,9 +21161,9 @@
 </p:sld>
 </file>
 
-<file path=ppt/slides/slide21.xml><?xml version="1.0" encoding="utf-8"?>
+<file path=ppt/slides/slide22.xml><?xml version="1.0" encoding="utf-8"?>
 <p:sld xmlns:a="http://schemas.openxmlformats.org/drawingml/2006/main" xmlns:r="http://schemas.openxmlformats.org/officeDocument/2006/relationships" xmlns:p="http://schemas.openxmlformats.org/presentationml/2006/main">
-  <p:cSld name="Slide 21">
+  <p:cSld name="Slide 22">
     <p:bg>
       <p:bgPr>
         <a:solidFill>
@@ -20823,9 +21668,9 @@
 </p:sld>
 </file>
 
-<file path=ppt/slides/slide22.xml><?xml version="1.0" encoding="utf-8"?>
+<file path=ppt/slides/slide23.xml><?xml version="1.0" encoding="utf-8"?>
 <p:sld xmlns:a="http://schemas.openxmlformats.org/drawingml/2006/main" xmlns:r="http://schemas.openxmlformats.org/officeDocument/2006/relationships" xmlns:p="http://schemas.openxmlformats.org/presentationml/2006/main">
-  <p:cSld name="Slide 22">
+  <p:cSld name="Slide 23">
     <p:bg>
       <p:bgPr>
         <a:solidFill>
@@ -34846,7 +35691,7 @@
                 <a:ea typeface="Microsoft JhengHei" pitchFamily="34" charset="-122"/>
                 <a:cs typeface="Microsoft JhengHei" pitchFamily="34" charset="-120"/>
               </a:rPr>
-              <a:t>交接不打架的五條規則</a:t>
+              <a:t>交棒地圖：哪個工項完成，交付給誰</a:t>
             </a:r>
             <a:endParaRPr lang="en-US" sz="2700" dirty="0"/>
           </a:p>
@@ -34854,112 +35699,14 @@
       </p:sp>
       <p:sp>
         <p:nvSpPr>
-          <p:cNvPr id="3" name="Shape 1"/>
+          <p:cNvPr id="3" name="Text 1"/>
           <p:cNvSpPr/>
           <p:nvPr/>
         </p:nvSpPr>
         <p:spPr>
           <a:xfrm>
-            <a:off x="548640" y="1645920"/>
-            <a:ext cx="502920" cy="502920"/>
-          </a:xfrm>
-          <a:prstGeom prst="ellipse">
-            <a:avLst/>
-          </a:prstGeom>
-          <a:solidFill>
-            <a:srgbClr val="16224D"/>
-          </a:solidFill>
-          <a:ln/>
-        </p:spPr>
-      </p:sp>
-      <p:sp>
-        <p:nvSpPr>
-          <p:cNvPr id="4" name="Text 2"/>
-          <p:cNvSpPr/>
-          <p:nvPr/>
-        </p:nvSpPr>
-        <p:spPr>
-          <a:xfrm>
-            <a:off x="548640" y="1645920"/>
-            <a:ext cx="502920" cy="502920"/>
-          </a:xfrm>
-          <a:prstGeom prst="rect">
-            <a:avLst/>
-          </a:prstGeom>
-          <a:noFill/>
-          <a:ln/>
-        </p:spPr>
-        <p:txBody>
-          <a:bodyPr wrap="square" lIns="0" tIns="0" rIns="0" bIns="0" rtlCol="0" anchor="ctr"/>
-          <a:lstStyle/>
-          <a:p>
-            <a:pPr algn="ctr" indent="0" marL="0">
-              <a:buNone/>
-            </a:pPr>
-            <a:r>
-              <a:rPr lang="en-US" sz="1600" b="1" dirty="0">
-                <a:solidFill>
-                  <a:srgbClr val="FFFFFF"/>
-                </a:solidFill>
-                <a:latin typeface="Microsoft JhengHei" pitchFamily="34" charset="0"/>
-                <a:ea typeface="Microsoft JhengHei" pitchFamily="34" charset="-122"/>
-                <a:cs typeface="Microsoft JhengHei" pitchFamily="34" charset="-120"/>
-              </a:rPr>
-              <a:t>1</a:t>
-            </a:r>
-            <a:endParaRPr lang="en-US" sz="1600" dirty="0"/>
-          </a:p>
-        </p:txBody>
-      </p:sp>
-      <p:sp>
-        <p:nvSpPr>
-          <p:cNvPr id="5" name="Text 3"/>
-          <p:cNvSpPr/>
-          <p:nvPr/>
-        </p:nvSpPr>
-        <p:spPr>
-          <a:xfrm>
-            <a:off x="1280160" y="1554480"/>
-            <a:ext cx="2194560" cy="777240"/>
-          </a:xfrm>
-          <a:prstGeom prst="rect">
-            <a:avLst/>
-          </a:prstGeom>
-          <a:noFill/>
-          <a:ln/>
-        </p:spPr>
-        <p:txBody>
-          <a:bodyPr wrap="square" lIns="0" tIns="0" rIns="0" bIns="0" rtlCol="0" anchor="ctr"/>
-          <a:lstStyle/>
-          <a:p>
-            <a:pPr indent="0" marL="0">
-              <a:buNone/>
-            </a:pPr>
-            <a:r>
-              <a:rPr lang="en-US" sz="1550" b="1" dirty="0">
-                <a:solidFill>
-                  <a:srgbClr val="16224D"/>
-                </a:solidFill>
-                <a:latin typeface="Microsoft JhengHei" pitchFamily="34" charset="0"/>
-                <a:ea typeface="Microsoft JhengHei" pitchFamily="34" charset="-122"/>
-                <a:cs typeface="Microsoft JhengHei" pitchFamily="34" charset="-120"/>
-              </a:rPr>
-              <a:t>地盤制</a:t>
-            </a:r>
-            <a:endParaRPr lang="en-US" sz="1550" dirty="0"/>
-          </a:p>
-        </p:txBody>
-      </p:sp>
-      <p:sp>
-        <p:nvSpPr>
-          <p:cNvPr id="6" name="Text 4"/>
-          <p:cNvSpPr/>
-          <p:nvPr/>
-        </p:nvSpPr>
-        <p:spPr>
-          <a:xfrm>
-            <a:off x="3566160" y="1554480"/>
-            <a:ext cx="8138160" cy="777240"/>
+            <a:off x="548640" y="1024128"/>
+            <a:ext cx="11091672" cy="320040"/>
           </a:xfrm>
           <a:prstGeom prst="rect">
             <a:avLst/>
@@ -34977,87 +35724,3740 @@
             <a:r>
               <a:rPr lang="en-US" sz="1250" dirty="0">
                 <a:solidFill>
-                  <a:srgbClr val="1F2937"/>
+                  <a:srgbClr val="6B7280"/>
                 </a:solidFill>
                 <a:latin typeface="Microsoft JhengHei" pitchFamily="34" charset="0"/>
                 <a:ea typeface="Microsoft JhengHei" pitchFamily="34" charset="-122"/>
                 <a:cs typeface="Microsoft JhengHei" pitchFamily="34" charset="-120"/>
               </a:rPr>
-              <a:t>每包只 commit 自己的目錄。要動別人的地盤 → 開 issue 給對方包，不直接改</a:t>
+              <a:t>進來的箭頭＝你在等什麼；出去的箭頭＝誰在等你。流程圖版在 README §1</a:t>
             </a:r>
             <a:endParaRPr lang="en-US" sz="1250" dirty="0"/>
           </a:p>
         </p:txBody>
       </p:sp>
+      <p:graphicFrame>
+        <p:nvGraphicFramePr>
+          <p:cNvPr id="10" name="Table 0"/>
+          <p:cNvGraphicFramePr>
+            <a:graphicFrameLocks noGrp="1"/>
+          </p:cNvGraphicFramePr>
+          <p:nvPr>
+            <p:extLst>
+              <p:ext uri="{D42A27DB-BD31-4B8C-83A1-F6EECF244321}">
+                <p14:modId xmlns:p14="http://schemas.microsoft.com/office/powerpoint/2010/main" val="1579011935"/>
+              </p:ext>
+            </p:extLst>
+          </p:nvPr>
+        </p:nvGraphicFramePr>
+        <p:xfrm>
+          <a:off x="548640" y="1508760"/>
+          <a:ext cx="11091672" cy="914400"/>
+        </p:xfrm>
+        <a:graphic>
+          <a:graphicData uri="http://schemas.openxmlformats.org/drawingml/2006/table">
+            <a:tbl>
+              <a:tblPr/>
+              <a:tblGrid>
+                <a:gridCol w="3200400"/>
+                <a:gridCol w="2651760"/>
+                <a:gridCol w="1234440"/>
+                <a:gridCol w="4005072"/>
+              </a:tblGrid>
+              <a:tr h="352044">
+                <a:tc>
+                  <a:txBody>
+                    <a:bodyPr/>
+                    <a:lstStyle/>
+                    <a:p>
+                      <a:pPr indent="0" marL="0">
+                        <a:buNone/>
+                      </a:pPr>
+                      <a:r>
+                        <a:rPr lang="en-US" sz="1000" b="1" dirty="0">
+                          <a:solidFill>
+                            <a:srgbClr val="FFFFFF"/>
+                          </a:solidFill>
+                          <a:latin typeface="Microsoft JhengHei" pitchFamily="34" charset="0"/>
+                          <a:ea typeface="Microsoft JhengHei" pitchFamily="34" charset="-122"/>
+                          <a:cs typeface="Microsoft JhengHei" pitchFamily="34" charset="-120"/>
+                        </a:rPr>
+                        <a:t>完成的工項</a:t>
+                      </a:r>
+                      <a:endParaRPr lang="en-US" sz="1000" dirty="0">
+                        <a:latin typeface="Microsoft JhengHei" charset="0"/>
+                        <a:ea typeface="Microsoft JhengHei" charset="0"/>
+                        <a:cs typeface="Microsoft JhengHei" charset="0"/>
+                      </a:endParaRPr>
+                    </a:p>
+                  </a:txBody>
+                  <a:tcPr marL="45720" marR="45720" marT="45720" marB="45720" anchor="ctr">
+                    <a:lnL w="9525" cap="flat" cmpd="sng" algn="ctr">
+                      <a:solidFill>
+                        <a:srgbClr val="D5DEF0"/>
+                      </a:solidFill>
+                      <a:prstDash val="solid"/>
+                      <a:round/>
+                      <a:headEnd type="none" w="med" len="med"/>
+                      <a:tailEnd type="none" w="med" len="med"/>
+                    </a:lnL>
+                    <a:lnR w="9525" cap="flat" cmpd="sng" algn="ctr">
+                      <a:solidFill>
+                        <a:srgbClr val="D5DEF0"/>
+                      </a:solidFill>
+                      <a:prstDash val="solid"/>
+                      <a:round/>
+                      <a:headEnd type="none" w="med" len="med"/>
+                      <a:tailEnd type="none" w="med" len="med"/>
+                    </a:lnR>
+                    <a:lnT w="9525" cap="flat" cmpd="sng" algn="ctr">
+                      <a:solidFill>
+                        <a:srgbClr val="D5DEF0"/>
+                      </a:solidFill>
+                      <a:prstDash val="solid"/>
+                      <a:round/>
+                      <a:headEnd type="none" w="med" len="med"/>
+                      <a:tailEnd type="none" w="med" len="med"/>
+                    </a:lnT>
+                    <a:lnB w="9525" cap="flat" cmpd="sng" algn="ctr">
+                      <a:solidFill>
+                        <a:srgbClr val="D5DEF0"/>
+                      </a:solidFill>
+                      <a:prstDash val="solid"/>
+                      <a:round/>
+                      <a:headEnd type="none" w="med" len="med"/>
+                      <a:tailEnd type="none" w="med" len="med"/>
+                    </a:lnB>
+                    <a:solidFill>
+                      <a:srgbClr val="16224D"/>
+                    </a:solidFill>
+                  </a:tcPr>
+                </a:tc>
+                <a:tc>
+                  <a:txBody>
+                    <a:bodyPr/>
+                    <a:lstStyle/>
+                    <a:p>
+                      <a:pPr indent="0" marL="0">
+                        <a:buNone/>
+                      </a:pPr>
+                      <a:r>
+                        <a:rPr lang="en-US" sz="1000" b="1" dirty="0">
+                          <a:solidFill>
+                            <a:srgbClr val="FFFFFF"/>
+                          </a:solidFill>
+                          <a:latin typeface="Microsoft JhengHei" pitchFamily="34" charset="0"/>
+                          <a:ea typeface="Microsoft JhengHei" pitchFamily="34" charset="-122"/>
+                          <a:cs typeface="Microsoft JhengHei" pitchFamily="34" charset="-120"/>
+                        </a:rPr>
+                        <a:t>交付物</a:t>
+                      </a:r>
+                      <a:endParaRPr lang="en-US" sz="1000" dirty="0">
+                        <a:latin typeface="Microsoft JhengHei" charset="0"/>
+                        <a:ea typeface="Microsoft JhengHei" charset="0"/>
+                        <a:cs typeface="Microsoft JhengHei" charset="0"/>
+                      </a:endParaRPr>
+                    </a:p>
+                  </a:txBody>
+                  <a:tcPr marL="45720" marR="45720" marT="45720" marB="45720" anchor="ctr">
+                    <a:lnL w="9525" cap="flat" cmpd="sng" algn="ctr">
+                      <a:solidFill>
+                        <a:srgbClr val="D5DEF0"/>
+                      </a:solidFill>
+                      <a:prstDash val="solid"/>
+                      <a:round/>
+                      <a:headEnd type="none" w="med" len="med"/>
+                      <a:tailEnd type="none" w="med" len="med"/>
+                    </a:lnL>
+                    <a:lnR w="9525" cap="flat" cmpd="sng" algn="ctr">
+                      <a:solidFill>
+                        <a:srgbClr val="D5DEF0"/>
+                      </a:solidFill>
+                      <a:prstDash val="solid"/>
+                      <a:round/>
+                      <a:headEnd type="none" w="med" len="med"/>
+                      <a:tailEnd type="none" w="med" len="med"/>
+                    </a:lnR>
+                    <a:lnT w="9525" cap="flat" cmpd="sng" algn="ctr">
+                      <a:solidFill>
+                        <a:srgbClr val="D5DEF0"/>
+                      </a:solidFill>
+                      <a:prstDash val="solid"/>
+                      <a:round/>
+                      <a:headEnd type="none" w="med" len="med"/>
+                      <a:tailEnd type="none" w="med" len="med"/>
+                    </a:lnT>
+                    <a:lnB w="9525" cap="flat" cmpd="sng" algn="ctr">
+                      <a:solidFill>
+                        <a:srgbClr val="D5DEF0"/>
+                      </a:solidFill>
+                      <a:prstDash val="solid"/>
+                      <a:round/>
+                      <a:headEnd type="none" w="med" len="med"/>
+                      <a:tailEnd type="none" w="med" len="med"/>
+                    </a:lnB>
+                    <a:solidFill>
+                      <a:srgbClr val="16224D"/>
+                    </a:solidFill>
+                  </a:tcPr>
+                </a:tc>
+                <a:tc>
+                  <a:txBody>
+                    <a:bodyPr/>
+                    <a:lstStyle/>
+                    <a:p>
+                      <a:pPr indent="0" marL="0">
+                        <a:buNone/>
+                      </a:pPr>
+                      <a:r>
+                        <a:rPr lang="en-US" sz="1000" b="1" dirty="0">
+                          <a:solidFill>
+                            <a:srgbClr val="FFFFFF"/>
+                          </a:solidFill>
+                          <a:latin typeface="Microsoft JhengHei" pitchFamily="34" charset="0"/>
+                          <a:ea typeface="Microsoft JhengHei" pitchFamily="34" charset="-122"/>
+                          <a:cs typeface="Microsoft JhengHei" pitchFamily="34" charset="-120"/>
+                        </a:rPr>
+                        <a:t>交給</a:t>
+                      </a:r>
+                      <a:endParaRPr lang="en-US" sz="1000" dirty="0">
+                        <a:latin typeface="Microsoft JhengHei" charset="0"/>
+                        <a:ea typeface="Microsoft JhengHei" charset="0"/>
+                        <a:cs typeface="Microsoft JhengHei" charset="0"/>
+                      </a:endParaRPr>
+                    </a:p>
+                  </a:txBody>
+                  <a:tcPr marL="45720" marR="45720" marT="45720" marB="45720" anchor="ctr">
+                    <a:lnL w="9525" cap="flat" cmpd="sng" algn="ctr">
+                      <a:solidFill>
+                        <a:srgbClr val="D5DEF0"/>
+                      </a:solidFill>
+                      <a:prstDash val="solid"/>
+                      <a:round/>
+                      <a:headEnd type="none" w="med" len="med"/>
+                      <a:tailEnd type="none" w="med" len="med"/>
+                    </a:lnL>
+                    <a:lnR w="9525" cap="flat" cmpd="sng" algn="ctr">
+                      <a:solidFill>
+                        <a:srgbClr val="D5DEF0"/>
+                      </a:solidFill>
+                      <a:prstDash val="solid"/>
+                      <a:round/>
+                      <a:headEnd type="none" w="med" len="med"/>
+                      <a:tailEnd type="none" w="med" len="med"/>
+                    </a:lnR>
+                    <a:lnT w="9525" cap="flat" cmpd="sng" algn="ctr">
+                      <a:solidFill>
+                        <a:srgbClr val="D5DEF0"/>
+                      </a:solidFill>
+                      <a:prstDash val="solid"/>
+                      <a:round/>
+                      <a:headEnd type="none" w="med" len="med"/>
+                      <a:tailEnd type="none" w="med" len="med"/>
+                    </a:lnT>
+                    <a:lnB w="9525" cap="flat" cmpd="sng" algn="ctr">
+                      <a:solidFill>
+                        <a:srgbClr val="D5DEF0"/>
+                      </a:solidFill>
+                      <a:prstDash val="solid"/>
+                      <a:round/>
+                      <a:headEnd type="none" w="med" len="med"/>
+                      <a:tailEnd type="none" w="med" len="med"/>
+                    </a:lnB>
+                    <a:solidFill>
+                      <a:srgbClr val="16224D"/>
+                    </a:solidFill>
+                  </a:tcPr>
+                </a:tc>
+                <a:tc>
+                  <a:txBody>
+                    <a:bodyPr/>
+                    <a:lstStyle/>
+                    <a:p>
+                      <a:pPr indent="0" marL="0">
+                        <a:buNone/>
+                      </a:pPr>
+                      <a:r>
+                        <a:rPr lang="en-US" sz="1000" b="1" dirty="0">
+                          <a:solidFill>
+                            <a:srgbClr val="FFFFFF"/>
+                          </a:solidFill>
+                          <a:latin typeface="Microsoft JhengHei" pitchFamily="34" charset="0"/>
+                          <a:ea typeface="Microsoft JhengHei" pitchFamily="34" charset="-122"/>
+                          <a:cs typeface="Microsoft JhengHei" pitchFamily="34" charset="-120"/>
+                        </a:rPr>
+                        <a:t>對方拿去做什麼</a:t>
+                      </a:r>
+                      <a:endParaRPr lang="en-US" sz="1000" dirty="0">
+                        <a:latin typeface="Microsoft JhengHei" charset="0"/>
+                        <a:ea typeface="Microsoft JhengHei" charset="0"/>
+                        <a:cs typeface="Microsoft JhengHei" charset="0"/>
+                      </a:endParaRPr>
+                    </a:p>
+                  </a:txBody>
+                  <a:tcPr marL="45720" marR="45720" marT="45720" marB="45720" anchor="ctr">
+                    <a:lnL w="9525" cap="flat" cmpd="sng" algn="ctr">
+                      <a:solidFill>
+                        <a:srgbClr val="D5DEF0"/>
+                      </a:solidFill>
+                      <a:prstDash val="solid"/>
+                      <a:round/>
+                      <a:headEnd type="none" w="med" len="med"/>
+                      <a:tailEnd type="none" w="med" len="med"/>
+                    </a:lnL>
+                    <a:lnR w="9525" cap="flat" cmpd="sng" algn="ctr">
+                      <a:solidFill>
+                        <a:srgbClr val="D5DEF0"/>
+                      </a:solidFill>
+                      <a:prstDash val="solid"/>
+                      <a:round/>
+                      <a:headEnd type="none" w="med" len="med"/>
+                      <a:tailEnd type="none" w="med" len="med"/>
+                    </a:lnR>
+                    <a:lnT w="9525" cap="flat" cmpd="sng" algn="ctr">
+                      <a:solidFill>
+                        <a:srgbClr val="D5DEF0"/>
+                      </a:solidFill>
+                      <a:prstDash val="solid"/>
+                      <a:round/>
+                      <a:headEnd type="none" w="med" len="med"/>
+                      <a:tailEnd type="none" w="med" len="med"/>
+                    </a:lnT>
+                    <a:lnB w="9525" cap="flat" cmpd="sng" algn="ctr">
+                      <a:solidFill>
+                        <a:srgbClr val="D5DEF0"/>
+                      </a:solidFill>
+                      <a:prstDash val="solid"/>
+                      <a:round/>
+                      <a:headEnd type="none" w="med" len="med"/>
+                      <a:tailEnd type="none" w="med" len="med"/>
+                    </a:lnB>
+                    <a:solidFill>
+                      <a:srgbClr val="16224D"/>
+                    </a:solidFill>
+                  </a:tcPr>
+                </a:tc>
+              </a:tr>
+              <a:tr h="352044">
+                <a:tc>
+                  <a:txBody>
+                    <a:bodyPr/>
+                    <a:lstStyle/>
+                    <a:p>
+                      <a:pPr indent="0" marL="0">
+                        <a:buNone/>
+                      </a:pPr>
+                      <a:r>
+                        <a:rPr lang="en-US" sz="1000" b="1" dirty="0">
+                          <a:solidFill>
+                            <a:srgbClr val="1F2937"/>
+                          </a:solidFill>
+                          <a:latin typeface="Microsoft JhengHei" pitchFamily="34" charset="0"/>
+                          <a:ea typeface="Microsoft JhengHei" pitchFamily="34" charset="-122"/>
+                          <a:cs typeface="Microsoft JhengHei" pitchFamily="34" charset="-120"/>
+                        </a:rPr>
+                        <a:t>D：AWS 帳號＋Bedrock 開通</a:t>
+                      </a:r>
+                      <a:endParaRPr lang="en-US" sz="1000" dirty="0">
+                        <a:latin typeface="Microsoft JhengHei" charset="0"/>
+                        <a:ea typeface="Microsoft JhengHei" charset="0"/>
+                        <a:cs typeface="Microsoft JhengHei" charset="0"/>
+                      </a:endParaRPr>
+                    </a:p>
+                  </a:txBody>
+                  <a:tcPr marL="45720" marR="45720" marT="45720" marB="45720" anchor="ctr">
+                    <a:lnL w="9525" cap="flat" cmpd="sng" algn="ctr">
+                      <a:solidFill>
+                        <a:srgbClr val="D5DEF0"/>
+                      </a:solidFill>
+                      <a:prstDash val="solid"/>
+                      <a:round/>
+                      <a:headEnd type="none" w="med" len="med"/>
+                      <a:tailEnd type="none" w="med" len="med"/>
+                    </a:lnL>
+                    <a:lnR w="9525" cap="flat" cmpd="sng" algn="ctr">
+                      <a:solidFill>
+                        <a:srgbClr val="D5DEF0"/>
+                      </a:solidFill>
+                      <a:prstDash val="solid"/>
+                      <a:round/>
+                      <a:headEnd type="none" w="med" len="med"/>
+                      <a:tailEnd type="none" w="med" len="med"/>
+                    </a:lnR>
+                    <a:lnT w="9525" cap="flat" cmpd="sng" algn="ctr">
+                      <a:solidFill>
+                        <a:srgbClr val="D5DEF0"/>
+                      </a:solidFill>
+                      <a:prstDash val="solid"/>
+                      <a:round/>
+                      <a:headEnd type="none" w="med" len="med"/>
+                      <a:tailEnd type="none" w="med" len="med"/>
+                    </a:lnT>
+                    <a:lnB w="9525" cap="flat" cmpd="sng" algn="ctr">
+                      <a:solidFill>
+                        <a:srgbClr val="D5DEF0"/>
+                      </a:solidFill>
+                      <a:prstDash val="solid"/>
+                      <a:round/>
+                      <a:headEnd type="none" w="med" len="med"/>
+                      <a:tailEnd type="none" w="med" len="med"/>
+                    </a:lnB>
+                  </a:tcPr>
+                </a:tc>
+                <a:tc>
+                  <a:txBody>
+                    <a:bodyPr/>
+                    <a:lstStyle/>
+                    <a:p>
+                      <a:pPr indent="0" marL="0">
+                        <a:buNone/>
+                      </a:pPr>
+                      <a:r>
+                        <a:rPr lang="en-US" sz="1000" dirty="0">
+                          <a:solidFill>
+                            <a:srgbClr val="16224D"/>
+                          </a:solidFill>
+                          <a:latin typeface="Microsoft JhengHei" pitchFamily="34" charset="0"/>
+                          <a:ea typeface="Microsoft JhengHei" pitchFamily="34" charset="-122"/>
+                          <a:cs typeface="Microsoft JhengHei" pitchFamily="34" charset="-120"/>
+                        </a:rPr>
+                        <a:t>帳號憑證</a:t>
+                      </a:r>
+                      <a:endParaRPr lang="en-US" sz="1000" dirty="0">
+                        <a:latin typeface="Microsoft JhengHei" charset="0"/>
+                        <a:ea typeface="Microsoft JhengHei" charset="0"/>
+                        <a:cs typeface="Microsoft JhengHei" charset="0"/>
+                      </a:endParaRPr>
+                    </a:p>
+                  </a:txBody>
+                  <a:tcPr marL="45720" marR="45720" marT="45720" marB="45720" anchor="ctr">
+                    <a:lnL w="9525" cap="flat" cmpd="sng" algn="ctr">
+                      <a:solidFill>
+                        <a:srgbClr val="D5DEF0"/>
+                      </a:solidFill>
+                      <a:prstDash val="solid"/>
+                      <a:round/>
+                      <a:headEnd type="none" w="med" len="med"/>
+                      <a:tailEnd type="none" w="med" len="med"/>
+                    </a:lnL>
+                    <a:lnR w="9525" cap="flat" cmpd="sng" algn="ctr">
+                      <a:solidFill>
+                        <a:srgbClr val="D5DEF0"/>
+                      </a:solidFill>
+                      <a:prstDash val="solid"/>
+                      <a:round/>
+                      <a:headEnd type="none" w="med" len="med"/>
+                      <a:tailEnd type="none" w="med" len="med"/>
+                    </a:lnR>
+                    <a:lnT w="9525" cap="flat" cmpd="sng" algn="ctr">
+                      <a:solidFill>
+                        <a:srgbClr val="D5DEF0"/>
+                      </a:solidFill>
+                      <a:prstDash val="solid"/>
+                      <a:round/>
+                      <a:headEnd type="none" w="med" len="med"/>
+                      <a:tailEnd type="none" w="med" len="med"/>
+                    </a:lnT>
+                    <a:lnB w="9525" cap="flat" cmpd="sng" algn="ctr">
+                      <a:solidFill>
+                        <a:srgbClr val="D5DEF0"/>
+                      </a:solidFill>
+                      <a:prstDash val="solid"/>
+                      <a:round/>
+                      <a:headEnd type="none" w="med" len="med"/>
+                      <a:tailEnd type="none" w="med" len="med"/>
+                    </a:lnB>
+                  </a:tcPr>
+                </a:tc>
+                <a:tc>
+                  <a:txBody>
+                    <a:bodyPr/>
+                    <a:lstStyle/>
+                    <a:p>
+                      <a:pPr indent="0" marL="0">
+                        <a:buNone/>
+                      </a:pPr>
+                      <a:r>
+                        <a:rPr lang="en-US" sz="1000" b="1" dirty="0">
+                          <a:solidFill>
+                            <a:srgbClr val="E8A13A"/>
+                          </a:solidFill>
+                          <a:latin typeface="Microsoft JhengHei" pitchFamily="34" charset="0"/>
+                          <a:ea typeface="Microsoft JhengHei" pitchFamily="34" charset="-122"/>
+                          <a:cs typeface="Microsoft JhengHei" pitchFamily="34" charset="-120"/>
+                        </a:rPr>
+                        <a:t>A／B／D</a:t>
+                      </a:r>
+                      <a:endParaRPr lang="en-US" sz="1000" dirty="0">
+                        <a:latin typeface="Microsoft JhengHei" charset="0"/>
+                        <a:ea typeface="Microsoft JhengHei" charset="0"/>
+                        <a:cs typeface="Microsoft JhengHei" charset="0"/>
+                      </a:endParaRPr>
+                    </a:p>
+                  </a:txBody>
+                  <a:tcPr marL="45720" marR="45720" marT="45720" marB="45720" anchor="ctr">
+                    <a:lnL w="9525" cap="flat" cmpd="sng" algn="ctr">
+                      <a:solidFill>
+                        <a:srgbClr val="D5DEF0"/>
+                      </a:solidFill>
+                      <a:prstDash val="solid"/>
+                      <a:round/>
+                      <a:headEnd type="none" w="med" len="med"/>
+                      <a:tailEnd type="none" w="med" len="med"/>
+                    </a:lnL>
+                    <a:lnR w="9525" cap="flat" cmpd="sng" algn="ctr">
+                      <a:solidFill>
+                        <a:srgbClr val="D5DEF0"/>
+                      </a:solidFill>
+                      <a:prstDash val="solid"/>
+                      <a:round/>
+                      <a:headEnd type="none" w="med" len="med"/>
+                      <a:tailEnd type="none" w="med" len="med"/>
+                    </a:lnR>
+                    <a:lnT w="9525" cap="flat" cmpd="sng" algn="ctr">
+                      <a:solidFill>
+                        <a:srgbClr val="D5DEF0"/>
+                      </a:solidFill>
+                      <a:prstDash val="solid"/>
+                      <a:round/>
+                      <a:headEnd type="none" w="med" len="med"/>
+                      <a:tailEnd type="none" w="med" len="med"/>
+                    </a:lnT>
+                    <a:lnB w="9525" cap="flat" cmpd="sng" algn="ctr">
+                      <a:solidFill>
+                        <a:srgbClr val="D5DEF0"/>
+                      </a:solidFill>
+                      <a:prstDash val="solid"/>
+                      <a:round/>
+                      <a:headEnd type="none" w="med" len="med"/>
+                      <a:tailEnd type="none" w="med" len="med"/>
+                    </a:lnB>
+                  </a:tcPr>
+                </a:tc>
+                <a:tc>
+                  <a:txBody>
+                    <a:bodyPr/>
+                    <a:lstStyle/>
+                    <a:p>
+                      <a:pPr indent="0" marL="0">
+                        <a:buNone/>
+                      </a:pPr>
+                      <a:r>
+                        <a:rPr lang="en-US" sz="1000" dirty="0">
+                          <a:solidFill>
+                            <a:srgbClr val="1F2937"/>
+                          </a:solidFill>
+                          <a:latin typeface="Microsoft JhengHei" pitchFamily="34" charset="0"/>
+                          <a:ea typeface="Microsoft JhengHei" pitchFamily="34" charset="-122"/>
+                          <a:cs typeface="Microsoft JhengHei" pitchFamily="34" charset="-120"/>
+                        </a:rPr>
+                        <a:t>Bedrock 首跑｜KB 建置｜SAM 部署</a:t>
+                      </a:r>
+                      <a:endParaRPr lang="en-US" sz="1000" dirty="0">
+                        <a:latin typeface="Microsoft JhengHei" charset="0"/>
+                        <a:ea typeface="Microsoft JhengHei" charset="0"/>
+                        <a:cs typeface="Microsoft JhengHei" charset="0"/>
+                      </a:endParaRPr>
+                    </a:p>
+                  </a:txBody>
+                  <a:tcPr marL="45720" marR="45720" marT="45720" marB="45720" anchor="ctr">
+                    <a:lnL w="9525" cap="flat" cmpd="sng" algn="ctr">
+                      <a:solidFill>
+                        <a:srgbClr val="D5DEF0"/>
+                      </a:solidFill>
+                      <a:prstDash val="solid"/>
+                      <a:round/>
+                      <a:headEnd type="none" w="med" len="med"/>
+                      <a:tailEnd type="none" w="med" len="med"/>
+                    </a:lnL>
+                    <a:lnR w="9525" cap="flat" cmpd="sng" algn="ctr">
+                      <a:solidFill>
+                        <a:srgbClr val="D5DEF0"/>
+                      </a:solidFill>
+                      <a:prstDash val="solid"/>
+                      <a:round/>
+                      <a:headEnd type="none" w="med" len="med"/>
+                      <a:tailEnd type="none" w="med" len="med"/>
+                    </a:lnR>
+                    <a:lnT w="9525" cap="flat" cmpd="sng" algn="ctr">
+                      <a:solidFill>
+                        <a:srgbClr val="D5DEF0"/>
+                      </a:solidFill>
+                      <a:prstDash val="solid"/>
+                      <a:round/>
+                      <a:headEnd type="none" w="med" len="med"/>
+                      <a:tailEnd type="none" w="med" len="med"/>
+                    </a:lnT>
+                    <a:lnB w="9525" cap="flat" cmpd="sng" algn="ctr">
+                      <a:solidFill>
+                        <a:srgbClr val="D5DEF0"/>
+                      </a:solidFill>
+                      <a:prstDash val="solid"/>
+                      <a:round/>
+                      <a:headEnd type="none" w="med" len="med"/>
+                      <a:tailEnd type="none" w="med" len="med"/>
+                    </a:lnB>
+                  </a:tcPr>
+                </a:tc>
+              </a:tr>
+              <a:tr h="352044">
+                <a:tc>
+                  <a:txBody>
+                    <a:bodyPr/>
+                    <a:lstStyle/>
+                    <a:p>
+                      <a:pPr indent="0" marL="0">
+                        <a:buNone/>
+                      </a:pPr>
+                      <a:r>
+                        <a:rPr lang="en-US" sz="1000" b="1" dirty="0">
+                          <a:solidFill>
+                            <a:srgbClr val="1F2937"/>
+                          </a:solidFill>
+                          <a:latin typeface="Microsoft JhengHei" pitchFamily="34" charset="0"/>
+                          <a:ea typeface="Microsoft JhengHei" pitchFamily="34" charset="-122"/>
+                          <a:cs typeface="Microsoft JhengHei" pitchFamily="34" charset="-120"/>
+                        </a:rPr>
+                        <a:t>全員：Lv2 KYC＋Key（#3）</a:t>
+                      </a:r>
+                      <a:endParaRPr lang="en-US" sz="1000" dirty="0">
+                        <a:latin typeface="Microsoft JhengHei" charset="0"/>
+                        <a:ea typeface="Microsoft JhengHei" charset="0"/>
+                        <a:cs typeface="Microsoft JhengHei" charset="0"/>
+                      </a:endParaRPr>
+                    </a:p>
+                  </a:txBody>
+                  <a:tcPr marL="45720" marR="45720" marT="45720" marB="45720" anchor="ctr">
+                    <a:lnL w="9525" cap="flat" cmpd="sng" algn="ctr">
+                      <a:solidFill>
+                        <a:srgbClr val="D5DEF0"/>
+                      </a:solidFill>
+                      <a:prstDash val="solid"/>
+                      <a:round/>
+                      <a:headEnd type="none" w="med" len="med"/>
+                      <a:tailEnd type="none" w="med" len="med"/>
+                    </a:lnL>
+                    <a:lnR w="9525" cap="flat" cmpd="sng" algn="ctr">
+                      <a:solidFill>
+                        <a:srgbClr val="D5DEF0"/>
+                      </a:solidFill>
+                      <a:prstDash val="solid"/>
+                      <a:round/>
+                      <a:headEnd type="none" w="med" len="med"/>
+                      <a:tailEnd type="none" w="med" len="med"/>
+                    </a:lnR>
+                    <a:lnT w="9525" cap="flat" cmpd="sng" algn="ctr">
+                      <a:solidFill>
+                        <a:srgbClr val="D5DEF0"/>
+                      </a:solidFill>
+                      <a:prstDash val="solid"/>
+                      <a:round/>
+                      <a:headEnd type="none" w="med" len="med"/>
+                      <a:tailEnd type="none" w="med" len="med"/>
+                    </a:lnT>
+                    <a:lnB w="9525" cap="flat" cmpd="sng" algn="ctr">
+                      <a:solidFill>
+                        <a:srgbClr val="D5DEF0"/>
+                      </a:solidFill>
+                      <a:prstDash val="solid"/>
+                      <a:round/>
+                      <a:headEnd type="none" w="med" len="med"/>
+                      <a:tailEnd type="none" w="med" len="med"/>
+                    </a:lnB>
+                  </a:tcPr>
+                </a:tc>
+                <a:tc>
+                  <a:txBody>
+                    <a:bodyPr/>
+                    <a:lstStyle/>
+                    <a:p>
+                      <a:pPr indent="0" marL="0">
+                        <a:buNone/>
+                      </a:pPr>
+                      <a:r>
+                        <a:rPr lang="en-US" sz="1000" dirty="0">
+                          <a:solidFill>
+                            <a:srgbClr val="16224D"/>
+                          </a:solidFill>
+                          <a:latin typeface="Microsoft JhengHei" pitchFamily="34" charset="0"/>
+                          <a:ea typeface="Microsoft JhengHei" pitchFamily="34" charset="-122"/>
+                          <a:cs typeface="Microsoft JhengHei" pitchFamily="34" charset="-120"/>
+                        </a:rPr>
+                        <a:t>各自 API Key</a:t>
+                      </a:r>
+                      <a:endParaRPr lang="en-US" sz="1000" dirty="0">
+                        <a:latin typeface="Microsoft JhengHei" charset="0"/>
+                        <a:ea typeface="Microsoft JhengHei" charset="0"/>
+                        <a:cs typeface="Microsoft JhengHei" charset="0"/>
+                      </a:endParaRPr>
+                    </a:p>
+                  </a:txBody>
+                  <a:tcPr marL="45720" marR="45720" marT="45720" marB="45720" anchor="ctr">
+                    <a:lnL w="9525" cap="flat" cmpd="sng" algn="ctr">
+                      <a:solidFill>
+                        <a:srgbClr val="D5DEF0"/>
+                      </a:solidFill>
+                      <a:prstDash val="solid"/>
+                      <a:round/>
+                      <a:headEnd type="none" w="med" len="med"/>
+                      <a:tailEnd type="none" w="med" len="med"/>
+                    </a:lnL>
+                    <a:lnR w="9525" cap="flat" cmpd="sng" algn="ctr">
+                      <a:solidFill>
+                        <a:srgbClr val="D5DEF0"/>
+                      </a:solidFill>
+                      <a:prstDash val="solid"/>
+                      <a:round/>
+                      <a:headEnd type="none" w="med" len="med"/>
+                      <a:tailEnd type="none" w="med" len="med"/>
+                    </a:lnR>
+                    <a:lnT w="9525" cap="flat" cmpd="sng" algn="ctr">
+                      <a:solidFill>
+                        <a:srgbClr val="D5DEF0"/>
+                      </a:solidFill>
+                      <a:prstDash val="solid"/>
+                      <a:round/>
+                      <a:headEnd type="none" w="med" len="med"/>
+                      <a:tailEnd type="none" w="med" len="med"/>
+                    </a:lnT>
+                    <a:lnB w="9525" cap="flat" cmpd="sng" algn="ctr">
+                      <a:solidFill>
+                        <a:srgbClr val="D5DEF0"/>
+                      </a:solidFill>
+                      <a:prstDash val="solid"/>
+                      <a:round/>
+                      <a:headEnd type="none" w="med" len="med"/>
+                      <a:tailEnd type="none" w="med" len="med"/>
+                    </a:lnB>
+                  </a:tcPr>
+                </a:tc>
+                <a:tc>
+                  <a:txBody>
+                    <a:bodyPr/>
+                    <a:lstStyle/>
+                    <a:p>
+                      <a:pPr indent="0" marL="0">
+                        <a:buNone/>
+                      </a:pPr>
+                      <a:r>
+                        <a:rPr lang="en-US" sz="1000" b="1" dirty="0">
+                          <a:solidFill>
+                            <a:srgbClr val="E8A13A"/>
+                          </a:solidFill>
+                          <a:latin typeface="Microsoft JhengHei" pitchFamily="34" charset="0"/>
+                          <a:ea typeface="Microsoft JhengHei" pitchFamily="34" charset="-122"/>
+                          <a:cs typeface="Microsoft JhengHei" pitchFamily="34" charset="-120"/>
+                        </a:rPr>
+                        <a:t>D</a:t>
+                      </a:r>
+                      <a:endParaRPr lang="en-US" sz="1000" dirty="0">
+                        <a:latin typeface="Microsoft JhengHei" charset="0"/>
+                        <a:ea typeface="Microsoft JhengHei" charset="0"/>
+                        <a:cs typeface="Microsoft JhengHei" charset="0"/>
+                      </a:endParaRPr>
+                    </a:p>
+                  </a:txBody>
+                  <a:tcPr marL="45720" marR="45720" marT="45720" marB="45720" anchor="ctr">
+                    <a:lnL w="9525" cap="flat" cmpd="sng" algn="ctr">
+                      <a:solidFill>
+                        <a:srgbClr val="D5DEF0"/>
+                      </a:solidFill>
+                      <a:prstDash val="solid"/>
+                      <a:round/>
+                      <a:headEnd type="none" w="med" len="med"/>
+                      <a:tailEnd type="none" w="med" len="med"/>
+                    </a:lnL>
+                    <a:lnR w="9525" cap="flat" cmpd="sng" algn="ctr">
+                      <a:solidFill>
+                        <a:srgbClr val="D5DEF0"/>
+                      </a:solidFill>
+                      <a:prstDash val="solid"/>
+                      <a:round/>
+                      <a:headEnd type="none" w="med" len="med"/>
+                      <a:tailEnd type="none" w="med" len="med"/>
+                    </a:lnR>
+                    <a:lnT w="9525" cap="flat" cmpd="sng" algn="ctr">
+                      <a:solidFill>
+                        <a:srgbClr val="D5DEF0"/>
+                      </a:solidFill>
+                      <a:prstDash val="solid"/>
+                      <a:round/>
+                      <a:headEnd type="none" w="med" len="med"/>
+                      <a:tailEnd type="none" w="med" len="med"/>
+                    </a:lnT>
+                    <a:lnB w="9525" cap="flat" cmpd="sng" algn="ctr">
+                      <a:solidFill>
+                        <a:srgbClr val="D5DEF0"/>
+                      </a:solidFill>
+                      <a:prstDash val="solid"/>
+                      <a:round/>
+                      <a:headEnd type="none" w="med" len="med"/>
+                      <a:tailEnd type="none" w="med" len="med"/>
+                    </a:lnB>
+                  </a:tcPr>
+                </a:tc>
+                <a:tc>
+                  <a:txBody>
+                    <a:bodyPr/>
+                    <a:lstStyle/>
+                    <a:p>
+                      <a:pPr indent="0" marL="0">
+                        <a:buNone/>
+                      </a:pPr>
+                      <a:r>
+                        <a:rPr lang="en-US" sz="1000" dirty="0">
+                          <a:solidFill>
+                            <a:srgbClr val="1F2937"/>
+                          </a:solidFill>
+                          <a:latin typeface="Microsoft JhengHei" pitchFamily="34" charset="0"/>
+                          <a:ea typeface="Microsoft JhengHei" pitchFamily="34" charset="-122"/>
+                          <a:cs typeface="Microsoft JhengHei" pitchFamily="34" charset="-120"/>
+                        </a:rPr>
+                        <a:t>Private API E2E（#4）</a:t>
+                      </a:r>
+                      <a:endParaRPr lang="en-US" sz="1000" dirty="0">
+                        <a:latin typeface="Microsoft JhengHei" charset="0"/>
+                        <a:ea typeface="Microsoft JhengHei" charset="0"/>
+                        <a:cs typeface="Microsoft JhengHei" charset="0"/>
+                      </a:endParaRPr>
+                    </a:p>
+                  </a:txBody>
+                  <a:tcPr marL="45720" marR="45720" marT="45720" marB="45720" anchor="ctr">
+                    <a:lnL w="9525" cap="flat" cmpd="sng" algn="ctr">
+                      <a:solidFill>
+                        <a:srgbClr val="D5DEF0"/>
+                      </a:solidFill>
+                      <a:prstDash val="solid"/>
+                      <a:round/>
+                      <a:headEnd type="none" w="med" len="med"/>
+                      <a:tailEnd type="none" w="med" len="med"/>
+                    </a:lnL>
+                    <a:lnR w="9525" cap="flat" cmpd="sng" algn="ctr">
+                      <a:solidFill>
+                        <a:srgbClr val="D5DEF0"/>
+                      </a:solidFill>
+                      <a:prstDash val="solid"/>
+                      <a:round/>
+                      <a:headEnd type="none" w="med" len="med"/>
+                      <a:tailEnd type="none" w="med" len="med"/>
+                    </a:lnR>
+                    <a:lnT w="9525" cap="flat" cmpd="sng" algn="ctr">
+                      <a:solidFill>
+                        <a:srgbClr val="D5DEF0"/>
+                      </a:solidFill>
+                      <a:prstDash val="solid"/>
+                      <a:round/>
+                      <a:headEnd type="none" w="med" len="med"/>
+                      <a:tailEnd type="none" w="med" len="med"/>
+                    </a:lnT>
+                    <a:lnB w="9525" cap="flat" cmpd="sng" algn="ctr">
+                      <a:solidFill>
+                        <a:srgbClr val="D5DEF0"/>
+                      </a:solidFill>
+                      <a:prstDash val="solid"/>
+                      <a:round/>
+                      <a:headEnd type="none" w="med" len="med"/>
+                      <a:tailEnd type="none" w="med" len="med"/>
+                    </a:lnB>
+                  </a:tcPr>
+                </a:tc>
+              </a:tr>
+              <a:tr h="352044">
+                <a:tc>
+                  <a:txBody>
+                    <a:bodyPr/>
+                    <a:lstStyle/>
+                    <a:p>
+                      <a:pPr indent="0" marL="0">
+                        <a:buNone/>
+                      </a:pPr>
+                      <a:r>
+                        <a:rPr lang="en-US" sz="1000" b="1" dirty="0">
+                          <a:solidFill>
+                            <a:srgbClr val="1F2937"/>
+                          </a:solidFill>
+                          <a:latin typeface="Microsoft JhengHei" pitchFamily="34" charset="0"/>
+                          <a:ea typeface="Microsoft JhengHei" pitchFamily="34" charset="-122"/>
+                          <a:cs typeface="Microsoft JhengHei" pitchFamily="34" charset="-120"/>
+                        </a:rPr>
+                        <a:t>B：max_public 實測（#2）</a:t>
+                      </a:r>
+                      <a:endParaRPr lang="en-US" sz="1000" dirty="0">
+                        <a:latin typeface="Microsoft JhengHei" charset="0"/>
+                        <a:ea typeface="Microsoft JhengHei" charset="0"/>
+                        <a:cs typeface="Microsoft JhengHei" charset="0"/>
+                      </a:endParaRPr>
+                    </a:p>
+                  </a:txBody>
+                  <a:tcPr marL="45720" marR="45720" marT="45720" marB="45720" anchor="ctr">
+                    <a:lnL w="9525" cap="flat" cmpd="sng" algn="ctr">
+                      <a:solidFill>
+                        <a:srgbClr val="D5DEF0"/>
+                      </a:solidFill>
+                      <a:prstDash val="solid"/>
+                      <a:round/>
+                      <a:headEnd type="none" w="med" len="med"/>
+                      <a:tailEnd type="none" w="med" len="med"/>
+                    </a:lnL>
+                    <a:lnR w="9525" cap="flat" cmpd="sng" algn="ctr">
+                      <a:solidFill>
+                        <a:srgbClr val="D5DEF0"/>
+                      </a:solidFill>
+                      <a:prstDash val="solid"/>
+                      <a:round/>
+                      <a:headEnd type="none" w="med" len="med"/>
+                      <a:tailEnd type="none" w="med" len="med"/>
+                    </a:lnR>
+                    <a:lnT w="9525" cap="flat" cmpd="sng" algn="ctr">
+                      <a:solidFill>
+                        <a:srgbClr val="D5DEF0"/>
+                      </a:solidFill>
+                      <a:prstDash val="solid"/>
+                      <a:round/>
+                      <a:headEnd type="none" w="med" len="med"/>
+                      <a:tailEnd type="none" w="med" len="med"/>
+                    </a:lnT>
+                    <a:lnB w="9525" cap="flat" cmpd="sng" algn="ctr">
+                      <a:solidFill>
+                        <a:srgbClr val="D5DEF0"/>
+                      </a:solidFill>
+                      <a:prstDash val="solid"/>
+                      <a:round/>
+                      <a:headEnd type="none" w="med" len="med"/>
+                      <a:tailEnd type="none" w="med" len="med"/>
+                    </a:lnB>
+                  </a:tcPr>
+                </a:tc>
+                <a:tc>
+                  <a:txBody>
+                    <a:bodyPr/>
+                    <a:lstStyle/>
+                    <a:p>
+                      <a:pPr indent="0" marL="0">
+                        <a:buNone/>
+                      </a:pPr>
+                      <a:r>
+                        <a:rPr lang="en-US" sz="1000" dirty="0">
+                          <a:solidFill>
+                            <a:srgbClr val="16224D"/>
+                          </a:solidFill>
+                          <a:latin typeface="Microsoft JhengHei" pitchFamily="34" charset="0"/>
+                          <a:ea typeface="Microsoft JhengHei" pitchFamily="34" charset="-122"/>
+                          <a:cs typeface="Microsoft JhengHei" pitchFamily="34" charset="-120"/>
+                        </a:rPr>
+                        <a:t>可靠的行情工具</a:t>
+                      </a:r>
+                      <a:endParaRPr lang="en-US" sz="1000" dirty="0">
+                        <a:latin typeface="Microsoft JhengHei" charset="0"/>
+                        <a:ea typeface="Microsoft JhengHei" charset="0"/>
+                        <a:cs typeface="Microsoft JhengHei" charset="0"/>
+                      </a:endParaRPr>
+                    </a:p>
+                  </a:txBody>
+                  <a:tcPr marL="45720" marR="45720" marT="45720" marB="45720" anchor="ctr">
+                    <a:lnL w="9525" cap="flat" cmpd="sng" algn="ctr">
+                      <a:solidFill>
+                        <a:srgbClr val="D5DEF0"/>
+                      </a:solidFill>
+                      <a:prstDash val="solid"/>
+                      <a:round/>
+                      <a:headEnd type="none" w="med" len="med"/>
+                      <a:tailEnd type="none" w="med" len="med"/>
+                    </a:lnL>
+                    <a:lnR w="9525" cap="flat" cmpd="sng" algn="ctr">
+                      <a:solidFill>
+                        <a:srgbClr val="D5DEF0"/>
+                      </a:solidFill>
+                      <a:prstDash val="solid"/>
+                      <a:round/>
+                      <a:headEnd type="none" w="med" len="med"/>
+                      <a:tailEnd type="none" w="med" len="med"/>
+                    </a:lnR>
+                    <a:lnT w="9525" cap="flat" cmpd="sng" algn="ctr">
+                      <a:solidFill>
+                        <a:srgbClr val="D5DEF0"/>
+                      </a:solidFill>
+                      <a:prstDash val="solid"/>
+                      <a:round/>
+                      <a:headEnd type="none" w="med" len="med"/>
+                      <a:tailEnd type="none" w="med" len="med"/>
+                    </a:lnT>
+                    <a:lnB w="9525" cap="flat" cmpd="sng" algn="ctr">
+                      <a:solidFill>
+                        <a:srgbClr val="D5DEF0"/>
+                      </a:solidFill>
+                      <a:prstDash val="solid"/>
+                      <a:round/>
+                      <a:headEnd type="none" w="med" len="med"/>
+                      <a:tailEnd type="none" w="med" len="med"/>
+                    </a:lnB>
+                  </a:tcPr>
+                </a:tc>
+                <a:tc>
+                  <a:txBody>
+                    <a:bodyPr/>
+                    <a:lstStyle/>
+                    <a:p>
+                      <a:pPr indent="0" marL="0">
+                        <a:buNone/>
+                      </a:pPr>
+                      <a:r>
+                        <a:rPr lang="en-US" sz="1000" b="1" dirty="0">
+                          <a:solidFill>
+                            <a:srgbClr val="E8A13A"/>
+                          </a:solidFill>
+                          <a:latin typeface="Microsoft JhengHei" pitchFamily="34" charset="0"/>
+                          <a:ea typeface="Microsoft JhengHei" pitchFamily="34" charset="-122"/>
+                          <a:cs typeface="Microsoft JhengHei" pitchFamily="34" charset="-120"/>
+                        </a:rPr>
+                        <a:t>A</a:t>
+                      </a:r>
+                      <a:endParaRPr lang="en-US" sz="1000" dirty="0">
+                        <a:latin typeface="Microsoft JhengHei" charset="0"/>
+                        <a:ea typeface="Microsoft JhengHei" charset="0"/>
+                        <a:cs typeface="Microsoft JhengHei" charset="0"/>
+                      </a:endParaRPr>
+                    </a:p>
+                  </a:txBody>
+                  <a:tcPr marL="45720" marR="45720" marT="45720" marB="45720" anchor="ctr">
+                    <a:lnL w="9525" cap="flat" cmpd="sng" algn="ctr">
+                      <a:solidFill>
+                        <a:srgbClr val="D5DEF0"/>
+                      </a:solidFill>
+                      <a:prstDash val="solid"/>
+                      <a:round/>
+                      <a:headEnd type="none" w="med" len="med"/>
+                      <a:tailEnd type="none" w="med" len="med"/>
+                    </a:lnL>
+                    <a:lnR w="9525" cap="flat" cmpd="sng" algn="ctr">
+                      <a:solidFill>
+                        <a:srgbClr val="D5DEF0"/>
+                      </a:solidFill>
+                      <a:prstDash val="solid"/>
+                      <a:round/>
+                      <a:headEnd type="none" w="med" len="med"/>
+                      <a:tailEnd type="none" w="med" len="med"/>
+                    </a:lnR>
+                    <a:lnT w="9525" cap="flat" cmpd="sng" algn="ctr">
+                      <a:solidFill>
+                        <a:srgbClr val="D5DEF0"/>
+                      </a:solidFill>
+                      <a:prstDash val="solid"/>
+                      <a:round/>
+                      <a:headEnd type="none" w="med" len="med"/>
+                      <a:tailEnd type="none" w="med" len="med"/>
+                    </a:lnT>
+                    <a:lnB w="9525" cap="flat" cmpd="sng" algn="ctr">
+                      <a:solidFill>
+                        <a:srgbClr val="D5DEF0"/>
+                      </a:solidFill>
+                      <a:prstDash val="solid"/>
+                      <a:round/>
+                      <a:headEnd type="none" w="med" len="med"/>
+                      <a:tailEnd type="none" w="med" len="med"/>
+                    </a:lnB>
+                  </a:tcPr>
+                </a:tc>
+                <a:tc>
+                  <a:txBody>
+                    <a:bodyPr/>
+                    <a:lstStyle/>
+                    <a:p>
+                      <a:pPr indent="0" marL="0">
+                        <a:buNone/>
+                      </a:pPr>
+                      <a:r>
+                        <a:rPr lang="en-US" sz="1000" dirty="0">
+                          <a:solidFill>
+                            <a:srgbClr val="1F2937"/>
+                          </a:solidFill>
+                          <a:latin typeface="Microsoft JhengHei" pitchFamily="34" charset="0"/>
+                          <a:ea typeface="Microsoft JhengHei" pitchFamily="34" charset="-122"/>
+                          <a:cs typeface="Microsoft JhengHei" pitchFamily="34" charset="-120"/>
+                        </a:rPr>
+                        <a:t>get_market_data 放心用</a:t>
+                      </a:r>
+                      <a:endParaRPr lang="en-US" sz="1000" dirty="0">
+                        <a:latin typeface="Microsoft JhengHei" charset="0"/>
+                        <a:ea typeface="Microsoft JhengHei" charset="0"/>
+                        <a:cs typeface="Microsoft JhengHei" charset="0"/>
+                      </a:endParaRPr>
+                    </a:p>
+                  </a:txBody>
+                  <a:tcPr marL="45720" marR="45720" marT="45720" marB="45720" anchor="ctr">
+                    <a:lnL w="9525" cap="flat" cmpd="sng" algn="ctr">
+                      <a:solidFill>
+                        <a:srgbClr val="D5DEF0"/>
+                      </a:solidFill>
+                      <a:prstDash val="solid"/>
+                      <a:round/>
+                      <a:headEnd type="none" w="med" len="med"/>
+                      <a:tailEnd type="none" w="med" len="med"/>
+                    </a:lnL>
+                    <a:lnR w="9525" cap="flat" cmpd="sng" algn="ctr">
+                      <a:solidFill>
+                        <a:srgbClr val="D5DEF0"/>
+                      </a:solidFill>
+                      <a:prstDash val="solid"/>
+                      <a:round/>
+                      <a:headEnd type="none" w="med" len="med"/>
+                      <a:tailEnd type="none" w="med" len="med"/>
+                    </a:lnR>
+                    <a:lnT w="9525" cap="flat" cmpd="sng" algn="ctr">
+                      <a:solidFill>
+                        <a:srgbClr val="D5DEF0"/>
+                      </a:solidFill>
+                      <a:prstDash val="solid"/>
+                      <a:round/>
+                      <a:headEnd type="none" w="med" len="med"/>
+                      <a:tailEnd type="none" w="med" len="med"/>
+                    </a:lnT>
+                    <a:lnB w="9525" cap="flat" cmpd="sng" algn="ctr">
+                      <a:solidFill>
+                        <a:srgbClr val="D5DEF0"/>
+                      </a:solidFill>
+                      <a:prstDash val="solid"/>
+                      <a:round/>
+                      <a:headEnd type="none" w="med" len="med"/>
+                      <a:tailEnd type="none" w="med" len="med"/>
+                    </a:lnB>
+                  </a:tcPr>
+                </a:tc>
+              </a:tr>
+              <a:tr h="352044">
+                <a:tc>
+                  <a:txBody>
+                    <a:bodyPr/>
+                    <a:lstStyle/>
+                    <a:p>
+                      <a:pPr indent="0" marL="0">
+                        <a:buNone/>
+                      </a:pPr>
+                      <a:r>
+                        <a:rPr lang="en-US" sz="1000" b="1" dirty="0">
+                          <a:solidFill>
+                            <a:srgbClr val="1F2937"/>
+                          </a:solidFill>
+                          <a:latin typeface="Microsoft JhengHei" pitchFamily="34" charset="0"/>
+                          <a:ea typeface="Microsoft JhengHei" pitchFamily="34" charset="-122"/>
+                          <a:cs typeface="Microsoft JhengHei" pitchFamily="34" charset="-120"/>
+                        </a:rPr>
+                        <a:t>B：簽章對照核對</a:t>
+                      </a:r>
+                      <a:endParaRPr lang="en-US" sz="1000" dirty="0">
+                        <a:latin typeface="Microsoft JhengHei" charset="0"/>
+                        <a:ea typeface="Microsoft JhengHei" charset="0"/>
+                        <a:cs typeface="Microsoft JhengHei" charset="0"/>
+                      </a:endParaRPr>
+                    </a:p>
+                  </a:txBody>
+                  <a:tcPr marL="45720" marR="45720" marT="45720" marB="45720" anchor="ctr">
+                    <a:lnL w="9525" cap="flat" cmpd="sng" algn="ctr">
+                      <a:solidFill>
+                        <a:srgbClr val="D5DEF0"/>
+                      </a:solidFill>
+                      <a:prstDash val="solid"/>
+                      <a:round/>
+                      <a:headEnd type="none" w="med" len="med"/>
+                      <a:tailEnd type="none" w="med" len="med"/>
+                    </a:lnL>
+                    <a:lnR w="9525" cap="flat" cmpd="sng" algn="ctr">
+                      <a:solidFill>
+                        <a:srgbClr val="D5DEF0"/>
+                      </a:solidFill>
+                      <a:prstDash val="solid"/>
+                      <a:round/>
+                      <a:headEnd type="none" w="med" len="med"/>
+                      <a:tailEnd type="none" w="med" len="med"/>
+                    </a:lnR>
+                    <a:lnT w="9525" cap="flat" cmpd="sng" algn="ctr">
+                      <a:solidFill>
+                        <a:srgbClr val="D5DEF0"/>
+                      </a:solidFill>
+                      <a:prstDash val="solid"/>
+                      <a:round/>
+                      <a:headEnd type="none" w="med" len="med"/>
+                      <a:tailEnd type="none" w="med" len="med"/>
+                    </a:lnT>
+                    <a:lnB w="9525" cap="flat" cmpd="sng" algn="ctr">
+                      <a:solidFill>
+                        <a:srgbClr val="D5DEF0"/>
+                      </a:solidFill>
+                      <a:prstDash val="solid"/>
+                      <a:round/>
+                      <a:headEnd type="none" w="med" len="med"/>
+                      <a:tailEnd type="none" w="med" len="med"/>
+                    </a:lnB>
+                  </a:tcPr>
+                </a:tc>
+                <a:tc>
+                  <a:txBody>
+                    <a:bodyPr/>
+                    <a:lstStyle/>
+                    <a:p>
+                      <a:pPr indent="0" marL="0">
+                        <a:buNone/>
+                      </a:pPr>
+                      <a:r>
+                        <a:rPr lang="en-US" sz="1000" dirty="0">
+                          <a:solidFill>
+                            <a:srgbClr val="16224D"/>
+                          </a:solidFill>
+                          <a:latin typeface="Microsoft JhengHei" pitchFamily="34" charset="0"/>
+                          <a:ea typeface="Microsoft JhengHei" pitchFamily="34" charset="-122"/>
+                          <a:cs typeface="Microsoft JhengHei" pitchFamily="34" charset="-120"/>
+                        </a:rPr>
+                        <a:t>簽章確認</a:t>
+                      </a:r>
+                      <a:endParaRPr lang="en-US" sz="1000" dirty="0">
+                        <a:latin typeface="Microsoft JhengHei" charset="0"/>
+                        <a:ea typeface="Microsoft JhengHei" charset="0"/>
+                        <a:cs typeface="Microsoft JhengHei" charset="0"/>
+                      </a:endParaRPr>
+                    </a:p>
+                  </a:txBody>
+                  <a:tcPr marL="45720" marR="45720" marT="45720" marB="45720" anchor="ctr">
+                    <a:lnL w="9525" cap="flat" cmpd="sng" algn="ctr">
+                      <a:solidFill>
+                        <a:srgbClr val="D5DEF0"/>
+                      </a:solidFill>
+                      <a:prstDash val="solid"/>
+                      <a:round/>
+                      <a:headEnd type="none" w="med" len="med"/>
+                      <a:tailEnd type="none" w="med" len="med"/>
+                    </a:lnL>
+                    <a:lnR w="9525" cap="flat" cmpd="sng" algn="ctr">
+                      <a:solidFill>
+                        <a:srgbClr val="D5DEF0"/>
+                      </a:solidFill>
+                      <a:prstDash val="solid"/>
+                      <a:round/>
+                      <a:headEnd type="none" w="med" len="med"/>
+                      <a:tailEnd type="none" w="med" len="med"/>
+                    </a:lnR>
+                    <a:lnT w="9525" cap="flat" cmpd="sng" algn="ctr">
+                      <a:solidFill>
+                        <a:srgbClr val="D5DEF0"/>
+                      </a:solidFill>
+                      <a:prstDash val="solid"/>
+                      <a:round/>
+                      <a:headEnd type="none" w="med" len="med"/>
+                      <a:tailEnd type="none" w="med" len="med"/>
+                    </a:lnT>
+                    <a:lnB w="9525" cap="flat" cmpd="sng" algn="ctr">
+                      <a:solidFill>
+                        <a:srgbClr val="D5DEF0"/>
+                      </a:solidFill>
+                      <a:prstDash val="solid"/>
+                      <a:round/>
+                      <a:headEnd type="none" w="med" len="med"/>
+                      <a:tailEnd type="none" w="med" len="med"/>
+                    </a:lnB>
+                  </a:tcPr>
+                </a:tc>
+                <a:tc>
+                  <a:txBody>
+                    <a:bodyPr/>
+                    <a:lstStyle/>
+                    <a:p>
+                      <a:pPr indent="0" marL="0">
+                        <a:buNone/>
+                      </a:pPr>
+                      <a:r>
+                        <a:rPr lang="en-US" sz="1000" b="1" dirty="0">
+                          <a:solidFill>
+                            <a:srgbClr val="E8A13A"/>
+                          </a:solidFill>
+                          <a:latin typeface="Microsoft JhengHei" pitchFamily="34" charset="0"/>
+                          <a:ea typeface="Microsoft JhengHei" pitchFamily="34" charset="-122"/>
+                          <a:cs typeface="Microsoft JhengHei" pitchFamily="34" charset="-120"/>
+                        </a:rPr>
+                        <a:t>D</a:t>
+                      </a:r>
+                      <a:endParaRPr lang="en-US" sz="1000" dirty="0">
+                        <a:latin typeface="Microsoft JhengHei" charset="0"/>
+                        <a:ea typeface="Microsoft JhengHei" charset="0"/>
+                        <a:cs typeface="Microsoft JhengHei" charset="0"/>
+                      </a:endParaRPr>
+                    </a:p>
+                  </a:txBody>
+                  <a:tcPr marL="45720" marR="45720" marT="45720" marB="45720" anchor="ctr">
+                    <a:lnL w="9525" cap="flat" cmpd="sng" algn="ctr">
+                      <a:solidFill>
+                        <a:srgbClr val="D5DEF0"/>
+                      </a:solidFill>
+                      <a:prstDash val="solid"/>
+                      <a:round/>
+                      <a:headEnd type="none" w="med" len="med"/>
+                      <a:tailEnd type="none" w="med" len="med"/>
+                    </a:lnL>
+                    <a:lnR w="9525" cap="flat" cmpd="sng" algn="ctr">
+                      <a:solidFill>
+                        <a:srgbClr val="D5DEF0"/>
+                      </a:solidFill>
+                      <a:prstDash val="solid"/>
+                      <a:round/>
+                      <a:headEnd type="none" w="med" len="med"/>
+                      <a:tailEnd type="none" w="med" len="med"/>
+                    </a:lnR>
+                    <a:lnT w="9525" cap="flat" cmpd="sng" algn="ctr">
+                      <a:solidFill>
+                        <a:srgbClr val="D5DEF0"/>
+                      </a:solidFill>
+                      <a:prstDash val="solid"/>
+                      <a:round/>
+                      <a:headEnd type="none" w="med" len="med"/>
+                      <a:tailEnd type="none" w="med" len="med"/>
+                    </a:lnT>
+                    <a:lnB w="9525" cap="flat" cmpd="sng" algn="ctr">
+                      <a:solidFill>
+                        <a:srgbClr val="D5DEF0"/>
+                      </a:solidFill>
+                      <a:prstDash val="solid"/>
+                      <a:round/>
+                      <a:headEnd type="none" w="med" len="med"/>
+                      <a:tailEnd type="none" w="med" len="med"/>
+                    </a:lnB>
+                  </a:tcPr>
+                </a:tc>
+                <a:tc>
+                  <a:txBody>
+                    <a:bodyPr/>
+                    <a:lstStyle/>
+                    <a:p>
+                      <a:pPr indent="0" marL="0">
+                        <a:buNone/>
+                      </a:pPr>
+                      <a:r>
+                        <a:rPr lang="en-US" sz="1000" dirty="0">
+                          <a:solidFill>
+                            <a:srgbClr val="1F2937"/>
+                          </a:solidFill>
+                          <a:latin typeface="Microsoft JhengHei" pitchFamily="34" charset="0"/>
+                          <a:ea typeface="Microsoft JhengHei" pitchFamily="34" charset="-122"/>
+                          <a:cs typeface="Microsoft JhengHei" pitchFamily="34" charset="-120"/>
+                        </a:rPr>
+                        <a:t>E2E 真下單前置</a:t>
+                      </a:r>
+                      <a:endParaRPr lang="en-US" sz="1000" dirty="0">
+                        <a:latin typeface="Microsoft JhengHei" charset="0"/>
+                        <a:ea typeface="Microsoft JhengHei" charset="0"/>
+                        <a:cs typeface="Microsoft JhengHei" charset="0"/>
+                      </a:endParaRPr>
+                    </a:p>
+                  </a:txBody>
+                  <a:tcPr marL="45720" marR="45720" marT="45720" marB="45720" anchor="ctr">
+                    <a:lnL w="9525" cap="flat" cmpd="sng" algn="ctr">
+                      <a:solidFill>
+                        <a:srgbClr val="D5DEF0"/>
+                      </a:solidFill>
+                      <a:prstDash val="solid"/>
+                      <a:round/>
+                      <a:headEnd type="none" w="med" len="med"/>
+                      <a:tailEnd type="none" w="med" len="med"/>
+                    </a:lnL>
+                    <a:lnR w="9525" cap="flat" cmpd="sng" algn="ctr">
+                      <a:solidFill>
+                        <a:srgbClr val="D5DEF0"/>
+                      </a:solidFill>
+                      <a:prstDash val="solid"/>
+                      <a:round/>
+                      <a:headEnd type="none" w="med" len="med"/>
+                      <a:tailEnd type="none" w="med" len="med"/>
+                    </a:lnR>
+                    <a:lnT w="9525" cap="flat" cmpd="sng" algn="ctr">
+                      <a:solidFill>
+                        <a:srgbClr val="D5DEF0"/>
+                      </a:solidFill>
+                      <a:prstDash val="solid"/>
+                      <a:round/>
+                      <a:headEnd type="none" w="med" len="med"/>
+                      <a:tailEnd type="none" w="med" len="med"/>
+                    </a:lnT>
+                    <a:lnB w="9525" cap="flat" cmpd="sng" algn="ctr">
+                      <a:solidFill>
+                        <a:srgbClr val="D5DEF0"/>
+                      </a:solidFill>
+                      <a:prstDash val="solid"/>
+                      <a:round/>
+                      <a:headEnd type="none" w="med" len="med"/>
+                      <a:tailEnd type="none" w="med" len="med"/>
+                    </a:lnB>
+                  </a:tcPr>
+                </a:tc>
+              </a:tr>
+              <a:tr h="352044">
+                <a:tc>
+                  <a:txBody>
+                    <a:bodyPr/>
+                    <a:lstStyle/>
+                    <a:p>
+                      <a:pPr indent="0" marL="0">
+                        <a:buNone/>
+                      </a:pPr>
+                      <a:r>
+                        <a:rPr lang="en-US" sz="1000" b="1" dirty="0">
+                          <a:solidFill>
+                            <a:srgbClr val="1F2937"/>
+                          </a:solidFill>
+                          <a:latin typeface="Microsoft JhengHei" pitchFamily="34" charset="0"/>
+                          <a:ea typeface="Microsoft JhengHei" pitchFamily="34" charset="-122"/>
+                          <a:cs typeface="Microsoft JhengHei" pitchFamily="34" charset="-120"/>
+                        </a:rPr>
+                        <a:t>A：Bedrock 迴圈首跑</a:t>
+                      </a:r>
+                      <a:endParaRPr lang="en-US" sz="1000" dirty="0">
+                        <a:latin typeface="Microsoft JhengHei" charset="0"/>
+                        <a:ea typeface="Microsoft JhengHei" charset="0"/>
+                        <a:cs typeface="Microsoft JhengHei" charset="0"/>
+                      </a:endParaRPr>
+                    </a:p>
+                  </a:txBody>
+                  <a:tcPr marL="45720" marR="45720" marT="45720" marB="45720" anchor="ctr">
+                    <a:lnL w="9525" cap="flat" cmpd="sng" algn="ctr">
+                      <a:solidFill>
+                        <a:srgbClr val="D5DEF0"/>
+                      </a:solidFill>
+                      <a:prstDash val="solid"/>
+                      <a:round/>
+                      <a:headEnd type="none" w="med" len="med"/>
+                      <a:tailEnd type="none" w="med" len="med"/>
+                    </a:lnL>
+                    <a:lnR w="9525" cap="flat" cmpd="sng" algn="ctr">
+                      <a:solidFill>
+                        <a:srgbClr val="D5DEF0"/>
+                      </a:solidFill>
+                      <a:prstDash val="solid"/>
+                      <a:round/>
+                      <a:headEnd type="none" w="med" len="med"/>
+                      <a:tailEnd type="none" w="med" len="med"/>
+                    </a:lnR>
+                    <a:lnT w="9525" cap="flat" cmpd="sng" algn="ctr">
+                      <a:solidFill>
+                        <a:srgbClr val="D5DEF0"/>
+                      </a:solidFill>
+                      <a:prstDash val="solid"/>
+                      <a:round/>
+                      <a:headEnd type="none" w="med" len="med"/>
+                      <a:tailEnd type="none" w="med" len="med"/>
+                    </a:lnT>
+                    <a:lnB w="9525" cap="flat" cmpd="sng" algn="ctr">
+                      <a:solidFill>
+                        <a:srgbClr val="D5DEF0"/>
+                      </a:solidFill>
+                      <a:prstDash val="solid"/>
+                      <a:round/>
+                      <a:headEnd type="none" w="med" len="med"/>
+                      <a:tailEnd type="none" w="med" len="med"/>
+                    </a:lnB>
+                  </a:tcPr>
+                </a:tc>
+                <a:tc>
+                  <a:txBody>
+                    <a:bodyPr/>
+                    <a:lstStyle/>
+                    <a:p>
+                      <a:pPr indent="0" marL="0">
+                        <a:buNone/>
+                      </a:pPr>
+                      <a:r>
+                        <a:rPr lang="en-US" sz="1000" dirty="0">
+                          <a:solidFill>
+                            <a:srgbClr val="16224D"/>
+                          </a:solidFill>
+                          <a:latin typeface="Microsoft JhengHei" pitchFamily="34" charset="0"/>
+                          <a:ea typeface="Microsoft JhengHei" pitchFamily="34" charset="-122"/>
+                          <a:cs typeface="Microsoft JhengHei" pitchFamily="34" charset="-120"/>
+                        </a:rPr>
+                        <a:t>跑通的迴圈</a:t>
+                      </a:r>
+                      <a:endParaRPr lang="en-US" sz="1000" dirty="0">
+                        <a:latin typeface="Microsoft JhengHei" charset="0"/>
+                        <a:ea typeface="Microsoft JhengHei" charset="0"/>
+                        <a:cs typeface="Microsoft JhengHei" charset="0"/>
+                      </a:endParaRPr>
+                    </a:p>
+                  </a:txBody>
+                  <a:tcPr marL="45720" marR="45720" marT="45720" marB="45720" anchor="ctr">
+                    <a:lnL w="9525" cap="flat" cmpd="sng" algn="ctr">
+                      <a:solidFill>
+                        <a:srgbClr val="D5DEF0"/>
+                      </a:solidFill>
+                      <a:prstDash val="solid"/>
+                      <a:round/>
+                      <a:headEnd type="none" w="med" len="med"/>
+                      <a:tailEnd type="none" w="med" len="med"/>
+                    </a:lnL>
+                    <a:lnR w="9525" cap="flat" cmpd="sng" algn="ctr">
+                      <a:solidFill>
+                        <a:srgbClr val="D5DEF0"/>
+                      </a:solidFill>
+                      <a:prstDash val="solid"/>
+                      <a:round/>
+                      <a:headEnd type="none" w="med" len="med"/>
+                      <a:tailEnd type="none" w="med" len="med"/>
+                    </a:lnR>
+                    <a:lnT w="9525" cap="flat" cmpd="sng" algn="ctr">
+                      <a:solidFill>
+                        <a:srgbClr val="D5DEF0"/>
+                      </a:solidFill>
+                      <a:prstDash val="solid"/>
+                      <a:round/>
+                      <a:headEnd type="none" w="med" len="med"/>
+                      <a:tailEnd type="none" w="med" len="med"/>
+                    </a:lnT>
+                    <a:lnB w="9525" cap="flat" cmpd="sng" algn="ctr">
+                      <a:solidFill>
+                        <a:srgbClr val="D5DEF0"/>
+                      </a:solidFill>
+                      <a:prstDash val="solid"/>
+                      <a:round/>
+                      <a:headEnd type="none" w="med" len="med"/>
+                      <a:tailEnd type="none" w="med" len="med"/>
+                    </a:lnB>
+                  </a:tcPr>
+                </a:tc>
+                <a:tc>
+                  <a:txBody>
+                    <a:bodyPr/>
+                    <a:lstStyle/>
+                    <a:p>
+                      <a:pPr indent="0" marL="0">
+                        <a:buNone/>
+                      </a:pPr>
+                      <a:r>
+                        <a:rPr lang="en-US" sz="1000" b="1" dirty="0">
+                          <a:solidFill>
+                            <a:srgbClr val="E8A13A"/>
+                          </a:solidFill>
+                          <a:latin typeface="Microsoft JhengHei" pitchFamily="34" charset="0"/>
+                          <a:ea typeface="Microsoft JhengHei" pitchFamily="34" charset="-122"/>
+                          <a:cs typeface="Microsoft JhengHei" pitchFamily="34" charset="-120"/>
+                        </a:rPr>
+                        <a:t>A 自己</a:t>
+                      </a:r>
+                      <a:endParaRPr lang="en-US" sz="1000" dirty="0">
+                        <a:latin typeface="Microsoft JhengHei" charset="0"/>
+                        <a:ea typeface="Microsoft JhengHei" charset="0"/>
+                        <a:cs typeface="Microsoft JhengHei" charset="0"/>
+                      </a:endParaRPr>
+                    </a:p>
+                  </a:txBody>
+                  <a:tcPr marL="45720" marR="45720" marT="45720" marB="45720" anchor="ctr">
+                    <a:lnL w="9525" cap="flat" cmpd="sng" algn="ctr">
+                      <a:solidFill>
+                        <a:srgbClr val="D5DEF0"/>
+                      </a:solidFill>
+                      <a:prstDash val="solid"/>
+                      <a:round/>
+                      <a:headEnd type="none" w="med" len="med"/>
+                      <a:tailEnd type="none" w="med" len="med"/>
+                    </a:lnL>
+                    <a:lnR w="9525" cap="flat" cmpd="sng" algn="ctr">
+                      <a:solidFill>
+                        <a:srgbClr val="D5DEF0"/>
+                      </a:solidFill>
+                      <a:prstDash val="solid"/>
+                      <a:round/>
+                      <a:headEnd type="none" w="med" len="med"/>
+                      <a:tailEnd type="none" w="med" len="med"/>
+                    </a:lnR>
+                    <a:lnT w="9525" cap="flat" cmpd="sng" algn="ctr">
+                      <a:solidFill>
+                        <a:srgbClr val="D5DEF0"/>
+                      </a:solidFill>
+                      <a:prstDash val="solid"/>
+                      <a:round/>
+                      <a:headEnd type="none" w="med" len="med"/>
+                      <a:tailEnd type="none" w="med" len="med"/>
+                    </a:lnT>
+                    <a:lnB w="9525" cap="flat" cmpd="sng" algn="ctr">
+                      <a:solidFill>
+                        <a:srgbClr val="D5DEF0"/>
+                      </a:solidFill>
+                      <a:prstDash val="solid"/>
+                      <a:round/>
+                      <a:headEnd type="none" w="med" len="med"/>
+                      <a:tailEnd type="none" w="med" len="med"/>
+                    </a:lnB>
+                  </a:tcPr>
+                </a:tc>
+                <a:tc>
+                  <a:txBody>
+                    <a:bodyPr/>
+                    <a:lstStyle/>
+                    <a:p>
+                      <a:pPr indent="0" marL="0">
+                        <a:buNone/>
+                      </a:pPr>
+                      <a:r>
+                        <a:rPr lang="en-US" sz="1000" dirty="0">
+                          <a:solidFill>
+                            <a:srgbClr val="1F2937"/>
+                          </a:solidFill>
+                          <a:latin typeface="Microsoft JhengHei" pitchFamily="34" charset="0"/>
+                          <a:ea typeface="Microsoft JhengHei" pitchFamily="34" charset="-122"/>
+                          <a:cs typeface="Microsoft JhengHei" pitchFamily="34" charset="-120"/>
+                        </a:rPr>
+                        <a:t>解鎖 #1 #5 #10 #11 開發</a:t>
+                      </a:r>
+                      <a:endParaRPr lang="en-US" sz="1000" dirty="0">
+                        <a:latin typeface="Microsoft JhengHei" charset="0"/>
+                        <a:ea typeface="Microsoft JhengHei" charset="0"/>
+                        <a:cs typeface="Microsoft JhengHei" charset="0"/>
+                      </a:endParaRPr>
+                    </a:p>
+                  </a:txBody>
+                  <a:tcPr marL="45720" marR="45720" marT="45720" marB="45720" anchor="ctr">
+                    <a:lnL w="9525" cap="flat" cmpd="sng" algn="ctr">
+                      <a:solidFill>
+                        <a:srgbClr val="D5DEF0"/>
+                      </a:solidFill>
+                      <a:prstDash val="solid"/>
+                      <a:round/>
+                      <a:headEnd type="none" w="med" len="med"/>
+                      <a:tailEnd type="none" w="med" len="med"/>
+                    </a:lnL>
+                    <a:lnR w="9525" cap="flat" cmpd="sng" algn="ctr">
+                      <a:solidFill>
+                        <a:srgbClr val="D5DEF0"/>
+                      </a:solidFill>
+                      <a:prstDash val="solid"/>
+                      <a:round/>
+                      <a:headEnd type="none" w="med" len="med"/>
+                      <a:tailEnd type="none" w="med" len="med"/>
+                    </a:lnR>
+                    <a:lnT w="9525" cap="flat" cmpd="sng" algn="ctr">
+                      <a:solidFill>
+                        <a:srgbClr val="D5DEF0"/>
+                      </a:solidFill>
+                      <a:prstDash val="solid"/>
+                      <a:round/>
+                      <a:headEnd type="none" w="med" len="med"/>
+                      <a:tailEnd type="none" w="med" len="med"/>
+                    </a:lnT>
+                    <a:lnB w="9525" cap="flat" cmpd="sng" algn="ctr">
+                      <a:solidFill>
+                        <a:srgbClr val="D5DEF0"/>
+                      </a:solidFill>
+                      <a:prstDash val="solid"/>
+                      <a:round/>
+                      <a:headEnd type="none" w="med" len="med"/>
+                      <a:tailEnd type="none" w="med" len="med"/>
+                    </a:lnB>
+                  </a:tcPr>
+                </a:tc>
+              </a:tr>
+              <a:tr h="352044">
+                <a:tc>
+                  <a:txBody>
+                    <a:bodyPr/>
+                    <a:lstStyle/>
+                    <a:p>
+                      <a:pPr indent="0" marL="0">
+                        <a:buNone/>
+                      </a:pPr>
+                      <a:r>
+                        <a:rPr lang="en-US" sz="1000" b="1" dirty="0">
+                          <a:solidFill>
+                            <a:srgbClr val="1F2937"/>
+                          </a:solidFill>
+                          <a:latin typeface="Microsoft JhengHei" pitchFamily="34" charset="0"/>
+                          <a:ea typeface="Microsoft JhengHei" pitchFamily="34" charset="-122"/>
+                          <a:cs typeface="Microsoft JhengHei" pitchFamily="34" charset="-120"/>
+                        </a:rPr>
+                        <a:t>B：query_knowledge＋audit.py</a:t>
+                      </a:r>
+                      <a:endParaRPr lang="en-US" sz="1000" dirty="0">
+                        <a:latin typeface="Microsoft JhengHei" charset="0"/>
+                        <a:ea typeface="Microsoft JhengHei" charset="0"/>
+                        <a:cs typeface="Microsoft JhengHei" charset="0"/>
+                      </a:endParaRPr>
+                    </a:p>
+                  </a:txBody>
+                  <a:tcPr marL="45720" marR="45720" marT="45720" marB="45720" anchor="ctr">
+                    <a:lnL w="9525" cap="flat" cmpd="sng" algn="ctr">
+                      <a:solidFill>
+                        <a:srgbClr val="D5DEF0"/>
+                      </a:solidFill>
+                      <a:prstDash val="solid"/>
+                      <a:round/>
+                      <a:headEnd type="none" w="med" len="med"/>
+                      <a:tailEnd type="none" w="med" len="med"/>
+                    </a:lnL>
+                    <a:lnR w="9525" cap="flat" cmpd="sng" algn="ctr">
+                      <a:solidFill>
+                        <a:srgbClr val="D5DEF0"/>
+                      </a:solidFill>
+                      <a:prstDash val="solid"/>
+                      <a:round/>
+                      <a:headEnd type="none" w="med" len="med"/>
+                      <a:tailEnd type="none" w="med" len="med"/>
+                    </a:lnR>
+                    <a:lnT w="9525" cap="flat" cmpd="sng" algn="ctr">
+                      <a:solidFill>
+                        <a:srgbClr val="D5DEF0"/>
+                      </a:solidFill>
+                      <a:prstDash val="solid"/>
+                      <a:round/>
+                      <a:headEnd type="none" w="med" len="med"/>
+                      <a:tailEnd type="none" w="med" len="med"/>
+                    </a:lnT>
+                    <a:lnB w="9525" cap="flat" cmpd="sng" algn="ctr">
+                      <a:solidFill>
+                        <a:srgbClr val="D5DEF0"/>
+                      </a:solidFill>
+                      <a:prstDash val="solid"/>
+                      <a:round/>
+                      <a:headEnd type="none" w="med" len="med"/>
+                      <a:tailEnd type="none" w="med" len="med"/>
+                    </a:lnB>
+                  </a:tcPr>
+                </a:tc>
+                <a:tc>
+                  <a:txBody>
+                    <a:bodyPr/>
+                    <a:lstStyle/>
+                    <a:p>
+                      <a:pPr indent="0" marL="0">
+                        <a:buNone/>
+                      </a:pPr>
+                      <a:r>
+                        <a:rPr lang="en-US" sz="1000" dirty="0">
+                          <a:solidFill>
+                            <a:srgbClr val="16224D"/>
+                          </a:solidFill>
+                          <a:latin typeface="Microsoft JhengHei" pitchFamily="34" charset="0"/>
+                          <a:ea typeface="Microsoft JhengHei" pitchFamily="34" charset="-122"/>
+                          <a:cs typeface="Microsoft JhengHei" pitchFamily="34" charset="-120"/>
+                        </a:rPr>
+                        <a:t>函式</a:t>
+                      </a:r>
+                      <a:endParaRPr lang="en-US" sz="1000" dirty="0">
+                        <a:latin typeface="Microsoft JhengHei" charset="0"/>
+                        <a:ea typeface="Microsoft JhengHei" charset="0"/>
+                        <a:cs typeface="Microsoft JhengHei" charset="0"/>
+                      </a:endParaRPr>
+                    </a:p>
+                  </a:txBody>
+                  <a:tcPr marL="45720" marR="45720" marT="45720" marB="45720" anchor="ctr">
+                    <a:lnL w="9525" cap="flat" cmpd="sng" algn="ctr">
+                      <a:solidFill>
+                        <a:srgbClr val="D5DEF0"/>
+                      </a:solidFill>
+                      <a:prstDash val="solid"/>
+                      <a:round/>
+                      <a:headEnd type="none" w="med" len="med"/>
+                      <a:tailEnd type="none" w="med" len="med"/>
+                    </a:lnL>
+                    <a:lnR w="9525" cap="flat" cmpd="sng" algn="ctr">
+                      <a:solidFill>
+                        <a:srgbClr val="D5DEF0"/>
+                      </a:solidFill>
+                      <a:prstDash val="solid"/>
+                      <a:round/>
+                      <a:headEnd type="none" w="med" len="med"/>
+                      <a:tailEnd type="none" w="med" len="med"/>
+                    </a:lnR>
+                    <a:lnT w="9525" cap="flat" cmpd="sng" algn="ctr">
+                      <a:solidFill>
+                        <a:srgbClr val="D5DEF0"/>
+                      </a:solidFill>
+                      <a:prstDash val="solid"/>
+                      <a:round/>
+                      <a:headEnd type="none" w="med" len="med"/>
+                      <a:tailEnd type="none" w="med" len="med"/>
+                    </a:lnT>
+                    <a:lnB w="9525" cap="flat" cmpd="sng" algn="ctr">
+                      <a:solidFill>
+                        <a:srgbClr val="D5DEF0"/>
+                      </a:solidFill>
+                      <a:prstDash val="solid"/>
+                      <a:round/>
+                      <a:headEnd type="none" w="med" len="med"/>
+                      <a:tailEnd type="none" w="med" len="med"/>
+                    </a:lnB>
+                  </a:tcPr>
+                </a:tc>
+                <a:tc>
+                  <a:txBody>
+                    <a:bodyPr/>
+                    <a:lstStyle/>
+                    <a:p>
+                      <a:pPr indent="0" marL="0">
+                        <a:buNone/>
+                      </a:pPr>
+                      <a:r>
+                        <a:rPr lang="en-US" sz="1000" b="1" dirty="0">
+                          <a:solidFill>
+                            <a:srgbClr val="E8A13A"/>
+                          </a:solidFill>
+                          <a:latin typeface="Microsoft JhengHei" pitchFamily="34" charset="0"/>
+                          <a:ea typeface="Microsoft JhengHei" pitchFamily="34" charset="-122"/>
+                          <a:cs typeface="Microsoft JhengHei" pitchFamily="34" charset="-120"/>
+                        </a:rPr>
+                        <a:t>A</a:t>
+                      </a:r>
+                      <a:endParaRPr lang="en-US" sz="1000" dirty="0">
+                        <a:latin typeface="Microsoft JhengHei" charset="0"/>
+                        <a:ea typeface="Microsoft JhengHei" charset="0"/>
+                        <a:cs typeface="Microsoft JhengHei" charset="0"/>
+                      </a:endParaRPr>
+                    </a:p>
+                  </a:txBody>
+                  <a:tcPr marL="45720" marR="45720" marT="45720" marB="45720" anchor="ctr">
+                    <a:lnL w="9525" cap="flat" cmpd="sng" algn="ctr">
+                      <a:solidFill>
+                        <a:srgbClr val="D5DEF0"/>
+                      </a:solidFill>
+                      <a:prstDash val="solid"/>
+                      <a:round/>
+                      <a:headEnd type="none" w="med" len="med"/>
+                      <a:tailEnd type="none" w="med" len="med"/>
+                    </a:lnL>
+                    <a:lnR w="9525" cap="flat" cmpd="sng" algn="ctr">
+                      <a:solidFill>
+                        <a:srgbClr val="D5DEF0"/>
+                      </a:solidFill>
+                      <a:prstDash val="solid"/>
+                      <a:round/>
+                      <a:headEnd type="none" w="med" len="med"/>
+                      <a:tailEnd type="none" w="med" len="med"/>
+                    </a:lnR>
+                    <a:lnT w="9525" cap="flat" cmpd="sng" algn="ctr">
+                      <a:solidFill>
+                        <a:srgbClr val="D5DEF0"/>
+                      </a:solidFill>
+                      <a:prstDash val="solid"/>
+                      <a:round/>
+                      <a:headEnd type="none" w="med" len="med"/>
+                      <a:tailEnd type="none" w="med" len="med"/>
+                    </a:lnT>
+                    <a:lnB w="9525" cap="flat" cmpd="sng" algn="ctr">
+                      <a:solidFill>
+                        <a:srgbClr val="D5DEF0"/>
+                      </a:solidFill>
+                      <a:prstDash val="solid"/>
+                      <a:round/>
+                      <a:headEnd type="none" w="med" len="med"/>
+                      <a:tailEnd type="none" w="med" len="med"/>
+                    </a:lnB>
+                  </a:tcPr>
+                </a:tc>
+                <a:tc>
+                  <a:txBody>
+                    <a:bodyPr/>
+                    <a:lstStyle/>
+                    <a:p>
+                      <a:pPr indent="0" marL="0">
+                        <a:buNone/>
+                      </a:pPr>
+                      <a:r>
+                        <a:rPr lang="en-US" sz="1000" dirty="0">
+                          <a:solidFill>
+                            <a:srgbClr val="1F2937"/>
+                          </a:solidFill>
+                          <a:latin typeface="Microsoft JhengHei" pitchFamily="34" charset="0"/>
+                          <a:ea typeface="Microsoft JhengHei" pitchFamily="34" charset="-122"/>
+                          <a:cs typeface="Microsoft JhengHei" pitchFamily="34" charset="-120"/>
+                        </a:rPr>
+                        <a:t>註冊進 tools＋loop 埋點</a:t>
+                      </a:r>
+                      <a:endParaRPr lang="en-US" sz="1000" dirty="0">
+                        <a:latin typeface="Microsoft JhengHei" charset="0"/>
+                        <a:ea typeface="Microsoft JhengHei" charset="0"/>
+                        <a:cs typeface="Microsoft JhengHei" charset="0"/>
+                      </a:endParaRPr>
+                    </a:p>
+                  </a:txBody>
+                  <a:tcPr marL="45720" marR="45720" marT="45720" marB="45720" anchor="ctr">
+                    <a:lnL w="9525" cap="flat" cmpd="sng" algn="ctr">
+                      <a:solidFill>
+                        <a:srgbClr val="D5DEF0"/>
+                      </a:solidFill>
+                      <a:prstDash val="solid"/>
+                      <a:round/>
+                      <a:headEnd type="none" w="med" len="med"/>
+                      <a:tailEnd type="none" w="med" len="med"/>
+                    </a:lnL>
+                    <a:lnR w="9525" cap="flat" cmpd="sng" algn="ctr">
+                      <a:solidFill>
+                        <a:srgbClr val="D5DEF0"/>
+                      </a:solidFill>
+                      <a:prstDash val="solid"/>
+                      <a:round/>
+                      <a:headEnd type="none" w="med" len="med"/>
+                      <a:tailEnd type="none" w="med" len="med"/>
+                    </a:lnR>
+                    <a:lnT w="9525" cap="flat" cmpd="sng" algn="ctr">
+                      <a:solidFill>
+                        <a:srgbClr val="D5DEF0"/>
+                      </a:solidFill>
+                      <a:prstDash val="solid"/>
+                      <a:round/>
+                      <a:headEnd type="none" w="med" len="med"/>
+                      <a:tailEnd type="none" w="med" len="med"/>
+                    </a:lnT>
+                    <a:lnB w="9525" cap="flat" cmpd="sng" algn="ctr">
+                      <a:solidFill>
+                        <a:srgbClr val="D5DEF0"/>
+                      </a:solidFill>
+                      <a:prstDash val="solid"/>
+                      <a:round/>
+                      <a:headEnd type="none" w="med" len="med"/>
+                      <a:tailEnd type="none" w="med" len="med"/>
+                    </a:lnB>
+                  </a:tcPr>
+                </a:tc>
+              </a:tr>
+              <a:tr h="352044">
+                <a:tc>
+                  <a:txBody>
+                    <a:bodyPr/>
+                    <a:lstStyle/>
+                    <a:p>
+                      <a:pPr indent="0" marL="0">
+                        <a:buNone/>
+                      </a:pPr>
+                      <a:r>
+                        <a:rPr lang="en-US" sz="1000" b="1" dirty="0">
+                          <a:solidFill>
+                            <a:srgbClr val="1F2937"/>
+                          </a:solidFill>
+                          <a:latin typeface="Microsoft JhengHei" pitchFamily="34" charset="0"/>
+                          <a:ea typeface="Microsoft JhengHei" pitchFamily="34" charset="-122"/>
+                          <a:cs typeface="Microsoft JhengHei" pitchFamily="34" charset="-120"/>
+                        </a:rPr>
+                        <a:t>B：/audit endpoint</a:t>
+                      </a:r>
+                      <a:endParaRPr lang="en-US" sz="1000" dirty="0">
+                        <a:latin typeface="Microsoft JhengHei" charset="0"/>
+                        <a:ea typeface="Microsoft JhengHei" charset="0"/>
+                        <a:cs typeface="Microsoft JhengHei" charset="0"/>
+                      </a:endParaRPr>
+                    </a:p>
+                  </a:txBody>
+                  <a:tcPr marL="45720" marR="45720" marT="45720" marB="45720" anchor="ctr">
+                    <a:lnL w="9525" cap="flat" cmpd="sng" algn="ctr">
+                      <a:solidFill>
+                        <a:srgbClr val="D5DEF0"/>
+                      </a:solidFill>
+                      <a:prstDash val="solid"/>
+                      <a:round/>
+                      <a:headEnd type="none" w="med" len="med"/>
+                      <a:tailEnd type="none" w="med" len="med"/>
+                    </a:lnL>
+                    <a:lnR w="9525" cap="flat" cmpd="sng" algn="ctr">
+                      <a:solidFill>
+                        <a:srgbClr val="D5DEF0"/>
+                      </a:solidFill>
+                      <a:prstDash val="solid"/>
+                      <a:round/>
+                      <a:headEnd type="none" w="med" len="med"/>
+                      <a:tailEnd type="none" w="med" len="med"/>
+                    </a:lnR>
+                    <a:lnT w="9525" cap="flat" cmpd="sng" algn="ctr">
+                      <a:solidFill>
+                        <a:srgbClr val="D5DEF0"/>
+                      </a:solidFill>
+                      <a:prstDash val="solid"/>
+                      <a:round/>
+                      <a:headEnd type="none" w="med" len="med"/>
+                      <a:tailEnd type="none" w="med" len="med"/>
+                    </a:lnT>
+                    <a:lnB w="9525" cap="flat" cmpd="sng" algn="ctr">
+                      <a:solidFill>
+                        <a:srgbClr val="D5DEF0"/>
+                      </a:solidFill>
+                      <a:prstDash val="solid"/>
+                      <a:round/>
+                      <a:headEnd type="none" w="med" len="med"/>
+                      <a:tailEnd type="none" w="med" len="med"/>
+                    </a:lnB>
+                  </a:tcPr>
+                </a:tc>
+                <a:tc>
+                  <a:txBody>
+                    <a:bodyPr/>
+                    <a:lstStyle/>
+                    <a:p>
+                      <a:pPr indent="0" marL="0">
+                        <a:buNone/>
+                      </a:pPr>
+                      <a:r>
+                        <a:rPr lang="en-US" sz="1000" dirty="0">
+                          <a:solidFill>
+                            <a:srgbClr val="16224D"/>
+                          </a:solidFill>
+                          <a:latin typeface="Microsoft JhengHei" pitchFamily="34" charset="0"/>
+                          <a:ea typeface="Microsoft JhengHei" pitchFamily="34" charset="-122"/>
+                          <a:cs typeface="Microsoft JhengHei" pitchFamily="34" charset="-120"/>
+                        </a:rPr>
+                        <a:t>audit schema</a:t>
+                      </a:r>
+                      <a:endParaRPr lang="en-US" sz="1000" dirty="0">
+                        <a:latin typeface="Microsoft JhengHei" charset="0"/>
+                        <a:ea typeface="Microsoft JhengHei" charset="0"/>
+                        <a:cs typeface="Microsoft JhengHei" charset="0"/>
+                      </a:endParaRPr>
+                    </a:p>
+                  </a:txBody>
+                  <a:tcPr marL="45720" marR="45720" marT="45720" marB="45720" anchor="ctr">
+                    <a:lnL w="9525" cap="flat" cmpd="sng" algn="ctr">
+                      <a:solidFill>
+                        <a:srgbClr val="D5DEF0"/>
+                      </a:solidFill>
+                      <a:prstDash val="solid"/>
+                      <a:round/>
+                      <a:headEnd type="none" w="med" len="med"/>
+                      <a:tailEnd type="none" w="med" len="med"/>
+                    </a:lnL>
+                    <a:lnR w="9525" cap="flat" cmpd="sng" algn="ctr">
+                      <a:solidFill>
+                        <a:srgbClr val="D5DEF0"/>
+                      </a:solidFill>
+                      <a:prstDash val="solid"/>
+                      <a:round/>
+                      <a:headEnd type="none" w="med" len="med"/>
+                      <a:tailEnd type="none" w="med" len="med"/>
+                    </a:lnR>
+                    <a:lnT w="9525" cap="flat" cmpd="sng" algn="ctr">
+                      <a:solidFill>
+                        <a:srgbClr val="D5DEF0"/>
+                      </a:solidFill>
+                      <a:prstDash val="solid"/>
+                      <a:round/>
+                      <a:headEnd type="none" w="med" len="med"/>
+                      <a:tailEnd type="none" w="med" len="med"/>
+                    </a:lnT>
+                    <a:lnB w="9525" cap="flat" cmpd="sng" algn="ctr">
+                      <a:solidFill>
+                        <a:srgbClr val="D5DEF0"/>
+                      </a:solidFill>
+                      <a:prstDash val="solid"/>
+                      <a:round/>
+                      <a:headEnd type="none" w="med" len="med"/>
+                      <a:tailEnd type="none" w="med" len="med"/>
+                    </a:lnB>
+                  </a:tcPr>
+                </a:tc>
+                <a:tc>
+                  <a:txBody>
+                    <a:bodyPr/>
+                    <a:lstStyle/>
+                    <a:p>
+                      <a:pPr indent="0" marL="0">
+                        <a:buNone/>
+                      </a:pPr>
+                      <a:r>
+                        <a:rPr lang="en-US" sz="1000" b="1" dirty="0">
+                          <a:solidFill>
+                            <a:srgbClr val="E8A13A"/>
+                          </a:solidFill>
+                          <a:latin typeface="Microsoft JhengHei" pitchFamily="34" charset="0"/>
+                          <a:ea typeface="Microsoft JhengHei" pitchFamily="34" charset="-122"/>
+                          <a:cs typeface="Microsoft JhengHei" pitchFamily="34" charset="-120"/>
+                        </a:rPr>
+                        <a:t>C</a:t>
+                      </a:r>
+                      <a:endParaRPr lang="en-US" sz="1000" dirty="0">
+                        <a:latin typeface="Microsoft JhengHei" charset="0"/>
+                        <a:ea typeface="Microsoft JhengHei" charset="0"/>
+                        <a:cs typeface="Microsoft JhengHei" charset="0"/>
+                      </a:endParaRPr>
+                    </a:p>
+                  </a:txBody>
+                  <a:tcPr marL="45720" marR="45720" marT="45720" marB="45720" anchor="ctr">
+                    <a:lnL w="9525" cap="flat" cmpd="sng" algn="ctr">
+                      <a:solidFill>
+                        <a:srgbClr val="D5DEF0"/>
+                      </a:solidFill>
+                      <a:prstDash val="solid"/>
+                      <a:round/>
+                      <a:headEnd type="none" w="med" len="med"/>
+                      <a:tailEnd type="none" w="med" len="med"/>
+                    </a:lnL>
+                    <a:lnR w="9525" cap="flat" cmpd="sng" algn="ctr">
+                      <a:solidFill>
+                        <a:srgbClr val="D5DEF0"/>
+                      </a:solidFill>
+                      <a:prstDash val="solid"/>
+                      <a:round/>
+                      <a:headEnd type="none" w="med" len="med"/>
+                      <a:tailEnd type="none" w="med" len="med"/>
+                    </a:lnR>
+                    <a:lnT w="9525" cap="flat" cmpd="sng" algn="ctr">
+                      <a:solidFill>
+                        <a:srgbClr val="D5DEF0"/>
+                      </a:solidFill>
+                      <a:prstDash val="solid"/>
+                      <a:round/>
+                      <a:headEnd type="none" w="med" len="med"/>
+                      <a:tailEnd type="none" w="med" len="med"/>
+                    </a:lnT>
+                    <a:lnB w="9525" cap="flat" cmpd="sng" algn="ctr">
+                      <a:solidFill>
+                        <a:srgbClr val="D5DEF0"/>
+                      </a:solidFill>
+                      <a:prstDash val="solid"/>
+                      <a:round/>
+                      <a:headEnd type="none" w="med" len="med"/>
+                      <a:tailEnd type="none" w="med" len="med"/>
+                    </a:lnB>
+                  </a:tcPr>
+                </a:tc>
+                <a:tc>
+                  <a:txBody>
+                    <a:bodyPr/>
+                    <a:lstStyle/>
+                    <a:p>
+                      <a:pPr indent="0" marL="0">
+                        <a:buNone/>
+                      </a:pPr>
+                      <a:r>
+                        <a:rPr lang="en-US" sz="1000" dirty="0">
+                          <a:solidFill>
+                            <a:srgbClr val="1F2937"/>
+                          </a:solidFill>
+                          <a:latin typeface="Microsoft JhengHei" pitchFamily="34" charset="0"/>
+                          <a:ea typeface="Microsoft JhengHei" pitchFamily="34" charset="-122"/>
+                          <a:cs typeface="Microsoft JhengHei" pitchFamily="34" charset="-120"/>
+                        </a:rPr>
+                        <a:t>決策軌跡面板</a:t>
+                      </a:r>
+                      <a:endParaRPr lang="en-US" sz="1000" dirty="0">
+                        <a:latin typeface="Microsoft JhengHei" charset="0"/>
+                        <a:ea typeface="Microsoft JhengHei" charset="0"/>
+                        <a:cs typeface="Microsoft JhengHei" charset="0"/>
+                      </a:endParaRPr>
+                    </a:p>
+                  </a:txBody>
+                  <a:tcPr marL="45720" marR="45720" marT="45720" marB="45720" anchor="ctr">
+                    <a:lnL w="9525" cap="flat" cmpd="sng" algn="ctr">
+                      <a:solidFill>
+                        <a:srgbClr val="D5DEF0"/>
+                      </a:solidFill>
+                      <a:prstDash val="solid"/>
+                      <a:round/>
+                      <a:headEnd type="none" w="med" len="med"/>
+                      <a:tailEnd type="none" w="med" len="med"/>
+                    </a:lnL>
+                    <a:lnR w="9525" cap="flat" cmpd="sng" algn="ctr">
+                      <a:solidFill>
+                        <a:srgbClr val="D5DEF0"/>
+                      </a:solidFill>
+                      <a:prstDash val="solid"/>
+                      <a:round/>
+                      <a:headEnd type="none" w="med" len="med"/>
+                      <a:tailEnd type="none" w="med" len="med"/>
+                    </a:lnR>
+                    <a:lnT w="9525" cap="flat" cmpd="sng" algn="ctr">
+                      <a:solidFill>
+                        <a:srgbClr val="D5DEF0"/>
+                      </a:solidFill>
+                      <a:prstDash val="solid"/>
+                      <a:round/>
+                      <a:headEnd type="none" w="med" len="med"/>
+                      <a:tailEnd type="none" w="med" len="med"/>
+                    </a:lnT>
+                    <a:lnB w="9525" cap="flat" cmpd="sng" algn="ctr">
+                      <a:solidFill>
+                        <a:srgbClr val="D5DEF0"/>
+                      </a:solidFill>
+                      <a:prstDash val="solid"/>
+                      <a:round/>
+                      <a:headEnd type="none" w="med" len="med"/>
+                      <a:tailEnd type="none" w="med" len="med"/>
+                    </a:lnB>
+                  </a:tcPr>
+                </a:tc>
+              </a:tr>
+              <a:tr h="352044">
+                <a:tc>
+                  <a:txBody>
+                    <a:bodyPr/>
+                    <a:lstStyle/>
+                    <a:p>
+                      <a:pPr indent="0" marL="0">
+                        <a:buNone/>
+                      </a:pPr>
+                      <a:r>
+                        <a:rPr lang="en-US" sz="1000" b="1" dirty="0">
+                          <a:solidFill>
+                            <a:srgbClr val="1F2937"/>
+                          </a:solidFill>
+                          <a:latin typeface="Microsoft JhengHei" pitchFamily="34" charset="0"/>
+                          <a:ea typeface="Microsoft JhengHei" pitchFamily="34" charset="-122"/>
+                          <a:cs typeface="Microsoft JhengHei" pitchFamily="34" charset="-120"/>
+                        </a:rPr>
+                        <a:t>D：Guardrails 建立（#6）</a:t>
+                      </a:r>
+                      <a:endParaRPr lang="en-US" sz="1000" dirty="0">
+                        <a:latin typeface="Microsoft JhengHei" charset="0"/>
+                        <a:ea typeface="Microsoft JhengHei" charset="0"/>
+                        <a:cs typeface="Microsoft JhengHei" charset="0"/>
+                      </a:endParaRPr>
+                    </a:p>
+                  </a:txBody>
+                  <a:tcPr marL="45720" marR="45720" marT="45720" marB="45720" anchor="ctr">
+                    <a:lnL w="9525" cap="flat" cmpd="sng" algn="ctr">
+                      <a:solidFill>
+                        <a:srgbClr val="D5DEF0"/>
+                      </a:solidFill>
+                      <a:prstDash val="solid"/>
+                      <a:round/>
+                      <a:headEnd type="none" w="med" len="med"/>
+                      <a:tailEnd type="none" w="med" len="med"/>
+                    </a:lnL>
+                    <a:lnR w="9525" cap="flat" cmpd="sng" algn="ctr">
+                      <a:solidFill>
+                        <a:srgbClr val="D5DEF0"/>
+                      </a:solidFill>
+                      <a:prstDash val="solid"/>
+                      <a:round/>
+                      <a:headEnd type="none" w="med" len="med"/>
+                      <a:tailEnd type="none" w="med" len="med"/>
+                    </a:lnR>
+                    <a:lnT w="9525" cap="flat" cmpd="sng" algn="ctr">
+                      <a:solidFill>
+                        <a:srgbClr val="D5DEF0"/>
+                      </a:solidFill>
+                      <a:prstDash val="solid"/>
+                      <a:round/>
+                      <a:headEnd type="none" w="med" len="med"/>
+                      <a:tailEnd type="none" w="med" len="med"/>
+                    </a:lnT>
+                    <a:lnB w="9525" cap="flat" cmpd="sng" algn="ctr">
+                      <a:solidFill>
+                        <a:srgbClr val="D5DEF0"/>
+                      </a:solidFill>
+                      <a:prstDash val="solid"/>
+                      <a:round/>
+                      <a:headEnd type="none" w="med" len="med"/>
+                      <a:tailEnd type="none" w="med" len="med"/>
+                    </a:lnB>
+                  </a:tcPr>
+                </a:tc>
+                <a:tc>
+                  <a:txBody>
+                    <a:bodyPr/>
+                    <a:lstStyle/>
+                    <a:p>
+                      <a:pPr indent="0" marL="0">
+                        <a:buNone/>
+                      </a:pPr>
+                      <a:r>
+                        <a:rPr lang="en-US" sz="1000" dirty="0">
+                          <a:solidFill>
+                            <a:srgbClr val="16224D"/>
+                          </a:solidFill>
+                          <a:latin typeface="Microsoft JhengHei" pitchFamily="34" charset="0"/>
+                          <a:ea typeface="Microsoft JhengHei" pitchFamily="34" charset="-122"/>
+                          <a:cs typeface="Microsoft JhengHei" pitchFamily="34" charset="-120"/>
+                        </a:rPr>
+                        <a:t>Guardrail ID</a:t>
+                      </a:r>
+                      <a:endParaRPr lang="en-US" sz="1000" dirty="0">
+                        <a:latin typeface="Microsoft JhengHei" charset="0"/>
+                        <a:ea typeface="Microsoft JhengHei" charset="0"/>
+                        <a:cs typeface="Microsoft JhengHei" charset="0"/>
+                      </a:endParaRPr>
+                    </a:p>
+                  </a:txBody>
+                  <a:tcPr marL="45720" marR="45720" marT="45720" marB="45720" anchor="ctr">
+                    <a:lnL w="9525" cap="flat" cmpd="sng" algn="ctr">
+                      <a:solidFill>
+                        <a:srgbClr val="D5DEF0"/>
+                      </a:solidFill>
+                      <a:prstDash val="solid"/>
+                      <a:round/>
+                      <a:headEnd type="none" w="med" len="med"/>
+                      <a:tailEnd type="none" w="med" len="med"/>
+                    </a:lnL>
+                    <a:lnR w="9525" cap="flat" cmpd="sng" algn="ctr">
+                      <a:solidFill>
+                        <a:srgbClr val="D5DEF0"/>
+                      </a:solidFill>
+                      <a:prstDash val="solid"/>
+                      <a:round/>
+                      <a:headEnd type="none" w="med" len="med"/>
+                      <a:tailEnd type="none" w="med" len="med"/>
+                    </a:lnR>
+                    <a:lnT w="9525" cap="flat" cmpd="sng" algn="ctr">
+                      <a:solidFill>
+                        <a:srgbClr val="D5DEF0"/>
+                      </a:solidFill>
+                      <a:prstDash val="solid"/>
+                      <a:round/>
+                      <a:headEnd type="none" w="med" len="med"/>
+                      <a:tailEnd type="none" w="med" len="med"/>
+                    </a:lnT>
+                    <a:lnB w="9525" cap="flat" cmpd="sng" algn="ctr">
+                      <a:solidFill>
+                        <a:srgbClr val="D5DEF0"/>
+                      </a:solidFill>
+                      <a:prstDash val="solid"/>
+                      <a:round/>
+                      <a:headEnd type="none" w="med" len="med"/>
+                      <a:tailEnd type="none" w="med" len="med"/>
+                    </a:lnB>
+                  </a:tcPr>
+                </a:tc>
+                <a:tc>
+                  <a:txBody>
+                    <a:bodyPr/>
+                    <a:lstStyle/>
+                    <a:p>
+                      <a:pPr indent="0" marL="0">
+                        <a:buNone/>
+                      </a:pPr>
+                      <a:r>
+                        <a:rPr lang="en-US" sz="1000" b="1" dirty="0">
+                          <a:solidFill>
+                            <a:srgbClr val="E8A13A"/>
+                          </a:solidFill>
+                          <a:latin typeface="Microsoft JhengHei" pitchFamily="34" charset="0"/>
+                          <a:ea typeface="Microsoft JhengHei" pitchFamily="34" charset="-122"/>
+                          <a:cs typeface="Microsoft JhengHei" pitchFamily="34" charset="-120"/>
+                        </a:rPr>
+                        <a:t>A</a:t>
+                      </a:r>
+                      <a:endParaRPr lang="en-US" sz="1000" dirty="0">
+                        <a:latin typeface="Microsoft JhengHei" charset="0"/>
+                        <a:ea typeface="Microsoft JhengHei" charset="0"/>
+                        <a:cs typeface="Microsoft JhengHei" charset="0"/>
+                      </a:endParaRPr>
+                    </a:p>
+                  </a:txBody>
+                  <a:tcPr marL="45720" marR="45720" marT="45720" marB="45720" anchor="ctr">
+                    <a:lnL w="9525" cap="flat" cmpd="sng" algn="ctr">
+                      <a:solidFill>
+                        <a:srgbClr val="D5DEF0"/>
+                      </a:solidFill>
+                      <a:prstDash val="solid"/>
+                      <a:round/>
+                      <a:headEnd type="none" w="med" len="med"/>
+                      <a:tailEnd type="none" w="med" len="med"/>
+                    </a:lnL>
+                    <a:lnR w="9525" cap="flat" cmpd="sng" algn="ctr">
+                      <a:solidFill>
+                        <a:srgbClr val="D5DEF0"/>
+                      </a:solidFill>
+                      <a:prstDash val="solid"/>
+                      <a:round/>
+                      <a:headEnd type="none" w="med" len="med"/>
+                      <a:tailEnd type="none" w="med" len="med"/>
+                    </a:lnR>
+                    <a:lnT w="9525" cap="flat" cmpd="sng" algn="ctr">
+                      <a:solidFill>
+                        <a:srgbClr val="D5DEF0"/>
+                      </a:solidFill>
+                      <a:prstDash val="solid"/>
+                      <a:round/>
+                      <a:headEnd type="none" w="med" len="med"/>
+                      <a:tailEnd type="none" w="med" len="med"/>
+                    </a:lnT>
+                    <a:lnB w="9525" cap="flat" cmpd="sng" algn="ctr">
+                      <a:solidFill>
+                        <a:srgbClr val="D5DEF0"/>
+                      </a:solidFill>
+                      <a:prstDash val="solid"/>
+                      <a:round/>
+                      <a:headEnd type="none" w="med" len="med"/>
+                      <a:tailEnd type="none" w="med" len="med"/>
+                    </a:lnB>
+                  </a:tcPr>
+                </a:tc>
+                <a:tc>
+                  <a:txBody>
+                    <a:bodyPr/>
+                    <a:lstStyle/>
+                    <a:p>
+                      <a:pPr indent="0" marL="0">
+                        <a:buNone/>
+                      </a:pPr>
+                      <a:r>
+                        <a:rPr lang="en-US" sz="1000" dirty="0">
+                          <a:solidFill>
+                            <a:srgbClr val="1F2937"/>
+                          </a:solidFill>
+                          <a:latin typeface="Microsoft JhengHei" pitchFamily="34" charset="0"/>
+                          <a:ea typeface="Microsoft JhengHei" pitchFamily="34" charset="-122"/>
+                          <a:cs typeface="Microsoft JhengHei" pitchFamily="34" charset="-120"/>
+                        </a:rPr>
+                        <a:t>loop 掛載</a:t>
+                      </a:r>
+                      <a:endParaRPr lang="en-US" sz="1000" dirty="0">
+                        <a:latin typeface="Microsoft JhengHei" charset="0"/>
+                        <a:ea typeface="Microsoft JhengHei" charset="0"/>
+                        <a:cs typeface="Microsoft JhengHei" charset="0"/>
+                      </a:endParaRPr>
+                    </a:p>
+                  </a:txBody>
+                  <a:tcPr marL="45720" marR="45720" marT="45720" marB="45720" anchor="ctr">
+                    <a:lnL w="9525" cap="flat" cmpd="sng" algn="ctr">
+                      <a:solidFill>
+                        <a:srgbClr val="D5DEF0"/>
+                      </a:solidFill>
+                      <a:prstDash val="solid"/>
+                      <a:round/>
+                      <a:headEnd type="none" w="med" len="med"/>
+                      <a:tailEnd type="none" w="med" len="med"/>
+                    </a:lnL>
+                    <a:lnR w="9525" cap="flat" cmpd="sng" algn="ctr">
+                      <a:solidFill>
+                        <a:srgbClr val="D5DEF0"/>
+                      </a:solidFill>
+                      <a:prstDash val="solid"/>
+                      <a:round/>
+                      <a:headEnd type="none" w="med" len="med"/>
+                      <a:tailEnd type="none" w="med" len="med"/>
+                    </a:lnR>
+                    <a:lnT w="9525" cap="flat" cmpd="sng" algn="ctr">
+                      <a:solidFill>
+                        <a:srgbClr val="D5DEF0"/>
+                      </a:solidFill>
+                      <a:prstDash val="solid"/>
+                      <a:round/>
+                      <a:headEnd type="none" w="med" len="med"/>
+                      <a:tailEnd type="none" w="med" len="med"/>
+                    </a:lnT>
+                    <a:lnB w="9525" cap="flat" cmpd="sng" algn="ctr">
+                      <a:solidFill>
+                        <a:srgbClr val="D5DEF0"/>
+                      </a:solidFill>
+                      <a:prstDash val="solid"/>
+                      <a:round/>
+                      <a:headEnd type="none" w="med" len="med"/>
+                      <a:tailEnd type="none" w="med" len="med"/>
+                    </a:lnB>
+                  </a:tcPr>
+                </a:tc>
+              </a:tr>
+              <a:tr h="352044">
+                <a:tc>
+                  <a:txBody>
+                    <a:bodyPr/>
+                    <a:lstStyle/>
+                    <a:p>
+                      <a:pPr indent="0" marL="0">
+                        <a:buNone/>
+                      </a:pPr>
+                      <a:r>
+                        <a:rPr lang="en-US" sz="1000" b="1" dirty="0">
+                          <a:solidFill>
+                            <a:srgbClr val="1F2937"/>
+                          </a:solidFill>
+                          <a:latin typeface="Microsoft JhengHei" pitchFamily="34" charset="0"/>
+                          <a:ea typeface="Microsoft JhengHei" pitchFamily="34" charset="-122"/>
+                          <a:cs typeface="Microsoft JhengHei" pitchFamily="34" charset="-120"/>
+                        </a:rPr>
+                        <a:t>A：#11／#10／#1 完成</a:t>
+                      </a:r>
+                      <a:endParaRPr lang="en-US" sz="1000" dirty="0">
+                        <a:latin typeface="Microsoft JhengHei" charset="0"/>
+                        <a:ea typeface="Microsoft JhengHei" charset="0"/>
+                        <a:cs typeface="Microsoft JhengHei" charset="0"/>
+                      </a:endParaRPr>
+                    </a:p>
+                  </a:txBody>
+                  <a:tcPr marL="45720" marR="45720" marT="45720" marB="45720" anchor="ctr">
+                    <a:lnL w="9525" cap="flat" cmpd="sng" algn="ctr">
+                      <a:solidFill>
+                        <a:srgbClr val="D5DEF0"/>
+                      </a:solidFill>
+                      <a:prstDash val="solid"/>
+                      <a:round/>
+                      <a:headEnd type="none" w="med" len="med"/>
+                      <a:tailEnd type="none" w="med" len="med"/>
+                    </a:lnL>
+                    <a:lnR w="9525" cap="flat" cmpd="sng" algn="ctr">
+                      <a:solidFill>
+                        <a:srgbClr val="D5DEF0"/>
+                      </a:solidFill>
+                      <a:prstDash val="solid"/>
+                      <a:round/>
+                      <a:headEnd type="none" w="med" len="med"/>
+                      <a:tailEnd type="none" w="med" len="med"/>
+                    </a:lnR>
+                    <a:lnT w="9525" cap="flat" cmpd="sng" algn="ctr">
+                      <a:solidFill>
+                        <a:srgbClr val="D5DEF0"/>
+                      </a:solidFill>
+                      <a:prstDash val="solid"/>
+                      <a:round/>
+                      <a:headEnd type="none" w="med" len="med"/>
+                      <a:tailEnd type="none" w="med" len="med"/>
+                    </a:lnT>
+                    <a:lnB w="9525" cap="flat" cmpd="sng" algn="ctr">
+                      <a:solidFill>
+                        <a:srgbClr val="D5DEF0"/>
+                      </a:solidFill>
+                      <a:prstDash val="solid"/>
+                      <a:round/>
+                      <a:headEnd type="none" w="med" len="med"/>
+                      <a:tailEnd type="none" w="med" len="med"/>
+                    </a:lnB>
+                  </a:tcPr>
+                </a:tc>
+                <a:tc>
+                  <a:txBody>
+                    <a:bodyPr/>
+                    <a:lstStyle/>
+                    <a:p>
+                      <a:pPr indent="0" marL="0">
+                        <a:buNone/>
+                      </a:pPr>
+                      <a:r>
+                        <a:rPr lang="en-US" sz="1000" dirty="0">
+                          <a:solidFill>
+                            <a:srgbClr val="16224D"/>
+                          </a:solidFill>
+                          <a:latin typeface="Microsoft JhengHei" pitchFamily="34" charset="0"/>
+                          <a:ea typeface="Microsoft JhengHei" pitchFamily="34" charset="-122"/>
+                          <a:cs typeface="Microsoft JhengHei" pitchFamily="34" charset="-120"/>
+                        </a:rPr>
+                        <a:t>scenarios/confirm schema（§3）</a:t>
+                      </a:r>
+                      <a:endParaRPr lang="en-US" sz="1000" dirty="0">
+                        <a:latin typeface="Microsoft JhengHei" charset="0"/>
+                        <a:ea typeface="Microsoft JhengHei" charset="0"/>
+                        <a:cs typeface="Microsoft JhengHei" charset="0"/>
+                      </a:endParaRPr>
+                    </a:p>
+                  </a:txBody>
+                  <a:tcPr marL="45720" marR="45720" marT="45720" marB="45720" anchor="ctr">
+                    <a:lnL w="9525" cap="flat" cmpd="sng" algn="ctr">
+                      <a:solidFill>
+                        <a:srgbClr val="D5DEF0"/>
+                      </a:solidFill>
+                      <a:prstDash val="solid"/>
+                      <a:round/>
+                      <a:headEnd type="none" w="med" len="med"/>
+                      <a:tailEnd type="none" w="med" len="med"/>
+                    </a:lnL>
+                    <a:lnR w="9525" cap="flat" cmpd="sng" algn="ctr">
+                      <a:solidFill>
+                        <a:srgbClr val="D5DEF0"/>
+                      </a:solidFill>
+                      <a:prstDash val="solid"/>
+                      <a:round/>
+                      <a:headEnd type="none" w="med" len="med"/>
+                      <a:tailEnd type="none" w="med" len="med"/>
+                    </a:lnR>
+                    <a:lnT w="9525" cap="flat" cmpd="sng" algn="ctr">
+                      <a:solidFill>
+                        <a:srgbClr val="D5DEF0"/>
+                      </a:solidFill>
+                      <a:prstDash val="solid"/>
+                      <a:round/>
+                      <a:headEnd type="none" w="med" len="med"/>
+                      <a:tailEnd type="none" w="med" len="med"/>
+                    </a:lnT>
+                    <a:lnB w="9525" cap="flat" cmpd="sng" algn="ctr">
+                      <a:solidFill>
+                        <a:srgbClr val="D5DEF0"/>
+                      </a:solidFill>
+                      <a:prstDash val="solid"/>
+                      <a:round/>
+                      <a:headEnd type="none" w="med" len="med"/>
+                      <a:tailEnd type="none" w="med" len="med"/>
+                    </a:lnB>
+                  </a:tcPr>
+                </a:tc>
+                <a:tc>
+                  <a:txBody>
+                    <a:bodyPr/>
+                    <a:lstStyle/>
+                    <a:p>
+                      <a:pPr indent="0" marL="0">
+                        <a:buNone/>
+                      </a:pPr>
+                      <a:r>
+                        <a:rPr lang="en-US" sz="1000" b="1" dirty="0">
+                          <a:solidFill>
+                            <a:srgbClr val="E8A13A"/>
+                          </a:solidFill>
+                          <a:latin typeface="Microsoft JhengHei" pitchFamily="34" charset="0"/>
+                          <a:ea typeface="Microsoft JhengHei" pitchFamily="34" charset="-122"/>
+                          <a:cs typeface="Microsoft JhengHei" pitchFamily="34" charset="-120"/>
+                        </a:rPr>
+                        <a:t>C</a:t>
+                      </a:r>
+                      <a:endParaRPr lang="en-US" sz="1000" dirty="0">
+                        <a:latin typeface="Microsoft JhengHei" charset="0"/>
+                        <a:ea typeface="Microsoft JhengHei" charset="0"/>
+                        <a:cs typeface="Microsoft JhengHei" charset="0"/>
+                      </a:endParaRPr>
+                    </a:p>
+                  </a:txBody>
+                  <a:tcPr marL="45720" marR="45720" marT="45720" marB="45720" anchor="ctr">
+                    <a:lnL w="9525" cap="flat" cmpd="sng" algn="ctr">
+                      <a:solidFill>
+                        <a:srgbClr val="D5DEF0"/>
+                      </a:solidFill>
+                      <a:prstDash val="solid"/>
+                      <a:round/>
+                      <a:headEnd type="none" w="med" len="med"/>
+                      <a:tailEnd type="none" w="med" len="med"/>
+                    </a:lnL>
+                    <a:lnR w="9525" cap="flat" cmpd="sng" algn="ctr">
+                      <a:solidFill>
+                        <a:srgbClr val="D5DEF0"/>
+                      </a:solidFill>
+                      <a:prstDash val="solid"/>
+                      <a:round/>
+                      <a:headEnd type="none" w="med" len="med"/>
+                      <a:tailEnd type="none" w="med" len="med"/>
+                    </a:lnR>
+                    <a:lnT w="9525" cap="flat" cmpd="sng" algn="ctr">
+                      <a:solidFill>
+                        <a:srgbClr val="D5DEF0"/>
+                      </a:solidFill>
+                      <a:prstDash val="solid"/>
+                      <a:round/>
+                      <a:headEnd type="none" w="med" len="med"/>
+                      <a:tailEnd type="none" w="med" len="med"/>
+                    </a:lnT>
+                    <a:lnB w="9525" cap="flat" cmpd="sng" algn="ctr">
+                      <a:solidFill>
+                        <a:srgbClr val="D5DEF0"/>
+                      </a:solidFill>
+                      <a:prstDash val="solid"/>
+                      <a:round/>
+                      <a:headEnd type="none" w="med" len="med"/>
+                      <a:tailEnd type="none" w="med" len="med"/>
+                    </a:lnB>
+                  </a:tcPr>
+                </a:tc>
+                <a:tc>
+                  <a:txBody>
+                    <a:bodyPr/>
+                    <a:lstStyle/>
+                    <a:p>
+                      <a:pPr indent="0" marL="0">
+                        <a:buNone/>
+                      </a:pPr>
+                      <a:r>
+                        <a:rPr lang="en-US" sz="1000" dirty="0">
+                          <a:solidFill>
+                            <a:srgbClr val="1F2937"/>
+                          </a:solidFill>
+                          <a:latin typeface="Microsoft JhengHei" pitchFamily="34" charset="0"/>
+                          <a:ea typeface="Microsoft JhengHei" pitchFamily="34" charset="-122"/>
+                          <a:cs typeface="Microsoft JhengHei" pitchFamily="34" charset="-120"/>
+                        </a:rPr>
+                        <a:t>三方案卡・徽章・確認卡接真資料</a:t>
+                      </a:r>
+                      <a:endParaRPr lang="en-US" sz="1000" dirty="0">
+                        <a:latin typeface="Microsoft JhengHei" charset="0"/>
+                        <a:ea typeface="Microsoft JhengHei" charset="0"/>
+                        <a:cs typeface="Microsoft JhengHei" charset="0"/>
+                      </a:endParaRPr>
+                    </a:p>
+                  </a:txBody>
+                  <a:tcPr marL="45720" marR="45720" marT="45720" marB="45720" anchor="ctr">
+                    <a:lnL w="9525" cap="flat" cmpd="sng" algn="ctr">
+                      <a:solidFill>
+                        <a:srgbClr val="D5DEF0"/>
+                      </a:solidFill>
+                      <a:prstDash val="solid"/>
+                      <a:round/>
+                      <a:headEnd type="none" w="med" len="med"/>
+                      <a:tailEnd type="none" w="med" len="med"/>
+                    </a:lnL>
+                    <a:lnR w="9525" cap="flat" cmpd="sng" algn="ctr">
+                      <a:solidFill>
+                        <a:srgbClr val="D5DEF0"/>
+                      </a:solidFill>
+                      <a:prstDash val="solid"/>
+                      <a:round/>
+                      <a:headEnd type="none" w="med" len="med"/>
+                      <a:tailEnd type="none" w="med" len="med"/>
+                    </a:lnR>
+                    <a:lnT w="9525" cap="flat" cmpd="sng" algn="ctr">
+                      <a:solidFill>
+                        <a:srgbClr val="D5DEF0"/>
+                      </a:solidFill>
+                      <a:prstDash val="solid"/>
+                      <a:round/>
+                      <a:headEnd type="none" w="med" len="med"/>
+                      <a:tailEnd type="none" w="med" len="med"/>
+                    </a:lnT>
+                    <a:lnB w="9525" cap="flat" cmpd="sng" algn="ctr">
+                      <a:solidFill>
+                        <a:srgbClr val="D5DEF0"/>
+                      </a:solidFill>
+                      <a:prstDash val="solid"/>
+                      <a:round/>
+                      <a:headEnd type="none" w="med" len="med"/>
+                      <a:tailEnd type="none" w="med" len="med"/>
+                    </a:lnB>
+                  </a:tcPr>
+                </a:tc>
+              </a:tr>
+              <a:tr h="352044">
+                <a:tc>
+                  <a:txBody>
+                    <a:bodyPr/>
+                    <a:lstStyle/>
+                    <a:p>
+                      <a:pPr indent="0" marL="0">
+                        <a:buNone/>
+                      </a:pPr>
+                      <a:r>
+                        <a:rPr lang="en-US" sz="1000" b="1" dirty="0">
+                          <a:solidFill>
+                            <a:srgbClr val="1F2937"/>
+                          </a:solidFill>
+                          <a:latin typeface="Microsoft JhengHei" pitchFamily="34" charset="0"/>
+                          <a:ea typeface="Microsoft JhengHei" pitchFamily="34" charset="-122"/>
+                          <a:cs typeface="Microsoft JhengHei" pitchFamily="34" charset="-120"/>
+                        </a:rPr>
+                        <a:t>A：核心全完成</a:t>
+                      </a:r>
+                      <a:endParaRPr lang="en-US" sz="1000" dirty="0">
+                        <a:latin typeface="Microsoft JhengHei" charset="0"/>
+                        <a:ea typeface="Microsoft JhengHei" charset="0"/>
+                        <a:cs typeface="Microsoft JhengHei" charset="0"/>
+                      </a:endParaRPr>
+                    </a:p>
+                  </a:txBody>
+                  <a:tcPr marL="45720" marR="45720" marT="45720" marB="45720" anchor="ctr">
+                    <a:lnL w="9525" cap="flat" cmpd="sng" algn="ctr">
+                      <a:solidFill>
+                        <a:srgbClr val="D5DEF0"/>
+                      </a:solidFill>
+                      <a:prstDash val="solid"/>
+                      <a:round/>
+                      <a:headEnd type="none" w="med" len="med"/>
+                      <a:tailEnd type="none" w="med" len="med"/>
+                    </a:lnL>
+                    <a:lnR w="9525" cap="flat" cmpd="sng" algn="ctr">
+                      <a:solidFill>
+                        <a:srgbClr val="D5DEF0"/>
+                      </a:solidFill>
+                      <a:prstDash val="solid"/>
+                      <a:round/>
+                      <a:headEnd type="none" w="med" len="med"/>
+                      <a:tailEnd type="none" w="med" len="med"/>
+                    </a:lnR>
+                    <a:lnT w="9525" cap="flat" cmpd="sng" algn="ctr">
+                      <a:solidFill>
+                        <a:srgbClr val="D5DEF0"/>
+                      </a:solidFill>
+                      <a:prstDash val="solid"/>
+                      <a:round/>
+                      <a:headEnd type="none" w="med" len="med"/>
+                      <a:tailEnd type="none" w="med" len="med"/>
+                    </a:lnT>
+                    <a:lnB w="9525" cap="flat" cmpd="sng" algn="ctr">
+                      <a:solidFill>
+                        <a:srgbClr val="D5DEF0"/>
+                      </a:solidFill>
+                      <a:prstDash val="solid"/>
+                      <a:round/>
+                      <a:headEnd type="none" w="med" len="med"/>
+                      <a:tailEnd type="none" w="med" len="med"/>
+                    </a:lnB>
+                  </a:tcPr>
+                </a:tc>
+                <a:tc>
+                  <a:txBody>
+                    <a:bodyPr/>
+                    <a:lstStyle/>
+                    <a:p>
+                      <a:pPr indent="0" marL="0">
+                        <a:buNone/>
+                      </a:pPr>
+                      <a:r>
+                        <a:rPr lang="en-US" sz="1000" dirty="0">
+                          <a:solidFill>
+                            <a:srgbClr val="16224D"/>
+                          </a:solidFill>
+                          <a:latin typeface="Microsoft JhengHei" pitchFamily="34" charset="0"/>
+                          <a:ea typeface="Microsoft JhengHei" pitchFamily="34" charset="-122"/>
+                          <a:cs typeface="Microsoft JhengHei" pitchFamily="34" charset="-120"/>
+                        </a:rPr>
+                        <a:t>可測版本 tag</a:t>
+                      </a:r>
+                      <a:endParaRPr lang="en-US" sz="1000" dirty="0">
+                        <a:latin typeface="Microsoft JhengHei" charset="0"/>
+                        <a:ea typeface="Microsoft JhengHei" charset="0"/>
+                        <a:cs typeface="Microsoft JhengHei" charset="0"/>
+                      </a:endParaRPr>
+                    </a:p>
+                  </a:txBody>
+                  <a:tcPr marL="45720" marR="45720" marT="45720" marB="45720" anchor="ctr">
+                    <a:lnL w="9525" cap="flat" cmpd="sng" algn="ctr">
+                      <a:solidFill>
+                        <a:srgbClr val="D5DEF0"/>
+                      </a:solidFill>
+                      <a:prstDash val="solid"/>
+                      <a:round/>
+                      <a:headEnd type="none" w="med" len="med"/>
+                      <a:tailEnd type="none" w="med" len="med"/>
+                    </a:lnL>
+                    <a:lnR w="9525" cap="flat" cmpd="sng" algn="ctr">
+                      <a:solidFill>
+                        <a:srgbClr val="D5DEF0"/>
+                      </a:solidFill>
+                      <a:prstDash val="solid"/>
+                      <a:round/>
+                      <a:headEnd type="none" w="med" len="med"/>
+                      <a:tailEnd type="none" w="med" len="med"/>
+                    </a:lnR>
+                    <a:lnT w="9525" cap="flat" cmpd="sng" algn="ctr">
+                      <a:solidFill>
+                        <a:srgbClr val="D5DEF0"/>
+                      </a:solidFill>
+                      <a:prstDash val="solid"/>
+                      <a:round/>
+                      <a:headEnd type="none" w="med" len="med"/>
+                      <a:tailEnd type="none" w="med" len="med"/>
+                    </a:lnT>
+                    <a:lnB w="9525" cap="flat" cmpd="sng" algn="ctr">
+                      <a:solidFill>
+                        <a:srgbClr val="D5DEF0"/>
+                      </a:solidFill>
+                      <a:prstDash val="solid"/>
+                      <a:round/>
+                      <a:headEnd type="none" w="med" len="med"/>
+                      <a:tailEnd type="none" w="med" len="med"/>
+                    </a:lnB>
+                  </a:tcPr>
+                </a:tc>
+                <a:tc>
+                  <a:txBody>
+                    <a:bodyPr/>
+                    <a:lstStyle/>
+                    <a:p>
+                      <a:pPr indent="0" marL="0">
+                        <a:buNone/>
+                      </a:pPr>
+                      <a:r>
+                        <a:rPr lang="en-US" sz="1000" b="1" dirty="0">
+                          <a:solidFill>
+                            <a:srgbClr val="E8A13A"/>
+                          </a:solidFill>
+                          <a:latin typeface="Microsoft JhengHei" pitchFamily="34" charset="0"/>
+                          <a:ea typeface="Microsoft JhengHei" pitchFamily="34" charset="-122"/>
+                          <a:cs typeface="Microsoft JhengHei" pitchFamily="34" charset="-120"/>
+                        </a:rPr>
+                        <a:t>D</a:t>
+                      </a:r>
+                      <a:endParaRPr lang="en-US" sz="1000" dirty="0">
+                        <a:latin typeface="Microsoft JhengHei" charset="0"/>
+                        <a:ea typeface="Microsoft JhengHei" charset="0"/>
+                        <a:cs typeface="Microsoft JhengHei" charset="0"/>
+                      </a:endParaRPr>
+                    </a:p>
+                  </a:txBody>
+                  <a:tcPr marL="45720" marR="45720" marT="45720" marB="45720" anchor="ctr">
+                    <a:lnL w="9525" cap="flat" cmpd="sng" algn="ctr">
+                      <a:solidFill>
+                        <a:srgbClr val="D5DEF0"/>
+                      </a:solidFill>
+                      <a:prstDash val="solid"/>
+                      <a:round/>
+                      <a:headEnd type="none" w="med" len="med"/>
+                      <a:tailEnd type="none" w="med" len="med"/>
+                    </a:lnL>
+                    <a:lnR w="9525" cap="flat" cmpd="sng" algn="ctr">
+                      <a:solidFill>
+                        <a:srgbClr val="D5DEF0"/>
+                      </a:solidFill>
+                      <a:prstDash val="solid"/>
+                      <a:round/>
+                      <a:headEnd type="none" w="med" len="med"/>
+                      <a:tailEnd type="none" w="med" len="med"/>
+                    </a:lnR>
+                    <a:lnT w="9525" cap="flat" cmpd="sng" algn="ctr">
+                      <a:solidFill>
+                        <a:srgbClr val="D5DEF0"/>
+                      </a:solidFill>
+                      <a:prstDash val="solid"/>
+                      <a:round/>
+                      <a:headEnd type="none" w="med" len="med"/>
+                      <a:tailEnd type="none" w="med" len="med"/>
+                    </a:lnT>
+                    <a:lnB w="9525" cap="flat" cmpd="sng" algn="ctr">
+                      <a:solidFill>
+                        <a:srgbClr val="D5DEF0"/>
+                      </a:solidFill>
+                      <a:prstDash val="solid"/>
+                      <a:round/>
+                      <a:headEnd type="none" w="med" len="med"/>
+                      <a:tailEnd type="none" w="med" len="med"/>
+                    </a:lnB>
+                  </a:tcPr>
+                </a:tc>
+                <a:tc>
+                  <a:txBody>
+                    <a:bodyPr/>
+                    <a:lstStyle/>
+                    <a:p>
+                      <a:pPr indent="0" marL="0">
+                        <a:buNone/>
+                      </a:pPr>
+                      <a:r>
+                        <a:rPr lang="en-US" sz="1000" dirty="0">
+                          <a:solidFill>
+                            <a:srgbClr val="1F2937"/>
+                          </a:solidFill>
+                          <a:latin typeface="Microsoft JhengHei" pitchFamily="34" charset="0"/>
+                          <a:ea typeface="Microsoft JhengHei" pitchFamily="34" charset="-122"/>
+                          <a:cs typeface="Microsoft JhengHei" pitchFamily="34" charset="-120"/>
+                        </a:rPr>
+                        <a:t>E2E Golden Path 開跑</a:t>
+                      </a:r>
+                      <a:endParaRPr lang="en-US" sz="1000" dirty="0">
+                        <a:latin typeface="Microsoft JhengHei" charset="0"/>
+                        <a:ea typeface="Microsoft JhengHei" charset="0"/>
+                        <a:cs typeface="Microsoft JhengHei" charset="0"/>
+                      </a:endParaRPr>
+                    </a:p>
+                  </a:txBody>
+                  <a:tcPr marL="45720" marR="45720" marT="45720" marB="45720" anchor="ctr">
+                    <a:lnL w="9525" cap="flat" cmpd="sng" algn="ctr">
+                      <a:solidFill>
+                        <a:srgbClr val="D5DEF0"/>
+                      </a:solidFill>
+                      <a:prstDash val="solid"/>
+                      <a:round/>
+                      <a:headEnd type="none" w="med" len="med"/>
+                      <a:tailEnd type="none" w="med" len="med"/>
+                    </a:lnL>
+                    <a:lnR w="9525" cap="flat" cmpd="sng" algn="ctr">
+                      <a:solidFill>
+                        <a:srgbClr val="D5DEF0"/>
+                      </a:solidFill>
+                      <a:prstDash val="solid"/>
+                      <a:round/>
+                      <a:headEnd type="none" w="med" len="med"/>
+                      <a:tailEnd type="none" w="med" len="med"/>
+                    </a:lnR>
+                    <a:lnT w="9525" cap="flat" cmpd="sng" algn="ctr">
+                      <a:solidFill>
+                        <a:srgbClr val="D5DEF0"/>
+                      </a:solidFill>
+                      <a:prstDash val="solid"/>
+                      <a:round/>
+                      <a:headEnd type="none" w="med" len="med"/>
+                      <a:tailEnd type="none" w="med" len="med"/>
+                    </a:lnT>
+                    <a:lnB w="9525" cap="flat" cmpd="sng" algn="ctr">
+                      <a:solidFill>
+                        <a:srgbClr val="D5DEF0"/>
+                      </a:solidFill>
+                      <a:prstDash val="solid"/>
+                      <a:round/>
+                      <a:headEnd type="none" w="med" len="med"/>
+                      <a:tailEnd type="none" w="med" len="med"/>
+                    </a:lnB>
+                  </a:tcPr>
+                </a:tc>
+              </a:tr>
+              <a:tr h="352044">
+                <a:tc>
+                  <a:txBody>
+                    <a:bodyPr/>
+                    <a:lstStyle/>
+                    <a:p>
+                      <a:pPr indent="0" marL="0">
+                        <a:buNone/>
+                      </a:pPr>
+                      <a:r>
+                        <a:rPr lang="en-US" sz="1000" b="1" dirty="0">
+                          <a:solidFill>
+                            <a:srgbClr val="1F2937"/>
+                          </a:solidFill>
+                          <a:latin typeface="Microsoft JhengHei" pitchFamily="34" charset="0"/>
+                          <a:ea typeface="Microsoft JhengHei" pitchFamily="34" charset="-122"/>
+                          <a:cs typeface="Microsoft JhengHei" pitchFamily="34" charset="-120"/>
+                        </a:rPr>
+                        <a:t>C：手機版＋元件（#13）</a:t>
+                      </a:r>
+                      <a:endParaRPr lang="en-US" sz="1000" dirty="0">
+                        <a:latin typeface="Microsoft JhengHei" charset="0"/>
+                        <a:ea typeface="Microsoft JhengHei" charset="0"/>
+                        <a:cs typeface="Microsoft JhengHei" charset="0"/>
+                      </a:endParaRPr>
+                    </a:p>
+                  </a:txBody>
+                  <a:tcPr marL="45720" marR="45720" marT="45720" marB="45720" anchor="ctr">
+                    <a:lnL w="9525" cap="flat" cmpd="sng" algn="ctr">
+                      <a:solidFill>
+                        <a:srgbClr val="D5DEF0"/>
+                      </a:solidFill>
+                      <a:prstDash val="solid"/>
+                      <a:round/>
+                      <a:headEnd type="none" w="med" len="med"/>
+                      <a:tailEnd type="none" w="med" len="med"/>
+                    </a:lnL>
+                    <a:lnR w="9525" cap="flat" cmpd="sng" algn="ctr">
+                      <a:solidFill>
+                        <a:srgbClr val="D5DEF0"/>
+                      </a:solidFill>
+                      <a:prstDash val="solid"/>
+                      <a:round/>
+                      <a:headEnd type="none" w="med" len="med"/>
+                      <a:tailEnd type="none" w="med" len="med"/>
+                    </a:lnR>
+                    <a:lnT w="9525" cap="flat" cmpd="sng" algn="ctr">
+                      <a:solidFill>
+                        <a:srgbClr val="D5DEF0"/>
+                      </a:solidFill>
+                      <a:prstDash val="solid"/>
+                      <a:round/>
+                      <a:headEnd type="none" w="med" len="med"/>
+                      <a:tailEnd type="none" w="med" len="med"/>
+                    </a:lnT>
+                    <a:lnB w="9525" cap="flat" cmpd="sng" algn="ctr">
+                      <a:solidFill>
+                        <a:srgbClr val="D5DEF0"/>
+                      </a:solidFill>
+                      <a:prstDash val="solid"/>
+                      <a:round/>
+                      <a:headEnd type="none" w="med" len="med"/>
+                      <a:tailEnd type="none" w="med" len="med"/>
+                    </a:lnB>
+                  </a:tcPr>
+                </a:tc>
+                <a:tc>
+                  <a:txBody>
+                    <a:bodyPr/>
+                    <a:lstStyle/>
+                    <a:p>
+                      <a:pPr indent="0" marL="0">
+                        <a:buNone/>
+                      </a:pPr>
+                      <a:r>
+                        <a:rPr lang="en-US" sz="1000" dirty="0">
+                          <a:solidFill>
+                            <a:srgbClr val="16224D"/>
+                          </a:solidFill>
+                          <a:latin typeface="Microsoft JhengHei" pitchFamily="34" charset="0"/>
+                          <a:ea typeface="Microsoft JhengHei" pitchFamily="34" charset="-122"/>
+                          <a:cs typeface="Microsoft JhengHei" pitchFamily="34" charset="-120"/>
+                        </a:rPr>
+                        <a:t>可操作前端</a:t>
+                      </a:r>
+                      <a:endParaRPr lang="en-US" sz="1000" dirty="0">
+                        <a:latin typeface="Microsoft JhengHei" charset="0"/>
+                        <a:ea typeface="Microsoft JhengHei" charset="0"/>
+                        <a:cs typeface="Microsoft JhengHei" charset="0"/>
+                      </a:endParaRPr>
+                    </a:p>
+                  </a:txBody>
+                  <a:tcPr marL="45720" marR="45720" marT="45720" marB="45720" anchor="ctr">
+                    <a:lnL w="9525" cap="flat" cmpd="sng" algn="ctr">
+                      <a:solidFill>
+                        <a:srgbClr val="D5DEF0"/>
+                      </a:solidFill>
+                      <a:prstDash val="solid"/>
+                      <a:round/>
+                      <a:headEnd type="none" w="med" len="med"/>
+                      <a:tailEnd type="none" w="med" len="med"/>
+                    </a:lnL>
+                    <a:lnR w="9525" cap="flat" cmpd="sng" algn="ctr">
+                      <a:solidFill>
+                        <a:srgbClr val="D5DEF0"/>
+                      </a:solidFill>
+                      <a:prstDash val="solid"/>
+                      <a:round/>
+                      <a:headEnd type="none" w="med" len="med"/>
+                      <a:tailEnd type="none" w="med" len="med"/>
+                    </a:lnR>
+                    <a:lnT w="9525" cap="flat" cmpd="sng" algn="ctr">
+                      <a:solidFill>
+                        <a:srgbClr val="D5DEF0"/>
+                      </a:solidFill>
+                      <a:prstDash val="solid"/>
+                      <a:round/>
+                      <a:headEnd type="none" w="med" len="med"/>
+                      <a:tailEnd type="none" w="med" len="med"/>
+                    </a:lnT>
+                    <a:lnB w="9525" cap="flat" cmpd="sng" algn="ctr">
+                      <a:solidFill>
+                        <a:srgbClr val="D5DEF0"/>
+                      </a:solidFill>
+                      <a:prstDash val="solid"/>
+                      <a:round/>
+                      <a:headEnd type="none" w="med" len="med"/>
+                      <a:tailEnd type="none" w="med" len="med"/>
+                    </a:lnB>
+                  </a:tcPr>
+                </a:tc>
+                <a:tc>
+                  <a:txBody>
+                    <a:bodyPr/>
+                    <a:lstStyle/>
+                    <a:p>
+                      <a:pPr indent="0" marL="0">
+                        <a:buNone/>
+                      </a:pPr>
+                      <a:r>
+                        <a:rPr lang="en-US" sz="1000" b="1" dirty="0">
+                          <a:solidFill>
+                            <a:srgbClr val="E8A13A"/>
+                          </a:solidFill>
+                          <a:latin typeface="Microsoft JhengHei" pitchFamily="34" charset="0"/>
+                          <a:ea typeface="Microsoft JhengHei" pitchFamily="34" charset="-122"/>
+                          <a:cs typeface="Microsoft JhengHei" pitchFamily="34" charset="-120"/>
+                        </a:rPr>
+                        <a:t>D</a:t>
+                      </a:r>
+                      <a:endParaRPr lang="en-US" sz="1000" dirty="0">
+                        <a:latin typeface="Microsoft JhengHei" charset="0"/>
+                        <a:ea typeface="Microsoft JhengHei" charset="0"/>
+                        <a:cs typeface="Microsoft JhengHei" charset="0"/>
+                      </a:endParaRPr>
+                    </a:p>
+                  </a:txBody>
+                  <a:tcPr marL="45720" marR="45720" marT="45720" marB="45720" anchor="ctr">
+                    <a:lnL w="9525" cap="flat" cmpd="sng" algn="ctr">
+                      <a:solidFill>
+                        <a:srgbClr val="D5DEF0"/>
+                      </a:solidFill>
+                      <a:prstDash val="solid"/>
+                      <a:round/>
+                      <a:headEnd type="none" w="med" len="med"/>
+                      <a:tailEnd type="none" w="med" len="med"/>
+                    </a:lnL>
+                    <a:lnR w="9525" cap="flat" cmpd="sng" algn="ctr">
+                      <a:solidFill>
+                        <a:srgbClr val="D5DEF0"/>
+                      </a:solidFill>
+                      <a:prstDash val="solid"/>
+                      <a:round/>
+                      <a:headEnd type="none" w="med" len="med"/>
+                      <a:tailEnd type="none" w="med" len="med"/>
+                    </a:lnR>
+                    <a:lnT w="9525" cap="flat" cmpd="sng" algn="ctr">
+                      <a:solidFill>
+                        <a:srgbClr val="D5DEF0"/>
+                      </a:solidFill>
+                      <a:prstDash val="solid"/>
+                      <a:round/>
+                      <a:headEnd type="none" w="med" len="med"/>
+                      <a:tailEnd type="none" w="med" len="med"/>
+                    </a:lnT>
+                    <a:lnB w="9525" cap="flat" cmpd="sng" algn="ctr">
+                      <a:solidFill>
+                        <a:srgbClr val="D5DEF0"/>
+                      </a:solidFill>
+                      <a:prstDash val="solid"/>
+                      <a:round/>
+                      <a:headEnd type="none" w="med" len="med"/>
+                      <a:tailEnd type="none" w="med" len="med"/>
+                    </a:lnB>
+                  </a:tcPr>
+                </a:tc>
+                <a:tc>
+                  <a:txBody>
+                    <a:bodyPr/>
+                    <a:lstStyle/>
+                    <a:p>
+                      <a:pPr indent="0" marL="0">
+                        <a:buNone/>
+                      </a:pPr>
+                      <a:r>
+                        <a:rPr lang="en-US" sz="1000" dirty="0">
+                          <a:solidFill>
+                            <a:srgbClr val="1F2937"/>
+                          </a:solidFill>
+                          <a:latin typeface="Microsoft JhengHei" pitchFamily="34" charset="0"/>
+                          <a:ea typeface="Microsoft JhengHei" pitchFamily="34" charset="-122"/>
+                          <a:cs typeface="Microsoft JhengHei" pitchFamily="34" charset="-120"/>
+                        </a:rPr>
+                        <a:t>E2E＋離線備援驗證</a:t>
+                      </a:r>
+                      <a:endParaRPr lang="en-US" sz="1000" dirty="0">
+                        <a:latin typeface="Microsoft JhengHei" charset="0"/>
+                        <a:ea typeface="Microsoft JhengHei" charset="0"/>
+                        <a:cs typeface="Microsoft JhengHei" charset="0"/>
+                      </a:endParaRPr>
+                    </a:p>
+                  </a:txBody>
+                  <a:tcPr marL="45720" marR="45720" marT="45720" marB="45720" anchor="ctr">
+                    <a:lnL w="9525" cap="flat" cmpd="sng" algn="ctr">
+                      <a:solidFill>
+                        <a:srgbClr val="D5DEF0"/>
+                      </a:solidFill>
+                      <a:prstDash val="solid"/>
+                      <a:round/>
+                      <a:headEnd type="none" w="med" len="med"/>
+                      <a:tailEnd type="none" w="med" len="med"/>
+                    </a:lnL>
+                    <a:lnR w="9525" cap="flat" cmpd="sng" algn="ctr">
+                      <a:solidFill>
+                        <a:srgbClr val="D5DEF0"/>
+                      </a:solidFill>
+                      <a:prstDash val="solid"/>
+                      <a:round/>
+                      <a:headEnd type="none" w="med" len="med"/>
+                      <a:tailEnd type="none" w="med" len="med"/>
+                    </a:lnR>
+                    <a:lnT w="9525" cap="flat" cmpd="sng" algn="ctr">
+                      <a:solidFill>
+                        <a:srgbClr val="D5DEF0"/>
+                      </a:solidFill>
+                      <a:prstDash val="solid"/>
+                      <a:round/>
+                      <a:headEnd type="none" w="med" len="med"/>
+                      <a:tailEnd type="none" w="med" len="med"/>
+                    </a:lnT>
+                    <a:lnB w="9525" cap="flat" cmpd="sng" algn="ctr">
+                      <a:solidFill>
+                        <a:srgbClr val="D5DEF0"/>
+                      </a:solidFill>
+                      <a:prstDash val="solid"/>
+                      <a:round/>
+                      <a:headEnd type="none" w="med" len="med"/>
+                      <a:tailEnd type="none" w="med" len="med"/>
+                    </a:lnB>
+                  </a:tcPr>
+                </a:tc>
+              </a:tr>
+              <a:tr h="352044">
+                <a:tc>
+                  <a:txBody>
+                    <a:bodyPr/>
+                    <a:lstStyle/>
+                    <a:p>
+                      <a:pPr indent="0" marL="0">
+                        <a:buNone/>
+                      </a:pPr>
+                      <a:r>
+                        <a:rPr lang="en-US" sz="1000" b="1" dirty="0">
+                          <a:solidFill>
+                            <a:srgbClr val="1F2937"/>
+                          </a:solidFill>
+                          <a:latin typeface="Microsoft JhengHei" pitchFamily="34" charset="0"/>
+                          <a:ea typeface="Microsoft JhengHei" pitchFamily="34" charset="-122"/>
+                          <a:cs typeface="Microsoft JhengHei" pitchFamily="34" charset="-120"/>
+                        </a:rPr>
+                        <a:t>D：E2E 全線綠燈</a:t>
+                      </a:r>
+                      <a:endParaRPr lang="en-US" sz="1000" dirty="0">
+                        <a:latin typeface="Microsoft JhengHei" charset="0"/>
+                        <a:ea typeface="Microsoft JhengHei" charset="0"/>
+                        <a:cs typeface="Microsoft JhengHei" charset="0"/>
+                      </a:endParaRPr>
+                    </a:p>
+                  </a:txBody>
+                  <a:tcPr marL="45720" marR="45720" marT="45720" marB="45720" anchor="ctr">
+                    <a:lnL w="9525" cap="flat" cmpd="sng" algn="ctr">
+                      <a:solidFill>
+                        <a:srgbClr val="D5DEF0"/>
+                      </a:solidFill>
+                      <a:prstDash val="solid"/>
+                      <a:round/>
+                      <a:headEnd type="none" w="med" len="med"/>
+                      <a:tailEnd type="none" w="med" len="med"/>
+                    </a:lnL>
+                    <a:lnR w="9525" cap="flat" cmpd="sng" algn="ctr">
+                      <a:solidFill>
+                        <a:srgbClr val="D5DEF0"/>
+                      </a:solidFill>
+                      <a:prstDash val="solid"/>
+                      <a:round/>
+                      <a:headEnd type="none" w="med" len="med"/>
+                      <a:tailEnd type="none" w="med" len="med"/>
+                    </a:lnR>
+                    <a:lnT w="9525" cap="flat" cmpd="sng" algn="ctr">
+                      <a:solidFill>
+                        <a:srgbClr val="D5DEF0"/>
+                      </a:solidFill>
+                      <a:prstDash val="solid"/>
+                      <a:round/>
+                      <a:headEnd type="none" w="med" len="med"/>
+                      <a:tailEnd type="none" w="med" len="med"/>
+                    </a:lnT>
+                    <a:lnB w="9525" cap="flat" cmpd="sng" algn="ctr">
+                      <a:solidFill>
+                        <a:srgbClr val="D5DEF0"/>
+                      </a:solidFill>
+                      <a:prstDash val="solid"/>
+                      <a:round/>
+                      <a:headEnd type="none" w="med" len="med"/>
+                      <a:tailEnd type="none" w="med" len="med"/>
+                    </a:lnB>
+                  </a:tcPr>
+                </a:tc>
+                <a:tc>
+                  <a:txBody>
+                    <a:bodyPr/>
+                    <a:lstStyle/>
+                    <a:p>
+                      <a:pPr indent="0" marL="0">
+                        <a:buNone/>
+                      </a:pPr>
+                      <a:r>
+                        <a:rPr lang="en-US" sz="1000" dirty="0">
+                          <a:solidFill>
+                            <a:srgbClr val="16224D"/>
+                          </a:solidFill>
+                          <a:latin typeface="Microsoft JhengHei" pitchFamily="34" charset="0"/>
+                          <a:ea typeface="Microsoft JhengHei" pitchFamily="34" charset="-122"/>
+                          <a:cs typeface="Microsoft JhengHei" pitchFamily="34" charset="-120"/>
+                        </a:rPr>
+                        <a:t>綠燈</a:t>
+                      </a:r>
+                      <a:endParaRPr lang="en-US" sz="1000" dirty="0">
+                        <a:latin typeface="Microsoft JhengHei" charset="0"/>
+                        <a:ea typeface="Microsoft JhengHei" charset="0"/>
+                        <a:cs typeface="Microsoft JhengHei" charset="0"/>
+                      </a:endParaRPr>
+                    </a:p>
+                  </a:txBody>
+                  <a:tcPr marL="45720" marR="45720" marT="45720" marB="45720" anchor="ctr">
+                    <a:lnL w="9525" cap="flat" cmpd="sng" algn="ctr">
+                      <a:solidFill>
+                        <a:srgbClr val="D5DEF0"/>
+                      </a:solidFill>
+                      <a:prstDash val="solid"/>
+                      <a:round/>
+                      <a:headEnd type="none" w="med" len="med"/>
+                      <a:tailEnd type="none" w="med" len="med"/>
+                    </a:lnL>
+                    <a:lnR w="9525" cap="flat" cmpd="sng" algn="ctr">
+                      <a:solidFill>
+                        <a:srgbClr val="D5DEF0"/>
+                      </a:solidFill>
+                      <a:prstDash val="solid"/>
+                      <a:round/>
+                      <a:headEnd type="none" w="med" len="med"/>
+                      <a:tailEnd type="none" w="med" len="med"/>
+                    </a:lnR>
+                    <a:lnT w="9525" cap="flat" cmpd="sng" algn="ctr">
+                      <a:solidFill>
+                        <a:srgbClr val="D5DEF0"/>
+                      </a:solidFill>
+                      <a:prstDash val="solid"/>
+                      <a:round/>
+                      <a:headEnd type="none" w="med" len="med"/>
+                      <a:tailEnd type="none" w="med" len="med"/>
+                    </a:lnT>
+                    <a:lnB w="9525" cap="flat" cmpd="sng" algn="ctr">
+                      <a:solidFill>
+                        <a:srgbClr val="D5DEF0"/>
+                      </a:solidFill>
+                      <a:prstDash val="solid"/>
+                      <a:round/>
+                      <a:headEnd type="none" w="med" len="med"/>
+                      <a:tailEnd type="none" w="med" len="med"/>
+                    </a:lnB>
+                  </a:tcPr>
+                </a:tc>
+                <a:tc>
+                  <a:txBody>
+                    <a:bodyPr/>
+                    <a:lstStyle/>
+                    <a:p>
+                      <a:pPr indent="0" marL="0">
+                        <a:buNone/>
+                      </a:pPr>
+                      <a:r>
+                        <a:rPr lang="en-US" sz="1000" b="1" dirty="0">
+                          <a:solidFill>
+                            <a:srgbClr val="E8A13A"/>
+                          </a:solidFill>
+                          <a:latin typeface="Microsoft JhengHei" pitchFamily="34" charset="0"/>
+                          <a:ea typeface="Microsoft JhengHei" pitchFamily="34" charset="-122"/>
+                          <a:cs typeface="Microsoft JhengHei" pitchFamily="34" charset="-120"/>
+                        </a:rPr>
+                        <a:t>D 自己</a:t>
+                      </a:r>
+                      <a:endParaRPr lang="en-US" sz="1000" dirty="0">
+                        <a:latin typeface="Microsoft JhengHei" charset="0"/>
+                        <a:ea typeface="Microsoft JhengHei" charset="0"/>
+                        <a:cs typeface="Microsoft JhengHei" charset="0"/>
+                      </a:endParaRPr>
+                    </a:p>
+                  </a:txBody>
+                  <a:tcPr marL="45720" marR="45720" marT="45720" marB="45720" anchor="ctr">
+                    <a:lnL w="9525" cap="flat" cmpd="sng" algn="ctr">
+                      <a:solidFill>
+                        <a:srgbClr val="D5DEF0"/>
+                      </a:solidFill>
+                      <a:prstDash val="solid"/>
+                      <a:round/>
+                      <a:headEnd type="none" w="med" len="med"/>
+                      <a:tailEnd type="none" w="med" len="med"/>
+                    </a:lnL>
+                    <a:lnR w="9525" cap="flat" cmpd="sng" algn="ctr">
+                      <a:solidFill>
+                        <a:srgbClr val="D5DEF0"/>
+                      </a:solidFill>
+                      <a:prstDash val="solid"/>
+                      <a:round/>
+                      <a:headEnd type="none" w="med" len="med"/>
+                      <a:tailEnd type="none" w="med" len="med"/>
+                    </a:lnR>
+                    <a:lnT w="9525" cap="flat" cmpd="sng" algn="ctr">
+                      <a:solidFill>
+                        <a:srgbClr val="D5DEF0"/>
+                      </a:solidFill>
+                      <a:prstDash val="solid"/>
+                      <a:round/>
+                      <a:headEnd type="none" w="med" len="med"/>
+                      <a:tailEnd type="none" w="med" len="med"/>
+                    </a:lnT>
+                    <a:lnB w="9525" cap="flat" cmpd="sng" algn="ctr">
+                      <a:solidFill>
+                        <a:srgbClr val="D5DEF0"/>
+                      </a:solidFill>
+                      <a:prstDash val="solid"/>
+                      <a:round/>
+                      <a:headEnd type="none" w="med" len="med"/>
+                      <a:tailEnd type="none" w="med" len="med"/>
+                    </a:lnB>
+                  </a:tcPr>
+                </a:tc>
+                <a:tc>
+                  <a:txBody>
+                    <a:bodyPr/>
+                    <a:lstStyle/>
+                    <a:p>
+                      <a:pPr indent="0" marL="0">
+                        <a:buNone/>
+                      </a:pPr>
+                      <a:r>
+                        <a:rPr lang="en-US" sz="1000" dirty="0">
+                          <a:solidFill>
+                            <a:srgbClr val="1F2937"/>
+                          </a:solidFill>
+                          <a:latin typeface="Microsoft JhengHei" pitchFamily="34" charset="0"/>
+                          <a:ea typeface="Microsoft JhengHei" pitchFamily="34" charset="-122"/>
+                          <a:cs typeface="Microsoft JhengHei" pitchFamily="34" charset="-120"/>
+                        </a:rPr>
+                        <a:t>預錄影片（#8）＋DEPLOY.md（#14）</a:t>
+                      </a:r>
+                      <a:endParaRPr lang="en-US" sz="1000" dirty="0">
+                        <a:latin typeface="Microsoft JhengHei" charset="0"/>
+                        <a:ea typeface="Microsoft JhengHei" charset="0"/>
+                        <a:cs typeface="Microsoft JhengHei" charset="0"/>
+                      </a:endParaRPr>
+                    </a:p>
+                  </a:txBody>
+                  <a:tcPr marL="45720" marR="45720" marT="45720" marB="45720" anchor="ctr">
+                    <a:lnL w="9525" cap="flat" cmpd="sng" algn="ctr">
+                      <a:solidFill>
+                        <a:srgbClr val="D5DEF0"/>
+                      </a:solidFill>
+                      <a:prstDash val="solid"/>
+                      <a:round/>
+                      <a:headEnd type="none" w="med" len="med"/>
+                      <a:tailEnd type="none" w="med" len="med"/>
+                    </a:lnL>
+                    <a:lnR w="9525" cap="flat" cmpd="sng" algn="ctr">
+                      <a:solidFill>
+                        <a:srgbClr val="D5DEF0"/>
+                      </a:solidFill>
+                      <a:prstDash val="solid"/>
+                      <a:round/>
+                      <a:headEnd type="none" w="med" len="med"/>
+                      <a:tailEnd type="none" w="med" len="med"/>
+                    </a:lnR>
+                    <a:lnT w="9525" cap="flat" cmpd="sng" algn="ctr">
+                      <a:solidFill>
+                        <a:srgbClr val="D5DEF0"/>
+                      </a:solidFill>
+                      <a:prstDash val="solid"/>
+                      <a:round/>
+                      <a:headEnd type="none" w="med" len="med"/>
+                      <a:tailEnd type="none" w="med" len="med"/>
+                    </a:lnT>
+                    <a:lnB w="9525" cap="flat" cmpd="sng" algn="ctr">
+                      <a:solidFill>
+                        <a:srgbClr val="D5DEF0"/>
+                      </a:solidFill>
+                      <a:prstDash val="solid"/>
+                      <a:round/>
+                      <a:headEnd type="none" w="med" len="med"/>
+                      <a:tailEnd type="none" w="med" len="med"/>
+                    </a:lnB>
+                  </a:tcPr>
+                </a:tc>
+              </a:tr>
+              <a:tr h="352044">
+                <a:tc>
+                  <a:txBody>
+                    <a:bodyPr/>
+                    <a:lstStyle/>
+                    <a:p>
+                      <a:pPr indent="0" marL="0">
+                        <a:buNone/>
+                      </a:pPr>
+                      <a:r>
+                        <a:rPr lang="en-US" sz="1000" b="1" dirty="0">
+                          <a:solidFill>
+                            <a:srgbClr val="1F2937"/>
+                          </a:solidFill>
+                          <a:latin typeface="Microsoft JhengHei" pitchFamily="34" charset="0"/>
+                          <a:ea typeface="Microsoft JhengHei" pitchFamily="34" charset="-122"/>
+                          <a:cs typeface="Microsoft JhengHei" pitchFamily="34" charset="-120"/>
+                        </a:rPr>
+                        <a:t>D：影片＋部署 SOP</a:t>
+                      </a:r>
+                      <a:endParaRPr lang="en-US" sz="1000" dirty="0">
+                        <a:latin typeface="Microsoft JhengHei" charset="0"/>
+                        <a:ea typeface="Microsoft JhengHei" charset="0"/>
+                        <a:cs typeface="Microsoft JhengHei" charset="0"/>
+                      </a:endParaRPr>
+                    </a:p>
+                  </a:txBody>
+                  <a:tcPr marL="45720" marR="45720" marT="45720" marB="45720" anchor="ctr">
+                    <a:lnL w="9525" cap="flat" cmpd="sng" algn="ctr">
+                      <a:solidFill>
+                        <a:srgbClr val="D5DEF0"/>
+                      </a:solidFill>
+                      <a:prstDash val="solid"/>
+                      <a:round/>
+                      <a:headEnd type="none" w="med" len="med"/>
+                      <a:tailEnd type="none" w="med" len="med"/>
+                    </a:lnL>
+                    <a:lnR w="9525" cap="flat" cmpd="sng" algn="ctr">
+                      <a:solidFill>
+                        <a:srgbClr val="D5DEF0"/>
+                      </a:solidFill>
+                      <a:prstDash val="solid"/>
+                      <a:round/>
+                      <a:headEnd type="none" w="med" len="med"/>
+                      <a:tailEnd type="none" w="med" len="med"/>
+                    </a:lnR>
+                    <a:lnT w="9525" cap="flat" cmpd="sng" algn="ctr">
+                      <a:solidFill>
+                        <a:srgbClr val="D5DEF0"/>
+                      </a:solidFill>
+                      <a:prstDash val="solid"/>
+                      <a:round/>
+                      <a:headEnd type="none" w="med" len="med"/>
+                      <a:tailEnd type="none" w="med" len="med"/>
+                    </a:lnT>
+                    <a:lnB w="9525" cap="flat" cmpd="sng" algn="ctr">
+                      <a:solidFill>
+                        <a:srgbClr val="D5DEF0"/>
+                      </a:solidFill>
+                      <a:prstDash val="solid"/>
+                      <a:round/>
+                      <a:headEnd type="none" w="med" len="med"/>
+                      <a:tailEnd type="none" w="med" len="med"/>
+                    </a:lnB>
+                  </a:tcPr>
+                </a:tc>
+                <a:tc>
+                  <a:txBody>
+                    <a:bodyPr/>
+                    <a:lstStyle/>
+                    <a:p>
+                      <a:pPr indent="0" marL="0">
+                        <a:buNone/>
+                      </a:pPr>
+                      <a:r>
+                        <a:rPr lang="en-US" sz="1000" dirty="0">
+                          <a:solidFill>
+                            <a:srgbClr val="16224D"/>
+                          </a:solidFill>
+                          <a:latin typeface="Microsoft JhengHei" pitchFamily="34" charset="0"/>
+                          <a:ea typeface="Microsoft JhengHei" pitchFamily="34" charset="-122"/>
+                          <a:cs typeface="Microsoft JhengHei" pitchFamily="34" charset="-120"/>
+                        </a:rPr>
+                        <a:t>決賽武器包</a:t>
+                      </a:r>
+                      <a:endParaRPr lang="en-US" sz="1000" dirty="0">
+                        <a:latin typeface="Microsoft JhengHei" charset="0"/>
+                        <a:ea typeface="Microsoft JhengHei" charset="0"/>
+                        <a:cs typeface="Microsoft JhengHei" charset="0"/>
+                      </a:endParaRPr>
+                    </a:p>
+                  </a:txBody>
+                  <a:tcPr marL="45720" marR="45720" marT="45720" marB="45720" anchor="ctr">
+                    <a:lnL w="9525" cap="flat" cmpd="sng" algn="ctr">
+                      <a:solidFill>
+                        <a:srgbClr val="D5DEF0"/>
+                      </a:solidFill>
+                      <a:prstDash val="solid"/>
+                      <a:round/>
+                      <a:headEnd type="none" w="med" len="med"/>
+                      <a:tailEnd type="none" w="med" len="med"/>
+                    </a:lnL>
+                    <a:lnR w="9525" cap="flat" cmpd="sng" algn="ctr">
+                      <a:solidFill>
+                        <a:srgbClr val="D5DEF0"/>
+                      </a:solidFill>
+                      <a:prstDash val="solid"/>
+                      <a:round/>
+                      <a:headEnd type="none" w="med" len="med"/>
+                      <a:tailEnd type="none" w="med" len="med"/>
+                    </a:lnR>
+                    <a:lnT w="9525" cap="flat" cmpd="sng" algn="ctr">
+                      <a:solidFill>
+                        <a:srgbClr val="D5DEF0"/>
+                      </a:solidFill>
+                      <a:prstDash val="solid"/>
+                      <a:round/>
+                      <a:headEnd type="none" w="med" len="med"/>
+                      <a:tailEnd type="none" w="med" len="med"/>
+                    </a:lnT>
+                    <a:lnB w="9525" cap="flat" cmpd="sng" algn="ctr">
+                      <a:solidFill>
+                        <a:srgbClr val="D5DEF0"/>
+                      </a:solidFill>
+                      <a:prstDash val="solid"/>
+                      <a:round/>
+                      <a:headEnd type="none" w="med" len="med"/>
+                      <a:tailEnd type="none" w="med" len="med"/>
+                    </a:lnB>
+                  </a:tcPr>
+                </a:tc>
+                <a:tc>
+                  <a:txBody>
+                    <a:bodyPr/>
+                    <a:lstStyle/>
+                    <a:p>
+                      <a:pPr indent="0" marL="0">
+                        <a:buNone/>
+                      </a:pPr>
+                      <a:r>
+                        <a:rPr lang="en-US" sz="1000" b="1" dirty="0">
+                          <a:solidFill>
+                            <a:srgbClr val="E8A13A"/>
+                          </a:solidFill>
+                          <a:latin typeface="Microsoft JhengHei" pitchFamily="34" charset="0"/>
+                          <a:ea typeface="Microsoft JhengHei" pitchFamily="34" charset="-122"/>
+                          <a:cs typeface="Microsoft JhengHei" pitchFamily="34" charset="-120"/>
+                        </a:rPr>
+                        <a:t>全員</a:t>
+                      </a:r>
+                      <a:endParaRPr lang="en-US" sz="1000" dirty="0">
+                        <a:latin typeface="Microsoft JhengHei" charset="0"/>
+                        <a:ea typeface="Microsoft JhengHei" charset="0"/>
+                        <a:cs typeface="Microsoft JhengHei" charset="0"/>
+                      </a:endParaRPr>
+                    </a:p>
+                  </a:txBody>
+                  <a:tcPr marL="45720" marR="45720" marT="45720" marB="45720" anchor="ctr">
+                    <a:lnL w="9525" cap="flat" cmpd="sng" algn="ctr">
+                      <a:solidFill>
+                        <a:srgbClr val="D5DEF0"/>
+                      </a:solidFill>
+                      <a:prstDash val="solid"/>
+                      <a:round/>
+                      <a:headEnd type="none" w="med" len="med"/>
+                      <a:tailEnd type="none" w="med" len="med"/>
+                    </a:lnL>
+                    <a:lnR w="9525" cap="flat" cmpd="sng" algn="ctr">
+                      <a:solidFill>
+                        <a:srgbClr val="D5DEF0"/>
+                      </a:solidFill>
+                      <a:prstDash val="solid"/>
+                      <a:round/>
+                      <a:headEnd type="none" w="med" len="med"/>
+                      <a:tailEnd type="none" w="med" len="med"/>
+                    </a:lnR>
+                    <a:lnT w="9525" cap="flat" cmpd="sng" algn="ctr">
+                      <a:solidFill>
+                        <a:srgbClr val="D5DEF0"/>
+                      </a:solidFill>
+                      <a:prstDash val="solid"/>
+                      <a:round/>
+                      <a:headEnd type="none" w="med" len="med"/>
+                      <a:tailEnd type="none" w="med" len="med"/>
+                    </a:lnT>
+                    <a:lnB w="9525" cap="flat" cmpd="sng" algn="ctr">
+                      <a:solidFill>
+                        <a:srgbClr val="D5DEF0"/>
+                      </a:solidFill>
+                      <a:prstDash val="solid"/>
+                      <a:round/>
+                      <a:headEnd type="none" w="med" len="med"/>
+                      <a:tailEnd type="none" w="med" len="med"/>
+                    </a:lnB>
+                  </a:tcPr>
+                </a:tc>
+                <a:tc>
+                  <a:txBody>
+                    <a:bodyPr/>
+                    <a:lstStyle/>
+                    <a:p>
+                      <a:pPr indent="0" marL="0">
+                        <a:buNone/>
+                      </a:pPr>
+                      <a:r>
+                        <a:rPr lang="en-US" sz="1000" dirty="0">
+                          <a:solidFill>
+                            <a:srgbClr val="1F2937"/>
+                          </a:solidFill>
+                          <a:latin typeface="Microsoft JhengHei" pitchFamily="34" charset="0"/>
+                          <a:ea typeface="Microsoft JhengHei" pitchFamily="34" charset="-122"/>
+                          <a:cs typeface="Microsoft JhengHei" pitchFamily="34" charset="-120"/>
+                        </a:rPr>
+                        <a:t>8/1 上場</a:t>
+                      </a:r>
+                      <a:endParaRPr lang="en-US" sz="1000" dirty="0">
+                        <a:latin typeface="Microsoft JhengHei" charset="0"/>
+                        <a:ea typeface="Microsoft JhengHei" charset="0"/>
+                        <a:cs typeface="Microsoft JhengHei" charset="0"/>
+                      </a:endParaRPr>
+                    </a:p>
+                  </a:txBody>
+                  <a:tcPr marL="45720" marR="45720" marT="45720" marB="45720" anchor="ctr">
+                    <a:lnL w="9525" cap="flat" cmpd="sng" algn="ctr">
+                      <a:solidFill>
+                        <a:srgbClr val="D5DEF0"/>
+                      </a:solidFill>
+                      <a:prstDash val="solid"/>
+                      <a:round/>
+                      <a:headEnd type="none" w="med" len="med"/>
+                      <a:tailEnd type="none" w="med" len="med"/>
+                    </a:lnL>
+                    <a:lnR w="9525" cap="flat" cmpd="sng" algn="ctr">
+                      <a:solidFill>
+                        <a:srgbClr val="D5DEF0"/>
+                      </a:solidFill>
+                      <a:prstDash val="solid"/>
+                      <a:round/>
+                      <a:headEnd type="none" w="med" len="med"/>
+                      <a:tailEnd type="none" w="med" len="med"/>
+                    </a:lnR>
+                    <a:lnT w="9525" cap="flat" cmpd="sng" algn="ctr">
+                      <a:solidFill>
+                        <a:srgbClr val="D5DEF0"/>
+                      </a:solidFill>
+                      <a:prstDash val="solid"/>
+                      <a:round/>
+                      <a:headEnd type="none" w="med" len="med"/>
+                      <a:tailEnd type="none" w="med" len="med"/>
+                    </a:lnT>
+                    <a:lnB w="9525" cap="flat" cmpd="sng" algn="ctr">
+                      <a:solidFill>
+                        <a:srgbClr val="D5DEF0"/>
+                      </a:solidFill>
+                      <a:prstDash val="solid"/>
+                      <a:round/>
+                      <a:headEnd type="none" w="med" len="med"/>
+                      <a:tailEnd type="none" w="med" len="med"/>
+                    </a:lnB>
+                  </a:tcPr>
+                </a:tc>
+              </a:tr>
+            </a:tbl>
+          </a:graphicData>
+        </a:graphic>
+      </p:graphicFrame>
       <p:sp>
         <p:nvSpPr>
-          <p:cNvPr id="7" name="Shape 5"/>
+          <p:cNvPr id="5" name="Text 2"/>
           <p:cNvSpPr/>
           <p:nvPr/>
         </p:nvSpPr>
         <p:spPr>
           <a:xfrm>
-            <a:off x="548640" y="2578608"/>
-            <a:ext cx="502920" cy="502920"/>
-          </a:xfrm>
-          <a:prstGeom prst="ellipse">
-            <a:avLst/>
-          </a:prstGeom>
-          <a:solidFill>
-            <a:srgbClr val="E8A13A"/>
-          </a:solidFill>
-          <a:ln/>
-        </p:spPr>
-      </p:sp>
-      <p:sp>
-        <p:nvSpPr>
-          <p:cNvPr id="8" name="Text 6"/>
-          <p:cNvSpPr/>
-          <p:nvPr/>
-        </p:nvSpPr>
-        <p:spPr>
-          <a:xfrm>
-            <a:off x="548640" y="2578608"/>
-            <a:ext cx="502920" cy="502920"/>
-          </a:xfrm>
-          <a:prstGeom prst="rect">
-            <a:avLst/>
-          </a:prstGeom>
-          <a:noFill/>
-          <a:ln/>
-        </p:spPr>
-        <p:txBody>
-          <a:bodyPr wrap="square" lIns="0" tIns="0" rIns="0" bIns="0" rtlCol="0" anchor="ctr"/>
-          <a:lstStyle/>
-          <a:p>
-            <a:pPr algn="ctr" indent="0" marL="0">
-              <a:buNone/>
-            </a:pPr>
-            <a:r>
-              <a:rPr lang="en-US" sz="1600" b="1" dirty="0">
-                <a:solidFill>
-                  <a:srgbClr val="FFFFFF"/>
-                </a:solidFill>
-                <a:latin typeface="Microsoft JhengHei" pitchFamily="34" charset="0"/>
-                <a:ea typeface="Microsoft JhengHei" pitchFamily="34" charset="-122"/>
-                <a:cs typeface="Microsoft JhengHei" pitchFamily="34" charset="-120"/>
-              </a:rPr>
-              <a:t>2</a:t>
-            </a:r>
-            <a:endParaRPr lang="en-US" sz="1600" dirty="0"/>
-          </a:p>
-        </p:txBody>
-      </p:sp>
-      <p:sp>
-        <p:nvSpPr>
-          <p:cNvPr id="9" name="Text 7"/>
-          <p:cNvSpPr/>
-          <p:nvPr/>
-        </p:nvSpPr>
-        <p:spPr>
-          <a:xfrm>
-            <a:off x="1280160" y="2487168"/>
-            <a:ext cx="2194560" cy="777240"/>
+            <a:off x="548640" y="6355080"/>
+            <a:ext cx="11091672" cy="365760"/>
           </a:xfrm>
           <a:prstGeom prst="rect">
             <a:avLst/>
@@ -35073,7 +39473,7 @@
               <a:buNone/>
             </a:pPr>
             <a:r>
-              <a:rPr lang="en-US" sz="1550" b="1" dirty="0">
+              <a:rPr lang="en-US" sz="1150" b="1" dirty="0">
                 <a:solidFill>
                   <a:srgbClr val="16224D"/>
                 </a:solidFill>
@@ -35081,459 +39481,9 @@
                 <a:ea typeface="Microsoft JhengHei" pitchFamily="34" charset="-122"/>
                 <a:cs typeface="Microsoft JhengHei" pitchFamily="34" charset="-120"/>
               </a:rPr>
-              <a:t>介面契約先行</a:t>
+              <a:t>背四條就夠：B→A 函式｜A→C schema（已定義，C 先用假資料）｜D→A Guardrail ID｜A→D 可測版本 tag。</a:t>
             </a:r>
-            <a:endParaRPr lang="en-US" sz="1550" dirty="0"/>
-          </a:p>
-        </p:txBody>
-      </p:sp>
-      <p:sp>
-        <p:nvSpPr>
-          <p:cNvPr id="10" name="Text 8"/>
-          <p:cNvSpPr/>
-          <p:nvPr/>
-        </p:nvSpPr>
-        <p:spPr>
-          <a:xfrm>
-            <a:off x="3566160" y="2487168"/>
-            <a:ext cx="8138160" cy="777240"/>
-          </a:xfrm>
-          <a:prstGeom prst="rect">
-            <a:avLst/>
-          </a:prstGeom>
-          <a:noFill/>
-          <a:ln/>
-        </p:spPr>
-        <p:txBody>
-          <a:bodyPr wrap="square" lIns="0" tIns="0" rIns="0" bIns="0" rtlCol="0" anchor="ctr"/>
-          <a:lstStyle/>
-          <a:p>
-            <a:pPr indent="0" marL="0">
-              <a:buNone/>
-            </a:pPr>
-            <a:r>
-              <a:rPr lang="en-US" sz="1250" dirty="0">
-                <a:solidFill>
-                  <a:srgbClr val="1F2937"/>
-                </a:solidFill>
-                <a:latin typeface="Microsoft JhengHei" pitchFamily="34" charset="0"/>
-                <a:ea typeface="Microsoft JhengHei" pitchFamily="34" charset="-122"/>
-                <a:cs typeface="Microsoft JhengHei" pitchFamily="34" charset="-120"/>
-              </a:rPr>
-              <a:t>四支 API 格式寫死在 README §3——C 包照契約用假資料先做，不用等後端</a:t>
-            </a:r>
-            <a:endParaRPr lang="en-US" sz="1250" dirty="0"/>
-          </a:p>
-        </p:txBody>
-      </p:sp>
-      <p:sp>
-        <p:nvSpPr>
-          <p:cNvPr id="11" name="Shape 9"/>
-          <p:cNvSpPr/>
-          <p:nvPr/>
-        </p:nvSpPr>
-        <p:spPr>
-          <a:xfrm>
-            <a:off x="548640" y="3511296"/>
-            <a:ext cx="502920" cy="502920"/>
-          </a:xfrm>
-          <a:prstGeom prst="ellipse">
-            <a:avLst/>
-          </a:prstGeom>
-          <a:solidFill>
-            <a:srgbClr val="1F9D66"/>
-          </a:solidFill>
-          <a:ln/>
-        </p:spPr>
-      </p:sp>
-      <p:sp>
-        <p:nvSpPr>
-          <p:cNvPr id="12" name="Text 10"/>
-          <p:cNvSpPr/>
-          <p:nvPr/>
-        </p:nvSpPr>
-        <p:spPr>
-          <a:xfrm>
-            <a:off x="548640" y="3511296"/>
-            <a:ext cx="502920" cy="502920"/>
-          </a:xfrm>
-          <a:prstGeom prst="rect">
-            <a:avLst/>
-          </a:prstGeom>
-          <a:noFill/>
-          <a:ln/>
-        </p:spPr>
-        <p:txBody>
-          <a:bodyPr wrap="square" lIns="0" tIns="0" rIns="0" bIns="0" rtlCol="0" anchor="ctr"/>
-          <a:lstStyle/>
-          <a:p>
-            <a:pPr algn="ctr" indent="0" marL="0">
-              <a:buNone/>
-            </a:pPr>
-            <a:r>
-              <a:rPr lang="en-US" sz="1600" b="1" dirty="0">
-                <a:solidFill>
-                  <a:srgbClr val="FFFFFF"/>
-                </a:solidFill>
-                <a:latin typeface="Microsoft JhengHei" pitchFamily="34" charset="0"/>
-                <a:ea typeface="Microsoft JhengHei" pitchFamily="34" charset="-122"/>
-                <a:cs typeface="Microsoft JhengHei" pitchFamily="34" charset="-120"/>
-              </a:rPr>
-              <a:t>3</a:t>
-            </a:r>
-            <a:endParaRPr lang="en-US" sz="1600" dirty="0"/>
-          </a:p>
-        </p:txBody>
-      </p:sp>
-      <p:sp>
-        <p:nvSpPr>
-          <p:cNvPr id="13" name="Text 11"/>
-          <p:cNvSpPr/>
-          <p:nvPr/>
-        </p:nvSpPr>
-        <p:spPr>
-          <a:xfrm>
-            <a:off x="1280160" y="3419856"/>
-            <a:ext cx="2194560" cy="777240"/>
-          </a:xfrm>
-          <a:prstGeom prst="rect">
-            <a:avLst/>
-          </a:prstGeom>
-          <a:noFill/>
-          <a:ln/>
-        </p:spPr>
-        <p:txBody>
-          <a:bodyPr wrap="square" lIns="0" tIns="0" rIns="0" bIns="0" rtlCol="0" anchor="ctr"/>
-          <a:lstStyle/>
-          <a:p>
-            <a:pPr indent="0" marL="0">
-              <a:buNone/>
-            </a:pPr>
-            <a:r>
-              <a:rPr lang="en-US" sz="1550" b="1" dirty="0">
-                <a:solidFill>
-                  <a:srgbClr val="16224D"/>
-                </a:solidFill>
-                <a:latin typeface="Microsoft JhengHei" pitchFamily="34" charset="0"/>
-                <a:ea typeface="Microsoft JhengHei" pitchFamily="34" charset="-122"/>
-                <a:cs typeface="Microsoft JhengHei" pitchFamily="34" charset="-120"/>
-              </a:rPr>
-              <a:t>共用檔單一 owner</a:t>
-            </a:r>
-            <a:endParaRPr lang="en-US" sz="1550" dirty="0"/>
-          </a:p>
-        </p:txBody>
-      </p:sp>
-      <p:sp>
-        <p:nvSpPr>
-          <p:cNvPr id="14" name="Text 12"/>
-          <p:cNvSpPr/>
-          <p:nvPr/>
-        </p:nvSpPr>
-        <p:spPr>
-          <a:xfrm>
-            <a:off x="3566160" y="3419856"/>
-            <a:ext cx="8138160" cy="777240"/>
-          </a:xfrm>
-          <a:prstGeom prst="rect">
-            <a:avLst/>
-          </a:prstGeom>
-          <a:noFill/>
-          <a:ln/>
-        </p:spPr>
-        <p:txBody>
-          <a:bodyPr wrap="square" lIns="0" tIns="0" rIns="0" bIns="0" rtlCol="0" anchor="ctr"/>
-          <a:lstStyle/>
-          <a:p>
-            <a:pPr indent="0" marL="0">
-              <a:buNone/>
-            </a:pPr>
-            <a:r>
-              <a:rPr lang="en-US" sz="1250" dirty="0">
-                <a:solidFill>
-                  <a:srgbClr val="1F2937"/>
-                </a:solidFill>
-                <a:latin typeface="Microsoft JhengHei" pitchFamily="34" charset="0"/>
-                <a:ea typeface="Microsoft JhengHei" pitchFamily="34" charset="-122"/>
-                <a:cs typeface="Microsoft JhengHei" pitchFamily="34" charset="-120"/>
-              </a:rPr>
-              <a:t>tools.py／loop.py 歸 A；B 寫好函式由 A 註冊。infra 歸 D。誰的檔誰合</a:t>
-            </a:r>
-            <a:endParaRPr lang="en-US" sz="1250" dirty="0"/>
-          </a:p>
-        </p:txBody>
-      </p:sp>
-      <p:sp>
-        <p:nvSpPr>
-          <p:cNvPr id="15" name="Shape 13"/>
-          <p:cNvSpPr/>
-          <p:nvPr/>
-        </p:nvSpPr>
-        <p:spPr>
-          <a:xfrm>
-            <a:off x="548640" y="4443984"/>
-            <a:ext cx="502920" cy="502920"/>
-          </a:xfrm>
-          <a:prstGeom prst="ellipse">
-            <a:avLst/>
-          </a:prstGeom>
-          <a:solidFill>
-            <a:srgbClr val="2B6CB0"/>
-          </a:solidFill>
-          <a:ln/>
-        </p:spPr>
-      </p:sp>
-      <p:sp>
-        <p:nvSpPr>
-          <p:cNvPr id="16" name="Text 14"/>
-          <p:cNvSpPr/>
-          <p:nvPr/>
-        </p:nvSpPr>
-        <p:spPr>
-          <a:xfrm>
-            <a:off x="548640" y="4443984"/>
-            <a:ext cx="502920" cy="502920"/>
-          </a:xfrm>
-          <a:prstGeom prst="rect">
-            <a:avLst/>
-          </a:prstGeom>
-          <a:noFill/>
-          <a:ln/>
-        </p:spPr>
-        <p:txBody>
-          <a:bodyPr wrap="square" lIns="0" tIns="0" rIns="0" bIns="0" rtlCol="0" anchor="ctr"/>
-          <a:lstStyle/>
-          <a:p>
-            <a:pPr algn="ctr" indent="0" marL="0">
-              <a:buNone/>
-            </a:pPr>
-            <a:r>
-              <a:rPr lang="en-US" sz="1600" b="1" dirty="0">
-                <a:solidFill>
-                  <a:srgbClr val="FFFFFF"/>
-                </a:solidFill>
-                <a:latin typeface="Microsoft JhengHei" pitchFamily="34" charset="0"/>
-                <a:ea typeface="Microsoft JhengHei" pitchFamily="34" charset="-122"/>
-                <a:cs typeface="Microsoft JhengHei" pitchFamily="34" charset="-120"/>
-              </a:rPr>
-              <a:t>4</a:t>
-            </a:r>
-            <a:endParaRPr lang="en-US" sz="1600" dirty="0"/>
-          </a:p>
-        </p:txBody>
-      </p:sp>
-      <p:sp>
-        <p:nvSpPr>
-          <p:cNvPr id="17" name="Text 15"/>
-          <p:cNvSpPr/>
-          <p:nvPr/>
-        </p:nvSpPr>
-        <p:spPr>
-          <a:xfrm>
-            <a:off x="1280160" y="4352544"/>
-            <a:ext cx="2194560" cy="777240"/>
-          </a:xfrm>
-          <a:prstGeom prst="rect">
-            <a:avLst/>
-          </a:prstGeom>
-          <a:noFill/>
-          <a:ln/>
-        </p:spPr>
-        <p:txBody>
-          <a:bodyPr wrap="square" lIns="0" tIns="0" rIns="0" bIns="0" rtlCol="0" anchor="ctr"/>
-          <a:lstStyle/>
-          <a:p>
-            <a:pPr indent="0" marL="0">
-              <a:buNone/>
-            </a:pPr>
-            <a:r>
-              <a:rPr lang="en-US" sz="1550" b="1" dirty="0">
-                <a:solidFill>
-                  <a:srgbClr val="16224D"/>
-                </a:solidFill>
-                <a:latin typeface="Microsoft JhengHei" pitchFamily="34" charset="0"/>
-                <a:ea typeface="Microsoft JhengHei" pitchFamily="34" charset="-122"/>
-                <a:cs typeface="Microsoft JhengHei" pitchFamily="34" charset="-120"/>
-              </a:rPr>
-              <a:t>每日回合</a:t>
-            </a:r>
-            <a:endParaRPr lang="en-US" sz="1550" dirty="0"/>
-          </a:p>
-        </p:txBody>
-      </p:sp>
-      <p:sp>
-        <p:nvSpPr>
-          <p:cNvPr id="18" name="Text 16"/>
-          <p:cNvSpPr/>
-          <p:nvPr/>
-        </p:nvSpPr>
-        <p:spPr>
-          <a:xfrm>
-            <a:off x="3566160" y="4352544"/>
-            <a:ext cx="8138160" cy="777240"/>
-          </a:xfrm>
-          <a:prstGeom prst="rect">
-            <a:avLst/>
-          </a:prstGeom>
-          <a:noFill/>
-          <a:ln/>
-        </p:spPr>
-        <p:txBody>
-          <a:bodyPr wrap="square" lIns="0" tIns="0" rIns="0" bIns="0" rtlCol="0" anchor="ctr"/>
-          <a:lstStyle/>
-          <a:p>
-            <a:pPr indent="0" marL="0">
-              <a:buNone/>
-            </a:pPr>
-            <a:r>
-              <a:rPr lang="en-US" sz="1250" dirty="0">
-                <a:solidFill>
-                  <a:srgbClr val="1F2937"/>
-                </a:solidFill>
-                <a:latin typeface="Microsoft JhengHei" pitchFamily="34" charset="0"/>
-                <a:ea typeface="Microsoft JhengHei" pitchFamily="34" charset="-122"/>
-                <a:cs typeface="Microsoft JhengHei" pitchFamily="34" charset="-120"/>
-              </a:rPr>
-              <a:t>每天至少一次 pull --rebase ＋合回 main。衝突當天解，不隔夜</a:t>
-            </a:r>
-            <a:endParaRPr lang="en-US" sz="1250" dirty="0"/>
-          </a:p>
-        </p:txBody>
-      </p:sp>
-      <p:sp>
-        <p:nvSpPr>
-          <p:cNvPr id="19" name="Shape 17"/>
-          <p:cNvSpPr/>
-          <p:nvPr/>
-        </p:nvSpPr>
-        <p:spPr>
-          <a:xfrm>
-            <a:off x="548640" y="5376672"/>
-            <a:ext cx="502920" cy="502920"/>
-          </a:xfrm>
-          <a:prstGeom prst="ellipse">
-            <a:avLst/>
-          </a:prstGeom>
-          <a:solidFill>
-            <a:srgbClr val="D64550"/>
-          </a:solidFill>
-          <a:ln/>
-        </p:spPr>
-      </p:sp>
-      <p:sp>
-        <p:nvSpPr>
-          <p:cNvPr id="20" name="Text 18"/>
-          <p:cNvSpPr/>
-          <p:nvPr/>
-        </p:nvSpPr>
-        <p:spPr>
-          <a:xfrm>
-            <a:off x="548640" y="5376672"/>
-            <a:ext cx="502920" cy="502920"/>
-          </a:xfrm>
-          <a:prstGeom prst="rect">
-            <a:avLst/>
-          </a:prstGeom>
-          <a:noFill/>
-          <a:ln/>
-        </p:spPr>
-        <p:txBody>
-          <a:bodyPr wrap="square" lIns="0" tIns="0" rIns="0" bIns="0" rtlCol="0" anchor="ctr"/>
-          <a:lstStyle/>
-          <a:p>
-            <a:pPr algn="ctr" indent="0" marL="0">
-              <a:buNone/>
-            </a:pPr>
-            <a:r>
-              <a:rPr lang="en-US" sz="1600" b="1" dirty="0">
-                <a:solidFill>
-                  <a:srgbClr val="FFFFFF"/>
-                </a:solidFill>
-                <a:latin typeface="Microsoft JhengHei" pitchFamily="34" charset="0"/>
-                <a:ea typeface="Microsoft JhengHei" pitchFamily="34" charset="-122"/>
-                <a:cs typeface="Microsoft JhengHei" pitchFamily="34" charset="-120"/>
-              </a:rPr>
-              <a:t>5</a:t>
-            </a:r>
-            <a:endParaRPr lang="en-US" sz="1600" dirty="0"/>
-          </a:p>
-        </p:txBody>
-      </p:sp>
-      <p:sp>
-        <p:nvSpPr>
-          <p:cNvPr id="21" name="Text 19"/>
-          <p:cNvSpPr/>
-          <p:nvPr/>
-        </p:nvSpPr>
-        <p:spPr>
-          <a:xfrm>
-            <a:off x="1280160" y="5285232"/>
-            <a:ext cx="2194560" cy="777240"/>
-          </a:xfrm>
-          <a:prstGeom prst="rect">
-            <a:avLst/>
-          </a:prstGeom>
-          <a:noFill/>
-          <a:ln/>
-        </p:spPr>
-        <p:txBody>
-          <a:bodyPr wrap="square" lIns="0" tIns="0" rIns="0" bIns="0" rtlCol="0" anchor="ctr"/>
-          <a:lstStyle/>
-          <a:p>
-            <a:pPr indent="0" marL="0">
-              <a:buNone/>
-            </a:pPr>
-            <a:r>
-              <a:rPr lang="en-US" sz="1550" b="1" dirty="0">
-                <a:solidFill>
-                  <a:srgbClr val="16224D"/>
-                </a:solidFill>
-                <a:latin typeface="Microsoft JhengHei" pitchFamily="34" charset="0"/>
-                <a:ea typeface="Microsoft JhengHei" pitchFamily="34" charset="-122"/>
-                <a:cs typeface="Microsoft JhengHei" pitchFamily="34" charset="-120"/>
-              </a:rPr>
-              <a:t>改介面要廣播</a:t>
-            </a:r>
-            <a:endParaRPr lang="en-US" sz="1550" dirty="0"/>
-          </a:p>
-        </p:txBody>
-      </p:sp>
-      <p:sp>
-        <p:nvSpPr>
-          <p:cNvPr id="22" name="Text 20"/>
-          <p:cNvSpPr/>
-          <p:nvPr/>
-        </p:nvSpPr>
-        <p:spPr>
-          <a:xfrm>
-            <a:off x="3566160" y="5285232"/>
-            <a:ext cx="8138160" cy="777240"/>
-          </a:xfrm>
-          <a:prstGeom prst="rect">
-            <a:avLst/>
-          </a:prstGeom>
-          <a:noFill/>
-          <a:ln/>
-        </p:spPr>
-        <p:txBody>
-          <a:bodyPr wrap="square" lIns="0" tIns="0" rIns="0" bIns="0" rtlCol="0" anchor="ctr"/>
-          <a:lstStyle/>
-          <a:p>
-            <a:pPr indent="0" marL="0">
-              <a:buNone/>
-            </a:pPr>
-            <a:r>
-              <a:rPr lang="en-US" sz="1250" dirty="0">
-                <a:solidFill>
-                  <a:srgbClr val="1F2937"/>
-                </a:solidFill>
-                <a:latin typeface="Microsoft JhengHei" pitchFamily="34" charset="0"/>
-                <a:ea typeface="Microsoft JhengHei" pitchFamily="34" charset="-122"/>
-                <a:cs typeface="Microsoft JhengHei" pitchFamily="34" charset="-120"/>
-              </a:rPr>
-              <a:t>要改 README §3 先在 #dev 說，受影響的包點頭才動</a:t>
-            </a:r>
-            <a:endParaRPr lang="en-US" sz="1250" dirty="0"/>
+            <a:endParaRPr lang="en-US" sz="1150" dirty="0"/>
           </a:p>
         </p:txBody>
       </p:sp>

--- a/docs/MaiMate_開發手冊.pptx
+++ b/docs/MaiMate_開發手冊.pptx
@@ -3003,7 +3003,7 @@
                 <a:ea typeface="Microsoft JhengHei" pitchFamily="34" charset="-122"/>
                 <a:cs typeface="Microsoft JhengHei" pitchFamily="34" charset="-120"/>
               </a:rPr>
-              <a:t>2026/07/19｜決賽 8/1–8/2｜文字完整版：repo 首頁 README.md</a:t>
+              <a:t>2026/07/19 晚間更新｜決賽 8/1–8/2｜文字完整版：repo 首頁 README.md</a:t>
             </a:r>
             <a:endParaRPr lang="en-US" sz="1300" dirty="0"/>
           </a:p>
@@ -8508,7 +8508,7 @@
       </p:sp>
       <p:pic>
         <p:nvPicPr>
-          <p:cNvPr id="4" name="Image 0" descr="/workspace/maimate/docs/mockups/screen1.png">    </p:cNvPr>
+          <p:cNvPr id="4" name="Image 0" descr="/home/user/MaiMate/docs/mockups/screen1.png">    </p:cNvPr>
           <p:cNvPicPr>
             <a:picLocks noChangeAspect="1"/>
           </p:cNvPicPr>
@@ -8610,7 +8610,7 @@
       </p:sp>
       <p:pic>
         <p:nvPicPr>
-          <p:cNvPr id="7" name="Image 1" descr="/workspace/maimate/docs/mockups/screen2.png">    </p:cNvPr>
+          <p:cNvPr id="7" name="Image 1" descr="/home/user/MaiMate/docs/mockups/screen2.png">    </p:cNvPr>
           <p:cNvPicPr>
             <a:picLocks noChangeAspect="1"/>
           </p:cNvPicPr>
@@ -8712,7 +8712,7 @@
       </p:sp>
       <p:pic>
         <p:nvPicPr>
-          <p:cNvPr id="10" name="Image 2" descr="/workspace/maimate/docs/mockups/screen3.png">    </p:cNvPr>
+          <p:cNvPr id="10" name="Image 2" descr="/home/user/MaiMate/docs/mockups/screen3.png">    </p:cNvPr>
           <p:cNvPicPr>
             <a:picLocks noChangeAspect="1"/>
           </p:cNvPicPr>
@@ -16764,7 +16764,7 @@
                 <a:ea typeface="Microsoft JhengHei" pitchFamily="34" charset="-122"/>
                 <a:cs typeface="Microsoft JhengHei" pitchFamily="34" charset="-120"/>
               </a:rPr>
-              <a:t>總覽：repo 看起來很滿，驗證過的只有 8 項</a:t>
+              <a:t>總覽：07/19 部署上線，驗證過的從 8 項推進到 15 項</a:t>
             </a:r>
             <a:endParaRPr lang="en-US" sz="2700" dirty="0"/>
           </a:p>
@@ -16825,7 +16825,7 @@
                 <a:ea typeface="Microsoft JhengHei" pitchFamily="34" charset="-122"/>
                 <a:cs typeface="Microsoft JhengHei" pitchFamily="34" charset="-120"/>
               </a:rPr>
-              <a:t>8</a:t>
+              <a:t>15</a:t>
             </a:r>
             <a:endParaRPr lang="en-US" sz="5400" dirty="0"/>
           </a:p>
@@ -16903,7 +16903,7 @@
                 <a:ea typeface="Microsoft JhengHei" pitchFamily="34" charset="-122"/>
                 <a:cs typeface="Microsoft JhengHei" pitchFamily="34" charset="-120"/>
               </a:rPr>
-              <a:t>行為分析、文件、環境腳本</a:t>
+              <a:t>行為分析、Bedrock迴圈、部署上線、前端…</a:t>
             </a:r>
             <a:endParaRPr lang="en-US" sz="1050" dirty="0"/>
           </a:p>
@@ -16964,7 +16964,7 @@
                 <a:ea typeface="Microsoft JhengHei" pitchFamily="34" charset="-122"/>
                 <a:cs typeface="Microsoft JhengHei" pitchFamily="34" charset="-120"/>
               </a:rPr>
-              <a:t>11</a:t>
+              <a:t>7</a:t>
             </a:r>
             <a:endParaRPr lang="en-US" sz="5400" dirty="0"/>
           </a:p>
@@ -17042,7 +17042,7 @@
                 <a:ea typeface="Microsoft JhengHei" pitchFamily="34" charset="-122"/>
                 <a:cs typeface="Microsoft JhengHei" pitchFamily="34" charset="-120"/>
               </a:rPr>
-              <a:t>Agent迴圈、API串接、SAM…</a:t>
+              <a:t>confirm E2E、Private簽章、離線備援…</a:t>
             </a:r>
             <a:endParaRPr lang="en-US" sz="1050" dirty="0"/>
           </a:p>
@@ -17103,7 +17103,7 @@
                 <a:ea typeface="Microsoft JhengHei" pitchFamily="34" charset="-122"/>
                 <a:cs typeface="Microsoft JhengHei" pitchFamily="34" charset="-120"/>
               </a:rPr>
-              <a:t>14</a:t>
+              <a:t>12</a:t>
             </a:r>
             <a:endParaRPr lang="en-US" sz="5400" dirty="0"/>
           </a:p>
@@ -17242,7 +17242,7 @@
                 <a:ea typeface="Microsoft JhengHei" pitchFamily="34" charset="-122"/>
                 <a:cs typeface="Microsoft JhengHei" pitchFamily="34" charset="-120"/>
               </a:rPr>
-              <a:t>6</a:t>
+              <a:t>5</a:t>
             </a:r>
             <a:endParaRPr lang="en-US" sz="5400" dirty="0"/>
           </a:p>
@@ -17395,7 +17395,7 @@
                 <a:ea typeface="Microsoft JhengHei" pitchFamily="34" charset="-122"/>
                 <a:cs typeface="Microsoft JhengHei" pitchFamily="34" charset="-120"/>
               </a:rPr>
-              <a:t>Agent 迴圈從沒對真實 Bedrock 跑過、Private API 簽章沒驗證過、SAM 從沒 deploy 過——「寫好」不等於「能動」。</a:t>
+              <a:t>Private API 簽章仍未驗證（#4 最小成交前不算數）、/order 沒真跑過、模型暫全走 Haiku（#5 路由未做）——上線 ≠ Golden Path 能走通。</a:t>
             </a:r>
             <a:endParaRPr lang="en-US" sz="1400" dirty="0"/>
           </a:p>
@@ -21029,13 +21029,13 @@
                       <a:r>
                         <a:rPr lang="en-US" sz="1050" b="1" dirty="0">
                           <a:solidFill>
-                            <a:srgbClr val="D64550"/>
-                          </a:solidFill>
-                          <a:latin typeface="Microsoft JhengHei" pitchFamily="34" charset="0"/>
-                          <a:ea typeface="Microsoft JhengHei" pitchFamily="34" charset="-122"/>
-                          <a:cs typeface="Microsoft JhengHei" pitchFamily="34" charset="-120"/>
-                        </a:rPr>
-                        <a:t>待做</a:t>
+                            <a:srgbClr val="E8A13A"/>
+                          </a:solidFill>
+                          <a:latin typeface="Microsoft JhengHei" pitchFamily="34" charset="0"/>
+                          <a:ea typeface="Microsoft JhengHei" pitchFamily="34" charset="-122"/>
+                          <a:cs typeface="Microsoft JhengHei" pitchFamily="34" charset="-120"/>
+                        </a:rPr>
+                        <a:t>進行中</a:t>
                       </a:r>
                       <a:endParaRPr lang="en-US" sz="1050" dirty="0">
                         <a:latin typeface="Microsoft JhengHei" charset="0"/>
@@ -21100,7 +21100,7 @@
                           <a:ea typeface="Microsoft JhengHei" pitchFamily="34" charset="-122"/>
                           <a:cs typeface="Microsoft JhengHei" pitchFamily="34" charset="-120"/>
                         </a:rPr>
-                        <a:t>從零部署 &lt;1hr、E2E 全過、六項決賽交付物齊</a:t>
+                        <a:t>07/19 首次部署上線；從零 &lt;1hr 演練、E2E、六項交付物待做</a:t>
                       </a:r>
                       <a:endParaRPr lang="en-US" sz="1050" dirty="0">
                         <a:latin typeface="Microsoft JhengHei" charset="0"/>
@@ -22569,7 +22569,7 @@
                 <a:ea typeface="Microsoft JhengHei" pitchFamily="34" charset="-122"/>
                 <a:cs typeface="Microsoft JhengHei" pitchFamily="34" charset="-120"/>
               </a:rPr>
-              <a:t>Bedrock 首跑是全案最優先——唯一沒碰過真傢伙的核心路徑</a:t>
+              <a:t>07/19 迴圈已對真模型跑通（Haiku@us-east-1）——重心轉 confirm E2E・路由・三方案</a:t>
             </a:r>
             <a:endParaRPr lang="en-US" sz="1250" dirty="0"/>
           </a:p>
@@ -22954,13 +22954,13 @@
                       <a:r>
                         <a:rPr lang="en-US" sz="1100" b="1" dirty="0">
                           <a:solidFill>
-                            <a:srgbClr val="E8A13A"/>
-                          </a:solidFill>
-                          <a:latin typeface="Microsoft JhengHei" pitchFamily="34" charset="0"/>
-                          <a:ea typeface="Microsoft JhengHei" pitchFamily="34" charset="-122"/>
-                          <a:cs typeface="Microsoft JhengHei" pitchFamily="34" charset="-120"/>
-                        </a:rPr>
-                        <a:t>🧪 寫好待測</a:t>
+                            <a:srgbClr val="1F9D66"/>
+                          </a:solidFill>
+                          <a:latin typeface="Microsoft JhengHei" pitchFamily="34" charset="0"/>
+                          <a:ea typeface="Microsoft JhengHei" pitchFamily="34" charset="-122"/>
+                          <a:cs typeface="Microsoft JhengHei" pitchFamily="34" charset="-120"/>
+                        </a:rPr>
+                        <a:t>✅ 已驗證</a:t>
                       </a:r>
                       <a:endParaRPr lang="en-US" sz="1100" dirty="0">
                         <a:latin typeface="Microsoft JhengHei" charset="0"/>
@@ -23025,7 +23025,7 @@
                           <a:ea typeface="Microsoft JhengHei" pitchFamily="34" charset="-122"/>
                           <a:cs typeface="Microsoft JhengHei" pitchFamily="34" charset="-120"/>
                         </a:rPr>
-                        <a:t>程式完成，從沒對真實 Bedrock 跑過</a:t>
+                        <a:t>07/19 線上跑通：真模型多輪工具呼叫＋引用真實數據</a:t>
                       </a:r>
                       <a:endParaRPr lang="en-US" sz="1100" dirty="0">
                         <a:latin typeface="Microsoft JhengHei" charset="0"/>
@@ -23216,13 +23216,13 @@
                       <a:r>
                         <a:rPr lang="en-US" sz="1100" b="1" dirty="0">
                           <a:solidFill>
-                            <a:srgbClr val="E8A13A"/>
-                          </a:solidFill>
-                          <a:latin typeface="Microsoft JhengHei" pitchFamily="34" charset="0"/>
-                          <a:ea typeface="Microsoft JhengHei" pitchFamily="34" charset="-122"/>
-                          <a:cs typeface="Microsoft JhengHei" pitchFamily="34" charset="-120"/>
-                        </a:rPr>
-                        <a:t>🧪 寫好待測</a:t>
+                            <a:srgbClr val="1F9D66"/>
+                          </a:solidFill>
+                          <a:latin typeface="Microsoft JhengHei" pitchFamily="34" charset="0"/>
+                          <a:ea typeface="Microsoft JhengHei" pitchFamily="34" charset="-122"/>
+                          <a:cs typeface="Microsoft JhengHei" pitchFamily="34" charset="-120"/>
+                        </a:rPr>
+                        <a:t>✅ 已驗證</a:t>
                       </a:r>
                       <a:endParaRPr lang="en-US" sz="1100" dirty="0">
                         <a:latin typeface="Microsoft JhengHei" charset="0"/>
@@ -23287,7 +23287,7 @@
                           <a:ea typeface="Microsoft JhengHei" pitchFamily="34" charset="-122"/>
                           <a:cs typeface="Microsoft JhengHei" pitchFamily="34" charset="-120"/>
                         </a:rPr>
-                        <a:t>同上</a:t>
+                        <a:t>隨迴圈上線；已加 key_findings 摘要（答非所問保險）</a:t>
                       </a:r>
                       <a:endParaRPr lang="en-US" sz="1100" dirty="0">
                         <a:latin typeface="Microsoft JhengHei" charset="0"/>
@@ -24002,13 +24002,13 @@
                       <a:r>
                         <a:rPr lang="en-US" sz="1100" b="1" dirty="0">
                           <a:solidFill>
-                            <a:srgbClr val="D64550"/>
-                          </a:solidFill>
-                          <a:latin typeface="Microsoft JhengHei" pitchFamily="34" charset="0"/>
-                          <a:ea typeface="Microsoft JhengHei" pitchFamily="34" charset="-122"/>
-                          <a:cs typeface="Microsoft JhengHei" pitchFamily="34" charset="-120"/>
-                        </a:rPr>
-                        <a:t>🔨 待做</a:t>
+                            <a:srgbClr val="E8A13A"/>
+                          </a:solidFill>
+                          <a:latin typeface="Microsoft JhengHei" pitchFamily="34" charset="0"/>
+                          <a:ea typeface="Microsoft JhengHei" pitchFamily="34" charset="-122"/>
+                          <a:cs typeface="Microsoft JhengHei" pitchFamily="34" charset="-120"/>
+                        </a:rPr>
+                        <a:t>🧪 寫好待測</a:t>
                       </a:r>
                       <a:endParaRPr lang="en-US" sz="1100" dirty="0">
                         <a:latin typeface="Microsoft JhengHei" charset="0"/>
@@ -24073,7 +24073,7 @@
                           <a:ea typeface="Microsoft JhengHei" pitchFamily="34" charset="-122"/>
                           <a:cs typeface="Microsoft JhengHei" pitchFamily="34" charset="-120"/>
                         </a:rPr>
-                        <a:t>迴圈把確認卡帶給 handler 回應</a:t>
+                        <a:t>後端 07/19 完成上線（任務5）；待一次下單對話 E2E</a:t>
                       </a:r>
                       <a:endParaRPr lang="en-US" sz="1100" dirty="0">
                         <a:latin typeface="Microsoft JhengHei" charset="0"/>
@@ -24335,7 +24335,7 @@
                           <a:ea typeface="Microsoft JhengHei" pitchFamily="34" charset="-122"/>
                           <a:cs typeface="Microsoft JhengHei" pitchFamily="34" charset="-120"/>
                         </a:rPr>
-                        <a:t>含 prompt caching</a:t>
+                        <a:t>暫全走 Haiku；路由與 prompt caching 待做</a:t>
                       </a:r>
                       <a:endParaRPr lang="en-US" sz="1100" dirty="0">
                         <a:latin typeface="Microsoft JhengHei" charset="0"/>
@@ -27523,13 +27523,13 @@
                       <a:r>
                         <a:rPr lang="en-US" sz="1100" b="1" dirty="0">
                           <a:solidFill>
-                            <a:srgbClr val="E8A13A"/>
-                          </a:solidFill>
-                          <a:latin typeface="Microsoft JhengHei" pitchFamily="34" charset="0"/>
-                          <a:ea typeface="Microsoft JhengHei" pitchFamily="34" charset="-122"/>
-                          <a:cs typeface="Microsoft JhengHei" pitchFamily="34" charset="-120"/>
-                        </a:rPr>
-                        <a:t>🧪 寫好待測</a:t>
+                            <a:srgbClr val="1F9D66"/>
+                          </a:solidFill>
+                          <a:latin typeface="Microsoft JhengHei" pitchFamily="34" charset="0"/>
+                          <a:ea typeface="Microsoft JhengHei" pitchFamily="34" charset="-122"/>
+                          <a:cs typeface="Microsoft JhengHei" pitchFamily="34" charset="-120"/>
+                        </a:rPr>
+                        <a:t>✅ 已驗證</a:t>
                       </a:r>
                       <a:endParaRPr lang="en-US" sz="1100" dirty="0">
                         <a:latin typeface="Microsoft JhengHei" charset="0"/>
@@ -27594,7 +27594,7 @@
                           <a:ea typeface="Microsoft JhengHei" pitchFamily="34" charset="-122"/>
                           <a:cs typeface="Microsoft JhengHei" pitchFamily="34" charset="-120"/>
                         </a:rPr>
-                        <a:t>未部署未打過</a:t>
+                        <a:t>07/19 SAM 部署上線；/chat /health /market 線上實測，/order 待 #4</a:t>
                       </a:r>
                       <a:endParaRPr lang="en-US" sz="1100" dirty="0">
                         <a:latin typeface="Microsoft JhengHei" charset="0"/>
@@ -27856,7 +27856,7 @@
                           <a:ea typeface="Microsoft JhengHei" pitchFamily="34" charset="-122"/>
                           <a:cs typeface="Microsoft JhengHei" pitchFamily="34" charset="-120"/>
                         </a:rPr>
-                        <a:t>路徑需對官方文件核對後實測</a:t>
+                        <a:t>ticker 已線上實測（任務6）；kline/depth 待對文件核驗</a:t>
                       </a:r>
                       <a:endParaRPr lang="en-US" sz="1100" dirty="0">
                         <a:latin typeface="Microsoft JhengHei" charset="0"/>
@@ -29210,13 +29210,13 @@
                       <a:r>
                         <a:rPr lang="en-US" sz="1100" b="1" dirty="0">
                           <a:solidFill>
-                            <a:srgbClr val="E8A13A"/>
-                          </a:solidFill>
-                          <a:latin typeface="Microsoft JhengHei" pitchFamily="34" charset="0"/>
-                          <a:ea typeface="Microsoft JhengHei" pitchFamily="34" charset="-122"/>
-                          <a:cs typeface="Microsoft JhengHei" pitchFamily="34" charset="-120"/>
-                        </a:rPr>
-                        <a:t>🧪 寫好待測</a:t>
+                            <a:srgbClr val="1F9D66"/>
+                          </a:solidFill>
+                          <a:latin typeface="Microsoft JhengHei" pitchFamily="34" charset="0"/>
+                          <a:ea typeface="Microsoft JhengHei" pitchFamily="34" charset="-122"/>
+                          <a:cs typeface="Microsoft JhengHei" pitchFamily="34" charset="-120"/>
+                        </a:rPr>
+                        <a:t>✅ 已驗證</a:t>
                       </a:r>
                       <a:endParaRPr lang="en-US" sz="1100" dirty="0">
                         <a:latin typeface="Microsoft JhengHei" charset="0"/>
@@ -29281,7 +29281,7 @@
                           <a:ea typeface="Microsoft JhengHei" pitchFamily="34" charset="-122"/>
                           <a:cs typeface="Microsoft JhengHei" pitchFamily="34" charset="-120"/>
                         </a:rPr>
-                        <a:t>寫好，未在瀏覽器完整走過</a:t>
+                        <a:t>07/19 上線實測＋UX 修正（行情就地更新/氣泡渲染）</a:t>
                       </a:r>
                       <a:endParaRPr lang="en-US" sz="1100" dirty="0">
                         <a:latin typeface="Microsoft JhengHei" charset="0"/>
@@ -29543,7 +29543,7 @@
                           <a:ea typeface="Microsoft JhengHei" pitchFamily="34" charset="-122"/>
                           <a:cs typeface="Microsoft JhengHei" pitchFamily="34" charset="-120"/>
                         </a:rPr>
-                        <a:t>機制寫好，fallback 未驗證</a:t>
+                        <a:t>行情斷網保值已由 npm run smoke 驗證；整站拔網路實測待做</a:t>
                       </a:r>
                       <a:endParaRPr lang="en-US" sz="1100" dirty="0">
                         <a:latin typeface="Microsoft JhengHei" charset="0"/>
@@ -30258,13 +30258,13 @@
                       <a:r>
                         <a:rPr lang="en-US" sz="1100" b="1" dirty="0">
                           <a:solidFill>
-                            <a:srgbClr val="E8A13A"/>
-                          </a:solidFill>
-                          <a:latin typeface="Microsoft JhengHei" pitchFamily="34" charset="0"/>
-                          <a:ea typeface="Microsoft JhengHei" pitchFamily="34" charset="-122"/>
-                          <a:cs typeface="Microsoft JhengHei" pitchFamily="34" charset="-120"/>
-                        </a:rPr>
-                        <a:t>🧪 寫好待測</a:t>
+                            <a:srgbClr val="1F9D66"/>
+                          </a:solidFill>
+                          <a:latin typeface="Microsoft JhengHei" pitchFamily="34" charset="0"/>
+                          <a:ea typeface="Microsoft JhengHei" pitchFamily="34" charset="-122"/>
+                          <a:cs typeface="Microsoft JhengHei" pitchFamily="34" charset="-120"/>
+                        </a:rPr>
+                        <a:t>✅ 已驗證</a:t>
                       </a:r>
                       <a:endParaRPr lang="en-US" sz="1100" dirty="0">
                         <a:latin typeface="Microsoft JhengHei" charset="0"/>
@@ -30329,7 +30329,7 @@
                           <a:ea typeface="Microsoft JhengHei" pitchFamily="34" charset="-122"/>
                           <a:cs typeface="Microsoft JhengHei" pitchFamily="34" charset="-120"/>
                         </a:rPr>
-                        <a:t>從未實際 deploy</a:t>
+                        <a:t>07/19 首次 deploy 成功（us-east-1 API+S3）</a:t>
                       </a:r>
                       <a:endParaRPr lang="en-US" sz="1100" dirty="0">
                         <a:latin typeface="Microsoft JhengHei" charset="0"/>
@@ -30520,13 +30520,13 @@
                       <a:r>
                         <a:rPr lang="en-US" sz="1100" b="1" dirty="0">
                           <a:solidFill>
-                            <a:srgbClr val="D64550"/>
-                          </a:solidFill>
-                          <a:latin typeface="Microsoft JhengHei" pitchFamily="34" charset="0"/>
-                          <a:ea typeface="Microsoft JhengHei" pitchFamily="34" charset="-122"/>
-                          <a:cs typeface="Microsoft JhengHei" pitchFamily="34" charset="-120"/>
-                        </a:rPr>
-                        <a:t>🔨 待做</a:t>
+                            <a:srgbClr val="1F9D66"/>
+                          </a:solidFill>
+                          <a:latin typeface="Microsoft JhengHei" pitchFamily="34" charset="0"/>
+                          <a:ea typeface="Microsoft JhengHei" pitchFamily="34" charset="-122"/>
+                          <a:cs typeface="Microsoft JhengHei" pitchFamily="34" charset="-120"/>
+                        </a:rPr>
+                        <a:t>✅ 已驗證</a:t>
                       </a:r>
                       <a:endParaRPr lang="en-US" sz="1100" dirty="0">
                         <a:latin typeface="Microsoft JhengHei" charset="0"/>
@@ -30591,7 +30591,7 @@
                           <a:ea typeface="Microsoft JhengHei" pitchFamily="34" charset="-122"/>
                           <a:cs typeface="Microsoft JhengHei" pitchFamily="34" charset="-120"/>
                         </a:rPr>
-                        <a:t>多條線的前置——今天定誰出帳號</a:t>
+                        <a:t>隊長帳號出線，Bedrock 已開通（07/19）</a:t>
                       </a:r>
                       <a:endParaRPr lang="en-US" sz="1100" dirty="0">
                         <a:latin typeface="Microsoft JhengHei" charset="0"/>
@@ -30853,7 +30853,7 @@
                           <a:ea typeface="Microsoft JhengHei" pitchFamily="34" charset="-122"/>
                           <a:cs typeface="Microsoft JhengHei" pitchFamily="34" charset="-120"/>
                         </a:rPr>
-                        <a:t>目標&lt;1hr，7/31 前至少一次</a:t>
+                        <a:t>首次部署經驗已有；&lt;1hr 計時演練＋文件待做（含 API_BASE 檢查項）</a:t>
                       </a:r>
                       <a:endParaRPr lang="en-US" sz="1100" dirty="0">
                         <a:latin typeface="Microsoft JhengHei" charset="0"/>
@@ -32770,13 +32770,13 @@
                       <a:r>
                         <a:rPr lang="en-US" sz="1100" b="1" dirty="0">
                           <a:solidFill>
-                            <a:srgbClr val="2B6CB0"/>
-                          </a:solidFill>
-                          <a:latin typeface="Microsoft JhengHei" pitchFamily="34" charset="0"/>
-                          <a:ea typeface="Microsoft JhengHei" pitchFamily="34" charset="-122"/>
-                          <a:cs typeface="Microsoft JhengHei" pitchFamily="34" charset="-120"/>
-                        </a:rPr>
-                        <a:t>🔬 測試項</a:t>
+                            <a:srgbClr val="1F9D66"/>
+                          </a:solidFill>
+                          <a:latin typeface="Microsoft JhengHei" pitchFamily="34" charset="0"/>
+                          <a:ea typeface="Microsoft JhengHei" pitchFamily="34" charset="-122"/>
+                          <a:cs typeface="Microsoft JhengHei" pitchFamily="34" charset="-120"/>
+                        </a:rPr>
+                        <a:t>✅ 已驗證</a:t>
                       </a:r>
                       <a:endParaRPr lang="en-US" sz="1100" dirty="0">
                         <a:latin typeface="Microsoft JhengHei" charset="0"/>
@@ -32841,7 +32841,7 @@
                           <a:ea typeface="Microsoft JhengHei" pitchFamily="34" charset="-122"/>
                           <a:cs typeface="Microsoft JhengHei" pitchFamily="34" charset="-120"/>
                         </a:rPr>
-                        <a:t>對真模型完成一次多工具對話——全案最優先</a:t>
+                        <a:t>07/19 完成：Haiku 多工具對話、線上引用真實數據</a:t>
                       </a:r>
                       <a:endParaRPr lang="en-US" sz="1100" dirty="0">
                         <a:latin typeface="Microsoft JhengHei" charset="0"/>
@@ -32906,7 +32906,7 @@
                           <a:ea typeface="Microsoft JhengHei" pitchFamily="34" charset="-122"/>
                           <a:cs typeface="Microsoft JhengHei" pitchFamily="34" charset="-120"/>
                         </a:rPr>
-                        <a:t>需AWS帳號</a:t>
+                        <a:t>已達成</a:t>
                       </a:r>
                       <a:endParaRPr lang="en-US" sz="1000" dirty="0">
                         <a:latin typeface="Microsoft JhengHei" charset="0"/>
@@ -34510,13 +34510,13 @@
             <a:r>
               <a:rPr lang="en-US" sz="1150" b="1" dirty="0">
                 <a:solidFill>
-                  <a:srgbClr val="D64550"/>
+                  <a:srgbClr val="1F9D66"/>
                 </a:solidFill>
                 <a:latin typeface="Microsoft JhengHei" pitchFamily="34" charset="0"/>
                 <a:ea typeface="Microsoft JhengHei" pitchFamily="34" charset="-122"/>
                 <a:cs typeface="Microsoft JhengHei" pitchFamily="34" charset="-120"/>
               </a:rPr>
-              <a:t>🧪 Bedrock 迴圈首跑（全案最優先）</a:t>
+              <a:t>✅ Bedrock 迴圈首跑——07/19 完成</a:t>
             </a:r>
             <a:endParaRPr lang="en-US" sz="1150" dirty="0"/>
           </a:p>
@@ -34579,7 +34579,7 @@
                 <a:ea typeface="Microsoft JhengHei" pitchFamily="34" charset="-122"/>
                 <a:cs typeface="Microsoft JhengHei" pitchFamily="34" charset="-120"/>
               </a:rPr>
-              <a:t>🔨 #1 confirm 帶出｜#5 模型路由+caching</a:t>
+              <a:t>🧪 #1 confirm 後端✅待E2E｜🔨 #5 路由+caching</a:t>
             </a:r>
             <a:endParaRPr lang="en-US" sz="1150" dirty="0"/>
           </a:p>
@@ -34869,7 +34869,7 @@
                 <a:ea typeface="Microsoft JhengHei" pitchFamily="34" charset="-122"/>
                 <a:cs typeface="Microsoft JhengHei" pitchFamily="34" charset="-120"/>
               </a:rPr>
-              <a:t>🧪 #2 max_public 三 endpoint 實測</a:t>
+              <a:t>🧪 #2 max_public：ticker✅ 07/19，kline/depth 待驗</a:t>
             </a:r>
             <a:endParaRPr lang="en-US" sz="1150" dirty="0"/>
           </a:p>
@@ -35406,13 +35406,13 @@
             <a:r>
               <a:rPr lang="en-US" sz="1150" b="1" dirty="0">
                 <a:solidFill>
-                  <a:srgbClr val="D64550"/>
+                  <a:srgbClr val="1F9D66"/>
                 </a:solidFill>
                 <a:latin typeface="Microsoft JhengHei" pitchFamily="34" charset="0"/>
                 <a:ea typeface="Microsoft JhengHei" pitchFamily="34" charset="-122"/>
                 <a:cs typeface="Microsoft JhengHei" pitchFamily="34" charset="-120"/>
               </a:rPr>
-              <a:t>🔨 AWS 帳號＋Bedrock 開通（前置，第一件做）</a:t>
+              <a:t>✅ AWS 帳號＋Bedrock 開通——07/19 完成（隊長帳號）</a:t>
             </a:r>
             <a:endParaRPr lang="en-US" sz="1150" dirty="0"/>
           </a:p>
@@ -35433,7 +35433,7 @@
                 <a:ea typeface="Microsoft JhengHei" pitchFamily="34" charset="-122"/>
                 <a:cs typeface="Microsoft JhengHei" pitchFamily="34" charset="-120"/>
               </a:rPr>
-              <a:t>🧪 SAM 首次部署＋Lambda×4 冒煙</a:t>
+              <a:t>✅ SAM 部署上線 07/19（/order 冒煙待真單）</a:t>
             </a:r>
             <a:endParaRPr lang="en-US" sz="1150" dirty="0"/>
           </a:p>

--- a/docs/MaiMate_開發手冊.pptx
+++ b/docs/MaiMate_開發手冊.pptx
@@ -3003,7 +3003,7 @@
                 <a:ea typeface="Microsoft JhengHei" pitchFamily="34" charset="-122"/>
                 <a:cs typeface="Microsoft JhengHei" pitchFamily="34" charset="-120"/>
               </a:rPr>
-              <a:t>2026/07/19 晚間更新｜決賽 8/1–8/2｜文字完整版：repo 首頁 README.md</a:t>
+              <a:t>2026/07/21 更新｜決賽 8/1–8/2｜文字完整版：repo 首頁 README.md</a:t>
             </a:r>
             <a:endParaRPr lang="en-US" sz="1300" dirty="0"/>
           </a:p>
@@ -16764,7 +16764,7 @@
                 <a:ea typeface="Microsoft JhengHei" pitchFamily="34" charset="-122"/>
                 <a:cs typeface="Microsoft JhengHei" pitchFamily="34" charset="-120"/>
               </a:rPr>
-              <a:t>總覽：07/19 部署上線，驗證過的從 8 項推進到 15 項</a:t>
+              <a:t>總覽：07/21 四引擎完成單元驗證（三方案/Profile/Audit/路由），待部署整合</a:t>
             </a:r>
             <a:endParaRPr lang="en-US" sz="2700" dirty="0"/>
           </a:p>
@@ -16964,7 +16964,7 @@
                 <a:ea typeface="Microsoft JhengHei" pitchFamily="34" charset="-122"/>
                 <a:cs typeface="Microsoft JhengHei" pitchFamily="34" charset="-120"/>
               </a:rPr>
-              <a:t>7</a:t>
+              <a:t>12</a:t>
             </a:r>
             <a:endParaRPr lang="en-US" sz="5400" dirty="0"/>
           </a:p>
@@ -17042,7 +17042,7 @@
                 <a:ea typeface="Microsoft JhengHei" pitchFamily="34" charset="-122"/>
                 <a:cs typeface="Microsoft JhengHei" pitchFamily="34" charset="-120"/>
               </a:rPr>
-              <a:t>confirm E2E、Private簽章、離線備援…</a:t>
+              <a:t>三方案、Profile、Audit、路由、Private簽章…</a:t>
             </a:r>
             <a:endParaRPr lang="en-US" sz="1050" dirty="0"/>
           </a:p>
@@ -17103,7 +17103,7 @@
                 <a:ea typeface="Microsoft JhengHei" pitchFamily="34" charset="-122"/>
                 <a:cs typeface="Microsoft JhengHei" pitchFamily="34" charset="-120"/>
               </a:rPr>
-              <a:t>12</a:t>
+              <a:t>7</a:t>
             </a:r>
             <a:endParaRPr lang="en-US" sz="5400" dirty="0"/>
           </a:p>
@@ -17181,7 +17181,7 @@
                 <a:ea typeface="Microsoft JhengHei" pitchFamily="34" charset="-122"/>
                 <a:cs typeface="Microsoft JhengHei" pitchFamily="34" charset="-120"/>
               </a:rPr>
-              <a:t>RAG、三方案、Profile、手機版…</a:t>
+              <a:t>RAG、Guardrails、KYC、影片…</a:t>
             </a:r>
             <a:endParaRPr lang="en-US" sz="1050" dirty="0"/>
           </a:p>
@@ -17395,7 +17395,7 @@
                 <a:ea typeface="Microsoft JhengHei" pitchFamily="34" charset="-122"/>
                 <a:cs typeface="Microsoft JhengHei" pitchFamily="34" charset="-120"/>
               </a:rPr>
-              <a:t>Private API 簽章仍未驗證（#4 最小成交前不算數）、/order 沒真跑過、模型暫全走 Haiku（#5 路由未做）——上線 ≠ Golden Path 能走通。</a:t>
+              <a:t>Private API 簽章仍未驗證（#4 最小成交前不算數）、/order 沒真跑過、07/21 新四引擎（三方案/Profile/Audit/路由）僅單元驗證未部署——寫好 ≠ 部署過 ≠ Golden Path 能走通。</a:t>
             </a:r>
             <a:endParaRPr lang="en-US" sz="1400" dirty="0"/>
           </a:p>
@@ -19195,13 +19195,13 @@
                       <a:r>
                         <a:rPr lang="en-US" sz="1050" b="1" dirty="0">
                           <a:solidFill>
-                            <a:srgbClr val="D64550"/>
-                          </a:solidFill>
-                          <a:latin typeface="Microsoft JhengHei" pitchFamily="34" charset="0"/>
-                          <a:ea typeface="Microsoft JhengHei" pitchFamily="34" charset="-122"/>
-                          <a:cs typeface="Microsoft JhengHei" pitchFamily="34" charset="-120"/>
-                        </a:rPr>
-                        <a:t>待做</a:t>
+                            <a:srgbClr val="E8A13A"/>
+                          </a:solidFill>
+                          <a:latin typeface="Microsoft JhengHei" pitchFamily="34" charset="0"/>
+                          <a:ea typeface="Microsoft JhengHei" pitchFamily="34" charset="-122"/>
+                          <a:cs typeface="Microsoft JhengHei" pitchFamily="34" charset="-120"/>
+                        </a:rPr>
+                        <a:t>單元過</a:t>
                       </a:r>
                       <a:endParaRPr lang="en-US" sz="1050" dirty="0">
                         <a:latin typeface="Microsoft JhengHei" charset="0"/>
@@ -19266,7 +19266,7 @@
                           <a:ea typeface="Microsoft JhengHei" pitchFamily="34" charset="-122"/>
                           <a:cs typeface="Microsoft JhengHei" pitchFamily="34" charset="-120"/>
                         </a:rPr>
-                        <a:t>三方案數字全由程式算、費率附來源、相容 prepare_order</a:t>
+                        <a:t>07/21 實作＋18 項單元測綠；「全賣」整合測試待部署</a:t>
                       </a:r>
                       <a:endParaRPr lang="en-US" sz="1050" dirty="0">
                         <a:latin typeface="Microsoft JhengHei" charset="0"/>
@@ -19457,13 +19457,13 @@
                       <a:r>
                         <a:rPr lang="en-US" sz="1050" b="1" dirty="0">
                           <a:solidFill>
-                            <a:srgbClr val="D64550"/>
-                          </a:solidFill>
-                          <a:latin typeface="Microsoft JhengHei" pitchFamily="34" charset="0"/>
-                          <a:ea typeface="Microsoft JhengHei" pitchFamily="34" charset="-122"/>
-                          <a:cs typeface="Microsoft JhengHei" pitchFamily="34" charset="-120"/>
-                        </a:rPr>
-                        <a:t>待做</a:t>
+                            <a:srgbClr val="E8A13A"/>
+                          </a:solidFill>
+                          <a:latin typeface="Microsoft JhengHei" pitchFamily="34" charset="0"/>
+                          <a:ea typeface="Microsoft JhengHei" pitchFamily="34" charset="-122"/>
+                          <a:cs typeface="Microsoft JhengHei" pitchFamily="34" charset="-120"/>
+                        </a:rPr>
+                        <a:t>單元過</a:t>
                       </a:r>
                       <a:endParaRPr lang="en-US" sz="1050" dirty="0">
                         <a:latin typeface="Microsoft JhengHei" charset="0"/>
@@ -19528,7 +19528,7 @@
                           <a:ea typeface="Microsoft JhengHei" pitchFamily="34" charset="-122"/>
                           <a:cs typeface="Microsoft JhengHei" pitchFamily="34" charset="-120"/>
                         </a:rPr>
-                        <a:t>確定性分三模式、同句話三種回應肉眼可辨</a:t>
+                        <a:t>07/21 三模式分類＋注入＋切換完成；三模式截圖待部署</a:t>
                       </a:r>
                       <a:endParaRPr lang="en-US" sz="1050" dirty="0">
                         <a:latin typeface="Microsoft JhengHei" charset="0"/>
@@ -20243,13 +20243,13 @@
                       <a:r>
                         <a:rPr lang="en-US" sz="1050" b="1" dirty="0">
                           <a:solidFill>
-                            <a:srgbClr val="D64550"/>
-                          </a:solidFill>
-                          <a:latin typeface="Microsoft JhengHei" pitchFamily="34" charset="0"/>
-                          <a:ea typeface="Microsoft JhengHei" pitchFamily="34" charset="-122"/>
-                          <a:cs typeface="Microsoft JhengHei" pitchFamily="34" charset="-120"/>
-                        </a:rPr>
-                        <a:t>待做</a:t>
+                            <a:srgbClr val="E8A13A"/>
+                          </a:solidFill>
+                          <a:latin typeface="Microsoft JhengHei" pitchFamily="34" charset="0"/>
+                          <a:ea typeface="Microsoft JhengHei" pitchFamily="34" charset="-122"/>
+                          <a:cs typeface="Microsoft JhengHei" pitchFamily="34" charset="-120"/>
+                        </a:rPr>
+                        <a:t>單元過</a:t>
                       </a:r>
                       <a:endParaRPr lang="en-US" sz="1050" dirty="0">
                         <a:latin typeface="Microsoft JhengHei" charset="0"/>
@@ -20314,7 +20314,7 @@
                           <a:ea typeface="Microsoft JhengHei" pitchFamily="34" charset="-122"/>
                           <a:cs typeface="Microsoft JhengHei" pitchFamily="34" charset="-120"/>
                         </a:rPr>
-                        <a:t>工具+訂單全留痕、軌跡可還原、append-only</a:t>
+                        <a:t>07/21 留痕＋/audit＋面板完成；Golden Path 驗收待部署</a:t>
                       </a:r>
                       <a:endParaRPr lang="en-US" sz="1050" dirty="0">
                         <a:latin typeface="Microsoft JhengHei" charset="0"/>
@@ -24264,13 +24264,13 @@
                       <a:r>
                         <a:rPr lang="en-US" sz="1100" b="1" dirty="0">
                           <a:solidFill>
-                            <a:srgbClr val="D64550"/>
-                          </a:solidFill>
-                          <a:latin typeface="Microsoft JhengHei" pitchFamily="34" charset="0"/>
-                          <a:ea typeface="Microsoft JhengHei" pitchFamily="34" charset="-122"/>
-                          <a:cs typeface="Microsoft JhengHei" pitchFamily="34" charset="-120"/>
-                        </a:rPr>
-                        <a:t>🔨 待做</a:t>
+                            <a:srgbClr val="E8A13A"/>
+                          </a:solidFill>
+                          <a:latin typeface="Microsoft JhengHei" pitchFamily="34" charset="0"/>
+                          <a:ea typeface="Microsoft JhengHei" pitchFamily="34" charset="-122"/>
+                          <a:cs typeface="Microsoft JhengHei" pitchFamily="34" charset="-120"/>
+                        </a:rPr>
+                        <a:t>🧪 寫好待測</a:t>
                       </a:r>
                       <a:endParaRPr lang="en-US" sz="1100" dirty="0">
                         <a:latin typeface="Microsoft JhengHei" charset="0"/>
@@ -24335,7 +24335,7 @@
                           <a:ea typeface="Microsoft JhengHei" pitchFamily="34" charset="-122"/>
                           <a:cs typeface="Microsoft JhengHei" pitchFamily="34" charset="-120"/>
                         </a:rPr>
-                        <a:t>暫全走 Haiku；路由與 prompt caching 待做</a:t>
+                        <a:t>07/21 意圖路由完成＋單元測；caching 開關待真環境驗證</a:t>
                       </a:r>
                       <a:endParaRPr lang="en-US" sz="1100" dirty="0">
                         <a:latin typeface="Microsoft JhengHei" charset="0"/>
@@ -24788,13 +24788,13 @@
                       <a:r>
                         <a:rPr lang="en-US" sz="1100" b="1" dirty="0">
                           <a:solidFill>
-                            <a:srgbClr val="D64550"/>
-                          </a:solidFill>
-                          <a:latin typeface="Microsoft JhengHei" pitchFamily="34" charset="0"/>
-                          <a:ea typeface="Microsoft JhengHei" pitchFamily="34" charset="-122"/>
-                          <a:cs typeface="Microsoft JhengHei" pitchFamily="34" charset="-120"/>
-                        </a:rPr>
-                        <a:t>🔨 待做</a:t>
+                            <a:srgbClr val="E8A13A"/>
+                          </a:solidFill>
+                          <a:latin typeface="Microsoft JhengHei" pitchFamily="34" charset="0"/>
+                          <a:ea typeface="Microsoft JhengHei" pitchFamily="34" charset="-122"/>
+                          <a:cs typeface="Microsoft JhengHei" pitchFamily="34" charset="-120"/>
+                        </a:rPr>
+                        <a:t>🧪 寫好待測</a:t>
                       </a:r>
                       <a:endParaRPr lang="en-US" sz="1100" dirty="0">
                         <a:latin typeface="Microsoft JhengHei" charset="0"/>
@@ -24859,7 +24859,7 @@
                           <a:ea typeface="Microsoft JhengHei" pitchFamily="34" charset="-122"/>
                           <a:cs typeface="Microsoft JhengHei" pitchFamily="34" charset="-120"/>
                         </a:rPr>
-                        <a:t>行為推斷三模式→提醒強度</a:t>
+                        <a:t>07/21 三模式分類＋prompt 注入＋徽章切換完成；實測劇本待部署</a:t>
                       </a:r>
                       <a:endParaRPr lang="en-US" sz="1100" dirty="0">
                         <a:latin typeface="Microsoft JhengHei" charset="0"/>
@@ -24924,7 +24924,7 @@
                           <a:ea typeface="Microsoft JhengHei" pitchFamily="34" charset="-122"/>
                           <a:cs typeface="Microsoft JhengHei" pitchFamily="34" charset="-120"/>
                         </a:rPr>
-                        <a:t>#10 spec✓</a:t>
+                        <a:t>#10</a:t>
                       </a:r>
                       <a:endParaRPr lang="en-US" sz="1000" dirty="0">
                         <a:latin typeface="Microsoft JhengHei" charset="0"/>
@@ -25050,13 +25050,13 @@
                       <a:r>
                         <a:rPr lang="en-US" sz="1100" b="1" dirty="0">
                           <a:solidFill>
-                            <a:srgbClr val="D64550"/>
-                          </a:solidFill>
-                          <a:latin typeface="Microsoft JhengHei" pitchFamily="34" charset="0"/>
-                          <a:ea typeface="Microsoft JhengHei" pitchFamily="34" charset="-122"/>
-                          <a:cs typeface="Microsoft JhengHei" pitchFamily="34" charset="-120"/>
-                        </a:rPr>
-                        <a:t>🔨 待做</a:t>
+                            <a:srgbClr val="E8A13A"/>
+                          </a:solidFill>
+                          <a:latin typeface="Microsoft JhengHei" pitchFamily="34" charset="0"/>
+                          <a:ea typeface="Microsoft JhengHei" pitchFamily="34" charset="-122"/>
+                          <a:cs typeface="Microsoft JhengHei" pitchFamily="34" charset="-120"/>
+                        </a:rPr>
+                        <a:t>🧪 寫好待測</a:t>
                       </a:r>
                       <a:endParaRPr lang="en-US" sz="1100" dirty="0">
                         <a:latin typeface="Microsoft JhengHei" charset="0"/>
@@ -25121,7 +25121,7 @@
                           <a:ea typeface="Microsoft JhengHei" pitchFamily="34" charset="-122"/>
                           <a:cs typeface="Microsoft JhengHei" pitchFamily="34" charset="-120"/>
                         </a:rPr>
-                        <a:t>Golden Path 核心，確定性計算</a:t>
+                        <a:t>07/21 引擎＋工具＋前端卡完成、18 項單元測綠；整合測試待部署</a:t>
                       </a:r>
                       <a:endParaRPr lang="en-US" sz="1100" dirty="0">
                         <a:latin typeface="Microsoft JhengHei" charset="0"/>
@@ -25186,7 +25186,7 @@
                           <a:ea typeface="Microsoft JhengHei" pitchFamily="34" charset="-122"/>
                           <a:cs typeface="Microsoft JhengHei" pitchFamily="34" charset="-120"/>
                         </a:rPr>
-                        <a:t>#11 spec✓</a:t>
+                        <a:t>#11</a:t>
                       </a:r>
                       <a:endParaRPr lang="en-US" sz="1000" dirty="0">
                         <a:latin typeface="Microsoft JhengHei" charset="0"/>
@@ -25312,13 +25312,13 @@
                       <a:r>
                         <a:rPr lang="en-US" sz="1100" b="1" dirty="0">
                           <a:solidFill>
-                            <a:srgbClr val="D64550"/>
-                          </a:solidFill>
-                          <a:latin typeface="Microsoft JhengHei" pitchFamily="34" charset="0"/>
-                          <a:ea typeface="Microsoft JhengHei" pitchFamily="34" charset="-122"/>
-                          <a:cs typeface="Microsoft JhengHei" pitchFamily="34" charset="-120"/>
-                        </a:rPr>
-                        <a:t>🔨 待做</a:t>
+                            <a:srgbClr val="E8A13A"/>
+                          </a:solidFill>
+                          <a:latin typeface="Microsoft JhengHei" pitchFamily="34" charset="0"/>
+                          <a:ea typeface="Microsoft JhengHei" pitchFamily="34" charset="-122"/>
+                          <a:cs typeface="Microsoft JhengHei" pitchFamily="34" charset="-120"/>
+                        </a:rPr>
+                        <a:t>🧪 寫好待測</a:t>
                       </a:r>
                       <a:endParaRPr lang="en-US" sz="1100" dirty="0">
                         <a:latin typeface="Microsoft JhengHei" charset="0"/>
@@ -25383,7 +25383,7 @@
                           <a:ea typeface="Microsoft JhengHei" pitchFamily="34" charset="-122"/>
                           <a:cs typeface="Microsoft JhengHei" pitchFamily="34" charset="-120"/>
                         </a:rPr>
-                        <a:t>工具+訂單留痕＋軌跡面板</a:t>
+                        <a:t>07/21 留痕＋/audit＋軌跡面板完成；DynamoDB 路徑待部署驗</a:t>
                       </a:r>
                       <a:endParaRPr lang="en-US" sz="1100" dirty="0">
                         <a:latin typeface="Microsoft JhengHei" charset="0"/>
@@ -25448,7 +25448,7 @@
                           <a:ea typeface="Microsoft JhengHei" pitchFamily="34" charset="-122"/>
                           <a:cs typeface="Microsoft JhengHei" pitchFamily="34" charset="-120"/>
                         </a:rPr>
-                        <a:t>#12 spec✓</a:t>
+                        <a:t>#12</a:t>
                       </a:r>
                       <a:endParaRPr lang="en-US" sz="1000" dirty="0">
                         <a:latin typeface="Microsoft JhengHei" charset="0"/>
@@ -30782,13 +30782,13 @@
                       <a:r>
                         <a:rPr lang="en-US" sz="1100" b="1" dirty="0">
                           <a:solidFill>
-                            <a:srgbClr val="D64550"/>
-                          </a:solidFill>
-                          <a:latin typeface="Microsoft JhengHei" pitchFamily="34" charset="0"/>
-                          <a:ea typeface="Microsoft JhengHei" pitchFamily="34" charset="-122"/>
-                          <a:cs typeface="Microsoft JhengHei" pitchFamily="34" charset="-120"/>
-                        </a:rPr>
-                        <a:t>🔨 待做</a:t>
+                            <a:srgbClr val="E8A13A"/>
+                          </a:solidFill>
+                          <a:latin typeface="Microsoft JhengHei" pitchFamily="34" charset="0"/>
+                          <a:ea typeface="Microsoft JhengHei" pitchFamily="34" charset="-122"/>
+                          <a:cs typeface="Microsoft JhengHei" pitchFamily="34" charset="-120"/>
+                        </a:rPr>
+                        <a:t>🧪 寫好待測</a:t>
                       </a:r>
                       <a:endParaRPr lang="en-US" sz="1100" dirty="0">
                         <a:latin typeface="Microsoft JhengHei" charset="0"/>
@@ -30853,7 +30853,7 @@
                           <a:ea typeface="Microsoft JhengHei" pitchFamily="34" charset="-122"/>
                           <a:cs typeface="Microsoft JhengHei" pitchFamily="34" charset="-120"/>
                         </a:rPr>
-                        <a:t>首次部署經驗已有；&lt;1hr 計時演練＋文件待做（含 API_BASE 檢查項）</a:t>
+                        <a:t>DEPLOY.md 已出稿（07/21，含檢查清單與速查表）；&lt;1hr 計時演練待做</a:t>
                       </a:r>
                       <a:endParaRPr lang="en-US" sz="1100" dirty="0">
                         <a:latin typeface="Microsoft JhengHei" charset="0"/>
@@ -34579,7 +34579,7 @@
                 <a:ea typeface="Microsoft JhengHei" pitchFamily="34" charset="-122"/>
                 <a:cs typeface="Microsoft JhengHei" pitchFamily="34" charset="-120"/>
               </a:rPr>
-              <a:t>🧪 #1 confirm 後端✅待E2E｜🔨 #5 路由+caching</a:t>
+              <a:t>🧪 #1 confirm 後端✅待E2E｜#5 路由✅待部署</a:t>
             </a:r>
             <a:endParaRPr lang="en-US" sz="1150" dirty="0"/>
           </a:p>
@@ -34600,7 +34600,7 @@
                 <a:ea typeface="Microsoft JhengHei" pitchFamily="34" charset="-122"/>
                 <a:cs typeface="Microsoft JhengHei" pitchFamily="34" charset="-120"/>
               </a:rPr>
-              <a:t>🔨 #10 Profile 引擎（徽章 UI 歸 C）</a:t>
+              <a:t>🧪 #10 Profile 三模式——07/21 完成待部署實測</a:t>
             </a:r>
             <a:endParaRPr lang="en-US" sz="1150" dirty="0"/>
           </a:p>
@@ -34621,7 +34621,7 @@
                 <a:ea typeface="Microsoft JhengHei" pitchFamily="34" charset="-122"/>
                 <a:cs typeface="Microsoft JhengHei" pitchFamily="34" charset="-120"/>
               </a:rPr>
-              <a:t>🔨 #11 三方案計算（卡片渲染歸 C）</a:t>
+              <a:t>🧪 #11 三方案引擎——07/21 完成、單元測 18 項綠</a:t>
             </a:r>
             <a:endParaRPr lang="en-US" sz="1150" dirty="0"/>
           </a:p>
@@ -34642,7 +34642,7 @@
                 <a:ea typeface="Microsoft JhengHei" pitchFamily="34" charset="-122"/>
                 <a:cs typeface="Microsoft JhengHei" pitchFamily="34" charset="-120"/>
               </a:rPr>
-              <a:t>🔨 註冊 B 的函式／掛 D 的 Guardrails／埋 audit 點</a:t>
+              <a:t>🔨 註冊 B 的 query_knowledge／掛 D 的 Guardrails（audit 埋點✅）</a:t>
             </a:r>
             <a:endParaRPr lang="en-US" sz="1150" dirty="0"/>
           </a:p>
@@ -34848,7 +34848,7 @@
                 <a:ea typeface="Microsoft JhengHei" pitchFamily="34" charset="-122"/>
                 <a:cs typeface="Microsoft JhengHei" pitchFamily="34" charset="-120"/>
               </a:rPr>
-              <a:t>🔨 #12 audit.py＋/audit endpoint（A 埋點、C 面板）</a:t>
+              <a:t>🧪 #12 audit＋/audit＋面板——07/21 完成，DynamoDB 待部署驗</a:t>
             </a:r>
             <a:endParaRPr lang="en-US" sz="1150" dirty="0"/>
           </a:p>
@@ -35185,7 +35185,7 @@
                 <a:ea typeface="Microsoft JhengHei" pitchFamily="34" charset="-122"/>
                 <a:cs typeface="Microsoft JhengHei" pitchFamily="34" charset="-120"/>
               </a:rPr>
-              <a:t>🔨 三方案卡渲染（吃 README §3 schema）</a:t>
+              <a:t>✅ 三方案卡渲染——07/21 完成（mock 煙測）</a:t>
             </a:r>
             <a:endParaRPr lang="en-US" sz="1150" dirty="0"/>
           </a:p>
@@ -35206,7 +35206,7 @@
                 <a:ea typeface="Microsoft JhengHei" pitchFamily="34" charset="-122"/>
                 <a:cs typeface="Microsoft JhengHei" pitchFamily="34" charset="-120"/>
               </a:rPr>
-              <a:t>🔨 模式徽章＋切換｜決策軌跡面板</a:t>
+              <a:t>✅ 模式徽章切換｜軌跡面板——07/21 完成（mock 煙測）</a:t>
             </a:r>
             <a:endParaRPr lang="en-US" sz="1150" dirty="0"/>
           </a:p>
@@ -35454,7 +35454,7 @@
                 <a:ea typeface="Microsoft JhengHei" pitchFamily="34" charset="-122"/>
                 <a:cs typeface="Microsoft JhengHei" pitchFamily="34" charset="-120"/>
               </a:rPr>
-              <a:t>🔨 #6 Guardrails 建立｜#14 部署演練+DEPLOY.md</a:t>
+              <a:t>🔨 #6 Guardrails｜🧪 #14 DEPLOY.md 已出稿、計時演練待做</a:t>
             </a:r>
             <a:endParaRPr lang="en-US" sz="1150" dirty="0"/>
           </a:p>

--- a/docs/MaiMate_開發手冊.pptx
+++ b/docs/MaiMate_開發手冊.pptx
@@ -29543,7 +29543,7 @@
                           <a:ea typeface="Microsoft JhengHei" pitchFamily="34" charset="-122"/>
                           <a:cs typeface="Microsoft JhengHei" pitchFamily="34" charset="-120"/>
                         </a:rPr>
-                        <a:t>行情斷網保值已由 npm run smoke 驗證；整站拔網路實測待做</a:t>
+                        <a:t>07/21 Golden Path 離線劇本完成＋煙測（三方案→確認→軌跡）；真環境拔網路待驗</a:t>
                       </a:r>
                       <a:endParaRPr lang="en-US" sz="1100" dirty="0">
                         <a:latin typeface="Microsoft JhengHei" charset="0"/>
@@ -34642,7 +34642,7 @@
                 <a:ea typeface="Microsoft JhengHei" pitchFamily="34" charset="-122"/>
                 <a:cs typeface="Microsoft JhengHei" pitchFamily="34" charset="-120"/>
               </a:rPr>
-              <a:t>🔨 註冊 B 的 query_knowledge／掛 D 的 Guardrails（audit 埋點✅）</a:t>
+              <a:t>✅ B/D 接點就緒：KB_ID／GUARDRAIL_ID 環境變數設定即通</a:t>
             </a:r>
             <a:endParaRPr lang="en-US" sz="1150" dirty="0"/>
           </a:p>
@@ -35227,7 +35227,7 @@
                 <a:ea typeface="Microsoft JhengHei" pitchFamily="34" charset="-122"/>
                 <a:cs typeface="Microsoft JhengHei" pitchFamily="34" charset="-120"/>
               </a:rPr>
-              <a:t>🔨 麥麥視覺整合（成交切 BULLISH）</a:t>
+              <a:t>✅ 麥麥視覺整合（成交切 BULLISH）——07/21 完成</a:t>
             </a:r>
             <a:endParaRPr lang="en-US" sz="1150" dirty="0"/>
           </a:p>

--- a/docs/MaiMate_開發手冊.pptx
+++ b/docs/MaiMate_開發手冊.pptx
@@ -16764,7 +16764,7 @@
                 <a:ea typeface="Microsoft JhengHei" pitchFamily="34" charset="-122"/>
                 <a:cs typeface="Microsoft JhengHei" pitchFamily="34" charset="-120"/>
               </a:rPr>
-              <a:t>總覽：07/21 四引擎完成單元驗證（三方案/Profile/Audit/路由），待部署整合</a:t>
+              <a:t>總覽：07/21 四引擎＋離線 Golden Path 劇本完成單元驗證，待 merge 部署整合</a:t>
             </a:r>
             <a:endParaRPr lang="en-US" sz="2700" dirty="0"/>
           </a:p>
@@ -33627,7 +33627,7 @@
                           <a:ea typeface="Microsoft JhengHei" pitchFamily="34" charset="-122"/>
                           <a:cs typeface="Microsoft JhengHei" pitchFamily="34" charset="-120"/>
                         </a:rPr>
-                        <a:t>拔網路 mock 自動接手＋UI 標示</a:t>
+                        <a:t>Golden Path 離線劇本＋煙測已過（07/21）；真環境拔網路實測待做</a:t>
                       </a:r>
                       <a:endParaRPr lang="en-US" sz="1100" dirty="0">
                         <a:latin typeface="Microsoft JhengHei" charset="0"/>
@@ -33692,7 +33692,7 @@
                           <a:ea typeface="Microsoft JhengHei" pitchFamily="34" charset="-122"/>
                           <a:cs typeface="Microsoft JhengHei" pitchFamily="34" charset="-120"/>
                         </a:rPr>
-                        <a:t>前端部署後</a:t>
+                        <a:t>部署後</a:t>
                       </a:r>
                       <a:endParaRPr lang="en-US" sz="1000" dirty="0">
                         <a:latin typeface="Microsoft JhengHei" charset="0"/>
@@ -35730,7 +35730,7 @@
                 <a:ea typeface="Microsoft JhengHei" pitchFamily="34" charset="-122"/>
                 <a:cs typeface="Microsoft JhengHei" pitchFamily="34" charset="-120"/>
               </a:rPr>
-              <a:t>進來的箭頭＝你在等什麼；出去的箭頭＝誰在等你。流程圖版在 README §1</a:t>
+              <a:t>✅=已交棒｜🧪=就緒待部署驗證｜🔨=待做（07/21 盤點）。流程圖版在 README §1</a:t>
             </a:r>
             <a:endParaRPr lang="en-US" sz="1250" dirty="0"/>
           </a:p>
@@ -36056,7 +36056,7 @@
                           <a:ea typeface="Microsoft JhengHei" pitchFamily="34" charset="-122"/>
                           <a:cs typeface="Microsoft JhengHei" pitchFamily="34" charset="-120"/>
                         </a:rPr>
-                        <a:t>D：AWS 帳號＋Bedrock 開通</a:t>
+                        <a:t>✅ D：AWS 帳號＋Bedrock 開通（07/19）</a:t>
                       </a:r>
                       <a:endParaRPr lang="en-US" sz="1000" dirty="0">
                         <a:latin typeface="Microsoft JhengHei" charset="0"/>
@@ -36251,7 +36251,7 @@
                           <a:ea typeface="Microsoft JhengHei" pitchFamily="34" charset="-122"/>
                           <a:cs typeface="Microsoft JhengHei" pitchFamily="34" charset="-120"/>
                         </a:rPr>
-                        <a:t>Bedrock 首跑｜KB 建置｜SAM 部署</a:t>
+                        <a:t>Bedrock 首跑✅｜KB 建置｜SAM 部署✅</a:t>
                       </a:r>
                       <a:endParaRPr lang="en-US" sz="1000" dirty="0">
                         <a:latin typeface="Microsoft JhengHei" charset="0"/>
@@ -36318,7 +36318,7 @@
                           <a:ea typeface="Microsoft JhengHei" pitchFamily="34" charset="-122"/>
                           <a:cs typeface="Microsoft JhengHei" pitchFamily="34" charset="-120"/>
                         </a:rPr>
-                        <a:t>全員：Lv2 KYC＋Key（#3）</a:t>
+                        <a:t>🔨 全員：Lv2 KYC＋Key（#3）——最上游</a:t>
                       </a:r>
                       <a:endParaRPr lang="en-US" sz="1000" dirty="0">
                         <a:latin typeface="Microsoft JhengHei" charset="0"/>
@@ -36580,7 +36580,7 @@
                           <a:ea typeface="Microsoft JhengHei" pitchFamily="34" charset="-122"/>
                           <a:cs typeface="Microsoft JhengHei" pitchFamily="34" charset="-120"/>
                         </a:rPr>
-                        <a:t>B：max_public 實測（#2）</a:t>
+                        <a:t>🧪 B：max_public 實測（#2）ticker✅</a:t>
                       </a:r>
                       <a:endParaRPr lang="en-US" sz="1000" dirty="0">
                         <a:latin typeface="Microsoft JhengHei" charset="0"/>
@@ -36775,7 +36775,7 @@
                           <a:ea typeface="Microsoft JhengHei" pitchFamily="34" charset="-122"/>
                           <a:cs typeface="Microsoft JhengHei" pitchFamily="34" charset="-120"/>
                         </a:rPr>
-                        <a:t>get_market_data 放心用</a:t>
+                        <a:t>kline/depth 核對後全放心用</a:t>
                       </a:r>
                       <a:endParaRPr lang="en-US" sz="1000" dirty="0">
                         <a:latin typeface="Microsoft JhengHei" charset="0"/>
@@ -36842,7 +36842,7 @@
                           <a:ea typeface="Microsoft JhengHei" pitchFamily="34" charset="-122"/>
                           <a:cs typeface="Microsoft JhengHei" pitchFamily="34" charset="-120"/>
                         </a:rPr>
-                        <a:t>B：簽章對照核對</a:t>
+                        <a:t>🔨 B：簽章對照核對</a:t>
                       </a:r>
                       <a:endParaRPr lang="en-US" sz="1000" dirty="0">
                         <a:latin typeface="Microsoft JhengHei" charset="0"/>
@@ -37104,7 +37104,7 @@
                           <a:ea typeface="Microsoft JhengHei" pitchFamily="34" charset="-122"/>
                           <a:cs typeface="Microsoft JhengHei" pitchFamily="34" charset="-120"/>
                         </a:rPr>
-                        <a:t>A：Bedrock 迴圈首跑</a:t>
+                        <a:t>✅ A：Bedrock 迴圈首跑（07/19）</a:t>
                       </a:r>
                       <a:endParaRPr lang="en-US" sz="1000" dirty="0">
                         <a:latin typeface="Microsoft JhengHei" charset="0"/>
@@ -37299,7 +37299,7 @@
                           <a:ea typeface="Microsoft JhengHei" pitchFamily="34" charset="-122"/>
                           <a:cs typeface="Microsoft JhengHei" pitchFamily="34" charset="-120"/>
                         </a:rPr>
-                        <a:t>解鎖 #1 #5 #10 #11 開發</a:t>
+                        <a:t>已解鎖：#1 #5 #10 #11 全數開發完</a:t>
                       </a:r>
                       <a:endParaRPr lang="en-US" sz="1000" dirty="0">
                         <a:latin typeface="Microsoft JhengHei" charset="0"/>
@@ -37366,7 +37366,7 @@
                           <a:ea typeface="Microsoft JhengHei" pitchFamily="34" charset="-122"/>
                           <a:cs typeface="Microsoft JhengHei" pitchFamily="34" charset="-120"/>
                         </a:rPr>
-                        <a:t>B：query_knowledge＋audit.py</a:t>
+                        <a:t>🔨 B：KB 建置（#9，語料＋Bedrock KB）</a:t>
                       </a:r>
                       <a:endParaRPr lang="en-US" sz="1000" dirty="0">
                         <a:latin typeface="Microsoft JhengHei" charset="0"/>
@@ -37431,7 +37431,7 @@
                           <a:ea typeface="Microsoft JhengHei" pitchFamily="34" charset="-122"/>
                           <a:cs typeface="Microsoft JhengHei" pitchFamily="34" charset="-120"/>
                         </a:rPr>
-                        <a:t>函式</a:t>
+                        <a:t>KB_ID 環境變數</a:t>
                       </a:r>
                       <a:endParaRPr lang="en-US" sz="1000" dirty="0">
                         <a:latin typeface="Microsoft JhengHei" charset="0"/>
@@ -37561,7 +37561,7 @@
                           <a:ea typeface="Microsoft JhengHei" pitchFamily="34" charset="-122"/>
                           <a:cs typeface="Microsoft JhengHei" pitchFamily="34" charset="-120"/>
                         </a:rPr>
-                        <a:t>註冊進 tools＋loop 埋點</a:t>
+                        <a:t>設定即通——query_knowledge 接點已就緒</a:t>
                       </a:r>
                       <a:endParaRPr lang="en-US" sz="1000" dirty="0">
                         <a:latin typeface="Microsoft JhengHei" charset="0"/>
@@ -37628,7 +37628,7 @@
                           <a:ea typeface="Microsoft JhengHei" pitchFamily="34" charset="-122"/>
                           <a:cs typeface="Microsoft JhengHei" pitchFamily="34" charset="-120"/>
                         </a:rPr>
-                        <a:t>B：/audit endpoint</a:t>
+                        <a:t>✅ A：audit＋/audit＋面板（07/21 代 B/C 完成）</a:t>
                       </a:r>
                       <a:endParaRPr lang="en-US" sz="1000" dirty="0">
                         <a:latin typeface="Microsoft JhengHei" charset="0"/>
@@ -37823,7 +37823,7 @@
                           <a:ea typeface="Microsoft JhengHei" pitchFamily="34" charset="-122"/>
                           <a:cs typeface="Microsoft JhengHei" pitchFamily="34" charset="-120"/>
                         </a:rPr>
-                        <a:t>決策軌跡面板</a:t>
+                        <a:t>決策軌跡面板已接上</a:t>
                       </a:r>
                       <a:endParaRPr lang="en-US" sz="1000" dirty="0">
                         <a:latin typeface="Microsoft JhengHei" charset="0"/>
@@ -37890,7 +37890,7 @@
                           <a:ea typeface="Microsoft JhengHei" pitchFamily="34" charset="-122"/>
                           <a:cs typeface="Microsoft JhengHei" pitchFamily="34" charset="-120"/>
                         </a:rPr>
-                        <a:t>D：Guardrails 建立（#6）</a:t>
+                        <a:t>🔨 D：Guardrails 建立（#6）</a:t>
                       </a:r>
                       <a:endParaRPr lang="en-US" sz="1000" dirty="0">
                         <a:latin typeface="Microsoft JhengHei" charset="0"/>
@@ -37955,7 +37955,7 @@
                           <a:ea typeface="Microsoft JhengHei" pitchFamily="34" charset="-122"/>
                           <a:cs typeface="Microsoft JhengHei" pitchFamily="34" charset="-120"/>
                         </a:rPr>
-                        <a:t>Guardrail ID</a:t>
+                        <a:t>GUARDRAIL_ID 環境變數</a:t>
                       </a:r>
                       <a:endParaRPr lang="en-US" sz="1000" dirty="0">
                         <a:latin typeface="Microsoft JhengHei" charset="0"/>
@@ -38085,7 +38085,7 @@
                           <a:ea typeface="Microsoft JhengHei" pitchFamily="34" charset="-122"/>
                           <a:cs typeface="Microsoft JhengHei" pitchFamily="34" charset="-120"/>
                         </a:rPr>
-                        <a:t>loop 掛載</a:t>
+                        <a:t>設定即通——掛載程式已就緒</a:t>
                       </a:r>
                       <a:endParaRPr lang="en-US" sz="1000" dirty="0">
                         <a:latin typeface="Microsoft JhengHei" charset="0"/>
@@ -38152,7 +38152,7 @@
                           <a:ea typeface="Microsoft JhengHei" pitchFamily="34" charset="-122"/>
                           <a:cs typeface="Microsoft JhengHei" pitchFamily="34" charset="-120"/>
                         </a:rPr>
-                        <a:t>A：#11／#10／#1 完成</a:t>
+                        <a:t>✅ A：#11／#10／#1 完成（07/21）</a:t>
                       </a:r>
                       <a:endParaRPr lang="en-US" sz="1000" dirty="0">
                         <a:latin typeface="Microsoft JhengHei" charset="0"/>
@@ -38347,7 +38347,7 @@
                           <a:ea typeface="Microsoft JhengHei" pitchFamily="34" charset="-122"/>
                           <a:cs typeface="Microsoft JhengHei" pitchFamily="34" charset="-120"/>
                         </a:rPr>
-                        <a:t>三方案卡・徽章・確認卡接真資料</a:t>
+                        <a:t>三方案卡・徽章・確認卡已接上</a:t>
                       </a:r>
                       <a:endParaRPr lang="en-US" sz="1000" dirty="0">
                         <a:latin typeface="Microsoft JhengHei" charset="0"/>
@@ -38414,7 +38414,7 @@
                           <a:ea typeface="Microsoft JhengHei" pitchFamily="34" charset="-122"/>
                           <a:cs typeface="Microsoft JhengHei" pitchFamily="34" charset="-120"/>
                         </a:rPr>
-                        <a:t>A：核心全完成</a:t>
+                        <a:t>🧪 A：核心全完成</a:t>
                       </a:r>
                       <a:endParaRPr lang="en-US" sz="1000" dirty="0">
                         <a:latin typeface="Microsoft JhengHei" charset="0"/>
@@ -38479,7 +38479,7 @@
                           <a:ea typeface="Microsoft JhengHei" pitchFamily="34" charset="-122"/>
                           <a:cs typeface="Microsoft JhengHei" pitchFamily="34" charset="-120"/>
                         </a:rPr>
-                        <a:t>可測版本 tag</a:t>
+                        <a:t>可測版本 tag＝PR #17</a:t>
                       </a:r>
                       <a:endParaRPr lang="en-US" sz="1000" dirty="0">
                         <a:latin typeface="Microsoft JhengHei" charset="0"/>
@@ -38609,7 +38609,7 @@
                           <a:ea typeface="Microsoft JhengHei" pitchFamily="34" charset="-122"/>
                           <a:cs typeface="Microsoft JhengHei" pitchFamily="34" charset="-120"/>
                         </a:rPr>
-                        <a:t>E2E Golden Path 開跑</a:t>
+                        <a:t>merge＋重部署後 E2E Golden Path 開跑</a:t>
                       </a:r>
                       <a:endParaRPr lang="en-US" sz="1000" dirty="0">
                         <a:latin typeface="Microsoft JhengHei" charset="0"/>
@@ -38676,7 +38676,7 @@
                           <a:ea typeface="Microsoft JhengHei" pitchFamily="34" charset="-122"/>
                           <a:cs typeface="Microsoft JhengHei" pitchFamily="34" charset="-120"/>
                         </a:rPr>
-                        <a:t>C：手機版＋元件（#13）</a:t>
+                        <a:t>🧪 C：手機版＋元件（#13）</a:t>
                       </a:r>
                       <a:endParaRPr lang="en-US" sz="1000" dirty="0">
                         <a:latin typeface="Microsoft JhengHei" charset="0"/>
@@ -38741,7 +38741,7 @@
                           <a:ea typeface="Microsoft JhengHei" pitchFamily="34" charset="-122"/>
                           <a:cs typeface="Microsoft JhengHei" pitchFamily="34" charset="-120"/>
                         </a:rPr>
-                        <a:t>可操作前端</a:t>
+                        <a:t>可操作前端（mock 煙測✅）</a:t>
                       </a:r>
                       <a:endParaRPr lang="en-US" sz="1000" dirty="0">
                         <a:latin typeface="Microsoft JhengHei" charset="0"/>
@@ -38871,7 +38871,7 @@
                           <a:ea typeface="Microsoft JhengHei" pitchFamily="34" charset="-122"/>
                           <a:cs typeface="Microsoft JhengHei" pitchFamily="34" charset="-120"/>
                         </a:rPr>
-                        <a:t>E2E＋離線備援驗證</a:t>
+                        <a:t>E2E＋真環境拔網路驗證</a:t>
                       </a:r>
                       <a:endParaRPr lang="en-US" sz="1000" dirty="0">
                         <a:latin typeface="Microsoft JhengHei" charset="0"/>
@@ -38938,7 +38938,7 @@
                           <a:ea typeface="Microsoft JhengHei" pitchFamily="34" charset="-122"/>
                           <a:cs typeface="Microsoft JhengHei" pitchFamily="34" charset="-120"/>
                         </a:rPr>
-                        <a:t>D：E2E 全線綠燈</a:t>
+                        <a:t>🔨 D：E2E 全線綠燈</a:t>
                       </a:r>
                       <a:endParaRPr lang="en-US" sz="1000" dirty="0">
                         <a:latin typeface="Microsoft JhengHei" charset="0"/>
@@ -39133,7 +39133,7 @@
                           <a:ea typeface="Microsoft JhengHei" pitchFamily="34" charset="-122"/>
                           <a:cs typeface="Microsoft JhengHei" pitchFamily="34" charset="-120"/>
                         </a:rPr>
-                        <a:t>預錄影片（#8）＋DEPLOY.md（#14）</a:t>
+                        <a:t>預錄影片（#8）＋DEPLOY.md 演練（#14）</a:t>
                       </a:r>
                       <a:endParaRPr lang="en-US" sz="1000" dirty="0">
                         <a:latin typeface="Microsoft JhengHei" charset="0"/>
@@ -39200,7 +39200,7 @@
                           <a:ea typeface="Microsoft JhengHei" pitchFamily="34" charset="-122"/>
                           <a:cs typeface="Microsoft JhengHei" pitchFamily="34" charset="-120"/>
                         </a:rPr>
-                        <a:t>D：影片＋部署 SOP</a:t>
+                        <a:t>🔨 D：影片＋部署 SOP</a:t>
                       </a:r>
                       <a:endParaRPr lang="en-US" sz="1000" dirty="0">
                         <a:latin typeface="Microsoft JhengHei" charset="0"/>

--- a/docs/MaiMate_開發手冊.pptx
+++ b/docs/MaiMate_開發手冊.pptx
@@ -3003,7 +3003,7 @@
                 <a:ea typeface="Microsoft JhengHei" pitchFamily="34" charset="-122"/>
                 <a:cs typeface="Microsoft JhengHei" pitchFamily="34" charset="-120"/>
               </a:rPr>
-              <a:t>2026/07/21 更新｜決賽 8/1–8/2｜文字完整版：repo 首頁 README.md</a:t>
+              <a:t>2026/07/24 更新｜決賽 8/1–8/2｜文字完整版：repo 首頁 README.md</a:t>
             </a:r>
             <a:endParaRPr lang="en-US" sz="1300" dirty="0"/>
           </a:p>
@@ -16764,7 +16764,7 @@
                 <a:ea typeface="Microsoft JhengHei" pitchFamily="34" charset="-122"/>
                 <a:cs typeface="Microsoft JhengHei" pitchFamily="34" charset="-120"/>
               </a:rPr>
-              <a:t>總覽：07/21 四引擎＋離線 Golden Path 劇本完成單元驗證，待 merge 部署整合</a:t>
+              <a:t>總覽：07/23 RAG 護欄二輪修正（PR #23）＋jack 交 A 包文件——重部署仍是第一件事</a:t>
             </a:r>
             <a:endParaRPr lang="en-US" sz="2700" dirty="0"/>
           </a:p>
@@ -16825,7 +16825,7 @@
                 <a:ea typeface="Microsoft JhengHei" pitchFamily="34" charset="-122"/>
                 <a:cs typeface="Microsoft JhengHei" pitchFamily="34" charset="-120"/>
               </a:rPr>
-              <a:t>15</a:t>
+              <a:t>17</a:t>
             </a:r>
             <a:endParaRPr lang="en-US" sz="5400" dirty="0"/>
           </a:p>
@@ -16903,7 +16903,7 @@
                 <a:ea typeface="Microsoft JhengHei" pitchFamily="34" charset="-122"/>
                 <a:cs typeface="Microsoft JhengHei" pitchFamily="34" charset="-120"/>
               </a:rPr>
-              <a:t>行為分析、Bedrock迴圈、部署上線、前端…</a:t>
+              <a:t>行為分析、Bedrock迴圈、RAG KB、query_knowledge…</a:t>
             </a:r>
             <a:endParaRPr lang="en-US" sz="1050" dirty="0"/>
           </a:p>
@@ -16964,7 +16964,7 @@
                 <a:ea typeface="Microsoft JhengHei" pitchFamily="34" charset="-122"/>
                 <a:cs typeface="Microsoft JhengHei" pitchFamily="34" charset="-120"/>
               </a:rPr>
-              <a:t>12</a:t>
+              <a:t>13</a:t>
             </a:r>
             <a:endParaRPr lang="en-US" sz="5400" dirty="0"/>
           </a:p>
@@ -17042,7 +17042,7 @@
                 <a:ea typeface="Microsoft JhengHei" pitchFamily="34" charset="-122"/>
                 <a:cs typeface="Microsoft JhengHei" pitchFamily="34" charset="-120"/>
               </a:rPr>
-              <a:t>三方案、Profile、Audit、路由、Private簽章…</a:t>
+              <a:t>三方案、Profile、Audit、路由（已 merge 待重部署驗）…</a:t>
             </a:r>
             <a:endParaRPr lang="en-US" sz="1050" dirty="0"/>
           </a:p>
@@ -17103,7 +17103,7 @@
                 <a:ea typeface="Microsoft JhengHei" pitchFamily="34" charset="-122"/>
                 <a:cs typeface="Microsoft JhengHei" pitchFamily="34" charset="-120"/>
               </a:rPr>
-              <a:t>7</a:t>
+              <a:t>4</a:t>
             </a:r>
             <a:endParaRPr lang="en-US" sz="5400" dirty="0"/>
           </a:p>
@@ -17181,7 +17181,7 @@
                 <a:ea typeface="Microsoft JhengHei" pitchFamily="34" charset="-122"/>
                 <a:cs typeface="Microsoft JhengHei" pitchFamily="34" charset="-120"/>
               </a:rPr>
-              <a:t>RAG、Guardrails、KYC、影片…</a:t>
+              <a:t>Bedrock Guardrails、KYC、影片、簡報修正</a:t>
             </a:r>
             <a:endParaRPr lang="en-US" sz="1050" dirty="0"/>
           </a:p>
@@ -17395,7 +17395,7 @@
                 <a:ea typeface="Microsoft JhengHei" pitchFamily="34" charset="-122"/>
                 <a:cs typeface="Microsoft JhengHei" pitchFamily="34" charset="-120"/>
               </a:rPr>
-              <a:t>Private API 簽章仍未驗證（#4 最小成交前不算數）、/order 沒真跑過、07/21 新四引擎（三方案/Profile/Audit/路由）僅單元驗證未部署——寫好 ≠ 部署過 ≠ Golden Path 能走通。</a:t>
+              <a:t>PR #17 已 merge 但線上環境待重部署（sam deploy＋s3 sync＋兩支 Lambda 金鑰）；Private 簽章/order 真跑仍未驗；Bedrock Guardrails 未建。7/27 晚要全程跑通——重部署是本週第一件事。</a:t>
             </a:r>
             <a:endParaRPr lang="en-US" sz="1400" dirty="0"/>
           </a:p>
@@ -24597,7 +24597,7 @@
                           <a:ea typeface="Microsoft JhengHei" pitchFamily="34" charset="-122"/>
                           <a:cs typeface="Microsoft JhengHei" pitchFamily="34" charset="-120"/>
                         </a:rPr>
-                        <a:t>與程式層雙保險</a:t>
+                        <a:t>程式層誤判修正二輪＋測試（PR #20/#23）；Bedrock 層主控台待建</a:t>
                       </a:r>
                       <a:endParaRPr lang="en-US" sz="1100" dirty="0">
                         <a:latin typeface="Microsoft JhengHei" charset="0"/>
@@ -26737,13 +26737,13 @@
                       <a:r>
                         <a:rPr lang="en-US" sz="1100" b="1" dirty="0">
                           <a:solidFill>
-                            <a:srgbClr val="D64550"/>
-                          </a:solidFill>
-                          <a:latin typeface="Microsoft JhengHei" pitchFamily="34" charset="0"/>
-                          <a:ea typeface="Microsoft JhengHei" pitchFamily="34" charset="-122"/>
-                          <a:cs typeface="Microsoft JhengHei" pitchFamily="34" charset="-120"/>
-                        </a:rPr>
-                        <a:t>🔨 待做</a:t>
+                            <a:srgbClr val="E8A13A"/>
+                          </a:solidFill>
+                          <a:latin typeface="Microsoft JhengHei" pitchFamily="34" charset="0"/>
+                          <a:ea typeface="Microsoft JhengHei" pitchFamily="34" charset="-122"/>
+                          <a:cs typeface="Microsoft JhengHei" pitchFamily="34" charset="-120"/>
+                        </a:rPr>
+                        <a:t>🧪 寫好待測</a:t>
                       </a:r>
                       <a:endParaRPr lang="en-US" sz="1100" dirty="0">
                         <a:latin typeface="Microsoft JhengHei" charset="0"/>
@@ -26808,7 +26808,7 @@
                           <a:ea typeface="Microsoft JhengHei" pitchFamily="34" charset="-122"/>
                           <a:cs typeface="Microsoft JhengHei" pitchFamily="34" charset="-120"/>
                         </a:rPr>
-                        <a:t>防詐/教材公開資源＋工作坊資料（授權限制）</a:t>
+                        <a:t>初版語料已入 KB（護欄誤判由實測發現）；完整度待 B 確認</a:t>
                       </a:r>
                       <a:endParaRPr lang="en-US" sz="1100" dirty="0">
                         <a:latin typeface="Microsoft JhengHei" charset="0"/>
@@ -26999,13 +26999,13 @@
                       <a:r>
                         <a:rPr lang="en-US" sz="1100" b="1" dirty="0">
                           <a:solidFill>
-                            <a:srgbClr val="D64550"/>
-                          </a:solidFill>
-                          <a:latin typeface="Microsoft JhengHei" pitchFamily="34" charset="0"/>
-                          <a:ea typeface="Microsoft JhengHei" pitchFamily="34" charset="-122"/>
-                          <a:cs typeface="Microsoft JhengHei" pitchFamily="34" charset="-120"/>
-                        </a:rPr>
-                        <a:t>🔨 待做</a:t>
+                            <a:srgbClr val="1F9D66"/>
+                          </a:solidFill>
+                          <a:latin typeface="Microsoft JhengHei" pitchFamily="34" charset="0"/>
+                          <a:ea typeface="Microsoft JhengHei" pitchFamily="34" charset="-122"/>
+                          <a:cs typeface="Microsoft JhengHei" pitchFamily="34" charset="-120"/>
+                        </a:rPr>
+                        <a:t>✅ 已驗證</a:t>
                       </a:r>
                       <a:endParaRPr lang="en-US" sz="1100" dirty="0">
                         <a:latin typeface="Microsoft JhengHei" charset="0"/>
@@ -27070,7 +27070,7 @@
                           <a:ea typeface="Microsoft JhengHei" pitchFamily="34" charset="-122"/>
                           <a:cs typeface="Microsoft JhengHei" pitchFamily="34" charset="-120"/>
                         </a:rPr>
-                        <a:t>賽前建好，決賽只上架</a:t>
+                        <a:t>07/22 KB 建成＋SAM 參數化＋IAM（PR #21，B 包）</a:t>
                       </a:r>
                       <a:endParaRPr lang="en-US" sz="1100" dirty="0">
                         <a:latin typeface="Microsoft JhengHei" charset="0"/>
@@ -27261,13 +27261,13 @@
                       <a:r>
                         <a:rPr lang="en-US" sz="1100" b="1" dirty="0">
                           <a:solidFill>
-                            <a:srgbClr val="D64550"/>
-                          </a:solidFill>
-                          <a:latin typeface="Microsoft JhengHei" pitchFamily="34" charset="0"/>
-                          <a:ea typeface="Microsoft JhengHei" pitchFamily="34" charset="-122"/>
-                          <a:cs typeface="Microsoft JhengHei" pitchFamily="34" charset="-120"/>
-                        </a:rPr>
-                        <a:t>🔨 待做</a:t>
+                            <a:srgbClr val="1F9D66"/>
+                          </a:solidFill>
+                          <a:latin typeface="Microsoft JhengHei" pitchFamily="34" charset="0"/>
+                          <a:ea typeface="Microsoft JhengHei" pitchFamily="34" charset="-122"/>
+                          <a:cs typeface="Microsoft JhengHei" pitchFamily="34" charset="-120"/>
+                        </a:rPr>
+                        <a:t>✅ 已驗證</a:t>
                       </a:r>
                       <a:endParaRPr lang="en-US" sz="1100" dirty="0">
                         <a:latin typeface="Microsoft JhengHei" charset="0"/>
@@ -27332,7 +27332,7 @@
                           <a:ea typeface="Microsoft JhengHei" pitchFamily="34" charset="-122"/>
                           <a:cs typeface="Microsoft JhengHei" pitchFamily="34" charset="-120"/>
                         </a:rPr>
-                        <a:t>回答附出處</a:t>
+                        <a:t>07/22 接上真 KB 實測；防詐語境誤判已修（PR #20）</a:t>
                       </a:r>
                       <a:endParaRPr lang="en-US" sz="1100" dirty="0">
                         <a:latin typeface="Microsoft JhengHei" charset="0"/>
@@ -34785,7 +34785,7 @@
                 <a:ea typeface="Microsoft JhengHei" pitchFamily="34" charset="-122"/>
                 <a:cs typeface="Microsoft JhengHei" pitchFamily="34" charset="-120"/>
               </a:rPr>
-              <a:t>🔨 #9 RAG 語料蒐集（防詐+教材；不進 git）</a:t>
+              <a:t>🧪 #9 RAG 語料：初版已入 KB，完整度待確認</a:t>
             </a:r>
             <a:endParaRPr lang="en-US" sz="1150" dirty="0"/>
           </a:p>
@@ -34806,7 +34806,7 @@
                 <a:ea typeface="Microsoft JhengHei" pitchFamily="34" charset="-122"/>
                 <a:cs typeface="Microsoft JhengHei" pitchFamily="34" charset="-120"/>
               </a:rPr>
-              <a:t>🔨 #9 Bedrock KB＋S3 Vectors 建置</a:t>
+              <a:t>✅ #9 Bedrock KB 建成＋SAM 參數化——07/22</a:t>
             </a:r>
             <a:endParaRPr lang="en-US" sz="1150" dirty="0"/>
           </a:p>
@@ -34827,7 +34827,7 @@
                 <a:ea typeface="Microsoft JhengHei" pitchFamily="34" charset="-122"/>
                 <a:cs typeface="Microsoft JhengHei" pitchFamily="34" charset="-120"/>
               </a:rPr>
-              <a:t>🔨 #9 query_knowledge 函式（交 A 註冊）</a:t>
+              <a:t>✅ #9 query_knowledge 接真 KB 實測——07/22</a:t>
             </a:r>
             <a:endParaRPr lang="en-US" sz="1150" dirty="0"/>
           </a:p>
@@ -34869,7 +34869,7 @@
                 <a:ea typeface="Microsoft JhengHei" pitchFamily="34" charset="-122"/>
                 <a:cs typeface="Microsoft JhengHei" pitchFamily="34" charset="-120"/>
               </a:rPr>
-              <a:t>🧪 #2 max_public：ticker✅ 07/19，kline/depth 待驗</a:t>
+              <a:t>✅ #2 max_public：三 endpoint 正規化＋實測（PR #18）</a:t>
             </a:r>
             <a:endParaRPr lang="en-US" sz="1150" dirty="0"/>
           </a:p>
@@ -37366,7 +37366,7 @@
                           <a:ea typeface="Microsoft JhengHei" pitchFamily="34" charset="-122"/>
                           <a:cs typeface="Microsoft JhengHei" pitchFamily="34" charset="-120"/>
                         </a:rPr>
-                        <a:t>🔨 B：KB 建置（#9，語料＋Bedrock KB）</a:t>
+                        <a:t>✅ B：KB 建置（07/22，PR #21）</a:t>
                       </a:r>
                       <a:endParaRPr lang="en-US" sz="1000" dirty="0">
                         <a:latin typeface="Microsoft JhengHei" charset="0"/>
@@ -37431,7 +37431,7 @@
                           <a:ea typeface="Microsoft JhengHei" pitchFamily="34" charset="-122"/>
                           <a:cs typeface="Microsoft JhengHei" pitchFamily="34" charset="-120"/>
                         </a:rPr>
-                        <a:t>KB_ID 環境變數</a:t>
+                        <a:t>KB_ID 已入 SAM 參數</a:t>
                       </a:r>
                       <a:endParaRPr lang="en-US" sz="1000" dirty="0">
                         <a:latin typeface="Microsoft JhengHei" charset="0"/>
@@ -37561,7 +37561,7 @@
                           <a:ea typeface="Microsoft JhengHei" pitchFamily="34" charset="-122"/>
                           <a:cs typeface="Microsoft JhengHei" pitchFamily="34" charset="-120"/>
                         </a:rPr>
-                        <a:t>設定即通——query_knowledge 接點已就緒</a:t>
+                        <a:t>query_knowledge 已接上真 KB 實測</a:t>
                       </a:r>
                       <a:endParaRPr lang="en-US" sz="1000" dirty="0">
                         <a:latin typeface="Microsoft JhengHei" charset="0"/>
@@ -38414,7 +38414,7 @@
                           <a:ea typeface="Microsoft JhengHei" pitchFamily="34" charset="-122"/>
                           <a:cs typeface="Microsoft JhengHei" pitchFamily="34" charset="-120"/>
                         </a:rPr>
-                        <a:t>🧪 A：核心全完成</a:t>
+                        <a:t>✅ A：核心全完成（07/22 PR #17 merge）</a:t>
                       </a:r>
                       <a:endParaRPr lang="en-US" sz="1000" dirty="0">
                         <a:latin typeface="Microsoft JhengHei" charset="0"/>
@@ -38479,7 +38479,7 @@
                           <a:ea typeface="Microsoft JhengHei" pitchFamily="34" charset="-122"/>
                           <a:cs typeface="Microsoft JhengHei" pitchFamily="34" charset="-120"/>
                         </a:rPr>
-                        <a:t>可測版本 tag＝PR #17</a:t>
+                        <a:t>main 即可測版本</a:t>
                       </a:r>
                       <a:endParaRPr lang="en-US" sz="1000" dirty="0">
                         <a:latin typeface="Microsoft JhengHei" charset="0"/>
@@ -38609,7 +38609,7 @@
                           <a:ea typeface="Microsoft JhengHei" pitchFamily="34" charset="-122"/>
                           <a:cs typeface="Microsoft JhengHei" pitchFamily="34" charset="-120"/>
                         </a:rPr>
-                        <a:t>merge＋重部署後 E2E Golden Path 開跑</a:t>
+                        <a:t>重部署後 E2E Golden Path 開跑</a:t>
                       </a:r>
                       <a:endParaRPr lang="en-US" sz="1000" dirty="0">
                         <a:latin typeface="Microsoft JhengHei" charset="0"/>

--- a/docs/MaiMate_開發手冊.pptx
+++ b/docs/MaiMate_開發手冊.pptx
@@ -3003,7 +3003,7 @@
                 <a:ea typeface="Microsoft JhengHei" pitchFamily="34" charset="-122"/>
                 <a:cs typeface="Microsoft JhengHei" pitchFamily="34" charset="-120"/>
               </a:rPr>
-              <a:t>2026/07/24 更新｜決賽 8/1–8/2｜文字完整版：repo 首頁 README.md</a:t>
+              <a:t>2026/07/26 更新｜決賽 8/1–8/2｜文字完整版：repo 首頁 README.md</a:t>
             </a:r>
             <a:endParaRPr lang="en-US" sz="1300" dirty="0"/>
           </a:p>
@@ -3348,7 +3348,7 @@
                 <a:ea typeface="Microsoft JhengHei" pitchFamily="34" charset="-122"/>
                 <a:cs typeface="Microsoft JhengHei" pitchFamily="34" charset="-120"/>
               </a:rPr>
-              <a:t>四支 API 格式寫死在 README §3——C 包照契約用假資料先做，不用等後端</a:t>
+              <a:t>五支 API 格式寫死在 README §3——C 包照契約用假資料先做，不用等後端</a:t>
             </a:r>
             <a:endParaRPr lang="en-US" sz="1250" dirty="0"/>
           </a:p>
@@ -11888,7 +11888,7 @@
                           <a:ea typeface="Microsoft JhengHei" pitchFamily="34" charset="-122"/>
                           <a:cs typeface="Microsoft JhengHei" pitchFamily="34" charset="-120"/>
                         </a:rPr>
-                        <a:t>Lambda ×4＋API Gateway</a:t>
+                        <a:t>Lambda ×5＋API Gateway</a:t>
                       </a:r>
                       <a:endParaRPr lang="en-US" sz="1050" dirty="0">
                         <a:latin typeface="Microsoft JhengHei" charset="0"/>
@@ -21531,7 +21531,7 @@
                 <a:ea typeface="Microsoft JhengHei" pitchFamily="34" charset="-122"/>
                 <a:cs typeface="Microsoft JhengHei" pitchFamily="34" charset="-120"/>
               </a:rPr>
-              <a:t>程式骨架：Agent 迴圈/護欄、Lambda×4、MAX 整合、前端 SPA、SAM</a:t>
+              <a:t>程式骨架：Agent 迴圈/護欄、Lambda×5、MAX 整合、前端 SPA、SAM</a:t>
             </a:r>
             <a:endParaRPr lang="en-US" sz="1300" dirty="0"/>
           </a:p>
@@ -23157,7 +23157,7 @@
                           <a:ea typeface="Microsoft JhengHei" pitchFamily="34" charset="-122"/>
                           <a:cs typeface="Microsoft JhengHei" pitchFamily="34" charset="-120"/>
                         </a:rPr>
-                        <a:t>工具定義×4＋dispatch</a:t>
+                        <a:t>工具定義×5＋dispatch</a:t>
                       </a:r>
                       <a:endParaRPr lang="en-US" sz="1100" dirty="0">
                         <a:latin typeface="Microsoft JhengHei" charset="0"/>
@@ -23287,7 +23287,7 @@
                           <a:ea typeface="Microsoft JhengHei" pitchFamily="34" charset="-122"/>
                           <a:cs typeface="Microsoft JhengHei" pitchFamily="34" charset="-120"/>
                         </a:rPr>
-                        <a:t>隨迴圈上線；已加 key_findings 摘要（答非所問保險）</a:t>
+                        <a:t>隨迴圈上線；key_findings 摘要（答非所問保險）；KB_ID 設定時自動加掛 query_knowledge</a:t>
                       </a:r>
                       <a:endParaRPr lang="en-US" sz="1100" dirty="0">
                         <a:latin typeface="Microsoft JhengHei" charset="0"/>
@@ -27464,7 +27464,7 @@
                           <a:ea typeface="Microsoft JhengHei" pitchFamily="34" charset="-122"/>
                           <a:cs typeface="Microsoft JhengHei" pitchFamily="34" charset="-120"/>
                         </a:rPr>
-                        <a:t>Lambda×4 handlers</a:t>
+                        <a:t>Lambda×5 handlers（×4 上線）</a:t>
                       </a:r>
                       <a:endParaRPr lang="en-US" sz="1100" dirty="0">
                         <a:latin typeface="Microsoft JhengHei" charset="0"/>
@@ -27594,7 +27594,7 @@
                           <a:ea typeface="Microsoft JhengHei" pitchFamily="34" charset="-122"/>
                           <a:cs typeface="Microsoft JhengHei" pitchFamily="34" charset="-120"/>
                         </a:rPr>
-                        <a:t>07/19 SAM 部署上線；/chat /health /market 線上實測，/order 待 #4</a:t>
+                        <a:t>07/19 SAM×4 部署；/chat /health /market 線上實測；/audit 已寫好待重部署，/order 待 #4</a:t>
                       </a:r>
                       <a:endParaRPr lang="en-US" sz="1100" dirty="0">
                         <a:latin typeface="Microsoft JhengHei" charset="0"/>

--- a/docs/MaiMate_開發手冊.pptx
+++ b/docs/MaiMate_開發手冊.pptx
@@ -3003,7 +3003,7 @@
                 <a:ea typeface="Microsoft JhengHei" pitchFamily="34" charset="-122"/>
                 <a:cs typeface="Microsoft JhengHei" pitchFamily="34" charset="-120"/>
               </a:rPr>
-              <a:t>2026/07/26 更新｜決賽 8/1–8/2｜文字完整版：repo 首頁 README.md</a:t>
+              <a:t>2026/07/27 更新｜決賽 8/1–8/2｜文字完整版：repo 首頁 README.md</a:t>
             </a:r>
             <a:endParaRPr lang="en-US" sz="1300" dirty="0"/>
           </a:p>
@@ -16764,7 +16764,7 @@
                 <a:ea typeface="Microsoft JhengHei" pitchFamily="34" charset="-122"/>
                 <a:cs typeface="Microsoft JhengHei" pitchFamily="34" charset="-120"/>
               </a:rPr>
-              <a:t>總覽：07/23 RAG 護欄二輪修正（PR #23）＋jack 交 A 包文件——重部署仍是第一件事</a:t>
+              <a:t>總覽：07/26 haoting777 交 C 包兩 PR（hero 卡＋Onboarding 五屏，煙測已代驗全綠）——四 PR 待 merge</a:t>
             </a:r>
             <a:endParaRPr lang="en-US" sz="2700" dirty="0"/>
           </a:p>
@@ -17395,7 +17395,7 @@
                 <a:ea typeface="Microsoft JhengHei" pitchFamily="34" charset="-122"/>
                 <a:cs typeface="Microsoft JhengHei" pitchFamily="34" charset="-120"/>
               </a:rPr>
-              <a:t>PR #17 已 merge 但線上環境待重部署（sam deploy＋s3 sync＋兩支 Lambda 金鑰）；Private 簽章/order 真跑仍未驗；Bedrock Guardrails 未建。7/27 晚要全程跑通——重部署是本週第一件事。</a:t>
+              <a:t>今天就是 7/27：線上 wco1xm8zvl 仍是舊版，四 PR（#19 CI／#25 docs＋加拍／#26 hero／#28 Onboarding）全數待 merge。今晚唯一要事＝merge＋重部署＋E2E；#25 與 #26 撞 app.js，merge 順序見日報。距 7/31 code freeze 剩 4 天。</a:t>
             </a:r>
             <a:endParaRPr lang="en-US" sz="1400" dirty="0"/>
           </a:p>
@@ -29543,7 +29543,7 @@
                           <a:ea typeface="Microsoft JhengHei" pitchFamily="34" charset="-122"/>
                           <a:cs typeface="Microsoft JhengHei" pitchFamily="34" charset="-120"/>
                         </a:rPr>
-                        <a:t>07/21 Golden Path 離線劇本完成＋煙測（三方案→確認→軌跡）；真環境拔網路待驗</a:t>
+                        <a:t>07/21 Golden Path 劇本＋07/26 加拍備援（三模式開場白/RAG 防詐）皆煙測綠；真環境拔網路待驗</a:t>
                       </a:r>
                       <a:endParaRPr lang="en-US" sz="1100" dirty="0">
                         <a:latin typeface="Microsoft JhengHei" charset="0"/>
@@ -29805,7 +29805,7 @@
                           <a:ea typeface="Microsoft JhengHei" pitchFamily="34" charset="-122"/>
                           <a:cs typeface="Microsoft JhengHei" pitchFamily="34" charset="-120"/>
                         </a:rPr>
-                        <a:t>對話主畫面、確認卡放大、麥麥視覺</a:t>
+                        <a:t>haoting777 #26 hero 卡＋#28 Onboarding 五屏 open 中（07/27 煙測代驗全綠）；merge＋部署驗收待做</a:t>
                       </a:r>
                       <a:endParaRPr lang="en-US" sz="1100" dirty="0">
                         <a:latin typeface="Microsoft JhengHei" charset="0"/>
@@ -29996,13 +29996,13 @@
                       <a:r>
                         <a:rPr lang="en-US" sz="1100" b="1" dirty="0">
                           <a:solidFill>
-                            <a:srgbClr val="D64550"/>
-                          </a:solidFill>
-                          <a:latin typeface="Microsoft JhengHei" pitchFamily="34" charset="0"/>
-                          <a:ea typeface="Microsoft JhengHei" pitchFamily="34" charset="-122"/>
-                          <a:cs typeface="Microsoft JhengHei" pitchFamily="34" charset="-120"/>
-                        </a:rPr>
-                        <a:t>🔨 待做</a:t>
+                            <a:srgbClr val="E8A13A"/>
+                          </a:solidFill>
+                          <a:latin typeface="Microsoft JhengHei" pitchFamily="34" charset="0"/>
+                          <a:ea typeface="Microsoft JhengHei" pitchFamily="34" charset="-122"/>
+                          <a:cs typeface="Microsoft JhengHei" pitchFamily="34" charset="-120"/>
+                        </a:rPr>
+                        <a:t>🧪 寫好待測</a:t>
                       </a:r>
                       <a:endParaRPr lang="en-US" sz="1100" dirty="0">
                         <a:latin typeface="Microsoft JhengHei" charset="0"/>
@@ -30067,7 +30067,7 @@
                           <a:ea typeface="Microsoft JhengHei" pitchFamily="34" charset="-122"/>
                           <a:cs typeface="Microsoft JhengHei" pitchFamily="34" charset="-120"/>
                         </a:rPr>
-                        <a:t>隨 #11 #10 #12</a:t>
+                        <a:t>07/21 完成＋mock 煙測綠（本表 07/27 補正歸類）；部署後真資料驗收待做</a:t>
                       </a:r>
                       <a:endParaRPr lang="en-US" sz="1100" dirty="0">
                         <a:latin typeface="Microsoft JhengHei" charset="0"/>
@@ -35164,7 +35164,7 @@
                 <a:ea typeface="Microsoft JhengHei" pitchFamily="34" charset="-122"/>
                 <a:cs typeface="Microsoft JhengHei" pitchFamily="34" charset="-120"/>
               </a:rPr>
-              <a:t>🔨 #13 手機版 RWD（照 mockups 三畫面）</a:t>
+              <a:t>🔨 #13 RWD：haoting #26 hero 卡＋#28 Onboarding 待 merge</a:t>
             </a:r>
             <a:endParaRPr lang="en-US" sz="1150" dirty="0"/>
           </a:p>
@@ -38676,7 +38676,7 @@
                           <a:ea typeface="Microsoft JhengHei" pitchFamily="34" charset="-122"/>
                           <a:cs typeface="Microsoft JhengHei" pitchFamily="34" charset="-120"/>
                         </a:rPr>
-                        <a:t>🧪 C：手機版＋元件（#13）</a:t>
+                        <a:t>🧪 C：手機版＋元件（#13，haoting #26/#28 開發中）</a:t>
                       </a:r>
                       <a:endParaRPr lang="en-US" sz="1000" dirty="0">
                         <a:latin typeface="Microsoft JhengHei" charset="0"/>
@@ -38871,7 +38871,7 @@
                           <a:ea typeface="Microsoft JhengHei" pitchFamily="34" charset="-122"/>
                           <a:cs typeface="Microsoft JhengHei" pitchFamily="34" charset="-120"/>
                         </a:rPr>
-                        <a:t>E2E＋真環境拔網路驗證</a:t>
+                        <a:t>PR merge → E2E＋真環境拔網路驗證</a:t>
                       </a:r>
                       <a:endParaRPr lang="en-US" sz="1000" dirty="0">
                         <a:latin typeface="Microsoft JhengHei" charset="0"/>

--- a/docs/MaiMate_開發手冊.pptx
+++ b/docs/MaiMate_開發手冊.pptx
@@ -16764,7 +16764,7 @@
                 <a:ea typeface="Microsoft JhengHei" pitchFamily="34" charset="-122"/>
                 <a:cs typeface="Microsoft JhengHei" pitchFamily="34" charset="-120"/>
               </a:rPr>
-              <a:t>總覽：07/26 haoting777 交 C 包兩 PR（hero 卡＋Onboarding 五屏，煙測已代驗全綠）——四 PR 待 merge</a:t>
+              <a:t>總覽：07/27 #19 CI＋#26 hero 卡＋#28 Onboarding 全數 merge——重部署成唯一 blocker</a:t>
             </a:r>
             <a:endParaRPr lang="en-US" sz="2700" dirty="0"/>
           </a:p>
@@ -17395,7 +17395,7 @@
                 <a:ea typeface="Microsoft JhengHei" pitchFamily="34" charset="-122"/>
                 <a:cs typeface="Microsoft JhengHei" pitchFamily="34" charset="-120"/>
               </a:rPr>
-              <a:t>今天就是 7/27：線上 wco1xm8zvl 仍是舊版，四 PR（#19 CI／#25 docs＋加拍／#26 hero／#28 Onboarding）全數待 merge。今晚唯一要事＝merge＋重部署＋E2E；#25 與 #26 撞 app.js，merge 順序見日報。距 7/31 code freeze 剩 4 天。</a:t>
+              <a:t>今天就是 7/27：#19/#26/#28 已全數 merge（07/27 早），#25 已 rebase 待合。線上 wco1xm8zvl 仍是舊版——重部署（sam deploy＋s3 sync＋兩支 Lambda 金鑰）是現在唯一 blocker，今晚全程跑通就靠它。距 7/31 code freeze 剩 4 天。</a:t>
             </a:r>
             <a:endParaRPr lang="en-US" sz="1400" dirty="0"/>
           </a:p>
@@ -29734,13 +29734,13 @@
                       <a:r>
                         <a:rPr lang="en-US" sz="1100" b="1" dirty="0">
                           <a:solidFill>
-                            <a:srgbClr val="D64550"/>
-                          </a:solidFill>
-                          <a:latin typeface="Microsoft JhengHei" pitchFamily="34" charset="0"/>
-                          <a:ea typeface="Microsoft JhengHei" pitchFamily="34" charset="-122"/>
-                          <a:cs typeface="Microsoft JhengHei" pitchFamily="34" charset="-120"/>
-                        </a:rPr>
-                        <a:t>🔨 待做</a:t>
+                            <a:srgbClr val="E8A13A"/>
+                          </a:solidFill>
+                          <a:latin typeface="Microsoft JhengHei" pitchFamily="34" charset="0"/>
+                          <a:ea typeface="Microsoft JhengHei" pitchFamily="34" charset="-122"/>
+                          <a:cs typeface="Microsoft JhengHei" pitchFamily="34" charset="-120"/>
+                        </a:rPr>
+                        <a:t>🧪 寫好待測</a:t>
                       </a:r>
                       <a:endParaRPr lang="en-US" sz="1100" dirty="0">
                         <a:latin typeface="Microsoft JhengHei" charset="0"/>
@@ -29805,7 +29805,7 @@
                           <a:ea typeface="Microsoft JhengHei" pitchFamily="34" charset="-122"/>
                           <a:cs typeface="Microsoft JhengHei" pitchFamily="34" charset="-120"/>
                         </a:rPr>
-                        <a:t>haoting777 #26 hero 卡＋#28 Onboarding 五屏 open 中（07/27 煙測代驗全綠）；merge＋部署驗收待做</a:t>
+                        <a:t>haoting777 #26 hero 卡＋#28 Onboarding 五屏已 merge（07/27，四組煙測全綠）；部署驗收待做</a:t>
                       </a:r>
                       <a:endParaRPr lang="en-US" sz="1100" dirty="0">
                         <a:latin typeface="Microsoft JhengHei" charset="0"/>
@@ -35164,7 +35164,7 @@
                 <a:ea typeface="Microsoft JhengHei" pitchFamily="34" charset="-122"/>
                 <a:cs typeface="Microsoft JhengHei" pitchFamily="34" charset="-120"/>
               </a:rPr>
-              <a:t>🔨 #13 RWD：haoting #26 hero 卡＋#28 Onboarding 待 merge</a:t>
+              <a:t>🧪 #13 RWD：haoting #26＋#28 已 merge（07/27）待部署驗</a:t>
             </a:r>
             <a:endParaRPr lang="en-US" sz="1150" dirty="0"/>
           </a:p>
@@ -38676,7 +38676,7 @@
                           <a:ea typeface="Microsoft JhengHei" pitchFamily="34" charset="-122"/>
                           <a:cs typeface="Microsoft JhengHei" pitchFamily="34" charset="-120"/>
                         </a:rPr>
-                        <a:t>🧪 C：手機版＋元件（#13，haoting #26/#28 開發中）</a:t>
+                        <a:t>🧪 C：手機版＋元件（#13，haoting #26/#28 已 merge）</a:t>
                       </a:r>
                       <a:endParaRPr lang="en-US" sz="1000" dirty="0">
                         <a:latin typeface="Microsoft JhengHei" charset="0"/>
@@ -38871,7 +38871,7 @@
                           <a:ea typeface="Microsoft JhengHei" pitchFamily="34" charset="-122"/>
                           <a:cs typeface="Microsoft JhengHei" pitchFamily="34" charset="-120"/>
                         </a:rPr>
-                        <a:t>PR merge → E2E＋真環境拔網路驗證</a:t>
+                        <a:t>E2E＋真環境拔網路驗證</a:t>
                       </a:r>
                       <a:endParaRPr lang="en-US" sz="1000" dirty="0">
                         <a:latin typeface="Microsoft JhengHei" charset="0"/>

--- a/docs/MaiMate_開發手冊.pptx
+++ b/docs/MaiMate_開發手冊.pptx
@@ -3003,7 +3003,7 @@
                 <a:ea typeface="Microsoft JhengHei" pitchFamily="34" charset="-122"/>
                 <a:cs typeface="Microsoft JhengHei" pitchFamily="34" charset="-120"/>
               </a:rPr>
-              <a:t>2026/07/27 更新｜決賽 8/1–8/2｜文字完整版：repo 首頁 README.md</a:t>
+              <a:t>2026/07/28 更新｜決賽 8/1–8/2｜文字完整版：repo 首頁 README.md</a:t>
             </a:r>
             <a:endParaRPr lang="en-US" sz="1300" dirty="0"/>
           </a:p>
@@ -16764,7 +16764,7 @@
                 <a:ea typeface="Microsoft JhengHei" pitchFamily="34" charset="-122"/>
                 <a:cs typeface="Microsoft JhengHei" pitchFamily="34" charset="-120"/>
               </a:rPr>
-              <a:t>總覽：07/27 #19 CI＋#26 hero 卡＋#28 Onboarding 全數 merge——重部署成唯一 blocker</a:t>
+              <a:t>總覽：五 PR 全數 merge，main＝完整決賽版——只剩「部署上去、照表測完」</a:t>
             </a:r>
             <a:endParaRPr lang="en-US" sz="2700" dirty="0"/>
           </a:p>
@@ -17042,7 +17042,7 @@
                 <a:ea typeface="Microsoft JhengHei" pitchFamily="34" charset="-122"/>
                 <a:cs typeface="Microsoft JhengHei" pitchFamily="34" charset="-120"/>
               </a:rPr>
-              <a:t>三方案、Profile、Audit、路由（已 merge 待重部署驗）…</a:t>
+              <a:t>三方案、Profile、Audit、路由、RWD＋Onboarding（全在 main，待部署驗）…</a:t>
             </a:r>
             <a:endParaRPr lang="en-US" sz="1050" dirty="0"/>
           </a:p>
@@ -17395,7 +17395,7 @@
                 <a:ea typeface="Microsoft JhengHei" pitchFamily="34" charset="-122"/>
                 <a:cs typeface="Microsoft JhengHei" pitchFamily="34" charset="-120"/>
               </a:rPr>
-              <a:t>今天就是 7/27：#19/#26/#28 已全數 merge（07/27 早），#25 已 rebase 待合。線上 wco1xm8zvl 仍是舊版——重部署（sam deploy＋s3 sync＋兩支 Lambda 金鑰）是現在唯一 blocker，今晚全程跑通就靠它。距 7/31 code freeze 剩 4 天。</a:t>
+              <a:t>程式碼已無 blocker：#19/#26/#28/#25/#30 全數進 main（07/27–28）。剩下全是「人要做的事」——①跑 CSV 重產 health_report（#27/#29）②重部署（三個 API_BASE＋兩支 Lambda 金鑰）③照 docs/TEST_CHECKLIST.md 打勾。距 7/31 code freeze 剩 3 天。</a:t>
             </a:r>
             <a:endParaRPr lang="en-US" sz="1400" dirty="0"/>
           </a:p>
@@ -26284,7 +26284,7 @@
                           <a:ea typeface="Microsoft JhengHei" pitchFamily="34" charset="-122"/>
                           <a:cs typeface="Microsoft JhengHei" pitchFamily="34" charset="-120"/>
                         </a:rPr>
-                        <a:t>五組指標齊全</a:t>
+                        <a:t>五組指標齊全並驗證；realized_pnl＋#29 三聚合值程式已就緒，待跑 CSV 重產（#27/#29）</a:t>
                       </a:r>
                       <a:endParaRPr lang="en-US" sz="1100" dirty="0">
                         <a:latin typeface="Microsoft JhengHei" charset="0"/>
@@ -29675,7 +29675,7 @@
                           <a:ea typeface="Microsoft JhengHei" pitchFamily="34" charset="-122"/>
                           <a:cs typeface="Microsoft JhengHei" pitchFamily="34" charset="-120"/>
                         </a:rPr>
-                        <a:t>手機版 RWD（Golden Path 動線）</a:t>
+                        <a:t>手機版 RWD＋Onboarding 五屏</a:t>
                       </a:r>
                       <a:endParaRPr lang="en-US" sz="1100" dirty="0">
                         <a:latin typeface="Microsoft JhengHei" charset="0"/>
@@ -29805,7 +29805,7 @@
                           <a:ea typeface="Microsoft JhengHei" pitchFamily="34" charset="-122"/>
                           <a:cs typeface="Microsoft JhengHei" pitchFamily="34" charset="-120"/>
                         </a:rPr>
-                        <a:t>haoting777 #26 hero 卡＋#28 Onboarding 五屏已 merge（07/27，四組煙測全綠）；部署驗收待做</a:t>
+                        <a:t>haoting777 #26 健康分 hero 卡＋#28 入口/授權/問卷/分析/Profile 已 merge（07/27，四組煙測全綠）；部署驗收待做</a:t>
                       </a:r>
                       <a:endParaRPr lang="en-US" sz="1100" dirty="0">
                         <a:latin typeface="Microsoft JhengHei" charset="0"/>
@@ -30723,7 +30723,7 @@
                           <a:ea typeface="Microsoft JhengHei" pitchFamily="34" charset="-122"/>
                           <a:cs typeface="Microsoft JhengHei" pitchFamily="34" charset="-120"/>
                         </a:rPr>
-                        <a:t>從零部署演練＋DEPLOY.md</a:t>
+                        <a:t>部署 SOP＋驗收清單</a:t>
                       </a:r>
                       <a:endParaRPr lang="en-US" sz="1100" dirty="0">
                         <a:latin typeface="Microsoft JhengHei" charset="0"/>
@@ -30853,7 +30853,7 @@
                           <a:ea typeface="Microsoft JhengHei" pitchFamily="34" charset="-122"/>
                           <a:cs typeface="Microsoft JhengHei" pitchFamily="34" charset="-120"/>
                         </a:rPr>
-                        <a:t>DEPLOY.md 已出稿（07/21，含檢查清單與速查表）；&lt;1hr 計時演練待做</a:t>
+                        <a:t>DEPLOY.md（07/28 修正 API_BASE 三處陷阱）＋TEST_CHECKLIST.md A–G 段已出稿；&lt;1hr 計時演練待做</a:t>
                       </a:r>
                       <a:endParaRPr lang="en-US" sz="1100" dirty="0">
                         <a:latin typeface="Microsoft JhengHei" charset="0"/>
@@ -32385,7 +32385,7 @@
                 <a:ea typeface="Microsoft JhengHei" pitchFamily="34" charset="-122"/>
                 <a:cs typeface="Microsoft JhengHei" pitchFamily="34" charset="-120"/>
               </a:rPr>
-              <a:t>寫好的程式都要過這關才算數</a:t>
+              <a:t>寫好的程式都要過這關才算數——逐項操作步驟見 docs/TEST_CHECKLIST.md（A–G 段）</a:t>
             </a:r>
             <a:endParaRPr lang="en-US" sz="1250" dirty="0"/>
           </a:p>
@@ -33889,7 +33889,7 @@
                           <a:ea typeface="Microsoft JhengHei" pitchFamily="34" charset="-122"/>
                           <a:cs typeface="Microsoft JhengHei" pitchFamily="34" charset="-120"/>
                         </a:rPr>
-                        <a:t>全賣→三方案→確認→最小額度成交→軌跡完整</a:t>
+                        <a:t>全賣→三方案→確認→最小額度成交→軌跡完整（TEST_CHECKLIST D 段 18 項）</a:t>
                       </a:r>
                       <a:endParaRPr lang="en-US" sz="1100" dirty="0">
                         <a:latin typeface="Microsoft JhengHei" charset="0"/>
@@ -35164,7 +35164,7 @@
                 <a:ea typeface="Microsoft JhengHei" pitchFamily="34" charset="-122"/>
                 <a:cs typeface="Microsoft JhengHei" pitchFamily="34" charset="-120"/>
               </a:rPr>
-              <a:t>🧪 #13 RWD：haoting #26＋#28 已 merge（07/27）待部署驗</a:t>
+              <a:t>🧪 #13 RWD＋Onboarding：#26/#28 已 merge，待部署驗</a:t>
             </a:r>
             <a:endParaRPr lang="en-US" sz="1150" dirty="0"/>
           </a:p>
@@ -35454,7 +35454,7 @@
                 <a:ea typeface="Microsoft JhengHei" pitchFamily="34" charset="-122"/>
                 <a:cs typeface="Microsoft JhengHei" pitchFamily="34" charset="-120"/>
               </a:rPr>
-              <a:t>🔨 #6 Guardrails｜🧪 #14 DEPLOY.md 已出稿、計時演練待做</a:t>
+              <a:t>🔨 #6 Guardrails｜🧪 #14 DEPLOY＋TEST_CHECKLIST 已出稿、演練待做</a:t>
             </a:r>
             <a:endParaRPr lang="en-US" sz="1150" dirty="0"/>
           </a:p>
@@ -38676,7 +38676,7 @@
                           <a:ea typeface="Microsoft JhengHei" pitchFamily="34" charset="-122"/>
                           <a:cs typeface="Microsoft JhengHei" pitchFamily="34" charset="-120"/>
                         </a:rPr>
-                        <a:t>🧪 C：手機版＋元件（#13，haoting #26/#28 已 merge）</a:t>
+                        <a:t>✅ C：RWD＋Onboarding 已交（#26/#28 merge）</a:t>
                       </a:r>
                       <a:endParaRPr lang="en-US" sz="1000" dirty="0">
                         <a:latin typeface="Microsoft JhengHei" charset="0"/>
@@ -38741,7 +38741,7 @@
                           <a:ea typeface="Microsoft JhengHei" pitchFamily="34" charset="-122"/>
                           <a:cs typeface="Microsoft JhengHei" pitchFamily="34" charset="-120"/>
                         </a:rPr>
-                        <a:t>可操作前端（mock 煙測✅）</a:t>
+                        <a:t>可操作前端（四組煙測✅）</a:t>
                       </a:r>
                       <a:endParaRPr lang="en-US" sz="1000" dirty="0">
                         <a:latin typeface="Microsoft JhengHei" charset="0"/>
@@ -38871,7 +38871,7 @@
                           <a:ea typeface="Microsoft JhengHei" pitchFamily="34" charset="-122"/>
                           <a:cs typeface="Microsoft JhengHei" pitchFamily="34" charset="-120"/>
                         </a:rPr>
-                        <a:t>E2E＋真環境拔網路驗證</a:t>
+                        <a:t>只等部署→E2E＋拔網路驗證</a:t>
                       </a:r>
                       <a:endParaRPr lang="en-US" sz="1000" dirty="0">
                         <a:latin typeface="Microsoft JhengHei" charset="0"/>
@@ -38938,7 +38938,7 @@
                           <a:ea typeface="Microsoft JhengHei" pitchFamily="34" charset="-122"/>
                           <a:cs typeface="Microsoft JhengHei" pitchFamily="34" charset="-120"/>
                         </a:rPr>
-                        <a:t>🔨 D：E2E 全線綠燈</a:t>
+                        <a:t>🔨 D：E2E 全線綠燈（照 TEST_CHECKLIST）</a:t>
                       </a:r>
                       <a:endParaRPr lang="en-US" sz="1000" dirty="0">
                         <a:latin typeface="Microsoft JhengHei" charset="0"/>
@@ -39133,7 +39133,7 @@
                           <a:ea typeface="Microsoft JhengHei" pitchFamily="34" charset="-122"/>
                           <a:cs typeface="Microsoft JhengHei" pitchFamily="34" charset="-120"/>
                         </a:rPr>
-                        <a:t>預錄影片（#8）＋DEPLOY.md 演練（#14）</a:t>
+                        <a:t>預錄影片（#8）＋部署計時演練（#14）</a:t>
                       </a:r>
                       <a:endParaRPr lang="en-US" sz="1000" dirty="0">
                         <a:latin typeface="Microsoft JhengHei" charset="0"/>

--- a/docs/MaiMate_開發手冊.pptx
+++ b/docs/MaiMate_開發手冊.pptx
@@ -3003,7 +3003,7 @@
                 <a:ea typeface="Microsoft JhengHei" pitchFamily="34" charset="-122"/>
                 <a:cs typeface="Microsoft JhengHei" pitchFamily="34" charset="-120"/>
               </a:rPr>
-              <a:t>2026/07/28 更新｜決賽 8/1–8/2｜文字完整版：repo 首頁 README.md</a:t>
+              <a:t>2026/07/29 更新｜決賽 8/1–8/2｜文字完整版：repo 首頁 README.md</a:t>
             </a:r>
             <a:endParaRPr lang="en-US" sz="1300" dirty="0"/>
           </a:p>
@@ -16764,7 +16764,7 @@
                 <a:ea typeface="Microsoft JhengHei" pitchFamily="34" charset="-122"/>
                 <a:cs typeface="Microsoft JhengHei" pitchFamily="34" charset="-120"/>
               </a:rPr>
-              <a:t>總覽：五 PR 全數 merge，main＝完整決賽版——只剩「部署上去、照表測完」</a:t>
+              <a:t>總覽：上線實測抓出三個「線上必定失敗」的結構性 bug——都修好了，但還沒部署上去</a:t>
             </a:r>
             <a:endParaRPr lang="en-US" sz="2700" dirty="0"/>
           </a:p>
@@ -16825,7 +16825,7 @@
                 <a:ea typeface="Microsoft JhengHei" pitchFamily="34" charset="-122"/>
                 <a:cs typeface="Microsoft JhengHei" pitchFamily="34" charset="-120"/>
               </a:rPr>
-              <a:t>17</a:t>
+              <a:t>16</a:t>
             </a:r>
             <a:endParaRPr lang="en-US" sz="5400" dirty="0"/>
           </a:p>
@@ -16903,7 +16903,7 @@
                 <a:ea typeface="Microsoft JhengHei" pitchFamily="34" charset="-122"/>
                 <a:cs typeface="Microsoft JhengHei" pitchFamily="34" charset="-120"/>
               </a:rPr>
-              <a:t>行為分析、Bedrock迴圈、RAG KB、query_knowledge…</a:t>
+              <a:t>行為分析、Bedrock迴圈、RAG KB、MAX 簽章、確認卡…</a:t>
             </a:r>
             <a:endParaRPr lang="en-US" sz="1050" dirty="0"/>
           </a:p>
@@ -16964,7 +16964,7 @@
                 <a:ea typeface="Microsoft JhengHei" pitchFamily="34" charset="-122"/>
                 <a:cs typeface="Microsoft JhengHei" pitchFamily="34" charset="-120"/>
               </a:rPr>
-              <a:t>13</a:t>
+              <a:t>14</a:t>
             </a:r>
             <a:endParaRPr lang="en-US" sz="5400" dirty="0"/>
           </a:p>
@@ -17042,7 +17042,7 @@
                 <a:ea typeface="Microsoft JhengHei" pitchFamily="34" charset="-122"/>
                 <a:cs typeface="Microsoft JhengHei" pitchFamily="34" charset="-120"/>
               </a:rPr>
-              <a:t>三方案、Profile、Audit、路由、RWD＋Onboarding（全在 main，待部署驗）…</a:t>
+              <a:t>三方案、Profile、Audit、路由、RWD（線上跑的仍是舊版）…</a:t>
             </a:r>
             <a:endParaRPr lang="en-US" sz="1050" dirty="0"/>
           </a:p>
@@ -17103,7 +17103,7 @@
                 <a:ea typeface="Microsoft JhengHei" pitchFamily="34" charset="-122"/>
                 <a:cs typeface="Microsoft JhengHei" pitchFamily="34" charset="-120"/>
               </a:rPr>
-              <a:t>4</a:t>
+              <a:t>5</a:t>
             </a:r>
             <a:endParaRPr lang="en-US" sz="5400" dirty="0"/>
           </a:p>
@@ -17181,7 +17181,7 @@
                 <a:ea typeface="Microsoft JhengHei" pitchFamily="34" charset="-122"/>
                 <a:cs typeface="Microsoft JhengHei" pitchFamily="34" charset="-120"/>
               </a:rPr>
-              <a:t>Bedrock Guardrails、KYC、影片、簡報修正</a:t>
+              <a:t>Guardrails、全員 KYC、影片、簡報修正、Kiro 證據</a:t>
             </a:r>
             <a:endParaRPr lang="en-US" sz="1050" dirty="0"/>
           </a:p>
@@ -17395,7 +17395,7 @@
                 <a:ea typeface="Microsoft JhengHei" pitchFamily="34" charset="-122"/>
                 <a:cs typeface="Microsoft JhengHei" pitchFamily="34" charset="-120"/>
               </a:rPr>
-              <a:t>程式碼已無 blocker：#19/#26/#28/#25/#30 全數進 main（07/27–28）。剩下全是「人要做的事」——①跑 CSV 重產 health_report（#27/#29）②重部署（三個 API_BASE＋兩支 Lambda 金鑰）③照 docs/TEST_CHECKLIST.md 打勾。距 7/31 code freeze 剩 3 天。</a:t>
+              <a:t>修好了 ≠ 上線了。07/28–29 部署後實測抓到三個結構性 bug（簽章 2014／volume 空字串／確認憑證沒寫進 DynamoDB＝線上按確認必定 410），修正全在 PR #33 未 merge——**線上此刻跑的仍是壞版本**。下一步只有一條路：merge → sam deploy → 重設兩支 Lambda 金鑰 → 跑 TEST_CHECKLIST D 段。距 7/31 code freeze 剩 2 天。</a:t>
             </a:r>
             <a:endParaRPr lang="en-US" sz="1400" dirty="0"/>
           </a:p>
@@ -22103,7 +22103,7 @@
                 <a:ea typeface="Microsoft JhengHei" pitchFamily="34" charset="-122"/>
                 <a:cs typeface="Microsoft JhengHei" pitchFamily="34" charset="-120"/>
               </a:rPr>
-              <a:t>整合排練週</a:t>
+              <a:t>整合排練週（現在）</a:t>
             </a:r>
             <a:endParaRPr lang="en-US" sz="1500" dirty="0"/>
           </a:p>
@@ -22142,7 +22142,7 @@
                 <a:ea typeface="Microsoft JhengHei" pitchFamily="34" charset="-122"/>
                 <a:cs typeface="Microsoft JhengHei" pitchFamily="34" charset="-120"/>
               </a:rPr>
-              <a:t>E2E・離線備援・預錄影片 v1・簡報定稿・pitch 兩輪</a:t>
+              <a:t>07/28 上線＋D 段實測抓三個結構性 bug；剩：重部署驗證・E2E・影片・pitch</a:t>
             </a:r>
             <a:endParaRPr lang="en-US" sz="1250" dirty="0"/>
           </a:p>
@@ -22569,7 +22569,7 @@
                 <a:ea typeface="Microsoft JhengHei" pitchFamily="34" charset="-122"/>
                 <a:cs typeface="Microsoft JhengHei" pitchFamily="34" charset="-120"/>
               </a:rPr>
-              <a:t>07/19 迴圈已對真模型跑通（Haiku@us-east-1）——重心轉 confirm E2E・路由・三方案</a:t>
+              <a:t>07/29 線上實測：確認卡確實出現，但按下去必定 410——三個斷點已修，待重部署</a:t>
             </a:r>
             <a:endParaRPr lang="en-US" sz="1250" dirty="0"/>
           </a:p>
@@ -23549,7 +23549,7 @@
                           <a:ea typeface="Microsoft JhengHei" pitchFamily="34" charset="-122"/>
                           <a:cs typeface="Microsoft JhengHei" pitchFamily="34" charset="-120"/>
                         </a:rPr>
-                        <a:t>架構完成，待端到端驗證</a:t>
+                        <a:t>07/29 補齊兩個致命缺口：憑證改寫進 DynamoDB（原本只存 ChatFunction 記憶體、OrderFunction 讀不到＝必 410）＋volume_twd→下單量換算；待重部署 E2E</a:t>
                       </a:r>
                       <a:endParaRPr lang="en-US" sz="1100" dirty="0">
                         <a:latin typeface="Microsoft JhengHei" charset="0"/>
@@ -24002,13 +24002,13 @@
                       <a:r>
                         <a:rPr lang="en-US" sz="1100" b="1" dirty="0">
                           <a:solidFill>
-                            <a:srgbClr val="E8A13A"/>
-                          </a:solidFill>
-                          <a:latin typeface="Microsoft JhengHei" pitchFamily="34" charset="0"/>
-                          <a:ea typeface="Microsoft JhengHei" pitchFamily="34" charset="-122"/>
-                          <a:cs typeface="Microsoft JhengHei" pitchFamily="34" charset="-120"/>
-                        </a:rPr>
-                        <a:t>🧪 寫好待測</a:t>
+                            <a:srgbClr val="1F9D66"/>
+                          </a:solidFill>
+                          <a:latin typeface="Microsoft JhengHei" pitchFamily="34" charset="0"/>
+                          <a:ea typeface="Microsoft JhengHei" pitchFamily="34" charset="-122"/>
+                          <a:cs typeface="Microsoft JhengHei" pitchFamily="34" charset="-120"/>
+                        </a:rPr>
+                        <a:t>✅ 已驗證</a:t>
                       </a:r>
                       <a:endParaRPr lang="en-US" sz="1100" dirty="0">
                         <a:latin typeface="Microsoft JhengHei" charset="0"/>
@@ -24073,7 +24073,7 @@
                           <a:ea typeface="Microsoft JhengHei" pitchFamily="34" charset="-122"/>
                           <a:cs typeface="Microsoft JhengHei" pitchFamily="34" charset="-120"/>
                         </a:rPr>
-                        <a:t>後端 07/19 完成上線（任務5）；待一次下單對話 E2E</a:t>
+                        <a:t>07/29 線上實測確認卡確實跳出（D 段走查，並據此修好 TTL 文案／取消留痕）</a:t>
                       </a:r>
                       <a:endParaRPr lang="en-US" sz="1100" dirty="0">
                         <a:latin typeface="Microsoft JhengHei" charset="0"/>
@@ -25566,7 +25566,7 @@
                 <a:ea typeface="Microsoft JhengHei" pitchFamily="34" charset="-122"/>
                 <a:cs typeface="Microsoft JhengHei" pitchFamily="34" charset="-120"/>
               </a:rPr>
-              <a:t>資料・RAG・API 整合（11 項）｜主責 B（Private E2E:D、KYC:全員）</a:t>
+              <a:t>資料・RAG・API 整合（12 項）｜主責 B（Private E2E:D、KYC:全員）</a:t>
             </a:r>
             <a:endParaRPr lang="en-US" sz="2700" dirty="0"/>
           </a:p>
@@ -25600,7 +25600,7 @@
                 <a:gridCol w="5212080"/>
                 <a:gridCol w="1673352"/>
               </a:tblGrid>
-              <a:tr h="425196">
+              <a:tr h="393192">
                 <a:tc>
                   <a:txBody>
                     <a:bodyPr/>
@@ -25874,7 +25874,7 @@
                   </a:tcPr>
                 </a:tc>
               </a:tr>
-              <a:tr h="425196">
+              <a:tr h="393192">
                 <a:tc>
                   <a:txBody>
                     <a:bodyPr/>
@@ -26136,7 +26136,7 @@
                   </a:tcPr>
                 </a:tc>
               </a:tr>
-              <a:tr h="425196">
+              <a:tr h="393192">
                 <a:tc>
                   <a:txBody>
                     <a:bodyPr/>
@@ -26284,7 +26284,7 @@
                           <a:ea typeface="Microsoft JhengHei" pitchFamily="34" charset="-122"/>
                           <a:cs typeface="Microsoft JhengHei" pitchFamily="34" charset="-120"/>
                         </a:rPr>
-                        <a:t>五組指標齊全並驗證；realized_pnl＋#29 三聚合值程式已就緒，待跑 CSV 重產（#27/#29）</a:t>
+                        <a:t>07/28 已用官方 CSV 重產並進 main：已實現損益 +117,482（981勝/493負）、最痛真虧僅 963；三聚合值齊全（#27/#29 已解）</a:t>
                       </a:r>
                       <a:endParaRPr lang="en-US" sz="1100" dirty="0">
                         <a:latin typeface="Microsoft JhengHei" charset="0"/>
@@ -26398,7 +26398,7 @@
                   </a:tcPr>
                 </a:tc>
               </a:tr>
-              <a:tr h="425196">
+              <a:tr h="393192">
                 <a:tc>
                   <a:txBody>
                     <a:bodyPr/>
@@ -26660,7 +26660,7 @@
                   </a:tcPr>
                 </a:tc>
               </a:tr>
-              <a:tr h="425196">
+              <a:tr h="393192">
                 <a:tc>
                   <a:txBody>
                     <a:bodyPr/>
@@ -26922,7 +26922,7 @@
                   </a:tcPr>
                 </a:tc>
               </a:tr>
-              <a:tr h="425196">
+              <a:tr h="393192">
                 <a:tc>
                   <a:txBody>
                     <a:bodyPr/>
@@ -27184,7 +27184,7 @@
                   </a:tcPr>
                 </a:tc>
               </a:tr>
-              <a:tr h="425196">
+              <a:tr h="393192">
                 <a:tc>
                   <a:txBody>
                     <a:bodyPr/>
@@ -27446,7 +27446,7 @@
                   </a:tcPr>
                 </a:tc>
               </a:tr>
-              <a:tr h="425196">
+              <a:tr h="393192">
                 <a:tc>
                   <a:txBody>
                     <a:bodyPr/>
@@ -27464,7 +27464,7 @@
                           <a:ea typeface="Microsoft JhengHei" pitchFamily="34" charset="-122"/>
                           <a:cs typeface="Microsoft JhengHei" pitchFamily="34" charset="-120"/>
                         </a:rPr>
-                        <a:t>Lambda×5 handlers（×4 上線）</a:t>
+                        <a:t>Lambda×5 handlers 全數上線</a:t>
                       </a:r>
                       <a:endParaRPr lang="en-US" sz="1100" dirty="0">
                         <a:latin typeface="Microsoft JhengHei" charset="0"/>
@@ -27594,7 +27594,7 @@
                           <a:ea typeface="Microsoft JhengHei" pitchFamily="34" charset="-122"/>
                           <a:cs typeface="Microsoft JhengHei" pitchFamily="34" charset="-120"/>
                         </a:rPr>
-                        <a:t>07/19 SAM×4 部署；/chat /health /market 線上實測；/audit 已寫好待重部署，/order 待 #4</a:t>
+                        <a:t>07/28 五支皆部署：/chat /health /market /audit 線上實測皆正常（/audit 不再 404）；/order 待真單</a:t>
                       </a:r>
                       <a:endParaRPr lang="en-US" sz="1100" dirty="0">
                         <a:latin typeface="Microsoft JhengHei" charset="0"/>
@@ -27708,7 +27708,7 @@
                   </a:tcPr>
                 </a:tc>
               </a:tr>
-              <a:tr h="425196">
+              <a:tr h="393192">
                 <a:tc>
                   <a:txBody>
                     <a:bodyPr/>
@@ -27970,7 +27970,7 @@
                   </a:tcPr>
                 </a:tc>
               </a:tr>
-              <a:tr h="425196">
+              <a:tr h="393192">
                 <a:tc>
                   <a:txBody>
                     <a:bodyPr/>
@@ -27988,7 +27988,7 @@
                           <a:ea typeface="Microsoft JhengHei" pitchFamily="34" charset="-122"/>
                           <a:cs typeface="Microsoft JhengHei" pitchFamily="34" charset="-120"/>
                         </a:rPr>
-                        <a:t>MAX Private API（HMAC）</a:t>
+                        <a:t>MAX Private API 簽章（HMAC）</a:t>
                       </a:r>
                       <a:endParaRPr lang="en-US" sz="1100" dirty="0">
                         <a:latin typeface="Microsoft JhengHei" charset="0"/>
@@ -28047,6 +28047,268 @@
                       <a:r>
                         <a:rPr lang="en-US" sz="1100" b="1" dirty="0">
                           <a:solidFill>
+                            <a:srgbClr val="1F9D66"/>
+                          </a:solidFill>
+                          <a:latin typeface="Microsoft JhengHei" pitchFamily="34" charset="0"/>
+                          <a:ea typeface="Microsoft JhengHei" pitchFamily="34" charset="-122"/>
+                          <a:cs typeface="Microsoft JhengHei" pitchFamily="34" charset="-120"/>
+                        </a:rPr>
+                        <a:t>✅ 已驗證</a:t>
+                      </a:r>
+                      <a:endParaRPr lang="en-US" sz="1100" dirty="0">
+                        <a:latin typeface="Microsoft JhengHei" charset="0"/>
+                        <a:ea typeface="Microsoft JhengHei" charset="0"/>
+                        <a:cs typeface="Microsoft JhengHei" charset="0"/>
+                      </a:endParaRPr>
+                    </a:p>
+                  </a:txBody>
+                  <a:tcPr marL="54864" marR="54864" marT="54864" marB="54864" anchor="ctr">
+                    <a:lnL w="9525" cap="flat" cmpd="sng" algn="ctr">
+                      <a:solidFill>
+                        <a:srgbClr val="D5DEF0"/>
+                      </a:solidFill>
+                      <a:prstDash val="solid"/>
+                      <a:round/>
+                      <a:headEnd type="none" w="med" len="med"/>
+                      <a:tailEnd type="none" w="med" len="med"/>
+                    </a:lnL>
+                    <a:lnR w="9525" cap="flat" cmpd="sng" algn="ctr">
+                      <a:solidFill>
+                        <a:srgbClr val="D5DEF0"/>
+                      </a:solidFill>
+                      <a:prstDash val="solid"/>
+                      <a:round/>
+                      <a:headEnd type="none" w="med" len="med"/>
+                      <a:tailEnd type="none" w="med" len="med"/>
+                    </a:lnR>
+                    <a:lnT w="9525" cap="flat" cmpd="sng" algn="ctr">
+                      <a:solidFill>
+                        <a:srgbClr val="D5DEF0"/>
+                      </a:solidFill>
+                      <a:prstDash val="solid"/>
+                      <a:round/>
+                      <a:headEnd type="none" w="med" len="med"/>
+                      <a:tailEnd type="none" w="med" len="med"/>
+                    </a:lnT>
+                    <a:lnB w="9525" cap="flat" cmpd="sng" algn="ctr">
+                      <a:solidFill>
+                        <a:srgbClr val="D5DEF0"/>
+                      </a:solidFill>
+                      <a:prstDash val="solid"/>
+                      <a:round/>
+                      <a:headEnd type="none" w="med" len="med"/>
+                      <a:tailEnd type="none" w="med" len="med"/>
+                    </a:lnB>
+                  </a:tcPr>
+                </a:tc>
+                <a:tc>
+                  <a:txBody>
+                    <a:bodyPr/>
+                    <a:lstStyle/>
+                    <a:p>
+                      <a:pPr indent="0" marL="0">
+                        <a:buNone/>
+                      </a:pPr>
+                      <a:r>
+                        <a:rPr lang="en-US" sz="1100" dirty="0">
+                          <a:solidFill>
+                            <a:srgbClr val="1F2937"/>
+                          </a:solidFill>
+                          <a:latin typeface="Microsoft JhengHei" pitchFamily="34" charset="0"/>
+                          <a:ea typeface="Microsoft JhengHei" pitchFamily="34" charset="-122"/>
+                          <a:cs typeface="Microsoft JhengHei" pitchFamily="34" charset="-120"/>
+                        </a:rPr>
+                        <a:t>07/29 對真 API 實測通過（/api/v3/info 回 level:2）。2014 真因＝MAX 先比對「payload 解碼後 == request body」再驗簽章，GET 也必須送 body</a:t>
+                      </a:r>
+                      <a:endParaRPr lang="en-US" sz="1100" dirty="0">
+                        <a:latin typeface="Microsoft JhengHei" charset="0"/>
+                        <a:ea typeface="Microsoft JhengHei" charset="0"/>
+                        <a:cs typeface="Microsoft JhengHei" charset="0"/>
+                      </a:endParaRPr>
+                    </a:p>
+                  </a:txBody>
+                  <a:tcPr marL="54864" marR="54864" marT="54864" marB="54864" anchor="ctr">
+                    <a:lnL w="9525" cap="flat" cmpd="sng" algn="ctr">
+                      <a:solidFill>
+                        <a:srgbClr val="D5DEF0"/>
+                      </a:solidFill>
+                      <a:prstDash val="solid"/>
+                      <a:round/>
+                      <a:headEnd type="none" w="med" len="med"/>
+                      <a:tailEnd type="none" w="med" len="med"/>
+                    </a:lnL>
+                    <a:lnR w="9525" cap="flat" cmpd="sng" algn="ctr">
+                      <a:solidFill>
+                        <a:srgbClr val="D5DEF0"/>
+                      </a:solidFill>
+                      <a:prstDash val="solid"/>
+                      <a:round/>
+                      <a:headEnd type="none" w="med" len="med"/>
+                      <a:tailEnd type="none" w="med" len="med"/>
+                    </a:lnR>
+                    <a:lnT w="9525" cap="flat" cmpd="sng" algn="ctr">
+                      <a:solidFill>
+                        <a:srgbClr val="D5DEF0"/>
+                      </a:solidFill>
+                      <a:prstDash val="solid"/>
+                      <a:round/>
+                      <a:headEnd type="none" w="med" len="med"/>
+                      <a:tailEnd type="none" w="med" len="med"/>
+                    </a:lnT>
+                    <a:lnB w="9525" cap="flat" cmpd="sng" algn="ctr">
+                      <a:solidFill>
+                        <a:srgbClr val="D5DEF0"/>
+                      </a:solidFill>
+                      <a:prstDash val="solid"/>
+                      <a:round/>
+                      <a:headEnd type="none" w="med" len="med"/>
+                      <a:tailEnd type="none" w="med" len="med"/>
+                    </a:lnB>
+                  </a:tcPr>
+                </a:tc>
+                <a:tc>
+                  <a:txBody>
+                    <a:bodyPr/>
+                    <a:lstStyle/>
+                    <a:p>
+                      <a:pPr indent="0" marL="0">
+                        <a:buNone/>
+                      </a:pPr>
+                      <a:r>
+                        <a:rPr lang="en-US" sz="1000" dirty="0">
+                          <a:solidFill>
+                            <a:srgbClr val="6B7280"/>
+                          </a:solidFill>
+                          <a:latin typeface="Microsoft JhengHei" pitchFamily="34" charset="0"/>
+                          <a:ea typeface="Microsoft JhengHei" pitchFamily="34" charset="-122"/>
+                          <a:cs typeface="Microsoft JhengHei" pitchFamily="34" charset="-120"/>
+                        </a:rPr>
+                        <a:t>#4</a:t>
+                      </a:r>
+                      <a:endParaRPr lang="en-US" sz="1000" dirty="0">
+                        <a:latin typeface="Microsoft JhengHei" charset="0"/>
+                        <a:ea typeface="Microsoft JhengHei" charset="0"/>
+                        <a:cs typeface="Microsoft JhengHei" charset="0"/>
+                      </a:endParaRPr>
+                    </a:p>
+                  </a:txBody>
+                  <a:tcPr marL="54864" marR="54864" marT="54864" marB="54864" anchor="ctr">
+                    <a:lnL w="9525" cap="flat" cmpd="sng" algn="ctr">
+                      <a:solidFill>
+                        <a:srgbClr val="D5DEF0"/>
+                      </a:solidFill>
+                      <a:prstDash val="solid"/>
+                      <a:round/>
+                      <a:headEnd type="none" w="med" len="med"/>
+                      <a:tailEnd type="none" w="med" len="med"/>
+                    </a:lnL>
+                    <a:lnR w="9525" cap="flat" cmpd="sng" algn="ctr">
+                      <a:solidFill>
+                        <a:srgbClr val="D5DEF0"/>
+                      </a:solidFill>
+                      <a:prstDash val="solid"/>
+                      <a:round/>
+                      <a:headEnd type="none" w="med" len="med"/>
+                      <a:tailEnd type="none" w="med" len="med"/>
+                    </a:lnR>
+                    <a:lnT w="9525" cap="flat" cmpd="sng" algn="ctr">
+                      <a:solidFill>
+                        <a:srgbClr val="D5DEF0"/>
+                      </a:solidFill>
+                      <a:prstDash val="solid"/>
+                      <a:round/>
+                      <a:headEnd type="none" w="med" len="med"/>
+                      <a:tailEnd type="none" w="med" len="med"/>
+                    </a:lnT>
+                    <a:lnB w="9525" cap="flat" cmpd="sng" algn="ctr">
+                      <a:solidFill>
+                        <a:srgbClr val="D5DEF0"/>
+                      </a:solidFill>
+                      <a:prstDash val="solid"/>
+                      <a:round/>
+                      <a:headEnd type="none" w="med" len="med"/>
+                      <a:tailEnd type="none" w="med" len="med"/>
+                    </a:lnB>
+                  </a:tcPr>
+                </a:tc>
+              </a:tr>
+              <a:tr h="393192">
+                <a:tc>
+                  <a:txBody>
+                    <a:bodyPr/>
+                    <a:lstStyle/>
+                    <a:p>
+                      <a:pPr indent="0" marL="0">
+                        <a:buNone/>
+                      </a:pPr>
+                      <a:r>
+                        <a:rPr lang="en-US" sz="1100" b="1" dirty="0">
+                          <a:solidFill>
+                            <a:srgbClr val="1F2937"/>
+                          </a:solidFill>
+                          <a:latin typeface="Microsoft JhengHei" pitchFamily="34" charset="0"/>
+                          <a:ea typeface="Microsoft JhengHei" pitchFamily="34" charset="-122"/>
+                          <a:cs typeface="Microsoft JhengHei" pitchFamily="34" charset="-120"/>
+                        </a:rPr>
+                        <a:t>Private 下單 place_order</a:t>
+                      </a:r>
+                      <a:endParaRPr lang="en-US" sz="1100" dirty="0">
+                        <a:latin typeface="Microsoft JhengHei" charset="0"/>
+                        <a:ea typeface="Microsoft JhengHei" charset="0"/>
+                        <a:cs typeface="Microsoft JhengHei" charset="0"/>
+                      </a:endParaRPr>
+                    </a:p>
+                  </a:txBody>
+                  <a:tcPr marL="54864" marR="54864" marT="54864" marB="54864" anchor="ctr">
+                    <a:lnL w="9525" cap="flat" cmpd="sng" algn="ctr">
+                      <a:solidFill>
+                        <a:srgbClr val="D5DEF0"/>
+                      </a:solidFill>
+                      <a:prstDash val="solid"/>
+                      <a:round/>
+                      <a:headEnd type="none" w="med" len="med"/>
+                      <a:tailEnd type="none" w="med" len="med"/>
+                    </a:lnL>
+                    <a:lnR w="9525" cap="flat" cmpd="sng" algn="ctr">
+                      <a:solidFill>
+                        <a:srgbClr val="D5DEF0"/>
+                      </a:solidFill>
+                      <a:prstDash val="solid"/>
+                      <a:round/>
+                      <a:headEnd type="none" w="med" len="med"/>
+                      <a:tailEnd type="none" w="med" len="med"/>
+                    </a:lnR>
+                    <a:lnT w="9525" cap="flat" cmpd="sng" algn="ctr">
+                      <a:solidFill>
+                        <a:srgbClr val="D5DEF0"/>
+                      </a:solidFill>
+                      <a:prstDash val="solid"/>
+                      <a:round/>
+                      <a:headEnd type="none" w="med" len="med"/>
+                      <a:tailEnd type="none" w="med" len="med"/>
+                    </a:lnT>
+                    <a:lnB w="9525" cap="flat" cmpd="sng" algn="ctr">
+                      <a:solidFill>
+                        <a:srgbClr val="D5DEF0"/>
+                      </a:solidFill>
+                      <a:prstDash val="solid"/>
+                      <a:round/>
+                      <a:headEnd type="none" w="med" len="med"/>
+                      <a:tailEnd type="none" w="med" len="med"/>
+                    </a:lnB>
+                  </a:tcPr>
+                </a:tc>
+                <a:tc>
+                  <a:txBody>
+                    <a:bodyPr/>
+                    <a:lstStyle/>
+                    <a:p>
+                      <a:pPr indent="0" marL="0">
+                        <a:buNone/>
+                      </a:pPr>
+                      <a:r>
+                        <a:rPr lang="en-US" sz="1100" b="1" dirty="0">
+                          <a:solidFill>
                             <a:srgbClr val="E8A13A"/>
                           </a:solidFill>
                           <a:latin typeface="Microsoft JhengHei" pitchFamily="34" charset="0"/>
@@ -28118,7 +28380,7 @@
                           <a:ea typeface="Microsoft JhengHei" pitchFamily="34" charset="-122"/>
                           <a:cs typeface="Microsoft JhengHei" pitchFamily="34" charset="-120"/>
                         </a:rPr>
-                        <a:t>簽章未驗證——對照 max-mcp-server 核對</a:t>
+                        <a:t>volume 換算＋憑證持久化已補；線上跑的仍是 2014 舊版，最小額度真單待重部署後執行</a:t>
                       </a:r>
                       <a:endParaRPr lang="en-US" sz="1100" dirty="0">
                         <a:latin typeface="Microsoft JhengHei" charset="0"/>
@@ -28232,7 +28494,7 @@
                   </a:tcPr>
                 </a:tc>
               </a:tr>
-              <a:tr h="425196">
+              <a:tr h="393192">
                 <a:tc>
                   <a:txBody>
                     <a:bodyPr/>
@@ -28494,7 +28756,7 @@
                   </a:tcPr>
                 </a:tc>
               </a:tr>
-              <a:tr h="425196">
+              <a:tr h="393192">
                 <a:tc>
                   <a:txBody>
                     <a:bodyPr/>
@@ -28642,7 +28904,7 @@
                           <a:ea typeface="Microsoft JhengHei" pitchFamily="34" charset="-122"/>
                           <a:cs typeface="Microsoft JhengHei" pitchFamily="34" charset="-120"/>
                         </a:rPr>
-                        <a:t>人工項，審核有等待期——最急</a:t>
+                        <a:t>隊長 07/29 已驗證通過（level:2，權限「個人及帳戶[讀取]」）；其餘隊員未回報——加分證據五張截圖也還沒存 Drive</a:t>
                       </a:r>
                       <a:endParaRPr lang="en-US" sz="1100" dirty="0">
                         <a:latin typeface="Microsoft JhengHei" charset="0"/>
@@ -29805,7 +30067,7 @@
                           <a:ea typeface="Microsoft JhengHei" pitchFamily="34" charset="-122"/>
                           <a:cs typeface="Microsoft JhengHei" pitchFamily="34" charset="-120"/>
                         </a:rPr>
-                        <a:t>haoting777 #26 健康分 hero 卡＋#28 入口/授權/問卷/分析/Profile 已 merge（07/27，四組煙測全綠）；部署驗收待做</a:t>
+                        <a:t>07/28 已部署上線，D1–D4 過（健康分圓環正常、顯示 +NT$117,482）；D5–D18＋E 段五屏未測</a:t>
                       </a:r>
                       <a:endParaRPr lang="en-US" sz="1100" dirty="0">
                         <a:latin typeface="Microsoft JhengHei" charset="0"/>
@@ -30067,7 +30329,7 @@
                           <a:ea typeface="Microsoft JhengHei" pitchFamily="34" charset="-122"/>
                           <a:cs typeface="Microsoft JhengHei" pitchFamily="34" charset="-120"/>
                         </a:rPr>
-                        <a:t>07/21 完成＋mock 煙測綠（本表 07/27 補正歸類）；部署後真資料驗收待做</a:t>
+                        <a:t>07/29 實測抓到「推薦卡看起來可點卻沒反應」已修為 role=button；重部署後複驗</a:t>
                       </a:r>
                       <a:endParaRPr lang="en-US" sz="1100" dirty="0">
                         <a:latin typeface="Microsoft JhengHei" charset="0"/>
@@ -30329,7 +30591,7 @@
                           <a:ea typeface="Microsoft JhengHei" pitchFamily="34" charset="-122"/>
                           <a:cs typeface="Microsoft JhengHei" pitchFamily="34" charset="-120"/>
                         </a:rPr>
-                        <a:t>07/19 首次 deploy 成功（us-east-1 API+S3）</a:t>
+                        <a:t>07/19 首次 deploy＋07/28 重部署成功（stack maimate，五支 Lambda 全上）</a:t>
                       </a:r>
                       <a:endParaRPr lang="en-US" sz="1100" dirty="0">
                         <a:latin typeface="Microsoft JhengHei" charset="0"/>
@@ -30853,7 +31115,7 @@
                           <a:ea typeface="Microsoft JhengHei" pitchFamily="34" charset="-122"/>
                           <a:cs typeface="Microsoft JhengHei" pitchFamily="34" charset="-120"/>
                         </a:rPr>
-                        <a:t>DEPLOY.md（07/28 修正 API_BASE 三處陷阱）＋TEST_CHECKLIST.md A–G 段已出稿；&lt;1hr 計時演練待做</a:t>
+                        <a:t>07/28 實戰後再修：重部署會洗掉手動金鑰、macOS sed 要空引號、CLI --environment 會清空模板變數；deploy-drill spec 17 項可交 Kiro 跑；&lt;1hr 計時演練待做</a:t>
                       </a:r>
                       <a:endParaRPr lang="en-US" sz="1100" dirty="0">
                         <a:latin typeface="Microsoft JhengHei" charset="0"/>
@@ -33365,7 +33627,7 @@
                           <a:ea typeface="Microsoft JhengHei" pitchFamily="34" charset="-122"/>
                           <a:cs typeface="Microsoft JhengHei" pitchFamily="34" charset="-120"/>
                         </a:rPr>
-                        <a:t>token 過期/重放回 410；60 秒邊界</a:t>
+                        <a:t>過期／重放／未知 token 皆回 410 已有回歸測試（tests/test_order_flow.py）；線上 DynamoDB 路徑待重部署驗</a:t>
                       </a:r>
                       <a:endParaRPr lang="en-US" sz="1100" dirty="0">
                         <a:latin typeface="Microsoft JhengHei" charset="0"/>
@@ -34579,7 +34841,7 @@
                 <a:ea typeface="Microsoft JhengHei" pitchFamily="34" charset="-122"/>
                 <a:cs typeface="Microsoft JhengHei" pitchFamily="34" charset="-120"/>
               </a:rPr>
-              <a:t>🧪 #1 confirm 後端✅待E2E｜#5 路由✅待部署</a:t>
+              <a:t>✅ #1 confirm 確認卡 07/29 線上實測跳出｜🧪 #5 路由待部署</a:t>
             </a:r>
             <a:endParaRPr lang="en-US" sz="1150" dirty="0"/>
           </a:p>
@@ -34890,7 +35152,7 @@
                 <a:ea typeface="Microsoft JhengHei" pitchFamily="34" charset="-122"/>
                 <a:cs typeface="Microsoft JhengHei" pitchFamily="34" charset="-120"/>
               </a:rPr>
-              <a:t>🧪 max_private 簽章對照 max-mcp-server 核對</a:t>
+              <a:t>✅ max_private 簽章 07/29 對真 API 實測通過（level:2）</a:t>
             </a:r>
             <a:endParaRPr lang="en-US" sz="1150" dirty="0"/>
           </a:p>
@@ -35164,7 +35426,7 @@
                 <a:ea typeface="Microsoft JhengHei" pitchFamily="34" charset="-122"/>
                 <a:cs typeface="Microsoft JhengHei" pitchFamily="34" charset="-120"/>
               </a:rPr>
-              <a:t>🧪 #13 RWD＋Onboarding：#26/#28 已 merge，待部署驗</a:t>
+              <a:t>🧪 #13 RWD＋Onboarding：07/28 已上線，D1–D4 過、D5–D18 未測</a:t>
             </a:r>
             <a:endParaRPr lang="en-US" sz="1150" dirty="0"/>
           </a:p>
@@ -35433,7 +35695,7 @@
                 <a:ea typeface="Microsoft JhengHei" pitchFamily="34" charset="-122"/>
                 <a:cs typeface="Microsoft JhengHei" pitchFamily="34" charset="-120"/>
               </a:rPr>
-              <a:t>✅ SAM 部署上線 07/19（/order 冒煙待真單）</a:t>
+              <a:t>✅ SAM 重部署 07/28 全站上線（/order 待真單）</a:t>
             </a:r>
             <a:endParaRPr lang="en-US" sz="1150" dirty="0"/>
           </a:p>
@@ -35454,7 +35716,7 @@
                 <a:ea typeface="Microsoft JhengHei" pitchFamily="34" charset="-122"/>
                 <a:cs typeface="Microsoft JhengHei" pitchFamily="34" charset="-120"/>
               </a:rPr>
-              <a:t>🔨 #6 Guardrails｜🧪 #14 DEPLOY＋TEST_CHECKLIST 已出稿、演練待做</a:t>
+              <a:t>🔨 #6 Guardrails｜🧪 #14 DEPLOY 已依實戰修正、計時演練待做</a:t>
             </a:r>
             <a:endParaRPr lang="en-US" sz="1150" dirty="0"/>
           </a:p>
@@ -35730,7 +35992,7 @@
                 <a:ea typeface="Microsoft JhengHei" pitchFamily="34" charset="-122"/>
                 <a:cs typeface="Microsoft JhengHei" pitchFamily="34" charset="-120"/>
               </a:rPr>
-              <a:t>✅=已交棒｜🧪=就緒待部署驗證｜🔨=待做（07/21 盤點）。流程圖版在 README §1</a:t>
+              <a:t>✅=已交棒｜🧪=就緒待部署驗證｜🔨=待做（07/29 盤點）。流程圖版在 README §1</a:t>
             </a:r>
             <a:endParaRPr lang="en-US" sz="1250" dirty="0"/>
           </a:p>
@@ -36318,7 +36580,7 @@
                           <a:ea typeface="Microsoft JhengHei" pitchFamily="34" charset="-122"/>
                           <a:cs typeface="Microsoft JhengHei" pitchFamily="34" charset="-120"/>
                         </a:rPr>
-                        <a:t>🔨 全員：Lv2 KYC＋Key（#3）——最上游</a:t>
+                        <a:t>🧪 全員：Lv2 KYC＋Key（#3）隊長已通過</a:t>
                       </a:r>
                       <a:endParaRPr lang="en-US" sz="1000" dirty="0">
                         <a:latin typeface="Microsoft JhengHei" charset="0"/>
@@ -36513,7 +36775,7 @@
                           <a:ea typeface="Microsoft JhengHei" pitchFamily="34" charset="-122"/>
                           <a:cs typeface="Microsoft JhengHei" pitchFamily="34" charset="-120"/>
                         </a:rPr>
-                        <a:t>Private API E2E（#4）</a:t>
+                        <a:t>Private API E2E（#4）——其餘隊員待辦</a:t>
                       </a:r>
                       <a:endParaRPr lang="en-US" sz="1000" dirty="0">
                         <a:latin typeface="Microsoft JhengHei" charset="0"/>
@@ -36842,7 +37104,7 @@
                           <a:ea typeface="Microsoft JhengHei" pitchFamily="34" charset="-122"/>
                           <a:cs typeface="Microsoft JhengHei" pitchFamily="34" charset="-120"/>
                         </a:rPr>
-                        <a:t>🔨 B：簽章對照核對</a:t>
+                        <a:t>✅ A：簽章 2014 解決（07/29 實測 level:2）</a:t>
                       </a:r>
                       <a:endParaRPr lang="en-US" sz="1000" dirty="0">
                         <a:latin typeface="Microsoft JhengHei" charset="0"/>
@@ -36907,7 +37169,7 @@
                           <a:ea typeface="Microsoft JhengHei" pitchFamily="34" charset="-122"/>
                           <a:cs typeface="Microsoft JhengHei" pitchFamily="34" charset="-120"/>
                         </a:rPr>
-                        <a:t>簽章確認</a:t>
+                        <a:t>可用的 Private API</a:t>
                       </a:r>
                       <a:endParaRPr lang="en-US" sz="1000" dirty="0">
                         <a:latin typeface="Microsoft JhengHei" charset="0"/>
@@ -37037,7 +37299,7 @@
                           <a:ea typeface="Microsoft JhengHei" pitchFamily="34" charset="-122"/>
                           <a:cs typeface="Microsoft JhengHei" pitchFamily="34" charset="-120"/>
                         </a:rPr>
-                        <a:t>E2E 真下單前置</a:t>
+                        <a:t>只差重部署即可跑最小額度真單</a:t>
                       </a:r>
                       <a:endParaRPr lang="en-US" sz="1000" dirty="0">
                         <a:latin typeface="Microsoft JhengHei" charset="0"/>

--- a/docs/MaiMate_開發手冊.pptx
+++ b/docs/MaiMate_開發手冊.pptx
@@ -16764,7 +16764,7 @@
                 <a:ea typeface="Microsoft JhengHei" pitchFamily="34" charset="-122"/>
                 <a:cs typeface="Microsoft JhengHei" pitchFamily="34" charset="-120"/>
               </a:rPr>
-              <a:t>總覽：上線實測抓出三個「線上必定失敗」的結構性 bug——都修好了，但還沒部署上去</a:t>
+              <a:t>總覽：下單鏈路已上線並自動驗過 21 項——但 RAG 知識庫在線上是掛的</a:t>
             </a:r>
             <a:endParaRPr lang="en-US" sz="2700" dirty="0"/>
           </a:p>
@@ -16825,7 +16825,7 @@
                 <a:ea typeface="Microsoft JhengHei" pitchFamily="34" charset="-122"/>
                 <a:cs typeface="Microsoft JhengHei" pitchFamily="34" charset="-120"/>
               </a:rPr>
-              <a:t>16</a:t>
+              <a:t>17</a:t>
             </a:r>
             <a:endParaRPr lang="en-US" sz="5400" dirty="0"/>
           </a:p>
@@ -16903,7 +16903,7 @@
                 <a:ea typeface="Microsoft JhengHei" pitchFamily="34" charset="-122"/>
                 <a:cs typeface="Microsoft JhengHei" pitchFamily="34" charset="-120"/>
               </a:rPr>
-              <a:t>行為分析、Bedrock迴圈、RAG KB、MAX 簽章、確認卡…</a:t>
+              <a:t>行為分析、Bedrock迴圈、MAX 簽章、確認卡、決策軌跡、程式層護欄…</a:t>
             </a:r>
             <a:endParaRPr lang="en-US" sz="1050" dirty="0"/>
           </a:p>
@@ -16964,7 +16964,7 @@
                 <a:ea typeface="Microsoft JhengHei" pitchFamily="34" charset="-122"/>
                 <a:cs typeface="Microsoft JhengHei" pitchFamily="34" charset="-120"/>
               </a:rPr>
-              <a:t>14</a:t>
+              <a:t>12</a:t>
             </a:r>
             <a:endParaRPr lang="en-US" sz="5400" dirty="0"/>
           </a:p>
@@ -17042,7 +17042,7 @@
                 <a:ea typeface="Microsoft JhengHei" pitchFamily="34" charset="-122"/>
                 <a:cs typeface="Microsoft JhengHei" pitchFamily="34" charset="-120"/>
               </a:rPr>
-              <a:t>三方案、Profile、Audit、路由、RWD（線上跑的仍是舊版）…</a:t>
+              <a:t>Profile、路由、離線備援、RWD D5–D18、真實下單…</a:t>
             </a:r>
             <a:endParaRPr lang="en-US" sz="1050" dirty="0"/>
           </a:p>
@@ -17103,7 +17103,7 @@
                 <a:ea typeface="Microsoft JhengHei" pitchFamily="34" charset="-122"/>
                 <a:cs typeface="Microsoft JhengHei" pitchFamily="34" charset="-120"/>
               </a:rPr>
-              <a:t>5</a:t>
+              <a:t>6</a:t>
             </a:r>
             <a:endParaRPr lang="en-US" sz="5400" dirty="0"/>
           </a:p>
@@ -17181,7 +17181,7 @@
                 <a:ea typeface="Microsoft JhengHei" pitchFamily="34" charset="-122"/>
                 <a:cs typeface="Microsoft JhengHei" pitchFamily="34" charset="-120"/>
               </a:rPr>
-              <a:t>Guardrails、全員 KYC、影片、簡報修正、Kiro 證據</a:t>
+              <a:t>RAG KB 重建(#34)、Guardrails、全員 KYC、影片、簡報、Kiro 證據</a:t>
             </a:r>
             <a:endParaRPr lang="en-US" sz="1050" dirty="0"/>
           </a:p>
@@ -17395,7 +17395,7 @@
                 <a:ea typeface="Microsoft JhengHei" pitchFamily="34" charset="-122"/>
                 <a:cs typeface="Microsoft JhengHei" pitchFamily="34" charset="-120"/>
               </a:rPr>
-              <a:t>修好了 ≠ 上線了。07/28–29 部署後實測抓到三個結構性 bug（簽章 2014／volume 空字串／確認憑證沒寫進 DynamoDB＝線上按確認必定 410），修正全在 PR #33 未 merge——**線上此刻跑的仍是壞版本**。下一步只有一條路：merge → sam deploy → 重設兩支 Lambda 金鑰 → 跑 TEST_CHECKLIST D 段。距 7/31 code freeze 剩 2 天。</a:t>
+              <a:t>RAG 知識庫在線上是掛的（#34）：Bedrock 回「KB DSIYBVI1IX 不存在」，模型改用一般知識回答——**畫面看不出異常，只是安靜地少掉「附出處」這個賣點**，而 F3 是評分紅線。這種「優雅降級」的壞法最危險：不跑驗收就發現不了。修法要 B 包重建 KB 再帶參數部署。距 7/31 code freeze 剩 2 天。</a:t>
             </a:r>
             <a:endParaRPr lang="en-US" sz="1400" dirty="0"/>
           </a:p>
@@ -23478,13 +23478,13 @@
                       <a:r>
                         <a:rPr lang="en-US" sz="1100" b="1" dirty="0">
                           <a:solidFill>
-                            <a:srgbClr val="E8A13A"/>
-                          </a:solidFill>
-                          <a:latin typeface="Microsoft JhengHei" pitchFamily="34" charset="0"/>
-                          <a:ea typeface="Microsoft JhengHei" pitchFamily="34" charset="-122"/>
-                          <a:cs typeface="Microsoft JhengHei" pitchFamily="34" charset="-120"/>
-                        </a:rPr>
-                        <a:t>🧪 寫好待測</a:t>
+                            <a:srgbClr val="1F9D66"/>
+                          </a:solidFill>
+                          <a:latin typeface="Microsoft JhengHei" pitchFamily="34" charset="0"/>
+                          <a:ea typeface="Microsoft JhengHei" pitchFamily="34" charset="-122"/>
+                          <a:cs typeface="Microsoft JhengHei" pitchFamily="34" charset="-120"/>
+                        </a:rPr>
+                        <a:t>✅ 已驗證</a:t>
                       </a:r>
                       <a:endParaRPr lang="en-US" sz="1100" dirty="0">
                         <a:latin typeface="Microsoft JhengHei" charset="0"/>
@@ -23549,7 +23549,7 @@
                           <a:ea typeface="Microsoft JhengHei" pitchFamily="34" charset="-122"/>
                           <a:cs typeface="Microsoft JhengHei" pitchFamily="34" charset="-120"/>
                         </a:rPr>
-                        <a:t>07/29 補齊兩個致命缺口：憑證改寫進 DynamoDB（原本只存 ChatFunction 記憶體、OrderFunction 讀不到＝必 410）＋volume_twd→下單量換算；待重部署 E2E</a:t>
+                        <a:t>07/29 線上自動驗過：確認卡→取消→憑證消耗→軌跡留痕全串起來（verify_live.py D12/D13/D15）。剩真實成交未測</a:t>
                       </a:r>
                       <a:endParaRPr lang="en-US" sz="1100" dirty="0">
                         <a:latin typeface="Microsoft JhengHei" charset="0"/>
@@ -23740,13 +23740,13 @@
                       <a:r>
                         <a:rPr lang="en-US" sz="1100" b="1" dirty="0">
                           <a:solidFill>
-                            <a:srgbClr val="E8A13A"/>
-                          </a:solidFill>
-                          <a:latin typeface="Microsoft JhengHei" pitchFamily="34" charset="0"/>
-                          <a:ea typeface="Microsoft JhengHei" pitchFamily="34" charset="-122"/>
-                          <a:cs typeface="Microsoft JhengHei" pitchFamily="34" charset="-120"/>
-                        </a:rPr>
-                        <a:t>🧪 寫好待測</a:t>
+                            <a:srgbClr val="1F9D66"/>
+                          </a:solidFill>
+                          <a:latin typeface="Microsoft JhengHei" pitchFamily="34" charset="0"/>
+                          <a:ea typeface="Microsoft JhengHei" pitchFamily="34" charset="-122"/>
+                          <a:cs typeface="Microsoft JhengHei" pitchFamily="34" charset="-120"/>
+                        </a:rPr>
+                        <a:t>✅ 已驗證</a:t>
                       </a:r>
                       <a:endParaRPr lang="en-US" sz="1100" dirty="0">
                         <a:latin typeface="Microsoft JhengHei" charset="0"/>
@@ -23811,7 +23811,7 @@
                           <a:ea typeface="Microsoft JhengHei" pitchFamily="34" charset="-122"/>
                           <a:cs typeface="Microsoft JhengHei" pitchFamily="34" charset="-120"/>
                         </a:rPr>
-                        <a:t>正則可測，未寫測試</a:t>
+                        <a:t>07/29 線上驗過 F1/F2/F4/F5：不報明牌、不背書、教育題不誤攔、手機號不落回覆與軌跡</a:t>
                       </a:r>
                       <a:endParaRPr lang="en-US" sz="1100" dirty="0">
                         <a:latin typeface="Microsoft JhengHei" charset="0"/>
@@ -25121,7 +25121,7 @@
                           <a:ea typeface="Microsoft JhengHei" pitchFamily="34" charset="-122"/>
                           <a:cs typeface="Microsoft JhengHei" pitchFamily="34" charset="-120"/>
                         </a:rPr>
-                        <a:t>07/21 引擎＋工具＋前端卡完成、18 項單元測綠；整合測試待部署</a:t>
+                        <a:t>07/29 線上實測三卡出得來、手續費驗算正確（14,140×0.16%≈23）；但同一句話 7 次有 1 次不出卡，DEMO_SCRIPT 別寫死</a:t>
                       </a:r>
                       <a:endParaRPr lang="en-US" sz="1100" dirty="0">
                         <a:latin typeface="Microsoft JhengHei" charset="0"/>
@@ -25312,13 +25312,13 @@
                       <a:r>
                         <a:rPr lang="en-US" sz="1100" b="1" dirty="0">
                           <a:solidFill>
-                            <a:srgbClr val="E8A13A"/>
-                          </a:solidFill>
-                          <a:latin typeface="Microsoft JhengHei" pitchFamily="34" charset="0"/>
-                          <a:ea typeface="Microsoft JhengHei" pitchFamily="34" charset="-122"/>
-                          <a:cs typeface="Microsoft JhengHei" pitchFamily="34" charset="-120"/>
-                        </a:rPr>
-                        <a:t>🧪 寫好待測</a:t>
+                            <a:srgbClr val="1F9D66"/>
+                          </a:solidFill>
+                          <a:latin typeface="Microsoft JhengHei" pitchFamily="34" charset="0"/>
+                          <a:ea typeface="Microsoft JhengHei" pitchFamily="34" charset="-122"/>
+                          <a:cs typeface="Microsoft JhengHei" pitchFamily="34" charset="-120"/>
+                        </a:rPr>
+                        <a:t>✅ 已驗證</a:t>
                       </a:r>
                       <a:endParaRPr lang="en-US" sz="1100" dirty="0">
                         <a:latin typeface="Microsoft JhengHei" charset="0"/>
@@ -25383,7 +25383,7 @@
                           <a:ea typeface="Microsoft JhengHei" pitchFamily="34" charset="-122"/>
                           <a:cs typeface="Microsoft JhengHei" pitchFamily="34" charset="-120"/>
                         </a:rPr>
-                        <a:t>07/21 留痕＋/audit＋軌跡面板完成；DynamoDB 路徑待部署驗</a:t>
+                        <a:t>07/29 線上驗過：tool_call→draft_created→user_cancelled 依序留痕，PII 不落軌跡</a:t>
                       </a:r>
                       <a:endParaRPr lang="en-US" sz="1100" dirty="0">
                         <a:latin typeface="Microsoft JhengHei" charset="0"/>
@@ -26999,13 +26999,13 @@
                       <a:r>
                         <a:rPr lang="en-US" sz="1100" b="1" dirty="0">
                           <a:solidFill>
-                            <a:srgbClr val="1F9D66"/>
-                          </a:solidFill>
-                          <a:latin typeface="Microsoft JhengHei" pitchFamily="34" charset="0"/>
-                          <a:ea typeface="Microsoft JhengHei" pitchFamily="34" charset="-122"/>
-                          <a:cs typeface="Microsoft JhengHei" pitchFamily="34" charset="-120"/>
-                        </a:rPr>
-                        <a:t>✅ 已驗證</a:t>
+                            <a:srgbClr val="D64550"/>
+                          </a:solidFill>
+                          <a:latin typeface="Microsoft JhengHei" pitchFamily="34" charset="0"/>
+                          <a:ea typeface="Microsoft JhengHei" pitchFamily="34" charset="-122"/>
+                          <a:cs typeface="Microsoft JhengHei" pitchFamily="34" charset="-120"/>
+                        </a:rPr>
+                        <a:t>🔨 待做</a:t>
                       </a:r>
                       <a:endParaRPr lang="en-US" sz="1100" dirty="0">
                         <a:latin typeface="Microsoft JhengHei" charset="0"/>
@@ -27070,7 +27070,7 @@
                           <a:ea typeface="Microsoft JhengHei" pitchFamily="34" charset="-122"/>
                           <a:cs typeface="Microsoft JhengHei" pitchFamily="34" charset="-120"/>
                         </a:rPr>
-                        <a:t>07/22 KB 建成＋SAM 參數化＋IAM（PR #21，B 包）</a:t>
+                        <a:t>🚨 07/29 實測：KB DSIYBVI1IX 在帳號裡已不存在（Bedrock 回 ResourceNotFound）——07/22 建成後迴歸，需重建再帶 KnowledgeBaseId 部署（#34）</a:t>
                       </a:r>
                       <a:endParaRPr lang="en-US" sz="1100" dirty="0">
                         <a:latin typeface="Microsoft JhengHei" charset="0"/>
@@ -27261,13 +27261,13 @@
                       <a:r>
                         <a:rPr lang="en-US" sz="1100" b="1" dirty="0">
                           <a:solidFill>
-                            <a:srgbClr val="1F9D66"/>
-                          </a:solidFill>
-                          <a:latin typeface="Microsoft JhengHei" pitchFamily="34" charset="0"/>
-                          <a:ea typeface="Microsoft JhengHei" pitchFamily="34" charset="-122"/>
-                          <a:cs typeface="Microsoft JhengHei" pitchFamily="34" charset="-120"/>
-                        </a:rPr>
-                        <a:t>✅ 已驗證</a:t>
+                            <a:srgbClr val="E8A13A"/>
+                          </a:solidFill>
+                          <a:latin typeface="Microsoft JhengHei" pitchFamily="34" charset="0"/>
+                          <a:ea typeface="Microsoft JhengHei" pitchFamily="34" charset="-122"/>
+                          <a:cs typeface="Microsoft JhengHei" pitchFamily="34" charset="-120"/>
+                        </a:rPr>
+                        <a:t>🧪 寫好待測</a:t>
                       </a:r>
                       <a:endParaRPr lang="en-US" sz="1100" dirty="0">
                         <a:latin typeface="Microsoft JhengHei" charset="0"/>
@@ -27332,7 +27332,7 @@
                           <a:ea typeface="Microsoft JhengHei" pitchFamily="34" charset="-122"/>
                           <a:cs typeface="Microsoft JhengHei" pitchFamily="34" charset="-120"/>
                         </a:rPr>
-                        <a:t>07/22 接上真 KB 實測；防詐語境誤判已修（PR #20）</a:t>
+                        <a:t>程式正確（有註冊、模型也會呼叫），但線上因 KB 不存在而每次 error；KB 一補回來即通</a:t>
                       </a:r>
                       <a:endParaRPr lang="en-US" sz="1100" dirty="0">
                         <a:latin typeface="Microsoft JhengHei" charset="0"/>
@@ -31115,7 +31115,7 @@
                           <a:ea typeface="Microsoft JhengHei" pitchFamily="34" charset="-122"/>
                           <a:cs typeface="Microsoft JhengHei" pitchFamily="34" charset="-120"/>
                         </a:rPr>
-                        <a:t>07/28 實戰後再修：重部署會洗掉手動金鑰、macOS sed 要空引號、CLI --environment 會清空模板變數；deploy-drill spec 17 項可交 Kiro 跑；&lt;1hr 計時演練待做</a:t>
+                        <a:t>07/29 新增 scripts/verify_live.py：C/D/F 共 21 項自動判定、3 分鐘跑完，且永不送真單；人工只剩視覺項。&lt;1hr 計時演練待做</a:t>
                       </a:r>
                       <a:endParaRPr lang="en-US" sz="1100" dirty="0">
                         <a:latin typeface="Microsoft JhengHei" charset="0"/>

--- a/docs/MaiMate_開發手冊.pptx
+++ b/docs/MaiMate_開發手冊.pptx
@@ -28,9 +28,10 @@
     <p:sldId id="276" r:id="rId22"/>
     <p:sldId id="277" r:id="rId23"/>
     <p:sldId id="278" r:id="rId24"/>
+    <p:sldId id="279" r:id="rId25"/>
   </p:sldIdLst>
   <p:notesMasterIdLst>
-    <p:notesMasterId r:id="rId25"/>
+    <p:notesMasterId r:id="rId26"/>
   </p:notesMasterIdLst>
   <p:sldSz cx="12192000" cy="6858000"/>
   <p:notesSz cx="6858000" cy="12192000"/>
@@ -1868,6 +1869,94 @@
             <a:fld id="{F7021451-1387-4CA6-816F-3879F97B5CBC}" type="slidenum">
               <a:rPr lang="en-US"/>
               <a:t>23</a:t>
+            </a:fld>
+            <a:endParaRPr lang="en-US"/>
+          </a:p>
+        </p:txBody>
+      </p:sp>
+    </p:spTree>
+    <p:extLst>
+      <p:ext uri="{BB962C8B-B14F-4D97-AF65-F5344CB8AC3E}">
+        <p14:creationId xmlns:p14="http://schemas.microsoft.com/office/powerpoint/2010/main" val="1024086991"/>
+      </p:ext>
+    </p:extLst>
+  </p:cSld>
+  <p:clrMapOvr>
+    <a:masterClrMapping/>
+  </p:clrMapOvr>
+</p:notes>
+</file>
+
+<file path=ppt/notesSlides/notesSlide24.xml><?xml version="1.0" encoding="utf-8"?>
+<p:notes xmlns:a="http://schemas.openxmlformats.org/drawingml/2006/main" xmlns:r="http://schemas.openxmlformats.org/officeDocument/2006/relationships" xmlns:p="http://schemas.openxmlformats.org/presentationml/2006/main">
+  <p:cSld>
+    <p:spTree>
+      <p:nvGrpSpPr>
+        <p:cNvPr id="1" name=""/>
+        <p:cNvGrpSpPr/>
+        <p:nvPr/>
+      </p:nvGrpSpPr>
+      <p:grpSpPr>
+        <a:xfrm>
+          <a:off x="0" y="0"/>
+          <a:ext cx="0" cy="0"/>
+          <a:chOff x="0" y="0"/>
+          <a:chExt cx="0" cy="0"/>
+        </a:xfrm>
+      </p:grpSpPr>
+      <p:sp>
+        <p:nvSpPr>
+          <p:cNvPr id="2" name="Slide Image Placeholder 1"/>
+          <p:cNvSpPr>
+            <a:spLocks noGrp="1" noRot="1" noChangeAspect="1"/>
+          </p:cNvSpPr>
+          <p:nvPr>
+            <p:ph type="sldImg"/>
+          </p:nvPr>
+        </p:nvSpPr>
+        <p:spPr/>
+      </p:sp>
+      <p:sp>
+        <p:nvSpPr>
+          <p:cNvPr id="3" name="Notes Placeholder 2"/>
+          <p:cNvSpPr>
+            <a:spLocks noGrp="1"/>
+          </p:cNvSpPr>
+          <p:nvPr>
+            <p:ph type="body" idx="1"/>
+          </p:nvPr>
+        </p:nvSpPr>
+        <p:spPr/>
+        <p:txBody>
+          <a:bodyPr/>
+          <a:lstStyle/>
+          <a:p>
+            <a:r>
+              <a:rPr lang="en-US" dirty="0"/>
+              <a:t/>
+            </a:r>
+            <a:endParaRPr lang="en-US" dirty="0"/>
+          </a:p>
+        </p:txBody>
+      </p:sp>
+      <p:sp>
+        <p:nvSpPr>
+          <p:cNvPr id="4" name="Slide Number Placeholder 3"/>
+          <p:cNvSpPr>
+            <a:spLocks noGrp="1"/>
+          </p:cNvSpPr>
+          <p:nvPr>
+            <p:ph type="sldNum" sz="quarter" idx="10"/>
+          </p:nvPr>
+        </p:nvSpPr>
+        <p:spPr/>
+        <p:txBody>
+          <a:bodyPr/>
+          <a:lstStyle/>
+          <a:p>
+            <a:fld id="{F7021451-1387-4CA6-816F-3879F97B5CBC}" type="slidenum">
+              <a:rPr lang="en-US"/>
+              <a:t>24</a:t>
             </a:fld>
             <a:endParaRPr lang="en-US"/>
           </a:p>
@@ -8508,7 +8597,7 @@
       </p:sp>
       <p:pic>
         <p:nvPicPr>
-          <p:cNvPr id="4" name="Image 0" descr="/home/user/MaiMate/docs/mockups/screen1.png">    </p:cNvPr>
+          <p:cNvPr id="4" name="Image 0" descr="/Users/hao/Documents/MaiMate/docs/mockups/screen1.png">    </p:cNvPr>
           <p:cNvPicPr>
             <a:picLocks noChangeAspect="1"/>
           </p:cNvPicPr>
@@ -8610,7 +8699,7 @@
       </p:sp>
       <p:pic>
         <p:nvPicPr>
-          <p:cNvPr id="7" name="Image 1" descr="/home/user/MaiMate/docs/mockups/screen2.png">    </p:cNvPr>
+          <p:cNvPr id="7" name="Image 1" descr="/Users/hao/Documents/MaiMate/docs/mockups/screen2.png">    </p:cNvPr>
           <p:cNvPicPr>
             <a:picLocks noChangeAspect="1"/>
           </p:cNvPicPr>
@@ -8712,7 +8801,7 @@
       </p:sp>
       <p:pic>
         <p:nvPicPr>
-          <p:cNvPr id="10" name="Image 2" descr="/home/user/MaiMate/docs/mockups/screen3.png">    </p:cNvPr>
+          <p:cNvPr id="10" name="Image 2" descr="/Users/hao/Documents/MaiMate/docs/mockups/screen3.png">    </p:cNvPr>
           <p:cNvPicPr>
             <a:picLocks noChangeAspect="1"/>
           </p:cNvPicPr>
@@ -11127,6 +11216,3658 @@
                 <a:ea typeface="Microsoft JhengHei" pitchFamily="34" charset="-122"/>
                 <a:cs typeface="Microsoft JhengHei" pitchFamily="34" charset="-120"/>
               </a:rPr>
+              <a:t>#8 錄影工作分配：A～D 各三項，每項都對得到分數</a:t>
+            </a:r>
+            <a:endParaRPr lang="en-US" sz="2700" dirty="0"/>
+          </a:p>
+        </p:txBody>
+      </p:sp>
+      <p:sp>
+        <p:nvSpPr>
+          <p:cNvPr id="3" name="Text 1"/>
+          <p:cNvSpPr/>
+          <p:nvPr/>
+        </p:nvSpPr>
+        <p:spPr>
+          <a:xfrm>
+            <a:off x="548640" y="1024128"/>
+            <a:ext cx="11091672" cy="320040"/>
+          </a:xfrm>
+          <a:prstGeom prst="rect">
+            <a:avLst/>
+          </a:prstGeom>
+          <a:noFill/>
+          <a:ln/>
+        </p:spPr>
+        <p:txBody>
+          <a:bodyPr wrap="square" lIns="0" tIns="0" rIns="0" bIns="0" rtlCol="0" anchor="ctr"/>
+          <a:lstStyle/>
+          <a:p>
+            <a:pPr indent="0" marL="0">
+              <a:buNone/>
+            </a:pPr>
+            <a:r>
+              <a:rPr lang="en-US" sz="1250" dirty="0">
+                <a:solidFill>
+                  <a:srgbClr val="6B7280"/>
+                </a:solidFill>
+                <a:latin typeface="Microsoft JhengHei" pitchFamily="34" charset="0"/>
+                <a:ea typeface="Microsoft JhengHei" pitchFamily="34" charset="-122"/>
+                <a:cs typeface="Microsoft JhengHei" pitchFamily="34" charset="-120"/>
+              </a:rPr>
+              <a:t>評分表：創意25／可行20／商業20／AI設計15／切合10／完成10＋Lv2 Private API 5＋Kiro 5</a:t>
+            </a:r>
+            <a:endParaRPr lang="en-US" sz="1250" dirty="0"/>
+          </a:p>
+        </p:txBody>
+      </p:sp>
+      <p:graphicFrame>
+        <p:nvGraphicFramePr>
+          <p:cNvPr id="16" name="Table 0"/>
+          <p:cNvGraphicFramePr>
+            <a:graphicFrameLocks noGrp="1"/>
+          </p:cNvGraphicFramePr>
+          <p:nvPr>
+            <p:extLst>
+              <p:ext uri="{D42A27DB-BD31-4B8C-83A1-F6EECF244321}">
+                <p14:modId xmlns:p14="http://schemas.microsoft.com/office/powerpoint/2010/main" val="1579011935"/>
+              </p:ext>
+            </p:extLst>
+          </p:nvPr>
+        </p:nvGraphicFramePr>
+        <p:xfrm>
+          <a:off x="548640" y="1463040"/>
+          <a:ext cx="11091672" cy="914400"/>
+        </p:xfrm>
+        <a:graphic>
+          <a:graphicData uri="http://schemas.openxmlformats.org/drawingml/2006/table">
+            <a:tbl>
+              <a:tblPr/>
+              <a:tblGrid>
+                <a:gridCol w="548640"/>
+                <a:gridCol w="2926080"/>
+                <a:gridCol w="4846320"/>
+                <a:gridCol w="2770632"/>
+              </a:tblGrid>
+              <a:tr h="365760">
+                <a:tc>
+                  <a:txBody>
+                    <a:bodyPr/>
+                    <a:lstStyle/>
+                    <a:p>
+                      <a:pPr indent="0" marL="0">
+                        <a:buNone/>
+                      </a:pPr>
+                      <a:r>
+                        <a:rPr lang="en-US" sz="950" b="1" dirty="0">
+                          <a:solidFill>
+                            <a:srgbClr val="FFFFFF"/>
+                          </a:solidFill>
+                          <a:latin typeface="Microsoft JhengHei" pitchFamily="34" charset="0"/>
+                          <a:ea typeface="Microsoft JhengHei" pitchFamily="34" charset="-122"/>
+                          <a:cs typeface="Microsoft JhengHei" pitchFamily="34" charset="-120"/>
+                        </a:rPr>
+                        <a:t>包</a:t>
+                      </a:r>
+                      <a:endParaRPr lang="en-US" sz="950" dirty="0">
+                        <a:latin typeface="Microsoft JhengHei" charset="0"/>
+                        <a:ea typeface="Microsoft JhengHei" charset="0"/>
+                        <a:cs typeface="Microsoft JhengHei" charset="0"/>
+                      </a:endParaRPr>
+                    </a:p>
+                  </a:txBody>
+                  <a:tcPr marL="45720" marR="45720" marT="45720" marB="45720" anchor="ctr">
+                    <a:lnL w="9525" cap="flat" cmpd="sng" algn="ctr">
+                      <a:solidFill>
+                        <a:srgbClr val="D5DEF0"/>
+                      </a:solidFill>
+                      <a:prstDash val="solid"/>
+                      <a:round/>
+                      <a:headEnd type="none" w="med" len="med"/>
+                      <a:tailEnd type="none" w="med" len="med"/>
+                    </a:lnL>
+                    <a:lnR w="9525" cap="flat" cmpd="sng" algn="ctr">
+                      <a:solidFill>
+                        <a:srgbClr val="D5DEF0"/>
+                      </a:solidFill>
+                      <a:prstDash val="solid"/>
+                      <a:round/>
+                      <a:headEnd type="none" w="med" len="med"/>
+                      <a:tailEnd type="none" w="med" len="med"/>
+                    </a:lnR>
+                    <a:lnT w="9525" cap="flat" cmpd="sng" algn="ctr">
+                      <a:solidFill>
+                        <a:srgbClr val="D5DEF0"/>
+                      </a:solidFill>
+                      <a:prstDash val="solid"/>
+                      <a:round/>
+                      <a:headEnd type="none" w="med" len="med"/>
+                      <a:tailEnd type="none" w="med" len="med"/>
+                    </a:lnT>
+                    <a:lnB w="9525" cap="flat" cmpd="sng" algn="ctr">
+                      <a:solidFill>
+                        <a:srgbClr val="D5DEF0"/>
+                      </a:solidFill>
+                      <a:prstDash val="solid"/>
+                      <a:round/>
+                      <a:headEnd type="none" w="med" len="med"/>
+                      <a:tailEnd type="none" w="med" len="med"/>
+                    </a:lnB>
+                    <a:solidFill>
+                      <a:srgbClr val="16224D"/>
+                    </a:solidFill>
+                  </a:tcPr>
+                </a:tc>
+                <a:tc>
+                  <a:txBody>
+                    <a:bodyPr/>
+                    <a:lstStyle/>
+                    <a:p>
+                      <a:pPr indent="0" marL="0">
+                        <a:buNone/>
+                      </a:pPr>
+                      <a:r>
+                        <a:rPr lang="en-US" sz="950" b="1" dirty="0">
+                          <a:solidFill>
+                            <a:srgbClr val="FFFFFF"/>
+                          </a:solidFill>
+                          <a:latin typeface="Microsoft JhengHei" pitchFamily="34" charset="0"/>
+                          <a:ea typeface="Microsoft JhengHei" pitchFamily="34" charset="-122"/>
+                          <a:cs typeface="Microsoft JhengHei" pitchFamily="34" charset="-120"/>
+                        </a:rPr>
+                        <a:t>工作</a:t>
+                      </a:r>
+                      <a:endParaRPr lang="en-US" sz="950" dirty="0">
+                        <a:latin typeface="Microsoft JhengHei" charset="0"/>
+                        <a:ea typeface="Microsoft JhengHei" charset="0"/>
+                        <a:cs typeface="Microsoft JhengHei" charset="0"/>
+                      </a:endParaRPr>
+                    </a:p>
+                  </a:txBody>
+                  <a:tcPr marL="45720" marR="45720" marT="45720" marB="45720" anchor="ctr">
+                    <a:lnL w="9525" cap="flat" cmpd="sng" algn="ctr">
+                      <a:solidFill>
+                        <a:srgbClr val="D5DEF0"/>
+                      </a:solidFill>
+                      <a:prstDash val="solid"/>
+                      <a:round/>
+                      <a:headEnd type="none" w="med" len="med"/>
+                      <a:tailEnd type="none" w="med" len="med"/>
+                    </a:lnL>
+                    <a:lnR w="9525" cap="flat" cmpd="sng" algn="ctr">
+                      <a:solidFill>
+                        <a:srgbClr val="D5DEF0"/>
+                      </a:solidFill>
+                      <a:prstDash val="solid"/>
+                      <a:round/>
+                      <a:headEnd type="none" w="med" len="med"/>
+                      <a:tailEnd type="none" w="med" len="med"/>
+                    </a:lnR>
+                    <a:lnT w="9525" cap="flat" cmpd="sng" algn="ctr">
+                      <a:solidFill>
+                        <a:srgbClr val="D5DEF0"/>
+                      </a:solidFill>
+                      <a:prstDash val="solid"/>
+                      <a:round/>
+                      <a:headEnd type="none" w="med" len="med"/>
+                      <a:tailEnd type="none" w="med" len="med"/>
+                    </a:lnT>
+                    <a:lnB w="9525" cap="flat" cmpd="sng" algn="ctr">
+                      <a:solidFill>
+                        <a:srgbClr val="D5DEF0"/>
+                      </a:solidFill>
+                      <a:prstDash val="solid"/>
+                      <a:round/>
+                      <a:headEnd type="none" w="med" len="med"/>
+                      <a:tailEnd type="none" w="med" len="med"/>
+                    </a:lnB>
+                    <a:solidFill>
+                      <a:srgbClr val="16224D"/>
+                    </a:solidFill>
+                  </a:tcPr>
+                </a:tc>
+                <a:tc>
+                  <a:txBody>
+                    <a:bodyPr/>
+                    <a:lstStyle/>
+                    <a:p>
+                      <a:pPr indent="0" marL="0">
+                        <a:buNone/>
+                      </a:pPr>
+                      <a:r>
+                        <a:rPr lang="en-US" sz="950" b="1" dirty="0">
+                          <a:solidFill>
+                            <a:srgbClr val="FFFFFF"/>
+                          </a:solidFill>
+                          <a:latin typeface="Microsoft JhengHei" pitchFamily="34" charset="0"/>
+                          <a:ea typeface="Microsoft JhengHei" pitchFamily="34" charset="-122"/>
+                          <a:cs typeface="Microsoft JhengHei" pitchFamily="34" charset="-120"/>
+                        </a:rPr>
+                        <a:t>產出與驗收</a:t>
+                      </a:r>
+                      <a:endParaRPr lang="en-US" sz="950" dirty="0">
+                        <a:latin typeface="Microsoft JhengHei" charset="0"/>
+                        <a:ea typeface="Microsoft JhengHei" charset="0"/>
+                        <a:cs typeface="Microsoft JhengHei" charset="0"/>
+                      </a:endParaRPr>
+                    </a:p>
+                  </a:txBody>
+                  <a:tcPr marL="45720" marR="45720" marT="45720" marB="45720" anchor="ctr">
+                    <a:lnL w="9525" cap="flat" cmpd="sng" algn="ctr">
+                      <a:solidFill>
+                        <a:srgbClr val="D5DEF0"/>
+                      </a:solidFill>
+                      <a:prstDash val="solid"/>
+                      <a:round/>
+                      <a:headEnd type="none" w="med" len="med"/>
+                      <a:tailEnd type="none" w="med" len="med"/>
+                    </a:lnL>
+                    <a:lnR w="9525" cap="flat" cmpd="sng" algn="ctr">
+                      <a:solidFill>
+                        <a:srgbClr val="D5DEF0"/>
+                      </a:solidFill>
+                      <a:prstDash val="solid"/>
+                      <a:round/>
+                      <a:headEnd type="none" w="med" len="med"/>
+                      <a:tailEnd type="none" w="med" len="med"/>
+                    </a:lnR>
+                    <a:lnT w="9525" cap="flat" cmpd="sng" algn="ctr">
+                      <a:solidFill>
+                        <a:srgbClr val="D5DEF0"/>
+                      </a:solidFill>
+                      <a:prstDash val="solid"/>
+                      <a:round/>
+                      <a:headEnd type="none" w="med" len="med"/>
+                      <a:tailEnd type="none" w="med" len="med"/>
+                    </a:lnT>
+                    <a:lnB w="9525" cap="flat" cmpd="sng" algn="ctr">
+                      <a:solidFill>
+                        <a:srgbClr val="D5DEF0"/>
+                      </a:solidFill>
+                      <a:prstDash val="solid"/>
+                      <a:round/>
+                      <a:headEnd type="none" w="med" len="med"/>
+                      <a:tailEnd type="none" w="med" len="med"/>
+                    </a:lnB>
+                    <a:solidFill>
+                      <a:srgbClr val="16224D"/>
+                    </a:solidFill>
+                  </a:tcPr>
+                </a:tc>
+                <a:tc>
+                  <a:txBody>
+                    <a:bodyPr/>
+                    <a:lstStyle/>
+                    <a:p>
+                      <a:pPr indent="0" marL="0">
+                        <a:buNone/>
+                      </a:pPr>
+                      <a:r>
+                        <a:rPr lang="en-US" sz="950" b="1" dirty="0">
+                          <a:solidFill>
+                            <a:srgbClr val="FFFFFF"/>
+                          </a:solidFill>
+                          <a:latin typeface="Microsoft JhengHei" pitchFamily="34" charset="0"/>
+                          <a:ea typeface="Microsoft JhengHei" pitchFamily="34" charset="-122"/>
+                          <a:cs typeface="Microsoft JhengHei" pitchFamily="34" charset="-120"/>
+                        </a:rPr>
+                        <a:t>對應評分</a:t>
+                      </a:r>
+                      <a:endParaRPr lang="en-US" sz="950" dirty="0">
+                        <a:latin typeface="Microsoft JhengHei" charset="0"/>
+                        <a:ea typeface="Microsoft JhengHei" charset="0"/>
+                        <a:cs typeface="Microsoft JhengHei" charset="0"/>
+                      </a:endParaRPr>
+                    </a:p>
+                  </a:txBody>
+                  <a:tcPr marL="45720" marR="45720" marT="45720" marB="45720" anchor="ctr">
+                    <a:lnL w="9525" cap="flat" cmpd="sng" algn="ctr">
+                      <a:solidFill>
+                        <a:srgbClr val="D5DEF0"/>
+                      </a:solidFill>
+                      <a:prstDash val="solid"/>
+                      <a:round/>
+                      <a:headEnd type="none" w="med" len="med"/>
+                      <a:tailEnd type="none" w="med" len="med"/>
+                    </a:lnL>
+                    <a:lnR w="9525" cap="flat" cmpd="sng" algn="ctr">
+                      <a:solidFill>
+                        <a:srgbClr val="D5DEF0"/>
+                      </a:solidFill>
+                      <a:prstDash val="solid"/>
+                      <a:round/>
+                      <a:headEnd type="none" w="med" len="med"/>
+                      <a:tailEnd type="none" w="med" len="med"/>
+                    </a:lnR>
+                    <a:lnT w="9525" cap="flat" cmpd="sng" algn="ctr">
+                      <a:solidFill>
+                        <a:srgbClr val="D5DEF0"/>
+                      </a:solidFill>
+                      <a:prstDash val="solid"/>
+                      <a:round/>
+                      <a:headEnd type="none" w="med" len="med"/>
+                      <a:tailEnd type="none" w="med" len="med"/>
+                    </a:lnT>
+                    <a:lnB w="9525" cap="flat" cmpd="sng" algn="ctr">
+                      <a:solidFill>
+                        <a:srgbClr val="D5DEF0"/>
+                      </a:solidFill>
+                      <a:prstDash val="solid"/>
+                      <a:round/>
+                      <a:headEnd type="none" w="med" len="med"/>
+                      <a:tailEnd type="none" w="med" len="med"/>
+                    </a:lnB>
+                    <a:solidFill>
+                      <a:srgbClr val="16224D"/>
+                    </a:solidFill>
+                  </a:tcPr>
+                </a:tc>
+              </a:tr>
+              <a:tr h="365760">
+                <a:tc>
+                  <a:txBody>
+                    <a:bodyPr/>
+                    <a:lstStyle/>
+                    <a:p>
+                      <a:pPr algn="ctr" indent="0" marL="0">
+                        <a:buNone/>
+                      </a:pPr>
+                      <a:r>
+                        <a:rPr lang="en-US" sz="950" b="1" dirty="0">
+                          <a:solidFill>
+                            <a:srgbClr val="FFFFFF"/>
+                          </a:solidFill>
+                          <a:latin typeface="Microsoft JhengHei" pitchFamily="34" charset="0"/>
+                          <a:ea typeface="Microsoft JhengHei" pitchFamily="34" charset="-122"/>
+                          <a:cs typeface="Microsoft JhengHei" pitchFamily="34" charset="-120"/>
+                        </a:rPr>
+                        <a:t>A</a:t>
+                      </a:r>
+                      <a:endParaRPr lang="en-US" sz="950" dirty="0">
+                        <a:latin typeface="Microsoft JhengHei" charset="0"/>
+                        <a:ea typeface="Microsoft JhengHei" charset="0"/>
+                        <a:cs typeface="Microsoft JhengHei" charset="0"/>
+                      </a:endParaRPr>
+                    </a:p>
+                  </a:txBody>
+                  <a:tcPr marL="45720" marR="45720" marT="45720" marB="45720" anchor="ctr">
+                    <a:lnL w="9525" cap="flat" cmpd="sng" algn="ctr">
+                      <a:solidFill>
+                        <a:srgbClr val="D5DEF0"/>
+                      </a:solidFill>
+                      <a:prstDash val="solid"/>
+                      <a:round/>
+                      <a:headEnd type="none" w="med" len="med"/>
+                      <a:tailEnd type="none" w="med" len="med"/>
+                    </a:lnL>
+                    <a:lnR w="9525" cap="flat" cmpd="sng" algn="ctr">
+                      <a:solidFill>
+                        <a:srgbClr val="D5DEF0"/>
+                      </a:solidFill>
+                      <a:prstDash val="solid"/>
+                      <a:round/>
+                      <a:headEnd type="none" w="med" len="med"/>
+                      <a:tailEnd type="none" w="med" len="med"/>
+                    </a:lnR>
+                    <a:lnT w="9525" cap="flat" cmpd="sng" algn="ctr">
+                      <a:solidFill>
+                        <a:srgbClr val="D5DEF0"/>
+                      </a:solidFill>
+                      <a:prstDash val="solid"/>
+                      <a:round/>
+                      <a:headEnd type="none" w="med" len="med"/>
+                      <a:tailEnd type="none" w="med" len="med"/>
+                    </a:lnT>
+                    <a:lnB w="9525" cap="flat" cmpd="sng" algn="ctr">
+                      <a:solidFill>
+                        <a:srgbClr val="D5DEF0"/>
+                      </a:solidFill>
+                      <a:prstDash val="solid"/>
+                      <a:round/>
+                      <a:headEnd type="none" w="med" len="med"/>
+                      <a:tailEnd type="none" w="med" len="med"/>
+                    </a:lnB>
+                    <a:solidFill>
+                      <a:srgbClr val="2B6CB0"/>
+                    </a:solidFill>
+                  </a:tcPr>
+                </a:tc>
+                <a:tc>
+                  <a:txBody>
+                    <a:bodyPr/>
+                    <a:lstStyle/>
+                    <a:p>
+                      <a:pPr indent="0" marL="0">
+                        <a:buNone/>
+                      </a:pPr>
+                      <a:r>
+                        <a:rPr lang="en-US" sz="950" b="1" dirty="0">
+                          <a:solidFill>
+                            <a:srgbClr val="16224D"/>
+                          </a:solidFill>
+                          <a:latin typeface="Microsoft JhengHei" pitchFamily="34" charset="0"/>
+                          <a:ea typeface="Microsoft JhengHei" pitchFamily="34" charset="-122"/>
+                          <a:cs typeface="Microsoft JhengHei" pitchFamily="34" charset="-120"/>
+                        </a:rPr>
+                        <a:t>鏡 7 稽核軌跡素材</a:t>
+                      </a:r>
+                      <a:endParaRPr lang="en-US" sz="950" dirty="0">
+                        <a:latin typeface="Microsoft JhengHei" charset="0"/>
+                        <a:ea typeface="Microsoft JhengHei" charset="0"/>
+                        <a:cs typeface="Microsoft JhengHei" charset="0"/>
+                      </a:endParaRPr>
+                    </a:p>
+                  </a:txBody>
+                  <a:tcPr marL="45720" marR="45720" marT="45720" marB="45720" anchor="ctr">
+                    <a:lnL w="9525" cap="flat" cmpd="sng" algn="ctr">
+                      <a:solidFill>
+                        <a:srgbClr val="D5DEF0"/>
+                      </a:solidFill>
+                      <a:prstDash val="solid"/>
+                      <a:round/>
+                      <a:headEnd type="none" w="med" len="med"/>
+                      <a:tailEnd type="none" w="med" len="med"/>
+                    </a:lnL>
+                    <a:lnR w="9525" cap="flat" cmpd="sng" algn="ctr">
+                      <a:solidFill>
+                        <a:srgbClr val="D5DEF0"/>
+                      </a:solidFill>
+                      <a:prstDash val="solid"/>
+                      <a:round/>
+                      <a:headEnd type="none" w="med" len="med"/>
+                      <a:tailEnd type="none" w="med" len="med"/>
+                    </a:lnR>
+                    <a:lnT w="9525" cap="flat" cmpd="sng" algn="ctr">
+                      <a:solidFill>
+                        <a:srgbClr val="D5DEF0"/>
+                      </a:solidFill>
+                      <a:prstDash val="solid"/>
+                      <a:round/>
+                      <a:headEnd type="none" w="med" len="med"/>
+                      <a:tailEnd type="none" w="med" len="med"/>
+                    </a:lnT>
+                    <a:lnB w="9525" cap="flat" cmpd="sng" algn="ctr">
+                      <a:solidFill>
+                        <a:srgbClr val="D5DEF0"/>
+                      </a:solidFill>
+                      <a:prstDash val="solid"/>
+                      <a:round/>
+                      <a:headEnd type="none" w="med" len="med"/>
+                      <a:tailEnd type="none" w="med" len="med"/>
+                    </a:lnB>
+                  </a:tcPr>
+                </a:tc>
+                <a:tc>
+                  <a:txBody>
+                    <a:bodyPr/>
+                    <a:lstStyle/>
+                    <a:p>
+                      <a:pPr indent="0" marL="0">
+                        <a:buNone/>
+                      </a:pPr>
+                      <a:r>
+                        <a:rPr lang="en-US" sz="950" dirty="0">
+                          <a:solidFill>
+                            <a:srgbClr val="1F2937"/>
+                          </a:solidFill>
+                          <a:latin typeface="Microsoft JhengHei" pitchFamily="34" charset="0"/>
+                          <a:ea typeface="Microsoft JhengHei" pitchFamily="34" charset="-122"/>
+                          <a:cs typeface="Microsoft JhengHei" pitchFamily="34" charset="-120"/>
+                        </a:rPr>
+                        <a:t>07-31 真實成交 session 回放截圖（13 列含兩筆 executed）</a:t>
+                      </a:r>
+                      <a:endParaRPr lang="en-US" sz="950" dirty="0">
+                        <a:latin typeface="Microsoft JhengHei" charset="0"/>
+                        <a:ea typeface="Microsoft JhengHei" charset="0"/>
+                        <a:cs typeface="Microsoft JhengHei" charset="0"/>
+                      </a:endParaRPr>
+                    </a:p>
+                  </a:txBody>
+                  <a:tcPr marL="45720" marR="45720" marT="45720" marB="45720" anchor="ctr">
+                    <a:lnL w="9525" cap="flat" cmpd="sng" algn="ctr">
+                      <a:solidFill>
+                        <a:srgbClr val="D5DEF0"/>
+                      </a:solidFill>
+                      <a:prstDash val="solid"/>
+                      <a:round/>
+                      <a:headEnd type="none" w="med" len="med"/>
+                      <a:tailEnd type="none" w="med" len="med"/>
+                    </a:lnL>
+                    <a:lnR w="9525" cap="flat" cmpd="sng" algn="ctr">
+                      <a:solidFill>
+                        <a:srgbClr val="D5DEF0"/>
+                      </a:solidFill>
+                      <a:prstDash val="solid"/>
+                      <a:round/>
+                      <a:headEnd type="none" w="med" len="med"/>
+                      <a:tailEnd type="none" w="med" len="med"/>
+                    </a:lnR>
+                    <a:lnT w="9525" cap="flat" cmpd="sng" algn="ctr">
+                      <a:solidFill>
+                        <a:srgbClr val="D5DEF0"/>
+                      </a:solidFill>
+                      <a:prstDash val="solid"/>
+                      <a:round/>
+                      <a:headEnd type="none" w="med" len="med"/>
+                      <a:tailEnd type="none" w="med" len="med"/>
+                    </a:lnT>
+                    <a:lnB w="9525" cap="flat" cmpd="sng" algn="ctr">
+                      <a:solidFill>
+                        <a:srgbClr val="D5DEF0"/>
+                      </a:solidFill>
+                      <a:prstDash val="solid"/>
+                      <a:round/>
+                      <a:headEnd type="none" w="med" len="med"/>
+                      <a:tailEnd type="none" w="med" len="med"/>
+                    </a:lnB>
+                  </a:tcPr>
+                </a:tc>
+                <a:tc>
+                  <a:txBody>
+                    <a:bodyPr/>
+                    <a:lstStyle/>
+                    <a:p>
+                      <a:pPr indent="0" marL="0">
+                        <a:buNone/>
+                      </a:pPr>
+                      <a:r>
+                        <a:rPr lang="en-US" sz="950" b="1" dirty="0">
+                          <a:solidFill>
+                            <a:srgbClr val="E8A13A"/>
+                          </a:solidFill>
+                          <a:latin typeface="Microsoft JhengHei" pitchFamily="34" charset="0"/>
+                          <a:ea typeface="Microsoft JhengHei" pitchFamily="34" charset="-122"/>
+                          <a:cs typeface="Microsoft JhengHei" pitchFamily="34" charset="-120"/>
+                        </a:rPr>
+                        <a:t>可行 20 ＋ 完成 10</a:t>
+                      </a:r>
+                      <a:endParaRPr lang="en-US" sz="950" dirty="0">
+                        <a:latin typeface="Microsoft JhengHei" charset="0"/>
+                        <a:ea typeface="Microsoft JhengHei" charset="0"/>
+                        <a:cs typeface="Microsoft JhengHei" charset="0"/>
+                      </a:endParaRPr>
+                    </a:p>
+                  </a:txBody>
+                  <a:tcPr marL="45720" marR="45720" marT="45720" marB="45720" anchor="ctr">
+                    <a:lnL w="9525" cap="flat" cmpd="sng" algn="ctr">
+                      <a:solidFill>
+                        <a:srgbClr val="D5DEF0"/>
+                      </a:solidFill>
+                      <a:prstDash val="solid"/>
+                      <a:round/>
+                      <a:headEnd type="none" w="med" len="med"/>
+                      <a:tailEnd type="none" w="med" len="med"/>
+                    </a:lnL>
+                    <a:lnR w="9525" cap="flat" cmpd="sng" algn="ctr">
+                      <a:solidFill>
+                        <a:srgbClr val="D5DEF0"/>
+                      </a:solidFill>
+                      <a:prstDash val="solid"/>
+                      <a:round/>
+                      <a:headEnd type="none" w="med" len="med"/>
+                      <a:tailEnd type="none" w="med" len="med"/>
+                    </a:lnR>
+                    <a:lnT w="9525" cap="flat" cmpd="sng" algn="ctr">
+                      <a:solidFill>
+                        <a:srgbClr val="D5DEF0"/>
+                      </a:solidFill>
+                      <a:prstDash val="solid"/>
+                      <a:round/>
+                      <a:headEnd type="none" w="med" len="med"/>
+                      <a:tailEnd type="none" w="med" len="med"/>
+                    </a:lnT>
+                    <a:lnB w="9525" cap="flat" cmpd="sng" algn="ctr">
+                      <a:solidFill>
+                        <a:srgbClr val="D5DEF0"/>
+                      </a:solidFill>
+                      <a:prstDash val="solid"/>
+                      <a:round/>
+                      <a:headEnd type="none" w="med" len="med"/>
+                      <a:tailEnd type="none" w="med" len="med"/>
+                    </a:lnB>
+                  </a:tcPr>
+                </a:tc>
+              </a:tr>
+              <a:tr h="365760">
+                <a:tc>
+                  <a:txBody>
+                    <a:bodyPr/>
+                    <a:lstStyle/>
+                    <a:p>
+                      <a:pPr algn="ctr" indent="0" marL="0">
+                        <a:buNone/>
+                      </a:pPr>
+                      <a:r>
+                        <a:rPr lang="en-US" sz="950" b="1" dirty="0">
+                          <a:solidFill>
+                            <a:srgbClr val="FFFFFF"/>
+                          </a:solidFill>
+                          <a:latin typeface="Microsoft JhengHei" pitchFamily="34" charset="0"/>
+                          <a:ea typeface="Microsoft JhengHei" pitchFamily="34" charset="-122"/>
+                          <a:cs typeface="Microsoft JhengHei" pitchFamily="34" charset="-120"/>
+                        </a:rPr>
+                        <a:t>A</a:t>
+                      </a:r>
+                      <a:endParaRPr lang="en-US" sz="950" dirty="0">
+                        <a:latin typeface="Microsoft JhengHei" charset="0"/>
+                        <a:ea typeface="Microsoft JhengHei" charset="0"/>
+                        <a:cs typeface="Microsoft JhengHei" charset="0"/>
+                      </a:endParaRPr>
+                    </a:p>
+                  </a:txBody>
+                  <a:tcPr marL="45720" marR="45720" marT="45720" marB="45720" anchor="ctr">
+                    <a:lnL w="9525" cap="flat" cmpd="sng" algn="ctr">
+                      <a:solidFill>
+                        <a:srgbClr val="D5DEF0"/>
+                      </a:solidFill>
+                      <a:prstDash val="solid"/>
+                      <a:round/>
+                      <a:headEnd type="none" w="med" len="med"/>
+                      <a:tailEnd type="none" w="med" len="med"/>
+                    </a:lnL>
+                    <a:lnR w="9525" cap="flat" cmpd="sng" algn="ctr">
+                      <a:solidFill>
+                        <a:srgbClr val="D5DEF0"/>
+                      </a:solidFill>
+                      <a:prstDash val="solid"/>
+                      <a:round/>
+                      <a:headEnd type="none" w="med" len="med"/>
+                      <a:tailEnd type="none" w="med" len="med"/>
+                    </a:lnR>
+                    <a:lnT w="9525" cap="flat" cmpd="sng" algn="ctr">
+                      <a:solidFill>
+                        <a:srgbClr val="D5DEF0"/>
+                      </a:solidFill>
+                      <a:prstDash val="solid"/>
+                      <a:round/>
+                      <a:headEnd type="none" w="med" len="med"/>
+                      <a:tailEnd type="none" w="med" len="med"/>
+                    </a:lnT>
+                    <a:lnB w="9525" cap="flat" cmpd="sng" algn="ctr">
+                      <a:solidFill>
+                        <a:srgbClr val="D5DEF0"/>
+                      </a:solidFill>
+                      <a:prstDash val="solid"/>
+                      <a:round/>
+                      <a:headEnd type="none" w="med" len="med"/>
+                      <a:tailEnd type="none" w="med" len="med"/>
+                    </a:lnB>
+                    <a:solidFill>
+                      <a:srgbClr val="2B6CB0"/>
+                    </a:solidFill>
+                  </a:tcPr>
+                </a:tc>
+                <a:tc>
+                  <a:txBody>
+                    <a:bodyPr/>
+                    <a:lstStyle/>
+                    <a:p>
+                      <a:pPr indent="0" marL="0">
+                        <a:buNone/>
+                      </a:pPr>
+                      <a:r>
+                        <a:rPr lang="en-US" sz="950" b="1" dirty="0">
+                          <a:solidFill>
+                            <a:srgbClr val="16224D"/>
+                          </a:solidFill>
+                          <a:latin typeface="Microsoft JhengHei" pitchFamily="34" charset="0"/>
+                          <a:ea typeface="Microsoft JhengHei" pitchFamily="34" charset="-122"/>
+                          <a:cs typeface="Microsoft JhengHei" pitchFamily="34" charset="-120"/>
+                        </a:rPr>
+                        <a:t>字幕稿 SRT</a:t>
+                      </a:r>
+                      <a:endParaRPr lang="en-US" sz="950" dirty="0">
+                        <a:latin typeface="Microsoft JhengHei" charset="0"/>
+                        <a:ea typeface="Microsoft JhengHei" charset="0"/>
+                        <a:cs typeface="Microsoft JhengHei" charset="0"/>
+                      </a:endParaRPr>
+                    </a:p>
+                  </a:txBody>
+                  <a:tcPr marL="45720" marR="45720" marT="45720" marB="45720" anchor="ctr">
+                    <a:lnL w="9525" cap="flat" cmpd="sng" algn="ctr">
+                      <a:solidFill>
+                        <a:srgbClr val="D5DEF0"/>
+                      </a:solidFill>
+                      <a:prstDash val="solid"/>
+                      <a:round/>
+                      <a:headEnd type="none" w="med" len="med"/>
+                      <a:tailEnd type="none" w="med" len="med"/>
+                    </a:lnL>
+                    <a:lnR w="9525" cap="flat" cmpd="sng" algn="ctr">
+                      <a:solidFill>
+                        <a:srgbClr val="D5DEF0"/>
+                      </a:solidFill>
+                      <a:prstDash val="solid"/>
+                      <a:round/>
+                      <a:headEnd type="none" w="med" len="med"/>
+                      <a:tailEnd type="none" w="med" len="med"/>
+                    </a:lnR>
+                    <a:lnT w="9525" cap="flat" cmpd="sng" algn="ctr">
+                      <a:solidFill>
+                        <a:srgbClr val="D5DEF0"/>
+                      </a:solidFill>
+                      <a:prstDash val="solid"/>
+                      <a:round/>
+                      <a:headEnd type="none" w="med" len="med"/>
+                      <a:tailEnd type="none" w="med" len="med"/>
+                    </a:lnT>
+                    <a:lnB w="9525" cap="flat" cmpd="sng" algn="ctr">
+                      <a:solidFill>
+                        <a:srgbClr val="D5DEF0"/>
+                      </a:solidFill>
+                      <a:prstDash val="solid"/>
+                      <a:round/>
+                      <a:headEnd type="none" w="med" len="med"/>
+                      <a:tailEnd type="none" w="med" len="med"/>
+                    </a:lnB>
+                  </a:tcPr>
+                </a:tc>
+                <a:tc>
+                  <a:txBody>
+                    <a:bodyPr/>
+                    <a:lstStyle/>
+                    <a:p>
+                      <a:pPr indent="0" marL="0">
+                        <a:buNone/>
+                      </a:pPr>
+                      <a:r>
+                        <a:rPr lang="en-US" sz="950" dirty="0">
+                          <a:solidFill>
+                            <a:srgbClr val="1F2937"/>
+                          </a:solidFill>
+                          <a:latin typeface="Microsoft JhengHei" pitchFamily="34" charset="0"/>
+                          <a:ea typeface="Microsoft JhengHei" pitchFamily="34" charset="-122"/>
+                          <a:cs typeface="Microsoft JhengHei" pitchFamily="34" charset="-120"/>
+                        </a:rPr>
+                        <a:t>8 段旁白＋時間碼，剪輯直接匯入</a:t>
+                      </a:r>
+                      <a:endParaRPr lang="en-US" sz="950" dirty="0">
+                        <a:latin typeface="Microsoft JhengHei" charset="0"/>
+                        <a:ea typeface="Microsoft JhengHei" charset="0"/>
+                        <a:cs typeface="Microsoft JhengHei" charset="0"/>
+                      </a:endParaRPr>
+                    </a:p>
+                  </a:txBody>
+                  <a:tcPr marL="45720" marR="45720" marT="45720" marB="45720" anchor="ctr">
+                    <a:lnL w="9525" cap="flat" cmpd="sng" algn="ctr">
+                      <a:solidFill>
+                        <a:srgbClr val="D5DEF0"/>
+                      </a:solidFill>
+                      <a:prstDash val="solid"/>
+                      <a:round/>
+                      <a:headEnd type="none" w="med" len="med"/>
+                      <a:tailEnd type="none" w="med" len="med"/>
+                    </a:lnL>
+                    <a:lnR w="9525" cap="flat" cmpd="sng" algn="ctr">
+                      <a:solidFill>
+                        <a:srgbClr val="D5DEF0"/>
+                      </a:solidFill>
+                      <a:prstDash val="solid"/>
+                      <a:round/>
+                      <a:headEnd type="none" w="med" len="med"/>
+                      <a:tailEnd type="none" w="med" len="med"/>
+                    </a:lnR>
+                    <a:lnT w="9525" cap="flat" cmpd="sng" algn="ctr">
+                      <a:solidFill>
+                        <a:srgbClr val="D5DEF0"/>
+                      </a:solidFill>
+                      <a:prstDash val="solid"/>
+                      <a:round/>
+                      <a:headEnd type="none" w="med" len="med"/>
+                      <a:tailEnd type="none" w="med" len="med"/>
+                    </a:lnT>
+                    <a:lnB w="9525" cap="flat" cmpd="sng" algn="ctr">
+                      <a:solidFill>
+                        <a:srgbClr val="D5DEF0"/>
+                      </a:solidFill>
+                      <a:prstDash val="solid"/>
+                      <a:round/>
+                      <a:headEnd type="none" w="med" len="med"/>
+                      <a:tailEnd type="none" w="med" len="med"/>
+                    </a:lnB>
+                  </a:tcPr>
+                </a:tc>
+                <a:tc>
+                  <a:txBody>
+                    <a:bodyPr/>
+                    <a:lstStyle/>
+                    <a:p>
+                      <a:pPr indent="0" marL="0">
+                        <a:buNone/>
+                      </a:pPr>
+                      <a:r>
+                        <a:rPr lang="en-US" sz="950" b="1" dirty="0">
+                          <a:solidFill>
+                            <a:srgbClr val="E8A13A"/>
+                          </a:solidFill>
+                          <a:latin typeface="Microsoft JhengHei" pitchFamily="34" charset="0"/>
+                          <a:ea typeface="Microsoft JhengHei" pitchFamily="34" charset="-122"/>
+                          <a:cs typeface="Microsoft JhengHei" pitchFamily="34" charset="-120"/>
+                        </a:rPr>
+                        <a:t>完成 10</a:t>
+                      </a:r>
+                      <a:endParaRPr lang="en-US" sz="950" dirty="0">
+                        <a:latin typeface="Microsoft JhengHei" charset="0"/>
+                        <a:ea typeface="Microsoft JhengHei" charset="0"/>
+                        <a:cs typeface="Microsoft JhengHei" charset="0"/>
+                      </a:endParaRPr>
+                    </a:p>
+                  </a:txBody>
+                  <a:tcPr marL="45720" marR="45720" marT="45720" marB="45720" anchor="ctr">
+                    <a:lnL w="9525" cap="flat" cmpd="sng" algn="ctr">
+                      <a:solidFill>
+                        <a:srgbClr val="D5DEF0"/>
+                      </a:solidFill>
+                      <a:prstDash val="solid"/>
+                      <a:round/>
+                      <a:headEnd type="none" w="med" len="med"/>
+                      <a:tailEnd type="none" w="med" len="med"/>
+                    </a:lnL>
+                    <a:lnR w="9525" cap="flat" cmpd="sng" algn="ctr">
+                      <a:solidFill>
+                        <a:srgbClr val="D5DEF0"/>
+                      </a:solidFill>
+                      <a:prstDash val="solid"/>
+                      <a:round/>
+                      <a:headEnd type="none" w="med" len="med"/>
+                      <a:tailEnd type="none" w="med" len="med"/>
+                    </a:lnR>
+                    <a:lnT w="9525" cap="flat" cmpd="sng" algn="ctr">
+                      <a:solidFill>
+                        <a:srgbClr val="D5DEF0"/>
+                      </a:solidFill>
+                      <a:prstDash val="solid"/>
+                      <a:round/>
+                      <a:headEnd type="none" w="med" len="med"/>
+                      <a:tailEnd type="none" w="med" len="med"/>
+                    </a:lnT>
+                    <a:lnB w="9525" cap="flat" cmpd="sng" algn="ctr">
+                      <a:solidFill>
+                        <a:srgbClr val="D5DEF0"/>
+                      </a:solidFill>
+                      <a:prstDash val="solid"/>
+                      <a:round/>
+                      <a:headEnd type="none" w="med" len="med"/>
+                      <a:tailEnd type="none" w="med" len="med"/>
+                    </a:lnB>
+                  </a:tcPr>
+                </a:tc>
+              </a:tr>
+              <a:tr h="365760">
+                <a:tc>
+                  <a:txBody>
+                    <a:bodyPr/>
+                    <a:lstStyle/>
+                    <a:p>
+                      <a:pPr algn="ctr" indent="0" marL="0">
+                        <a:buNone/>
+                      </a:pPr>
+                      <a:r>
+                        <a:rPr lang="en-US" sz="950" b="1" dirty="0">
+                          <a:solidFill>
+                            <a:srgbClr val="FFFFFF"/>
+                          </a:solidFill>
+                          <a:latin typeface="Microsoft JhengHei" pitchFamily="34" charset="0"/>
+                          <a:ea typeface="Microsoft JhengHei" pitchFamily="34" charset="-122"/>
+                          <a:cs typeface="Microsoft JhengHei" pitchFamily="34" charset="-120"/>
+                        </a:rPr>
+                        <a:t>A</a:t>
+                      </a:r>
+                      <a:endParaRPr lang="en-US" sz="950" dirty="0">
+                        <a:latin typeface="Microsoft JhengHei" charset="0"/>
+                        <a:ea typeface="Microsoft JhengHei" charset="0"/>
+                        <a:cs typeface="Microsoft JhengHei" charset="0"/>
+                      </a:endParaRPr>
+                    </a:p>
+                  </a:txBody>
+                  <a:tcPr marL="45720" marR="45720" marT="45720" marB="45720" anchor="ctr">
+                    <a:lnL w="9525" cap="flat" cmpd="sng" algn="ctr">
+                      <a:solidFill>
+                        <a:srgbClr val="D5DEF0"/>
+                      </a:solidFill>
+                      <a:prstDash val="solid"/>
+                      <a:round/>
+                      <a:headEnd type="none" w="med" len="med"/>
+                      <a:tailEnd type="none" w="med" len="med"/>
+                    </a:lnL>
+                    <a:lnR w="9525" cap="flat" cmpd="sng" algn="ctr">
+                      <a:solidFill>
+                        <a:srgbClr val="D5DEF0"/>
+                      </a:solidFill>
+                      <a:prstDash val="solid"/>
+                      <a:round/>
+                      <a:headEnd type="none" w="med" len="med"/>
+                      <a:tailEnd type="none" w="med" len="med"/>
+                    </a:lnR>
+                    <a:lnT w="9525" cap="flat" cmpd="sng" algn="ctr">
+                      <a:solidFill>
+                        <a:srgbClr val="D5DEF0"/>
+                      </a:solidFill>
+                      <a:prstDash val="solid"/>
+                      <a:round/>
+                      <a:headEnd type="none" w="med" len="med"/>
+                      <a:tailEnd type="none" w="med" len="med"/>
+                    </a:lnT>
+                    <a:lnB w="9525" cap="flat" cmpd="sng" algn="ctr">
+                      <a:solidFill>
+                        <a:srgbClr val="D5DEF0"/>
+                      </a:solidFill>
+                      <a:prstDash val="solid"/>
+                      <a:round/>
+                      <a:headEnd type="none" w="med" len="med"/>
+                      <a:tailEnd type="none" w="med" len="med"/>
+                    </a:lnB>
+                    <a:solidFill>
+                      <a:srgbClr val="2B6CB0"/>
+                    </a:solidFill>
+                  </a:tcPr>
+                </a:tc>
+                <a:tc>
+                  <a:txBody>
+                    <a:bodyPr/>
+                    <a:lstStyle/>
+                    <a:p>
+                      <a:pPr indent="0" marL="0">
+                        <a:buNone/>
+                      </a:pPr>
+                      <a:r>
+                        <a:rPr lang="en-US" sz="950" b="1" dirty="0">
+                          <a:solidFill>
+                            <a:srgbClr val="16224D"/>
+                          </a:solidFill>
+                          <a:latin typeface="Microsoft JhengHei" pitchFamily="34" charset="0"/>
+                          <a:ea typeface="Microsoft JhengHei" pitchFamily="34" charset="-122"/>
+                          <a:cs typeface="Microsoft JhengHei" pitchFamily="34" charset="-120"/>
+                        </a:rPr>
+                        <a:t>每一 take 開錄前健康檢查</a:t>
+                      </a:r>
+                      <a:endParaRPr lang="en-US" sz="950" dirty="0">
+                        <a:latin typeface="Microsoft JhengHei" charset="0"/>
+                        <a:ea typeface="Microsoft JhengHei" charset="0"/>
+                        <a:cs typeface="Microsoft JhengHei" charset="0"/>
+                      </a:endParaRPr>
+                    </a:p>
+                  </a:txBody>
+                  <a:tcPr marL="45720" marR="45720" marT="45720" marB="45720" anchor="ctr">
+                    <a:lnL w="9525" cap="flat" cmpd="sng" algn="ctr">
+                      <a:solidFill>
+                        <a:srgbClr val="D5DEF0"/>
+                      </a:solidFill>
+                      <a:prstDash val="solid"/>
+                      <a:round/>
+                      <a:headEnd type="none" w="med" len="med"/>
+                      <a:tailEnd type="none" w="med" len="med"/>
+                    </a:lnL>
+                    <a:lnR w="9525" cap="flat" cmpd="sng" algn="ctr">
+                      <a:solidFill>
+                        <a:srgbClr val="D5DEF0"/>
+                      </a:solidFill>
+                      <a:prstDash val="solid"/>
+                      <a:round/>
+                      <a:headEnd type="none" w="med" len="med"/>
+                      <a:tailEnd type="none" w="med" len="med"/>
+                    </a:lnR>
+                    <a:lnT w="9525" cap="flat" cmpd="sng" algn="ctr">
+                      <a:solidFill>
+                        <a:srgbClr val="D5DEF0"/>
+                      </a:solidFill>
+                      <a:prstDash val="solid"/>
+                      <a:round/>
+                      <a:headEnd type="none" w="med" len="med"/>
+                      <a:tailEnd type="none" w="med" len="med"/>
+                    </a:lnT>
+                    <a:lnB w="9525" cap="flat" cmpd="sng" algn="ctr">
+                      <a:solidFill>
+                        <a:srgbClr val="D5DEF0"/>
+                      </a:solidFill>
+                      <a:prstDash val="solid"/>
+                      <a:round/>
+                      <a:headEnd type="none" w="med" len="med"/>
+                      <a:tailEnd type="none" w="med" len="med"/>
+                    </a:lnB>
+                  </a:tcPr>
+                </a:tc>
+                <a:tc>
+                  <a:txBody>
+                    <a:bodyPr/>
+                    <a:lstStyle/>
+                    <a:p>
+                      <a:pPr indent="0" marL="0">
+                        <a:buNone/>
+                      </a:pPr>
+                      <a:r>
+                        <a:rPr lang="en-US" sz="950" dirty="0">
+                          <a:solidFill>
+                            <a:srgbClr val="1F2937"/>
+                          </a:solidFill>
+                          <a:latin typeface="Microsoft JhengHei" pitchFamily="34" charset="0"/>
+                          <a:ea typeface="Microsoft JhengHei" pitchFamily="34" charset="-122"/>
+                          <a:cs typeface="Microsoft JhengHei" pitchFamily="34" charset="-120"/>
+                        </a:rPr>
+                        <a:t>verify_live 22 項＋前端 13 項；確認沒亮「離線展示」</a:t>
+                      </a:r>
+                      <a:endParaRPr lang="en-US" sz="950" dirty="0">
+                        <a:latin typeface="Microsoft JhengHei" charset="0"/>
+                        <a:ea typeface="Microsoft JhengHei" charset="0"/>
+                        <a:cs typeface="Microsoft JhengHei" charset="0"/>
+                      </a:endParaRPr>
+                    </a:p>
+                  </a:txBody>
+                  <a:tcPr marL="45720" marR="45720" marT="45720" marB="45720" anchor="ctr">
+                    <a:lnL w="9525" cap="flat" cmpd="sng" algn="ctr">
+                      <a:solidFill>
+                        <a:srgbClr val="D5DEF0"/>
+                      </a:solidFill>
+                      <a:prstDash val="solid"/>
+                      <a:round/>
+                      <a:headEnd type="none" w="med" len="med"/>
+                      <a:tailEnd type="none" w="med" len="med"/>
+                    </a:lnL>
+                    <a:lnR w="9525" cap="flat" cmpd="sng" algn="ctr">
+                      <a:solidFill>
+                        <a:srgbClr val="D5DEF0"/>
+                      </a:solidFill>
+                      <a:prstDash val="solid"/>
+                      <a:round/>
+                      <a:headEnd type="none" w="med" len="med"/>
+                      <a:tailEnd type="none" w="med" len="med"/>
+                    </a:lnR>
+                    <a:lnT w="9525" cap="flat" cmpd="sng" algn="ctr">
+                      <a:solidFill>
+                        <a:srgbClr val="D5DEF0"/>
+                      </a:solidFill>
+                      <a:prstDash val="solid"/>
+                      <a:round/>
+                      <a:headEnd type="none" w="med" len="med"/>
+                      <a:tailEnd type="none" w="med" len="med"/>
+                    </a:lnT>
+                    <a:lnB w="9525" cap="flat" cmpd="sng" algn="ctr">
+                      <a:solidFill>
+                        <a:srgbClr val="D5DEF0"/>
+                      </a:solidFill>
+                      <a:prstDash val="solid"/>
+                      <a:round/>
+                      <a:headEnd type="none" w="med" len="med"/>
+                      <a:tailEnd type="none" w="med" len="med"/>
+                    </a:lnB>
+                  </a:tcPr>
+                </a:tc>
+                <a:tc>
+                  <a:txBody>
+                    <a:bodyPr/>
+                    <a:lstStyle/>
+                    <a:p>
+                      <a:pPr indent="0" marL="0">
+                        <a:buNone/>
+                      </a:pPr>
+                      <a:r>
+                        <a:rPr lang="en-US" sz="950" b="1" dirty="0">
+                          <a:solidFill>
+                            <a:srgbClr val="E8A13A"/>
+                          </a:solidFill>
+                          <a:latin typeface="Microsoft JhengHei" pitchFamily="34" charset="0"/>
+                          <a:ea typeface="Microsoft JhengHei" pitchFamily="34" charset="-122"/>
+                          <a:cs typeface="Microsoft JhengHei" pitchFamily="34" charset="-120"/>
+                        </a:rPr>
+                        <a:t>完成 10</a:t>
+                      </a:r>
+                      <a:endParaRPr lang="en-US" sz="950" dirty="0">
+                        <a:latin typeface="Microsoft JhengHei" charset="0"/>
+                        <a:ea typeface="Microsoft JhengHei" charset="0"/>
+                        <a:cs typeface="Microsoft JhengHei" charset="0"/>
+                      </a:endParaRPr>
+                    </a:p>
+                  </a:txBody>
+                  <a:tcPr marL="45720" marR="45720" marT="45720" marB="45720" anchor="ctr">
+                    <a:lnL w="9525" cap="flat" cmpd="sng" algn="ctr">
+                      <a:solidFill>
+                        <a:srgbClr val="D5DEF0"/>
+                      </a:solidFill>
+                      <a:prstDash val="solid"/>
+                      <a:round/>
+                      <a:headEnd type="none" w="med" len="med"/>
+                      <a:tailEnd type="none" w="med" len="med"/>
+                    </a:lnL>
+                    <a:lnR w="9525" cap="flat" cmpd="sng" algn="ctr">
+                      <a:solidFill>
+                        <a:srgbClr val="D5DEF0"/>
+                      </a:solidFill>
+                      <a:prstDash val="solid"/>
+                      <a:round/>
+                      <a:headEnd type="none" w="med" len="med"/>
+                      <a:tailEnd type="none" w="med" len="med"/>
+                    </a:lnR>
+                    <a:lnT w="9525" cap="flat" cmpd="sng" algn="ctr">
+                      <a:solidFill>
+                        <a:srgbClr val="D5DEF0"/>
+                      </a:solidFill>
+                      <a:prstDash val="solid"/>
+                      <a:round/>
+                      <a:headEnd type="none" w="med" len="med"/>
+                      <a:tailEnd type="none" w="med" len="med"/>
+                    </a:lnT>
+                    <a:lnB w="9525" cap="flat" cmpd="sng" algn="ctr">
+                      <a:solidFill>
+                        <a:srgbClr val="D5DEF0"/>
+                      </a:solidFill>
+                      <a:prstDash val="solid"/>
+                      <a:round/>
+                      <a:headEnd type="none" w="med" len="med"/>
+                      <a:tailEnd type="none" w="med" len="med"/>
+                    </a:lnB>
+                  </a:tcPr>
+                </a:tc>
+              </a:tr>
+              <a:tr h="365760">
+                <a:tc>
+                  <a:txBody>
+                    <a:bodyPr/>
+                    <a:lstStyle/>
+                    <a:p>
+                      <a:pPr algn="ctr" indent="0" marL="0">
+                        <a:buNone/>
+                      </a:pPr>
+                      <a:r>
+                        <a:rPr lang="en-US" sz="950" b="1" dirty="0">
+                          <a:solidFill>
+                            <a:srgbClr val="FFFFFF"/>
+                          </a:solidFill>
+                          <a:latin typeface="Microsoft JhengHei" pitchFamily="34" charset="0"/>
+                          <a:ea typeface="Microsoft JhengHei" pitchFamily="34" charset="-122"/>
+                          <a:cs typeface="Microsoft JhengHei" pitchFamily="34" charset="-120"/>
+                        </a:rPr>
+                        <a:t>B</a:t>
+                      </a:r>
+                      <a:endParaRPr lang="en-US" sz="950" dirty="0">
+                        <a:latin typeface="Microsoft JhengHei" charset="0"/>
+                        <a:ea typeface="Microsoft JhengHei" charset="0"/>
+                        <a:cs typeface="Microsoft JhengHei" charset="0"/>
+                      </a:endParaRPr>
+                    </a:p>
+                  </a:txBody>
+                  <a:tcPr marL="45720" marR="45720" marT="45720" marB="45720" anchor="ctr">
+                    <a:lnL w="9525" cap="flat" cmpd="sng" algn="ctr">
+                      <a:solidFill>
+                        <a:srgbClr val="D5DEF0"/>
+                      </a:solidFill>
+                      <a:prstDash val="solid"/>
+                      <a:round/>
+                      <a:headEnd type="none" w="med" len="med"/>
+                      <a:tailEnd type="none" w="med" len="med"/>
+                    </a:lnL>
+                    <a:lnR w="9525" cap="flat" cmpd="sng" algn="ctr">
+                      <a:solidFill>
+                        <a:srgbClr val="D5DEF0"/>
+                      </a:solidFill>
+                      <a:prstDash val="solid"/>
+                      <a:round/>
+                      <a:headEnd type="none" w="med" len="med"/>
+                      <a:tailEnd type="none" w="med" len="med"/>
+                    </a:lnR>
+                    <a:lnT w="9525" cap="flat" cmpd="sng" algn="ctr">
+                      <a:solidFill>
+                        <a:srgbClr val="D5DEF0"/>
+                      </a:solidFill>
+                      <a:prstDash val="solid"/>
+                      <a:round/>
+                      <a:headEnd type="none" w="med" len="med"/>
+                      <a:tailEnd type="none" w="med" len="med"/>
+                    </a:lnT>
+                    <a:lnB w="9525" cap="flat" cmpd="sng" algn="ctr">
+                      <a:solidFill>
+                        <a:srgbClr val="D5DEF0"/>
+                      </a:solidFill>
+                      <a:prstDash val="solid"/>
+                      <a:round/>
+                      <a:headEnd type="none" w="med" len="med"/>
+                      <a:tailEnd type="none" w="med" len="med"/>
+                    </a:lnB>
+                    <a:solidFill>
+                      <a:srgbClr val="1F9D66"/>
+                    </a:solidFill>
+                  </a:tcPr>
+                </a:tc>
+                <a:tc>
+                  <a:txBody>
+                    <a:bodyPr/>
+                    <a:lstStyle/>
+                    <a:p>
+                      <a:pPr indent="0" marL="0">
+                        <a:buNone/>
+                      </a:pPr>
+                      <a:r>
+                        <a:rPr lang="en-US" sz="950" b="1" dirty="0">
+                          <a:solidFill>
+                            <a:srgbClr val="16224D"/>
+                          </a:solidFill>
+                          <a:latin typeface="Microsoft JhengHei" pitchFamily="34" charset="0"/>
+                          <a:ea typeface="Microsoft JhengHei" pitchFamily="34" charset="-122"/>
+                          <a:cs typeface="Microsoft JhengHei" pitchFamily="34" charset="-120"/>
+                        </a:rPr>
+                        <a:t>加拍：RAG 防詐附出處</a:t>
+                      </a:r>
+                      <a:endParaRPr lang="en-US" sz="950" dirty="0">
+                        <a:latin typeface="Microsoft JhengHei" charset="0"/>
+                        <a:ea typeface="Microsoft JhengHei" charset="0"/>
+                        <a:cs typeface="Microsoft JhengHei" charset="0"/>
+                      </a:endParaRPr>
+                    </a:p>
+                  </a:txBody>
+                  <a:tcPr marL="45720" marR="45720" marT="45720" marB="45720" anchor="ctr">
+                    <a:lnL w="9525" cap="flat" cmpd="sng" algn="ctr">
+                      <a:solidFill>
+                        <a:srgbClr val="D5DEF0"/>
+                      </a:solidFill>
+                      <a:prstDash val="solid"/>
+                      <a:round/>
+                      <a:headEnd type="none" w="med" len="med"/>
+                      <a:tailEnd type="none" w="med" len="med"/>
+                    </a:lnL>
+                    <a:lnR w="9525" cap="flat" cmpd="sng" algn="ctr">
+                      <a:solidFill>
+                        <a:srgbClr val="D5DEF0"/>
+                      </a:solidFill>
+                      <a:prstDash val="solid"/>
+                      <a:round/>
+                      <a:headEnd type="none" w="med" len="med"/>
+                      <a:tailEnd type="none" w="med" len="med"/>
+                    </a:lnR>
+                    <a:lnT w="9525" cap="flat" cmpd="sng" algn="ctr">
+                      <a:solidFill>
+                        <a:srgbClr val="D5DEF0"/>
+                      </a:solidFill>
+                      <a:prstDash val="solid"/>
+                      <a:round/>
+                      <a:headEnd type="none" w="med" len="med"/>
+                      <a:tailEnd type="none" w="med" len="med"/>
+                    </a:lnT>
+                    <a:lnB w="9525" cap="flat" cmpd="sng" algn="ctr">
+                      <a:solidFill>
+                        <a:srgbClr val="D5DEF0"/>
+                      </a:solidFill>
+                      <a:prstDash val="solid"/>
+                      <a:round/>
+                      <a:headEnd type="none" w="med" len="med"/>
+                      <a:tailEnd type="none" w="med" len="med"/>
+                    </a:lnB>
+                  </a:tcPr>
+                </a:tc>
+                <a:tc>
+                  <a:txBody>
+                    <a:bodyPr/>
+                    <a:lstStyle/>
+                    <a:p>
+                      <a:pPr indent="0" marL="0">
+                        <a:buNone/>
+                      </a:pPr>
+                      <a:r>
+                        <a:rPr lang="en-US" sz="950" dirty="0">
+                          <a:solidFill>
+                            <a:srgbClr val="1F2937"/>
+                          </a:solidFill>
+                          <a:latin typeface="Microsoft JhengHei" pitchFamily="34" charset="0"/>
+                          <a:ea typeface="Microsoft JhengHei" pitchFamily="34" charset="-122"/>
+                          <a:cs typeface="Microsoft JhengHei" pitchFamily="34" charset="-120"/>
+                        </a:rPr>
+                        <a:t>問「這是不是詐騙話術」→ 回答帶 source_url（15 秒）</a:t>
+                      </a:r>
+                      <a:endParaRPr lang="en-US" sz="950" dirty="0">
+                        <a:latin typeface="Microsoft JhengHei" charset="0"/>
+                        <a:ea typeface="Microsoft JhengHei" charset="0"/>
+                        <a:cs typeface="Microsoft JhengHei" charset="0"/>
+                      </a:endParaRPr>
+                    </a:p>
+                  </a:txBody>
+                  <a:tcPr marL="45720" marR="45720" marT="45720" marB="45720" anchor="ctr">
+                    <a:lnL w="9525" cap="flat" cmpd="sng" algn="ctr">
+                      <a:solidFill>
+                        <a:srgbClr val="D5DEF0"/>
+                      </a:solidFill>
+                      <a:prstDash val="solid"/>
+                      <a:round/>
+                      <a:headEnd type="none" w="med" len="med"/>
+                      <a:tailEnd type="none" w="med" len="med"/>
+                    </a:lnL>
+                    <a:lnR w="9525" cap="flat" cmpd="sng" algn="ctr">
+                      <a:solidFill>
+                        <a:srgbClr val="D5DEF0"/>
+                      </a:solidFill>
+                      <a:prstDash val="solid"/>
+                      <a:round/>
+                      <a:headEnd type="none" w="med" len="med"/>
+                      <a:tailEnd type="none" w="med" len="med"/>
+                    </a:lnR>
+                    <a:lnT w="9525" cap="flat" cmpd="sng" algn="ctr">
+                      <a:solidFill>
+                        <a:srgbClr val="D5DEF0"/>
+                      </a:solidFill>
+                      <a:prstDash val="solid"/>
+                      <a:round/>
+                      <a:headEnd type="none" w="med" len="med"/>
+                      <a:tailEnd type="none" w="med" len="med"/>
+                    </a:lnT>
+                    <a:lnB w="9525" cap="flat" cmpd="sng" algn="ctr">
+                      <a:solidFill>
+                        <a:srgbClr val="D5DEF0"/>
+                      </a:solidFill>
+                      <a:prstDash val="solid"/>
+                      <a:round/>
+                      <a:headEnd type="none" w="med" len="med"/>
+                      <a:tailEnd type="none" w="med" len="med"/>
+                    </a:lnB>
+                  </a:tcPr>
+                </a:tc>
+                <a:tc>
+                  <a:txBody>
+                    <a:bodyPr/>
+                    <a:lstStyle/>
+                    <a:p>
+                      <a:pPr indent="0" marL="0">
+                        <a:buNone/>
+                      </a:pPr>
+                      <a:r>
+                        <a:rPr lang="en-US" sz="950" b="1" dirty="0">
+                          <a:solidFill>
+                            <a:srgbClr val="E8A13A"/>
+                          </a:solidFill>
+                          <a:latin typeface="Microsoft JhengHei" pitchFamily="34" charset="0"/>
+                          <a:ea typeface="Microsoft JhengHei" pitchFamily="34" charset="-122"/>
+                          <a:cs typeface="Microsoft JhengHei" pitchFamily="34" charset="-120"/>
+                        </a:rPr>
+                        <a:t>AI設計 15 ＋ 切合 10</a:t>
+                      </a:r>
+                      <a:endParaRPr lang="en-US" sz="950" dirty="0">
+                        <a:latin typeface="Microsoft JhengHei" charset="0"/>
+                        <a:ea typeface="Microsoft JhengHei" charset="0"/>
+                        <a:cs typeface="Microsoft JhengHei" charset="0"/>
+                      </a:endParaRPr>
+                    </a:p>
+                  </a:txBody>
+                  <a:tcPr marL="45720" marR="45720" marT="45720" marB="45720" anchor="ctr">
+                    <a:lnL w="9525" cap="flat" cmpd="sng" algn="ctr">
+                      <a:solidFill>
+                        <a:srgbClr val="D5DEF0"/>
+                      </a:solidFill>
+                      <a:prstDash val="solid"/>
+                      <a:round/>
+                      <a:headEnd type="none" w="med" len="med"/>
+                      <a:tailEnd type="none" w="med" len="med"/>
+                    </a:lnL>
+                    <a:lnR w="9525" cap="flat" cmpd="sng" algn="ctr">
+                      <a:solidFill>
+                        <a:srgbClr val="D5DEF0"/>
+                      </a:solidFill>
+                      <a:prstDash val="solid"/>
+                      <a:round/>
+                      <a:headEnd type="none" w="med" len="med"/>
+                      <a:tailEnd type="none" w="med" len="med"/>
+                    </a:lnR>
+                    <a:lnT w="9525" cap="flat" cmpd="sng" algn="ctr">
+                      <a:solidFill>
+                        <a:srgbClr val="D5DEF0"/>
+                      </a:solidFill>
+                      <a:prstDash val="solid"/>
+                      <a:round/>
+                      <a:headEnd type="none" w="med" len="med"/>
+                      <a:tailEnd type="none" w="med" len="med"/>
+                    </a:lnT>
+                    <a:lnB w="9525" cap="flat" cmpd="sng" algn="ctr">
+                      <a:solidFill>
+                        <a:srgbClr val="D5DEF0"/>
+                      </a:solidFill>
+                      <a:prstDash val="solid"/>
+                      <a:round/>
+                      <a:headEnd type="none" w="med" len="med"/>
+                      <a:tailEnd type="none" w="med" len="med"/>
+                    </a:lnB>
+                  </a:tcPr>
+                </a:tc>
+              </a:tr>
+              <a:tr h="365760">
+                <a:tc>
+                  <a:txBody>
+                    <a:bodyPr/>
+                    <a:lstStyle/>
+                    <a:p>
+                      <a:pPr algn="ctr" indent="0" marL="0">
+                        <a:buNone/>
+                      </a:pPr>
+                      <a:r>
+                        <a:rPr lang="en-US" sz="950" b="1" dirty="0">
+                          <a:solidFill>
+                            <a:srgbClr val="FFFFFF"/>
+                          </a:solidFill>
+                          <a:latin typeface="Microsoft JhengHei" pitchFamily="34" charset="0"/>
+                          <a:ea typeface="Microsoft JhengHei" pitchFamily="34" charset="-122"/>
+                          <a:cs typeface="Microsoft JhengHei" pitchFamily="34" charset="-120"/>
+                        </a:rPr>
+                        <a:t>B</a:t>
+                      </a:r>
+                      <a:endParaRPr lang="en-US" sz="950" dirty="0">
+                        <a:latin typeface="Microsoft JhengHei" charset="0"/>
+                        <a:ea typeface="Microsoft JhengHei" charset="0"/>
+                        <a:cs typeface="Microsoft JhengHei" charset="0"/>
+                      </a:endParaRPr>
+                    </a:p>
+                  </a:txBody>
+                  <a:tcPr marL="45720" marR="45720" marT="45720" marB="45720" anchor="ctr">
+                    <a:lnL w="9525" cap="flat" cmpd="sng" algn="ctr">
+                      <a:solidFill>
+                        <a:srgbClr val="D5DEF0"/>
+                      </a:solidFill>
+                      <a:prstDash val="solid"/>
+                      <a:round/>
+                      <a:headEnd type="none" w="med" len="med"/>
+                      <a:tailEnd type="none" w="med" len="med"/>
+                    </a:lnL>
+                    <a:lnR w="9525" cap="flat" cmpd="sng" algn="ctr">
+                      <a:solidFill>
+                        <a:srgbClr val="D5DEF0"/>
+                      </a:solidFill>
+                      <a:prstDash val="solid"/>
+                      <a:round/>
+                      <a:headEnd type="none" w="med" len="med"/>
+                      <a:tailEnd type="none" w="med" len="med"/>
+                    </a:lnR>
+                    <a:lnT w="9525" cap="flat" cmpd="sng" algn="ctr">
+                      <a:solidFill>
+                        <a:srgbClr val="D5DEF0"/>
+                      </a:solidFill>
+                      <a:prstDash val="solid"/>
+                      <a:round/>
+                      <a:headEnd type="none" w="med" len="med"/>
+                      <a:tailEnd type="none" w="med" len="med"/>
+                    </a:lnT>
+                    <a:lnB w="9525" cap="flat" cmpd="sng" algn="ctr">
+                      <a:solidFill>
+                        <a:srgbClr val="D5DEF0"/>
+                      </a:solidFill>
+                      <a:prstDash val="solid"/>
+                      <a:round/>
+                      <a:headEnd type="none" w="med" len="med"/>
+                      <a:tailEnd type="none" w="med" len="med"/>
+                    </a:lnB>
+                    <a:solidFill>
+                      <a:srgbClr val="1F9D66"/>
+                    </a:solidFill>
+                  </a:tcPr>
+                </a:tc>
+                <a:tc>
+                  <a:txBody>
+                    <a:bodyPr/>
+                    <a:lstStyle/>
+                    <a:p>
+                      <a:pPr indent="0" marL="0">
+                        <a:buNone/>
+                      </a:pPr>
+                      <a:r>
+                        <a:rPr lang="en-US" sz="950" b="1" dirty="0">
+                          <a:solidFill>
+                            <a:srgbClr val="16224D"/>
+                          </a:solidFill>
+                          <a:latin typeface="Microsoft JhengHei" pitchFamily="34" charset="0"/>
+                          <a:ea typeface="Microsoft JhengHei" pitchFamily="34" charset="-122"/>
+                          <a:cs typeface="Microsoft JhengHei" pitchFamily="34" charset="-120"/>
+                        </a:rPr>
+                        <a:t>加拍：虧損 vs 少賺</a:t>
+                      </a:r>
+                      <a:endParaRPr lang="en-US" sz="950" dirty="0">
+                        <a:latin typeface="Microsoft JhengHei" charset="0"/>
+                        <a:ea typeface="Microsoft JhengHei" charset="0"/>
+                        <a:cs typeface="Microsoft JhengHei" charset="0"/>
+                      </a:endParaRPr>
+                    </a:p>
+                  </a:txBody>
+                  <a:tcPr marL="45720" marR="45720" marT="45720" marB="45720" anchor="ctr">
+                    <a:lnL w="9525" cap="flat" cmpd="sng" algn="ctr">
+                      <a:solidFill>
+                        <a:srgbClr val="D5DEF0"/>
+                      </a:solidFill>
+                      <a:prstDash val="solid"/>
+                      <a:round/>
+                      <a:headEnd type="none" w="med" len="med"/>
+                      <a:tailEnd type="none" w="med" len="med"/>
+                    </a:lnL>
+                    <a:lnR w="9525" cap="flat" cmpd="sng" algn="ctr">
+                      <a:solidFill>
+                        <a:srgbClr val="D5DEF0"/>
+                      </a:solidFill>
+                      <a:prstDash val="solid"/>
+                      <a:round/>
+                      <a:headEnd type="none" w="med" len="med"/>
+                      <a:tailEnd type="none" w="med" len="med"/>
+                    </a:lnR>
+                    <a:lnT w="9525" cap="flat" cmpd="sng" algn="ctr">
+                      <a:solidFill>
+                        <a:srgbClr val="D5DEF0"/>
+                      </a:solidFill>
+                      <a:prstDash val="solid"/>
+                      <a:round/>
+                      <a:headEnd type="none" w="med" len="med"/>
+                      <a:tailEnd type="none" w="med" len="med"/>
+                    </a:lnT>
+                    <a:lnB w="9525" cap="flat" cmpd="sng" algn="ctr">
+                      <a:solidFill>
+                        <a:srgbClr val="D5DEF0"/>
+                      </a:solidFill>
+                      <a:prstDash val="solid"/>
+                      <a:round/>
+                      <a:headEnd type="none" w="med" len="med"/>
+                      <a:tailEnd type="none" w="med" len="med"/>
+                    </a:lnB>
+                  </a:tcPr>
+                </a:tc>
+                <a:tc>
+                  <a:txBody>
+                    <a:bodyPr/>
+                    <a:lstStyle/>
+                    <a:p>
+                      <a:pPr indent="0" marL="0">
+                        <a:buNone/>
+                      </a:pPr>
+                      <a:r>
+                        <a:rPr lang="en-US" sz="950" dirty="0">
+                          <a:solidFill>
+                            <a:srgbClr val="1F2937"/>
+                          </a:solidFill>
+                          <a:latin typeface="Microsoft JhengHei" pitchFamily="34" charset="0"/>
+                          <a:ea typeface="Microsoft JhengHei" pitchFamily="34" charset="-122"/>
+                          <a:cs typeface="Microsoft JhengHei" pitchFamily="34" charset="-120"/>
+                        </a:rPr>
+                        <a:t>「去年虧最多哪一筆」→ 真實虧損 963 vs 少賺 2,660 萬（15 秒）</a:t>
+                      </a:r>
+                      <a:endParaRPr lang="en-US" sz="950" dirty="0">
+                        <a:latin typeface="Microsoft JhengHei" charset="0"/>
+                        <a:ea typeface="Microsoft JhengHei" charset="0"/>
+                        <a:cs typeface="Microsoft JhengHei" charset="0"/>
+                      </a:endParaRPr>
+                    </a:p>
+                  </a:txBody>
+                  <a:tcPr marL="45720" marR="45720" marT="45720" marB="45720" anchor="ctr">
+                    <a:lnL w="9525" cap="flat" cmpd="sng" algn="ctr">
+                      <a:solidFill>
+                        <a:srgbClr val="D5DEF0"/>
+                      </a:solidFill>
+                      <a:prstDash val="solid"/>
+                      <a:round/>
+                      <a:headEnd type="none" w="med" len="med"/>
+                      <a:tailEnd type="none" w="med" len="med"/>
+                    </a:lnL>
+                    <a:lnR w="9525" cap="flat" cmpd="sng" algn="ctr">
+                      <a:solidFill>
+                        <a:srgbClr val="D5DEF0"/>
+                      </a:solidFill>
+                      <a:prstDash val="solid"/>
+                      <a:round/>
+                      <a:headEnd type="none" w="med" len="med"/>
+                      <a:tailEnd type="none" w="med" len="med"/>
+                    </a:lnR>
+                    <a:lnT w="9525" cap="flat" cmpd="sng" algn="ctr">
+                      <a:solidFill>
+                        <a:srgbClr val="D5DEF0"/>
+                      </a:solidFill>
+                      <a:prstDash val="solid"/>
+                      <a:round/>
+                      <a:headEnd type="none" w="med" len="med"/>
+                      <a:tailEnd type="none" w="med" len="med"/>
+                    </a:lnT>
+                    <a:lnB w="9525" cap="flat" cmpd="sng" algn="ctr">
+                      <a:solidFill>
+                        <a:srgbClr val="D5DEF0"/>
+                      </a:solidFill>
+                      <a:prstDash val="solid"/>
+                      <a:round/>
+                      <a:headEnd type="none" w="med" len="med"/>
+                      <a:tailEnd type="none" w="med" len="med"/>
+                    </a:lnB>
+                  </a:tcPr>
+                </a:tc>
+                <a:tc>
+                  <a:txBody>
+                    <a:bodyPr/>
+                    <a:lstStyle/>
+                    <a:p>
+                      <a:pPr indent="0" marL="0">
+                        <a:buNone/>
+                      </a:pPr>
+                      <a:r>
+                        <a:rPr lang="en-US" sz="950" b="1" dirty="0">
+                          <a:solidFill>
+                            <a:srgbClr val="E8A13A"/>
+                          </a:solidFill>
+                          <a:latin typeface="Microsoft JhengHei" pitchFamily="34" charset="0"/>
+                          <a:ea typeface="Microsoft JhengHei" pitchFamily="34" charset="-122"/>
+                          <a:cs typeface="Microsoft JhengHei" pitchFamily="34" charset="-120"/>
+                        </a:rPr>
+                        <a:t>創意 25</a:t>
+                      </a:r>
+                      <a:endParaRPr lang="en-US" sz="950" dirty="0">
+                        <a:latin typeface="Microsoft JhengHei" charset="0"/>
+                        <a:ea typeface="Microsoft JhengHei" charset="0"/>
+                        <a:cs typeface="Microsoft JhengHei" charset="0"/>
+                      </a:endParaRPr>
+                    </a:p>
+                  </a:txBody>
+                  <a:tcPr marL="45720" marR="45720" marT="45720" marB="45720" anchor="ctr">
+                    <a:lnL w="9525" cap="flat" cmpd="sng" algn="ctr">
+                      <a:solidFill>
+                        <a:srgbClr val="D5DEF0"/>
+                      </a:solidFill>
+                      <a:prstDash val="solid"/>
+                      <a:round/>
+                      <a:headEnd type="none" w="med" len="med"/>
+                      <a:tailEnd type="none" w="med" len="med"/>
+                    </a:lnL>
+                    <a:lnR w="9525" cap="flat" cmpd="sng" algn="ctr">
+                      <a:solidFill>
+                        <a:srgbClr val="D5DEF0"/>
+                      </a:solidFill>
+                      <a:prstDash val="solid"/>
+                      <a:round/>
+                      <a:headEnd type="none" w="med" len="med"/>
+                      <a:tailEnd type="none" w="med" len="med"/>
+                    </a:lnR>
+                    <a:lnT w="9525" cap="flat" cmpd="sng" algn="ctr">
+                      <a:solidFill>
+                        <a:srgbClr val="D5DEF0"/>
+                      </a:solidFill>
+                      <a:prstDash val="solid"/>
+                      <a:round/>
+                      <a:headEnd type="none" w="med" len="med"/>
+                      <a:tailEnd type="none" w="med" len="med"/>
+                    </a:lnT>
+                    <a:lnB w="9525" cap="flat" cmpd="sng" algn="ctr">
+                      <a:solidFill>
+                        <a:srgbClr val="D5DEF0"/>
+                      </a:solidFill>
+                      <a:prstDash val="solid"/>
+                      <a:round/>
+                      <a:headEnd type="none" w="med" len="med"/>
+                      <a:tailEnd type="none" w="med" len="med"/>
+                    </a:lnB>
+                  </a:tcPr>
+                </a:tc>
+              </a:tr>
+              <a:tr h="365760">
+                <a:tc>
+                  <a:txBody>
+                    <a:bodyPr/>
+                    <a:lstStyle/>
+                    <a:p>
+                      <a:pPr algn="ctr" indent="0" marL="0">
+                        <a:buNone/>
+                      </a:pPr>
+                      <a:r>
+                        <a:rPr lang="en-US" sz="950" b="1" dirty="0">
+                          <a:solidFill>
+                            <a:srgbClr val="FFFFFF"/>
+                          </a:solidFill>
+                          <a:latin typeface="Microsoft JhengHei" pitchFamily="34" charset="0"/>
+                          <a:ea typeface="Microsoft JhengHei" pitchFamily="34" charset="-122"/>
+                          <a:cs typeface="Microsoft JhengHei" pitchFamily="34" charset="-120"/>
+                        </a:rPr>
+                        <a:t>B</a:t>
+                      </a:r>
+                      <a:endParaRPr lang="en-US" sz="950" dirty="0">
+                        <a:latin typeface="Microsoft JhengHei" charset="0"/>
+                        <a:ea typeface="Microsoft JhengHei" charset="0"/>
+                        <a:cs typeface="Microsoft JhengHei" charset="0"/>
+                      </a:endParaRPr>
+                    </a:p>
+                  </a:txBody>
+                  <a:tcPr marL="45720" marR="45720" marT="45720" marB="45720" anchor="ctr">
+                    <a:lnL w="9525" cap="flat" cmpd="sng" algn="ctr">
+                      <a:solidFill>
+                        <a:srgbClr val="D5DEF0"/>
+                      </a:solidFill>
+                      <a:prstDash val="solid"/>
+                      <a:round/>
+                      <a:headEnd type="none" w="med" len="med"/>
+                      <a:tailEnd type="none" w="med" len="med"/>
+                    </a:lnL>
+                    <a:lnR w="9525" cap="flat" cmpd="sng" algn="ctr">
+                      <a:solidFill>
+                        <a:srgbClr val="D5DEF0"/>
+                      </a:solidFill>
+                      <a:prstDash val="solid"/>
+                      <a:round/>
+                      <a:headEnd type="none" w="med" len="med"/>
+                      <a:tailEnd type="none" w="med" len="med"/>
+                    </a:lnR>
+                    <a:lnT w="9525" cap="flat" cmpd="sng" algn="ctr">
+                      <a:solidFill>
+                        <a:srgbClr val="D5DEF0"/>
+                      </a:solidFill>
+                      <a:prstDash val="solid"/>
+                      <a:round/>
+                      <a:headEnd type="none" w="med" len="med"/>
+                      <a:tailEnd type="none" w="med" len="med"/>
+                    </a:lnT>
+                    <a:lnB w="9525" cap="flat" cmpd="sng" algn="ctr">
+                      <a:solidFill>
+                        <a:srgbClr val="D5DEF0"/>
+                      </a:solidFill>
+                      <a:prstDash val="solid"/>
+                      <a:round/>
+                      <a:headEnd type="none" w="med" len="med"/>
+                      <a:tailEnd type="none" w="med" len="med"/>
+                    </a:lnB>
+                    <a:solidFill>
+                      <a:srgbClr val="1F9D66"/>
+                    </a:solidFill>
+                  </a:tcPr>
+                </a:tc>
+                <a:tc>
+                  <a:txBody>
+                    <a:bodyPr/>
+                    <a:lstStyle/>
+                    <a:p>
+                      <a:pPr indent="0" marL="0">
+                        <a:buNone/>
+                      </a:pPr>
+                      <a:r>
+                        <a:rPr lang="en-US" sz="950" b="1" dirty="0">
+                          <a:solidFill>
+                            <a:srgbClr val="16224D"/>
+                          </a:solidFill>
+                          <a:latin typeface="Microsoft JhengHei" pitchFamily="34" charset="0"/>
+                          <a:ea typeface="Microsoft JhengHei" pitchFamily="34" charset="-122"/>
+                          <a:cs typeface="Microsoft JhengHei" pitchFamily="34" charset="-120"/>
+                        </a:rPr>
+                        <a:t>行情面板空鏡</a:t>
+                      </a:r>
+                      <a:endParaRPr lang="en-US" sz="950" dirty="0">
+                        <a:latin typeface="Microsoft JhengHei" charset="0"/>
+                        <a:ea typeface="Microsoft JhengHei" charset="0"/>
+                        <a:cs typeface="Microsoft JhengHei" charset="0"/>
+                      </a:endParaRPr>
+                    </a:p>
+                  </a:txBody>
+                  <a:tcPr marL="45720" marR="45720" marT="45720" marB="45720" anchor="ctr">
+                    <a:lnL w="9525" cap="flat" cmpd="sng" algn="ctr">
+                      <a:solidFill>
+                        <a:srgbClr val="D5DEF0"/>
+                      </a:solidFill>
+                      <a:prstDash val="solid"/>
+                      <a:round/>
+                      <a:headEnd type="none" w="med" len="med"/>
+                      <a:tailEnd type="none" w="med" len="med"/>
+                    </a:lnL>
+                    <a:lnR w="9525" cap="flat" cmpd="sng" algn="ctr">
+                      <a:solidFill>
+                        <a:srgbClr val="D5DEF0"/>
+                      </a:solidFill>
+                      <a:prstDash val="solid"/>
+                      <a:round/>
+                      <a:headEnd type="none" w="med" len="med"/>
+                      <a:tailEnd type="none" w="med" len="med"/>
+                    </a:lnR>
+                    <a:lnT w="9525" cap="flat" cmpd="sng" algn="ctr">
+                      <a:solidFill>
+                        <a:srgbClr val="D5DEF0"/>
+                      </a:solidFill>
+                      <a:prstDash val="solid"/>
+                      <a:round/>
+                      <a:headEnd type="none" w="med" len="med"/>
+                      <a:tailEnd type="none" w="med" len="med"/>
+                    </a:lnT>
+                    <a:lnB w="9525" cap="flat" cmpd="sng" algn="ctr">
+                      <a:solidFill>
+                        <a:srgbClr val="D5DEF0"/>
+                      </a:solidFill>
+                      <a:prstDash val="solid"/>
+                      <a:round/>
+                      <a:headEnd type="none" w="med" len="med"/>
+                      <a:tailEnd type="none" w="med" len="med"/>
+                    </a:lnB>
+                  </a:tcPr>
+                </a:tc>
+                <a:tc>
+                  <a:txBody>
+                    <a:bodyPr/>
+                    <a:lstStyle/>
+                    <a:p>
+                      <a:pPr indent="0" marL="0">
+                        <a:buNone/>
+                      </a:pPr>
+                      <a:r>
+                        <a:rPr lang="en-US" sz="950" dirty="0">
+                          <a:solidFill>
+                            <a:srgbClr val="1F2937"/>
+                          </a:solidFill>
+                          <a:latin typeface="Microsoft JhengHei" pitchFamily="34" charset="0"/>
+                          <a:ea typeface="Microsoft JhengHei" pitchFamily="34" charset="-122"/>
+                          <a:cs typeface="Microsoft JhengHei" pitchFamily="34" charset="-120"/>
+                        </a:rPr>
+                        <a:t>四幣即時、10 秒刷新只變數字不閃爍（10 秒）</a:t>
+                      </a:r>
+                      <a:endParaRPr lang="en-US" sz="950" dirty="0">
+                        <a:latin typeface="Microsoft JhengHei" charset="0"/>
+                        <a:ea typeface="Microsoft JhengHei" charset="0"/>
+                        <a:cs typeface="Microsoft JhengHei" charset="0"/>
+                      </a:endParaRPr>
+                    </a:p>
+                  </a:txBody>
+                  <a:tcPr marL="45720" marR="45720" marT="45720" marB="45720" anchor="ctr">
+                    <a:lnL w="9525" cap="flat" cmpd="sng" algn="ctr">
+                      <a:solidFill>
+                        <a:srgbClr val="D5DEF0"/>
+                      </a:solidFill>
+                      <a:prstDash val="solid"/>
+                      <a:round/>
+                      <a:headEnd type="none" w="med" len="med"/>
+                      <a:tailEnd type="none" w="med" len="med"/>
+                    </a:lnL>
+                    <a:lnR w="9525" cap="flat" cmpd="sng" algn="ctr">
+                      <a:solidFill>
+                        <a:srgbClr val="D5DEF0"/>
+                      </a:solidFill>
+                      <a:prstDash val="solid"/>
+                      <a:round/>
+                      <a:headEnd type="none" w="med" len="med"/>
+                      <a:tailEnd type="none" w="med" len="med"/>
+                    </a:lnR>
+                    <a:lnT w="9525" cap="flat" cmpd="sng" algn="ctr">
+                      <a:solidFill>
+                        <a:srgbClr val="D5DEF0"/>
+                      </a:solidFill>
+                      <a:prstDash val="solid"/>
+                      <a:round/>
+                      <a:headEnd type="none" w="med" len="med"/>
+                      <a:tailEnd type="none" w="med" len="med"/>
+                    </a:lnT>
+                    <a:lnB w="9525" cap="flat" cmpd="sng" algn="ctr">
+                      <a:solidFill>
+                        <a:srgbClr val="D5DEF0"/>
+                      </a:solidFill>
+                      <a:prstDash val="solid"/>
+                      <a:round/>
+                      <a:headEnd type="none" w="med" len="med"/>
+                      <a:tailEnd type="none" w="med" len="med"/>
+                    </a:lnB>
+                  </a:tcPr>
+                </a:tc>
+                <a:tc>
+                  <a:txBody>
+                    <a:bodyPr/>
+                    <a:lstStyle/>
+                    <a:p>
+                      <a:pPr indent="0" marL="0">
+                        <a:buNone/>
+                      </a:pPr>
+                      <a:r>
+                        <a:rPr lang="en-US" sz="950" b="1" dirty="0">
+                          <a:solidFill>
+                            <a:srgbClr val="E8A13A"/>
+                          </a:solidFill>
+                          <a:latin typeface="Microsoft JhengHei" pitchFamily="34" charset="0"/>
+                          <a:ea typeface="Microsoft JhengHei" pitchFamily="34" charset="-122"/>
+                          <a:cs typeface="Microsoft JhengHei" pitchFamily="34" charset="-120"/>
+                        </a:rPr>
+                        <a:t>可行 20</a:t>
+                      </a:r>
+                      <a:endParaRPr lang="en-US" sz="950" dirty="0">
+                        <a:latin typeface="Microsoft JhengHei" charset="0"/>
+                        <a:ea typeface="Microsoft JhengHei" charset="0"/>
+                        <a:cs typeface="Microsoft JhengHei" charset="0"/>
+                      </a:endParaRPr>
+                    </a:p>
+                  </a:txBody>
+                  <a:tcPr marL="45720" marR="45720" marT="45720" marB="45720" anchor="ctr">
+                    <a:lnL w="9525" cap="flat" cmpd="sng" algn="ctr">
+                      <a:solidFill>
+                        <a:srgbClr val="D5DEF0"/>
+                      </a:solidFill>
+                      <a:prstDash val="solid"/>
+                      <a:round/>
+                      <a:headEnd type="none" w="med" len="med"/>
+                      <a:tailEnd type="none" w="med" len="med"/>
+                    </a:lnL>
+                    <a:lnR w="9525" cap="flat" cmpd="sng" algn="ctr">
+                      <a:solidFill>
+                        <a:srgbClr val="D5DEF0"/>
+                      </a:solidFill>
+                      <a:prstDash val="solid"/>
+                      <a:round/>
+                      <a:headEnd type="none" w="med" len="med"/>
+                      <a:tailEnd type="none" w="med" len="med"/>
+                    </a:lnR>
+                    <a:lnT w="9525" cap="flat" cmpd="sng" algn="ctr">
+                      <a:solidFill>
+                        <a:srgbClr val="D5DEF0"/>
+                      </a:solidFill>
+                      <a:prstDash val="solid"/>
+                      <a:round/>
+                      <a:headEnd type="none" w="med" len="med"/>
+                      <a:tailEnd type="none" w="med" len="med"/>
+                    </a:lnT>
+                    <a:lnB w="9525" cap="flat" cmpd="sng" algn="ctr">
+                      <a:solidFill>
+                        <a:srgbClr val="D5DEF0"/>
+                      </a:solidFill>
+                      <a:prstDash val="solid"/>
+                      <a:round/>
+                      <a:headEnd type="none" w="med" len="med"/>
+                      <a:tailEnd type="none" w="med" len="med"/>
+                    </a:lnB>
+                  </a:tcPr>
+                </a:tc>
+              </a:tr>
+              <a:tr h="365760">
+                <a:tc>
+                  <a:txBody>
+                    <a:bodyPr/>
+                    <a:lstStyle/>
+                    <a:p>
+                      <a:pPr algn="ctr" indent="0" marL="0">
+                        <a:buNone/>
+                      </a:pPr>
+                      <a:r>
+                        <a:rPr lang="en-US" sz="950" b="1" dirty="0">
+                          <a:solidFill>
+                            <a:srgbClr val="FFFFFF"/>
+                          </a:solidFill>
+                          <a:latin typeface="Microsoft JhengHei" pitchFamily="34" charset="0"/>
+                          <a:ea typeface="Microsoft JhengHei" pitchFamily="34" charset="-122"/>
+                          <a:cs typeface="Microsoft JhengHei" pitchFamily="34" charset="-120"/>
+                        </a:rPr>
+                        <a:t>C</a:t>
+                      </a:r>
+                      <a:endParaRPr lang="en-US" sz="950" dirty="0">
+                        <a:latin typeface="Microsoft JhengHei" charset="0"/>
+                        <a:ea typeface="Microsoft JhengHei" charset="0"/>
+                        <a:cs typeface="Microsoft JhengHei" charset="0"/>
+                      </a:endParaRPr>
+                    </a:p>
+                  </a:txBody>
+                  <a:tcPr marL="45720" marR="45720" marT="45720" marB="45720" anchor="ctr">
+                    <a:lnL w="9525" cap="flat" cmpd="sng" algn="ctr">
+                      <a:solidFill>
+                        <a:srgbClr val="D5DEF0"/>
+                      </a:solidFill>
+                      <a:prstDash val="solid"/>
+                      <a:round/>
+                      <a:headEnd type="none" w="med" len="med"/>
+                      <a:tailEnd type="none" w="med" len="med"/>
+                    </a:lnL>
+                    <a:lnR w="9525" cap="flat" cmpd="sng" algn="ctr">
+                      <a:solidFill>
+                        <a:srgbClr val="D5DEF0"/>
+                      </a:solidFill>
+                      <a:prstDash val="solid"/>
+                      <a:round/>
+                      <a:headEnd type="none" w="med" len="med"/>
+                      <a:tailEnd type="none" w="med" len="med"/>
+                    </a:lnR>
+                    <a:lnT w="9525" cap="flat" cmpd="sng" algn="ctr">
+                      <a:solidFill>
+                        <a:srgbClr val="D5DEF0"/>
+                      </a:solidFill>
+                      <a:prstDash val="solid"/>
+                      <a:round/>
+                      <a:headEnd type="none" w="med" len="med"/>
+                      <a:tailEnd type="none" w="med" len="med"/>
+                    </a:lnT>
+                    <a:lnB w="9525" cap="flat" cmpd="sng" algn="ctr">
+                      <a:solidFill>
+                        <a:srgbClr val="D5DEF0"/>
+                      </a:solidFill>
+                      <a:prstDash val="solid"/>
+                      <a:round/>
+                      <a:headEnd type="none" w="med" len="med"/>
+                      <a:tailEnd type="none" w="med" len="med"/>
+                    </a:lnB>
+                    <a:solidFill>
+                      <a:srgbClr val="E8A13A"/>
+                    </a:solidFill>
+                  </a:tcPr>
+                </a:tc>
+                <a:tc>
+                  <a:txBody>
+                    <a:bodyPr/>
+                    <a:lstStyle/>
+                    <a:p>
+                      <a:pPr indent="0" marL="0">
+                        <a:buNone/>
+                      </a:pPr>
+                      <a:r>
+                        <a:rPr lang="en-US" sz="950" b="1" dirty="0">
+                          <a:solidFill>
+                            <a:srgbClr val="16224D"/>
+                          </a:solidFill>
+                          <a:latin typeface="Microsoft JhengHei" pitchFamily="34" charset="0"/>
+                          <a:ea typeface="Microsoft JhengHei" pitchFamily="34" charset="-122"/>
+                          <a:cs typeface="Microsoft JhengHei" pitchFamily="34" charset="-120"/>
+                        </a:rPr>
+                        <a:t>加拍：三模式切換</a:t>
+                      </a:r>
+                      <a:endParaRPr lang="en-US" sz="950" dirty="0">
+                        <a:latin typeface="Microsoft JhengHei" charset="0"/>
+                        <a:ea typeface="Microsoft JhengHei" charset="0"/>
+                        <a:cs typeface="Microsoft JhengHei" charset="0"/>
+                      </a:endParaRPr>
+                    </a:p>
+                  </a:txBody>
+                  <a:tcPr marL="45720" marR="45720" marT="45720" marB="45720" anchor="ctr">
+                    <a:lnL w="9525" cap="flat" cmpd="sng" algn="ctr">
+                      <a:solidFill>
+                        <a:srgbClr val="D5DEF0"/>
+                      </a:solidFill>
+                      <a:prstDash val="solid"/>
+                      <a:round/>
+                      <a:headEnd type="none" w="med" len="med"/>
+                      <a:tailEnd type="none" w="med" len="med"/>
+                    </a:lnL>
+                    <a:lnR w="9525" cap="flat" cmpd="sng" algn="ctr">
+                      <a:solidFill>
+                        <a:srgbClr val="D5DEF0"/>
+                      </a:solidFill>
+                      <a:prstDash val="solid"/>
+                      <a:round/>
+                      <a:headEnd type="none" w="med" len="med"/>
+                      <a:tailEnd type="none" w="med" len="med"/>
+                    </a:lnR>
+                    <a:lnT w="9525" cap="flat" cmpd="sng" algn="ctr">
+                      <a:solidFill>
+                        <a:srgbClr val="D5DEF0"/>
+                      </a:solidFill>
+                      <a:prstDash val="solid"/>
+                      <a:round/>
+                      <a:headEnd type="none" w="med" len="med"/>
+                      <a:tailEnd type="none" w="med" len="med"/>
+                    </a:lnT>
+                    <a:lnB w="9525" cap="flat" cmpd="sng" algn="ctr">
+                      <a:solidFill>
+                        <a:srgbClr val="D5DEF0"/>
+                      </a:solidFill>
+                      <a:prstDash val="solid"/>
+                      <a:round/>
+                      <a:headEnd type="none" w="med" len="med"/>
+                      <a:tailEnd type="none" w="med" len="med"/>
+                    </a:lnB>
+                  </a:tcPr>
+                </a:tc>
+                <a:tc>
+                  <a:txBody>
+                    <a:bodyPr/>
+                    <a:lstStyle/>
+                    <a:p>
+                      <a:pPr indent="0" marL="0">
+                        <a:buNone/>
+                      </a:pPr>
+                      <a:r>
+                        <a:rPr lang="en-US" sz="950" dirty="0">
+                          <a:solidFill>
+                            <a:srgbClr val="1F2937"/>
+                          </a:solidFill>
+                          <a:latin typeface="Microsoft JhengHei" pitchFamily="34" charset="0"/>
+                          <a:ea typeface="Microsoft JhengHei" pitchFamily="34" charset="-122"/>
+                          <a:cs typeface="Microsoft JhengHei" pitchFamily="34" charset="-120"/>
+                        </a:rPr>
+                        <a:t>安心白話／專業效率各重問一次全賣（各 15 秒）</a:t>
+                      </a:r>
+                      <a:endParaRPr lang="en-US" sz="950" dirty="0">
+                        <a:latin typeface="Microsoft JhengHei" charset="0"/>
+                        <a:ea typeface="Microsoft JhengHei" charset="0"/>
+                        <a:cs typeface="Microsoft JhengHei" charset="0"/>
+                      </a:endParaRPr>
+                    </a:p>
+                  </a:txBody>
+                  <a:tcPr marL="45720" marR="45720" marT="45720" marB="45720" anchor="ctr">
+                    <a:lnL w="9525" cap="flat" cmpd="sng" algn="ctr">
+                      <a:solidFill>
+                        <a:srgbClr val="D5DEF0"/>
+                      </a:solidFill>
+                      <a:prstDash val="solid"/>
+                      <a:round/>
+                      <a:headEnd type="none" w="med" len="med"/>
+                      <a:tailEnd type="none" w="med" len="med"/>
+                    </a:lnL>
+                    <a:lnR w="9525" cap="flat" cmpd="sng" algn="ctr">
+                      <a:solidFill>
+                        <a:srgbClr val="D5DEF0"/>
+                      </a:solidFill>
+                      <a:prstDash val="solid"/>
+                      <a:round/>
+                      <a:headEnd type="none" w="med" len="med"/>
+                      <a:tailEnd type="none" w="med" len="med"/>
+                    </a:lnR>
+                    <a:lnT w="9525" cap="flat" cmpd="sng" algn="ctr">
+                      <a:solidFill>
+                        <a:srgbClr val="D5DEF0"/>
+                      </a:solidFill>
+                      <a:prstDash val="solid"/>
+                      <a:round/>
+                      <a:headEnd type="none" w="med" len="med"/>
+                      <a:tailEnd type="none" w="med" len="med"/>
+                    </a:lnT>
+                    <a:lnB w="9525" cap="flat" cmpd="sng" algn="ctr">
+                      <a:solidFill>
+                        <a:srgbClr val="D5DEF0"/>
+                      </a:solidFill>
+                      <a:prstDash val="solid"/>
+                      <a:round/>
+                      <a:headEnd type="none" w="med" len="med"/>
+                      <a:tailEnd type="none" w="med" len="med"/>
+                    </a:lnB>
+                  </a:tcPr>
+                </a:tc>
+                <a:tc>
+                  <a:txBody>
+                    <a:bodyPr/>
+                    <a:lstStyle/>
+                    <a:p>
+                      <a:pPr indent="0" marL="0">
+                        <a:buNone/>
+                      </a:pPr>
+                      <a:r>
+                        <a:rPr lang="en-US" sz="950" b="1" dirty="0">
+                          <a:solidFill>
+                            <a:srgbClr val="E8A13A"/>
+                          </a:solidFill>
+                          <a:latin typeface="Microsoft JhengHei" pitchFamily="34" charset="0"/>
+                          <a:ea typeface="Microsoft JhengHei" pitchFamily="34" charset="-122"/>
+                          <a:cs typeface="Microsoft JhengHei" pitchFamily="34" charset="-120"/>
+                        </a:rPr>
+                        <a:t>創意 25 ＋ 切合 10</a:t>
+                      </a:r>
+                      <a:endParaRPr lang="en-US" sz="950" dirty="0">
+                        <a:latin typeface="Microsoft JhengHei" charset="0"/>
+                        <a:ea typeface="Microsoft JhengHei" charset="0"/>
+                        <a:cs typeface="Microsoft JhengHei" charset="0"/>
+                      </a:endParaRPr>
+                    </a:p>
+                  </a:txBody>
+                  <a:tcPr marL="45720" marR="45720" marT="45720" marB="45720" anchor="ctr">
+                    <a:lnL w="9525" cap="flat" cmpd="sng" algn="ctr">
+                      <a:solidFill>
+                        <a:srgbClr val="D5DEF0"/>
+                      </a:solidFill>
+                      <a:prstDash val="solid"/>
+                      <a:round/>
+                      <a:headEnd type="none" w="med" len="med"/>
+                      <a:tailEnd type="none" w="med" len="med"/>
+                    </a:lnL>
+                    <a:lnR w="9525" cap="flat" cmpd="sng" algn="ctr">
+                      <a:solidFill>
+                        <a:srgbClr val="D5DEF0"/>
+                      </a:solidFill>
+                      <a:prstDash val="solid"/>
+                      <a:round/>
+                      <a:headEnd type="none" w="med" len="med"/>
+                      <a:tailEnd type="none" w="med" len="med"/>
+                    </a:lnR>
+                    <a:lnT w="9525" cap="flat" cmpd="sng" algn="ctr">
+                      <a:solidFill>
+                        <a:srgbClr val="D5DEF0"/>
+                      </a:solidFill>
+                      <a:prstDash val="solid"/>
+                      <a:round/>
+                      <a:headEnd type="none" w="med" len="med"/>
+                      <a:tailEnd type="none" w="med" len="med"/>
+                    </a:lnT>
+                    <a:lnB w="9525" cap="flat" cmpd="sng" algn="ctr">
+                      <a:solidFill>
+                        <a:srgbClr val="D5DEF0"/>
+                      </a:solidFill>
+                      <a:prstDash val="solid"/>
+                      <a:round/>
+                      <a:headEnd type="none" w="med" len="med"/>
+                      <a:tailEnd type="none" w="med" len="med"/>
+                    </a:lnB>
+                  </a:tcPr>
+                </a:tc>
+              </a:tr>
+              <a:tr h="365760">
+                <a:tc>
+                  <a:txBody>
+                    <a:bodyPr/>
+                    <a:lstStyle/>
+                    <a:p>
+                      <a:pPr algn="ctr" indent="0" marL="0">
+                        <a:buNone/>
+                      </a:pPr>
+                      <a:r>
+                        <a:rPr lang="en-US" sz="950" b="1" dirty="0">
+                          <a:solidFill>
+                            <a:srgbClr val="FFFFFF"/>
+                          </a:solidFill>
+                          <a:latin typeface="Microsoft JhengHei" pitchFamily="34" charset="0"/>
+                          <a:ea typeface="Microsoft JhengHei" pitchFamily="34" charset="-122"/>
+                          <a:cs typeface="Microsoft JhengHei" pitchFamily="34" charset="-120"/>
+                        </a:rPr>
+                        <a:t>C</a:t>
+                      </a:r>
+                      <a:endParaRPr lang="en-US" sz="950" dirty="0">
+                        <a:latin typeface="Microsoft JhengHei" charset="0"/>
+                        <a:ea typeface="Microsoft JhengHei" charset="0"/>
+                        <a:cs typeface="Microsoft JhengHei" charset="0"/>
+                      </a:endParaRPr>
+                    </a:p>
+                  </a:txBody>
+                  <a:tcPr marL="45720" marR="45720" marT="45720" marB="45720" anchor="ctr">
+                    <a:lnL w="9525" cap="flat" cmpd="sng" algn="ctr">
+                      <a:solidFill>
+                        <a:srgbClr val="D5DEF0"/>
+                      </a:solidFill>
+                      <a:prstDash val="solid"/>
+                      <a:round/>
+                      <a:headEnd type="none" w="med" len="med"/>
+                      <a:tailEnd type="none" w="med" len="med"/>
+                    </a:lnL>
+                    <a:lnR w="9525" cap="flat" cmpd="sng" algn="ctr">
+                      <a:solidFill>
+                        <a:srgbClr val="D5DEF0"/>
+                      </a:solidFill>
+                      <a:prstDash val="solid"/>
+                      <a:round/>
+                      <a:headEnd type="none" w="med" len="med"/>
+                      <a:tailEnd type="none" w="med" len="med"/>
+                    </a:lnR>
+                    <a:lnT w="9525" cap="flat" cmpd="sng" algn="ctr">
+                      <a:solidFill>
+                        <a:srgbClr val="D5DEF0"/>
+                      </a:solidFill>
+                      <a:prstDash val="solid"/>
+                      <a:round/>
+                      <a:headEnd type="none" w="med" len="med"/>
+                      <a:tailEnd type="none" w="med" len="med"/>
+                    </a:lnT>
+                    <a:lnB w="9525" cap="flat" cmpd="sng" algn="ctr">
+                      <a:solidFill>
+                        <a:srgbClr val="D5DEF0"/>
+                      </a:solidFill>
+                      <a:prstDash val="solid"/>
+                      <a:round/>
+                      <a:headEnd type="none" w="med" len="med"/>
+                      <a:tailEnd type="none" w="med" len="med"/>
+                    </a:lnB>
+                    <a:solidFill>
+                      <a:srgbClr val="E8A13A"/>
+                    </a:solidFill>
+                  </a:tcPr>
+                </a:tc>
+                <a:tc>
+                  <a:txBody>
+                    <a:bodyPr/>
+                    <a:lstStyle/>
+                    <a:p>
+                      <a:pPr indent="0" marL="0">
+                        <a:buNone/>
+                      </a:pPr>
+                      <a:r>
+                        <a:rPr lang="en-US" sz="950" b="1" dirty="0">
+                          <a:solidFill>
+                            <a:srgbClr val="16224D"/>
+                          </a:solidFill>
+                          <a:latin typeface="Microsoft JhengHei" pitchFamily="34" charset="0"/>
+                          <a:ea typeface="Microsoft JhengHei" pitchFamily="34" charset="-122"/>
+                          <a:cs typeface="Microsoft JhengHei" pitchFamily="34" charset="-120"/>
+                        </a:rPr>
+                        <a:t>剪輯與上字幕</a:t>
+                      </a:r>
+                      <a:endParaRPr lang="en-US" sz="950" dirty="0">
+                        <a:latin typeface="Microsoft JhengHei" charset="0"/>
+                        <a:ea typeface="Microsoft JhengHei" charset="0"/>
+                        <a:cs typeface="Microsoft JhengHei" charset="0"/>
+                      </a:endParaRPr>
+                    </a:p>
+                  </a:txBody>
+                  <a:tcPr marL="45720" marR="45720" marT="45720" marB="45720" anchor="ctr">
+                    <a:lnL w="9525" cap="flat" cmpd="sng" algn="ctr">
+                      <a:solidFill>
+                        <a:srgbClr val="D5DEF0"/>
+                      </a:solidFill>
+                      <a:prstDash val="solid"/>
+                      <a:round/>
+                      <a:headEnd type="none" w="med" len="med"/>
+                      <a:tailEnd type="none" w="med" len="med"/>
+                    </a:lnL>
+                    <a:lnR w="9525" cap="flat" cmpd="sng" algn="ctr">
+                      <a:solidFill>
+                        <a:srgbClr val="D5DEF0"/>
+                      </a:solidFill>
+                      <a:prstDash val="solid"/>
+                      <a:round/>
+                      <a:headEnd type="none" w="med" len="med"/>
+                      <a:tailEnd type="none" w="med" len="med"/>
+                    </a:lnR>
+                    <a:lnT w="9525" cap="flat" cmpd="sng" algn="ctr">
+                      <a:solidFill>
+                        <a:srgbClr val="D5DEF0"/>
+                      </a:solidFill>
+                      <a:prstDash val="solid"/>
+                      <a:round/>
+                      <a:headEnd type="none" w="med" len="med"/>
+                      <a:tailEnd type="none" w="med" len="med"/>
+                    </a:lnT>
+                    <a:lnB w="9525" cap="flat" cmpd="sng" algn="ctr">
+                      <a:solidFill>
+                        <a:srgbClr val="D5DEF0"/>
+                      </a:solidFill>
+                      <a:prstDash val="solid"/>
+                      <a:round/>
+                      <a:headEnd type="none" w="med" len="med"/>
+                      <a:tailEnd type="none" w="med" len="med"/>
+                    </a:lnB>
+                  </a:tcPr>
+                </a:tc>
+                <a:tc>
+                  <a:txBody>
+                    <a:bodyPr/>
+                    <a:lstStyle/>
+                    <a:p>
+                      <a:pPr indent="0" marL="0">
+                        <a:buNone/>
+                      </a:pPr>
+                      <a:r>
+                        <a:rPr lang="en-US" sz="950" dirty="0">
+                          <a:solidFill>
+                            <a:srgbClr val="1F2937"/>
+                          </a:solidFill>
+                          <a:latin typeface="Microsoft JhengHei" pitchFamily="34" charset="0"/>
+                          <a:ea typeface="Microsoft JhengHei" pitchFamily="34" charset="-122"/>
+                          <a:cs typeface="Microsoft JhengHei" pitchFamily="34" charset="-120"/>
+                        </a:rPr>
+                        <a:t>吃 A 的 SRT；順序 鏡1–5→6→7→8</a:t>
+                      </a:r>
+                      <a:endParaRPr lang="en-US" sz="950" dirty="0">
+                        <a:latin typeface="Microsoft JhengHei" charset="0"/>
+                        <a:ea typeface="Microsoft JhengHei" charset="0"/>
+                        <a:cs typeface="Microsoft JhengHei" charset="0"/>
+                      </a:endParaRPr>
+                    </a:p>
+                  </a:txBody>
+                  <a:tcPr marL="45720" marR="45720" marT="45720" marB="45720" anchor="ctr">
+                    <a:lnL w="9525" cap="flat" cmpd="sng" algn="ctr">
+                      <a:solidFill>
+                        <a:srgbClr val="D5DEF0"/>
+                      </a:solidFill>
+                      <a:prstDash val="solid"/>
+                      <a:round/>
+                      <a:headEnd type="none" w="med" len="med"/>
+                      <a:tailEnd type="none" w="med" len="med"/>
+                    </a:lnL>
+                    <a:lnR w="9525" cap="flat" cmpd="sng" algn="ctr">
+                      <a:solidFill>
+                        <a:srgbClr val="D5DEF0"/>
+                      </a:solidFill>
+                      <a:prstDash val="solid"/>
+                      <a:round/>
+                      <a:headEnd type="none" w="med" len="med"/>
+                      <a:tailEnd type="none" w="med" len="med"/>
+                    </a:lnR>
+                    <a:lnT w="9525" cap="flat" cmpd="sng" algn="ctr">
+                      <a:solidFill>
+                        <a:srgbClr val="D5DEF0"/>
+                      </a:solidFill>
+                      <a:prstDash val="solid"/>
+                      <a:round/>
+                      <a:headEnd type="none" w="med" len="med"/>
+                      <a:tailEnd type="none" w="med" len="med"/>
+                    </a:lnT>
+                    <a:lnB w="9525" cap="flat" cmpd="sng" algn="ctr">
+                      <a:solidFill>
+                        <a:srgbClr val="D5DEF0"/>
+                      </a:solidFill>
+                      <a:prstDash val="solid"/>
+                      <a:round/>
+                      <a:headEnd type="none" w="med" len="med"/>
+                      <a:tailEnd type="none" w="med" len="med"/>
+                    </a:lnB>
+                  </a:tcPr>
+                </a:tc>
+                <a:tc>
+                  <a:txBody>
+                    <a:bodyPr/>
+                    <a:lstStyle/>
+                    <a:p>
+                      <a:pPr indent="0" marL="0">
+                        <a:buNone/>
+                      </a:pPr>
+                      <a:r>
+                        <a:rPr lang="en-US" sz="950" b="1" dirty="0">
+                          <a:solidFill>
+                            <a:srgbClr val="E8A13A"/>
+                          </a:solidFill>
+                          <a:latin typeface="Microsoft JhengHei" pitchFamily="34" charset="0"/>
+                          <a:ea typeface="Microsoft JhengHei" pitchFamily="34" charset="-122"/>
+                          <a:cs typeface="Microsoft JhengHei" pitchFamily="34" charset="-120"/>
+                        </a:rPr>
+                        <a:t>完成 10</a:t>
+                      </a:r>
+                      <a:endParaRPr lang="en-US" sz="950" dirty="0">
+                        <a:latin typeface="Microsoft JhengHei" charset="0"/>
+                        <a:ea typeface="Microsoft JhengHei" charset="0"/>
+                        <a:cs typeface="Microsoft JhengHei" charset="0"/>
+                      </a:endParaRPr>
+                    </a:p>
+                  </a:txBody>
+                  <a:tcPr marL="45720" marR="45720" marT="45720" marB="45720" anchor="ctr">
+                    <a:lnL w="9525" cap="flat" cmpd="sng" algn="ctr">
+                      <a:solidFill>
+                        <a:srgbClr val="D5DEF0"/>
+                      </a:solidFill>
+                      <a:prstDash val="solid"/>
+                      <a:round/>
+                      <a:headEnd type="none" w="med" len="med"/>
+                      <a:tailEnd type="none" w="med" len="med"/>
+                    </a:lnL>
+                    <a:lnR w="9525" cap="flat" cmpd="sng" algn="ctr">
+                      <a:solidFill>
+                        <a:srgbClr val="D5DEF0"/>
+                      </a:solidFill>
+                      <a:prstDash val="solid"/>
+                      <a:round/>
+                      <a:headEnd type="none" w="med" len="med"/>
+                      <a:tailEnd type="none" w="med" len="med"/>
+                    </a:lnR>
+                    <a:lnT w="9525" cap="flat" cmpd="sng" algn="ctr">
+                      <a:solidFill>
+                        <a:srgbClr val="D5DEF0"/>
+                      </a:solidFill>
+                      <a:prstDash val="solid"/>
+                      <a:round/>
+                      <a:headEnd type="none" w="med" len="med"/>
+                      <a:tailEnd type="none" w="med" len="med"/>
+                    </a:lnT>
+                    <a:lnB w="9525" cap="flat" cmpd="sng" algn="ctr">
+                      <a:solidFill>
+                        <a:srgbClr val="D5DEF0"/>
+                      </a:solidFill>
+                      <a:prstDash val="solid"/>
+                      <a:round/>
+                      <a:headEnd type="none" w="med" len="med"/>
+                      <a:tailEnd type="none" w="med" len="med"/>
+                    </a:lnB>
+                  </a:tcPr>
+                </a:tc>
+              </a:tr>
+              <a:tr h="365760">
+                <a:tc>
+                  <a:txBody>
+                    <a:bodyPr/>
+                    <a:lstStyle/>
+                    <a:p>
+                      <a:pPr algn="ctr" indent="0" marL="0">
+                        <a:buNone/>
+                      </a:pPr>
+                      <a:r>
+                        <a:rPr lang="en-US" sz="950" b="1" dirty="0">
+                          <a:solidFill>
+                            <a:srgbClr val="FFFFFF"/>
+                          </a:solidFill>
+                          <a:latin typeface="Microsoft JhengHei" pitchFamily="34" charset="0"/>
+                          <a:ea typeface="Microsoft JhengHei" pitchFamily="34" charset="-122"/>
+                          <a:cs typeface="Microsoft JhengHei" pitchFamily="34" charset="-120"/>
+                        </a:rPr>
+                        <a:t>C</a:t>
+                      </a:r>
+                      <a:endParaRPr lang="en-US" sz="950" dirty="0">
+                        <a:latin typeface="Microsoft JhengHei" charset="0"/>
+                        <a:ea typeface="Microsoft JhengHei" charset="0"/>
+                        <a:cs typeface="Microsoft JhengHei" charset="0"/>
+                      </a:endParaRPr>
+                    </a:p>
+                  </a:txBody>
+                  <a:tcPr marL="45720" marR="45720" marT="45720" marB="45720" anchor="ctr">
+                    <a:lnL w="9525" cap="flat" cmpd="sng" algn="ctr">
+                      <a:solidFill>
+                        <a:srgbClr val="D5DEF0"/>
+                      </a:solidFill>
+                      <a:prstDash val="solid"/>
+                      <a:round/>
+                      <a:headEnd type="none" w="med" len="med"/>
+                      <a:tailEnd type="none" w="med" len="med"/>
+                    </a:lnL>
+                    <a:lnR w="9525" cap="flat" cmpd="sng" algn="ctr">
+                      <a:solidFill>
+                        <a:srgbClr val="D5DEF0"/>
+                      </a:solidFill>
+                      <a:prstDash val="solid"/>
+                      <a:round/>
+                      <a:headEnd type="none" w="med" len="med"/>
+                      <a:tailEnd type="none" w="med" len="med"/>
+                    </a:lnR>
+                    <a:lnT w="9525" cap="flat" cmpd="sng" algn="ctr">
+                      <a:solidFill>
+                        <a:srgbClr val="D5DEF0"/>
+                      </a:solidFill>
+                      <a:prstDash val="solid"/>
+                      <a:round/>
+                      <a:headEnd type="none" w="med" len="med"/>
+                      <a:tailEnd type="none" w="med" len="med"/>
+                    </a:lnT>
+                    <a:lnB w="9525" cap="flat" cmpd="sng" algn="ctr">
+                      <a:solidFill>
+                        <a:srgbClr val="D5DEF0"/>
+                      </a:solidFill>
+                      <a:prstDash val="solid"/>
+                      <a:round/>
+                      <a:headEnd type="none" w="med" len="med"/>
+                      <a:tailEnd type="none" w="med" len="med"/>
+                    </a:lnB>
+                    <a:solidFill>
+                      <a:srgbClr val="E8A13A"/>
+                    </a:solidFill>
+                  </a:tcPr>
+                </a:tc>
+                <a:tc>
+                  <a:txBody>
+                    <a:bodyPr/>
+                    <a:lstStyle/>
+                    <a:p>
+                      <a:pPr indent="0" marL="0">
+                        <a:buNone/>
+                      </a:pPr>
+                      <a:r>
+                        <a:rPr lang="en-US" sz="950" b="1" dirty="0">
+                          <a:solidFill>
+                            <a:srgbClr val="16224D"/>
+                          </a:solidFill>
+                          <a:latin typeface="Microsoft JhengHei" pitchFamily="34" charset="0"/>
+                          <a:ea typeface="Microsoft JhengHei" pitchFamily="34" charset="-122"/>
+                          <a:cs typeface="Microsoft JhengHei" pitchFamily="34" charset="-120"/>
+                        </a:rPr>
+                        <a:t>收尾字卡</a:t>
+                      </a:r>
+                      <a:endParaRPr lang="en-US" sz="950" dirty="0">
+                        <a:latin typeface="Microsoft JhengHei" charset="0"/>
+                        <a:ea typeface="Microsoft JhengHei" charset="0"/>
+                        <a:cs typeface="Microsoft JhengHei" charset="0"/>
+                      </a:endParaRPr>
+                    </a:p>
+                  </a:txBody>
+                  <a:tcPr marL="45720" marR="45720" marT="45720" marB="45720" anchor="ctr">
+                    <a:lnL w="9525" cap="flat" cmpd="sng" algn="ctr">
+                      <a:solidFill>
+                        <a:srgbClr val="D5DEF0"/>
+                      </a:solidFill>
+                      <a:prstDash val="solid"/>
+                      <a:round/>
+                      <a:headEnd type="none" w="med" len="med"/>
+                      <a:tailEnd type="none" w="med" len="med"/>
+                    </a:lnL>
+                    <a:lnR w="9525" cap="flat" cmpd="sng" algn="ctr">
+                      <a:solidFill>
+                        <a:srgbClr val="D5DEF0"/>
+                      </a:solidFill>
+                      <a:prstDash val="solid"/>
+                      <a:round/>
+                      <a:headEnd type="none" w="med" len="med"/>
+                      <a:tailEnd type="none" w="med" len="med"/>
+                    </a:lnR>
+                    <a:lnT w="9525" cap="flat" cmpd="sng" algn="ctr">
+                      <a:solidFill>
+                        <a:srgbClr val="D5DEF0"/>
+                      </a:solidFill>
+                      <a:prstDash val="solid"/>
+                      <a:round/>
+                      <a:headEnd type="none" w="med" len="med"/>
+                      <a:tailEnd type="none" w="med" len="med"/>
+                    </a:lnT>
+                    <a:lnB w="9525" cap="flat" cmpd="sng" algn="ctr">
+                      <a:solidFill>
+                        <a:srgbClr val="D5DEF0"/>
+                      </a:solidFill>
+                      <a:prstDash val="solid"/>
+                      <a:round/>
+                      <a:headEnd type="none" w="med" len="med"/>
+                      <a:tailEnd type="none" w="med" len="med"/>
+                    </a:lnB>
+                  </a:tcPr>
+                </a:tc>
+                <a:tc>
+                  <a:txBody>
+                    <a:bodyPr/>
+                    <a:lstStyle/>
+                    <a:p>
+                      <a:pPr indent="0" marL="0">
+                        <a:buNone/>
+                      </a:pPr>
+                      <a:r>
+                        <a:rPr lang="en-US" sz="950" dirty="0">
+                          <a:solidFill>
+                            <a:srgbClr val="1F2937"/>
+                          </a:solidFill>
+                          <a:latin typeface="Microsoft JhengHei" pitchFamily="34" charset="0"/>
+                          <a:ea typeface="Microsoft JhengHei" pitchFamily="34" charset="-122"/>
+                          <a:cs typeface="Microsoft JhengHei" pitchFamily="34" charset="-120"/>
+                        </a:rPr>
+                        <a:t>logo＋slogan＋商業模式一句話（補影片講不到的商業分）</a:t>
+                      </a:r>
+                      <a:endParaRPr lang="en-US" sz="950" dirty="0">
+                        <a:latin typeface="Microsoft JhengHei" charset="0"/>
+                        <a:ea typeface="Microsoft JhengHei" charset="0"/>
+                        <a:cs typeface="Microsoft JhengHei" charset="0"/>
+                      </a:endParaRPr>
+                    </a:p>
+                  </a:txBody>
+                  <a:tcPr marL="45720" marR="45720" marT="45720" marB="45720" anchor="ctr">
+                    <a:lnL w="9525" cap="flat" cmpd="sng" algn="ctr">
+                      <a:solidFill>
+                        <a:srgbClr val="D5DEF0"/>
+                      </a:solidFill>
+                      <a:prstDash val="solid"/>
+                      <a:round/>
+                      <a:headEnd type="none" w="med" len="med"/>
+                      <a:tailEnd type="none" w="med" len="med"/>
+                    </a:lnL>
+                    <a:lnR w="9525" cap="flat" cmpd="sng" algn="ctr">
+                      <a:solidFill>
+                        <a:srgbClr val="D5DEF0"/>
+                      </a:solidFill>
+                      <a:prstDash val="solid"/>
+                      <a:round/>
+                      <a:headEnd type="none" w="med" len="med"/>
+                      <a:tailEnd type="none" w="med" len="med"/>
+                    </a:lnR>
+                    <a:lnT w="9525" cap="flat" cmpd="sng" algn="ctr">
+                      <a:solidFill>
+                        <a:srgbClr val="D5DEF0"/>
+                      </a:solidFill>
+                      <a:prstDash val="solid"/>
+                      <a:round/>
+                      <a:headEnd type="none" w="med" len="med"/>
+                      <a:tailEnd type="none" w="med" len="med"/>
+                    </a:lnT>
+                    <a:lnB w="9525" cap="flat" cmpd="sng" algn="ctr">
+                      <a:solidFill>
+                        <a:srgbClr val="D5DEF0"/>
+                      </a:solidFill>
+                      <a:prstDash val="solid"/>
+                      <a:round/>
+                      <a:headEnd type="none" w="med" len="med"/>
+                      <a:tailEnd type="none" w="med" len="med"/>
+                    </a:lnB>
+                  </a:tcPr>
+                </a:tc>
+                <a:tc>
+                  <a:txBody>
+                    <a:bodyPr/>
+                    <a:lstStyle/>
+                    <a:p>
+                      <a:pPr indent="0" marL="0">
+                        <a:buNone/>
+                      </a:pPr>
+                      <a:r>
+                        <a:rPr lang="en-US" sz="950" b="1" dirty="0">
+                          <a:solidFill>
+                            <a:srgbClr val="E8A13A"/>
+                          </a:solidFill>
+                          <a:latin typeface="Microsoft JhengHei" pitchFamily="34" charset="0"/>
+                          <a:ea typeface="Microsoft JhengHei" pitchFamily="34" charset="-122"/>
+                          <a:cs typeface="Microsoft JhengHei" pitchFamily="34" charset="-120"/>
+                        </a:rPr>
+                        <a:t>商業 20</a:t>
+                      </a:r>
+                      <a:endParaRPr lang="en-US" sz="950" dirty="0">
+                        <a:latin typeface="Microsoft JhengHei" charset="0"/>
+                        <a:ea typeface="Microsoft JhengHei" charset="0"/>
+                        <a:cs typeface="Microsoft JhengHei" charset="0"/>
+                      </a:endParaRPr>
+                    </a:p>
+                  </a:txBody>
+                  <a:tcPr marL="45720" marR="45720" marT="45720" marB="45720" anchor="ctr">
+                    <a:lnL w="9525" cap="flat" cmpd="sng" algn="ctr">
+                      <a:solidFill>
+                        <a:srgbClr val="D5DEF0"/>
+                      </a:solidFill>
+                      <a:prstDash val="solid"/>
+                      <a:round/>
+                      <a:headEnd type="none" w="med" len="med"/>
+                      <a:tailEnd type="none" w="med" len="med"/>
+                    </a:lnL>
+                    <a:lnR w="9525" cap="flat" cmpd="sng" algn="ctr">
+                      <a:solidFill>
+                        <a:srgbClr val="D5DEF0"/>
+                      </a:solidFill>
+                      <a:prstDash val="solid"/>
+                      <a:round/>
+                      <a:headEnd type="none" w="med" len="med"/>
+                      <a:tailEnd type="none" w="med" len="med"/>
+                    </a:lnR>
+                    <a:lnT w="9525" cap="flat" cmpd="sng" algn="ctr">
+                      <a:solidFill>
+                        <a:srgbClr val="D5DEF0"/>
+                      </a:solidFill>
+                      <a:prstDash val="solid"/>
+                      <a:round/>
+                      <a:headEnd type="none" w="med" len="med"/>
+                      <a:tailEnd type="none" w="med" len="med"/>
+                    </a:lnT>
+                    <a:lnB w="9525" cap="flat" cmpd="sng" algn="ctr">
+                      <a:solidFill>
+                        <a:srgbClr val="D5DEF0"/>
+                      </a:solidFill>
+                      <a:prstDash val="solid"/>
+                      <a:round/>
+                      <a:headEnd type="none" w="med" len="med"/>
+                      <a:tailEnd type="none" w="med" len="med"/>
+                    </a:lnB>
+                  </a:tcPr>
+                </a:tc>
+              </a:tr>
+              <a:tr h="365760">
+                <a:tc>
+                  <a:txBody>
+                    <a:bodyPr/>
+                    <a:lstStyle/>
+                    <a:p>
+                      <a:pPr algn="ctr" indent="0" marL="0">
+                        <a:buNone/>
+                      </a:pPr>
+                      <a:r>
+                        <a:rPr lang="en-US" sz="950" b="1" dirty="0">
+                          <a:solidFill>
+                            <a:srgbClr val="FFFFFF"/>
+                          </a:solidFill>
+                          <a:latin typeface="Microsoft JhengHei" pitchFamily="34" charset="0"/>
+                          <a:ea typeface="Microsoft JhengHei" pitchFamily="34" charset="-122"/>
+                          <a:cs typeface="Microsoft JhengHei" pitchFamily="34" charset="-120"/>
+                        </a:rPr>
+                        <a:t>D</a:t>
+                      </a:r>
+                      <a:endParaRPr lang="en-US" sz="950" dirty="0">
+                        <a:latin typeface="Microsoft JhengHei" charset="0"/>
+                        <a:ea typeface="Microsoft JhengHei" charset="0"/>
+                        <a:cs typeface="Microsoft JhengHei" charset="0"/>
+                      </a:endParaRPr>
+                    </a:p>
+                  </a:txBody>
+                  <a:tcPr marL="45720" marR="45720" marT="45720" marB="45720" anchor="ctr">
+                    <a:lnL w="9525" cap="flat" cmpd="sng" algn="ctr">
+                      <a:solidFill>
+                        <a:srgbClr val="D5DEF0"/>
+                      </a:solidFill>
+                      <a:prstDash val="solid"/>
+                      <a:round/>
+                      <a:headEnd type="none" w="med" len="med"/>
+                      <a:tailEnd type="none" w="med" len="med"/>
+                    </a:lnL>
+                    <a:lnR w="9525" cap="flat" cmpd="sng" algn="ctr">
+                      <a:solidFill>
+                        <a:srgbClr val="D5DEF0"/>
+                      </a:solidFill>
+                      <a:prstDash val="solid"/>
+                      <a:round/>
+                      <a:headEnd type="none" w="med" len="med"/>
+                      <a:tailEnd type="none" w="med" len="med"/>
+                    </a:lnR>
+                    <a:lnT w="9525" cap="flat" cmpd="sng" algn="ctr">
+                      <a:solidFill>
+                        <a:srgbClr val="D5DEF0"/>
+                      </a:solidFill>
+                      <a:prstDash val="solid"/>
+                      <a:round/>
+                      <a:headEnd type="none" w="med" len="med"/>
+                      <a:tailEnd type="none" w="med" len="med"/>
+                    </a:lnT>
+                    <a:lnB w="9525" cap="flat" cmpd="sng" algn="ctr">
+                      <a:solidFill>
+                        <a:srgbClr val="D5DEF0"/>
+                      </a:solidFill>
+                      <a:prstDash val="solid"/>
+                      <a:round/>
+                      <a:headEnd type="none" w="med" len="med"/>
+                      <a:tailEnd type="none" w="med" len="med"/>
+                    </a:lnB>
+                    <a:solidFill>
+                      <a:srgbClr val="D64550"/>
+                    </a:solidFill>
+                  </a:tcPr>
+                </a:tc>
+                <a:tc>
+                  <a:txBody>
+                    <a:bodyPr/>
+                    <a:lstStyle/>
+                    <a:p>
+                      <a:pPr indent="0" marL="0">
+                        <a:buNone/>
+                      </a:pPr>
+                      <a:r>
+                        <a:rPr lang="en-US" sz="950" b="1" dirty="0">
+                          <a:solidFill>
+                            <a:srgbClr val="16224D"/>
+                          </a:solidFill>
+                          <a:latin typeface="Microsoft JhengHei" pitchFamily="34" charset="0"/>
+                          <a:ea typeface="Microsoft JhengHei" pitchFamily="34" charset="-122"/>
+                          <a:cs typeface="Microsoft JhengHei" pitchFamily="34" charset="-120"/>
+                        </a:rPr>
+                        <a:t>主片鏡 1–5 一鏡到底</a:t>
+                      </a:r>
+                      <a:endParaRPr lang="en-US" sz="950" dirty="0">
+                        <a:latin typeface="Microsoft JhengHei" charset="0"/>
+                        <a:ea typeface="Microsoft JhengHei" charset="0"/>
+                        <a:cs typeface="Microsoft JhengHei" charset="0"/>
+                      </a:endParaRPr>
+                    </a:p>
+                  </a:txBody>
+                  <a:tcPr marL="45720" marR="45720" marT="45720" marB="45720" anchor="ctr">
+                    <a:lnL w="9525" cap="flat" cmpd="sng" algn="ctr">
+                      <a:solidFill>
+                        <a:srgbClr val="D5DEF0"/>
+                      </a:solidFill>
+                      <a:prstDash val="solid"/>
+                      <a:round/>
+                      <a:headEnd type="none" w="med" len="med"/>
+                      <a:tailEnd type="none" w="med" len="med"/>
+                    </a:lnL>
+                    <a:lnR w="9525" cap="flat" cmpd="sng" algn="ctr">
+                      <a:solidFill>
+                        <a:srgbClr val="D5DEF0"/>
+                      </a:solidFill>
+                      <a:prstDash val="solid"/>
+                      <a:round/>
+                      <a:headEnd type="none" w="med" len="med"/>
+                      <a:tailEnd type="none" w="med" len="med"/>
+                    </a:lnR>
+                    <a:lnT w="9525" cap="flat" cmpd="sng" algn="ctr">
+                      <a:solidFill>
+                        <a:srgbClr val="D5DEF0"/>
+                      </a:solidFill>
+                      <a:prstDash val="solid"/>
+                      <a:round/>
+                      <a:headEnd type="none" w="med" len="med"/>
+                      <a:tailEnd type="none" w="med" len="med"/>
+                    </a:lnT>
+                    <a:lnB w="9525" cap="flat" cmpd="sng" algn="ctr">
+                      <a:solidFill>
+                        <a:srgbClr val="D5DEF0"/>
+                      </a:solidFill>
+                      <a:prstDash val="solid"/>
+                      <a:round/>
+                      <a:headEnd type="none" w="med" len="med"/>
+                      <a:tailEnd type="none" w="med" len="med"/>
+                    </a:lnB>
+                  </a:tcPr>
+                </a:tc>
+                <a:tc>
+                  <a:txBody>
+                    <a:bodyPr/>
+                    <a:lstStyle/>
+                    <a:p>
+                      <a:pPr indent="0" marL="0">
+                        <a:buNone/>
+                      </a:pPr>
+                      <a:r>
+                        <a:rPr lang="en-US" sz="950" dirty="0">
+                          <a:solidFill>
+                            <a:srgbClr val="1F2937"/>
+                          </a:solidFill>
+                          <a:latin typeface="Microsoft JhengHei" pitchFamily="34" charset="0"/>
+                          <a:ea typeface="Microsoft JhengHei" pitchFamily="34" charset="-122"/>
+                          <a:cs typeface="Microsoft JhengHei" pitchFamily="34" charset="-120"/>
+                        </a:rPr>
+                        <a:t>錄三遍取最順；停在確認卡不按（真錢 NT$46,197）</a:t>
+                      </a:r>
+                      <a:endParaRPr lang="en-US" sz="950" dirty="0">
+                        <a:latin typeface="Microsoft JhengHei" charset="0"/>
+                        <a:ea typeface="Microsoft JhengHei" charset="0"/>
+                        <a:cs typeface="Microsoft JhengHei" charset="0"/>
+                      </a:endParaRPr>
+                    </a:p>
+                  </a:txBody>
+                  <a:tcPr marL="45720" marR="45720" marT="45720" marB="45720" anchor="ctr">
+                    <a:lnL w="9525" cap="flat" cmpd="sng" algn="ctr">
+                      <a:solidFill>
+                        <a:srgbClr val="D5DEF0"/>
+                      </a:solidFill>
+                      <a:prstDash val="solid"/>
+                      <a:round/>
+                      <a:headEnd type="none" w="med" len="med"/>
+                      <a:tailEnd type="none" w="med" len="med"/>
+                    </a:lnL>
+                    <a:lnR w="9525" cap="flat" cmpd="sng" algn="ctr">
+                      <a:solidFill>
+                        <a:srgbClr val="D5DEF0"/>
+                      </a:solidFill>
+                      <a:prstDash val="solid"/>
+                      <a:round/>
+                      <a:headEnd type="none" w="med" len="med"/>
+                      <a:tailEnd type="none" w="med" len="med"/>
+                    </a:lnR>
+                    <a:lnT w="9525" cap="flat" cmpd="sng" algn="ctr">
+                      <a:solidFill>
+                        <a:srgbClr val="D5DEF0"/>
+                      </a:solidFill>
+                      <a:prstDash val="solid"/>
+                      <a:round/>
+                      <a:headEnd type="none" w="med" len="med"/>
+                      <a:tailEnd type="none" w="med" len="med"/>
+                    </a:lnT>
+                    <a:lnB w="9525" cap="flat" cmpd="sng" algn="ctr">
+                      <a:solidFill>
+                        <a:srgbClr val="D5DEF0"/>
+                      </a:solidFill>
+                      <a:prstDash val="solid"/>
+                      <a:round/>
+                      <a:headEnd type="none" w="med" len="med"/>
+                      <a:tailEnd type="none" w="med" len="med"/>
+                    </a:lnB>
+                  </a:tcPr>
+                </a:tc>
+                <a:tc>
+                  <a:txBody>
+                    <a:bodyPr/>
+                    <a:lstStyle/>
+                    <a:p>
+                      <a:pPr indent="0" marL="0">
+                        <a:buNone/>
+                      </a:pPr>
+                      <a:r>
+                        <a:rPr lang="en-US" sz="950" b="1" dirty="0">
+                          <a:solidFill>
+                            <a:srgbClr val="E8A13A"/>
+                          </a:solidFill>
+                          <a:latin typeface="Microsoft JhengHei" pitchFamily="34" charset="0"/>
+                          <a:ea typeface="Microsoft JhengHei" pitchFamily="34" charset="-122"/>
+                          <a:cs typeface="Microsoft JhengHei" pitchFamily="34" charset="-120"/>
+                        </a:rPr>
+                        <a:t>創意 25 ＋ AI設計 15 ＋ 可行 20</a:t>
+                      </a:r>
+                      <a:endParaRPr lang="en-US" sz="950" dirty="0">
+                        <a:latin typeface="Microsoft JhengHei" charset="0"/>
+                        <a:ea typeface="Microsoft JhengHei" charset="0"/>
+                        <a:cs typeface="Microsoft JhengHei" charset="0"/>
+                      </a:endParaRPr>
+                    </a:p>
+                  </a:txBody>
+                  <a:tcPr marL="45720" marR="45720" marT="45720" marB="45720" anchor="ctr">
+                    <a:lnL w="9525" cap="flat" cmpd="sng" algn="ctr">
+                      <a:solidFill>
+                        <a:srgbClr val="D5DEF0"/>
+                      </a:solidFill>
+                      <a:prstDash val="solid"/>
+                      <a:round/>
+                      <a:headEnd type="none" w="med" len="med"/>
+                      <a:tailEnd type="none" w="med" len="med"/>
+                    </a:lnL>
+                    <a:lnR w="9525" cap="flat" cmpd="sng" algn="ctr">
+                      <a:solidFill>
+                        <a:srgbClr val="D5DEF0"/>
+                      </a:solidFill>
+                      <a:prstDash val="solid"/>
+                      <a:round/>
+                      <a:headEnd type="none" w="med" len="med"/>
+                      <a:tailEnd type="none" w="med" len="med"/>
+                    </a:lnR>
+                    <a:lnT w="9525" cap="flat" cmpd="sng" algn="ctr">
+                      <a:solidFill>
+                        <a:srgbClr val="D5DEF0"/>
+                      </a:solidFill>
+                      <a:prstDash val="solid"/>
+                      <a:round/>
+                      <a:headEnd type="none" w="med" len="med"/>
+                      <a:tailEnd type="none" w="med" len="med"/>
+                    </a:lnT>
+                    <a:lnB w="9525" cap="flat" cmpd="sng" algn="ctr">
+                      <a:solidFill>
+                        <a:srgbClr val="D5DEF0"/>
+                      </a:solidFill>
+                      <a:prstDash val="solid"/>
+                      <a:round/>
+                      <a:headEnd type="none" w="med" len="med"/>
+                      <a:tailEnd type="none" w="med" len="med"/>
+                    </a:lnB>
+                  </a:tcPr>
+                </a:tc>
+              </a:tr>
+              <a:tr h="365760">
+                <a:tc>
+                  <a:txBody>
+                    <a:bodyPr/>
+                    <a:lstStyle/>
+                    <a:p>
+                      <a:pPr algn="ctr" indent="0" marL="0">
+                        <a:buNone/>
+                      </a:pPr>
+                      <a:r>
+                        <a:rPr lang="en-US" sz="950" b="1" dirty="0">
+                          <a:solidFill>
+                            <a:srgbClr val="FFFFFF"/>
+                          </a:solidFill>
+                          <a:latin typeface="Microsoft JhengHei" pitchFamily="34" charset="0"/>
+                          <a:ea typeface="Microsoft JhengHei" pitchFamily="34" charset="-122"/>
+                          <a:cs typeface="Microsoft JhengHei" pitchFamily="34" charset="-120"/>
+                        </a:rPr>
+                        <a:t>D</a:t>
+                      </a:r>
+                      <a:endParaRPr lang="en-US" sz="950" dirty="0">
+                        <a:latin typeface="Microsoft JhengHei" charset="0"/>
+                        <a:ea typeface="Microsoft JhengHei" charset="0"/>
+                        <a:cs typeface="Microsoft JhengHei" charset="0"/>
+                      </a:endParaRPr>
+                    </a:p>
+                  </a:txBody>
+                  <a:tcPr marL="45720" marR="45720" marT="45720" marB="45720" anchor="ctr">
+                    <a:lnL w="9525" cap="flat" cmpd="sng" algn="ctr">
+                      <a:solidFill>
+                        <a:srgbClr val="D5DEF0"/>
+                      </a:solidFill>
+                      <a:prstDash val="solid"/>
+                      <a:round/>
+                      <a:headEnd type="none" w="med" len="med"/>
+                      <a:tailEnd type="none" w="med" len="med"/>
+                    </a:lnL>
+                    <a:lnR w="9525" cap="flat" cmpd="sng" algn="ctr">
+                      <a:solidFill>
+                        <a:srgbClr val="D5DEF0"/>
+                      </a:solidFill>
+                      <a:prstDash val="solid"/>
+                      <a:round/>
+                      <a:headEnd type="none" w="med" len="med"/>
+                      <a:tailEnd type="none" w="med" len="med"/>
+                    </a:lnR>
+                    <a:lnT w="9525" cap="flat" cmpd="sng" algn="ctr">
+                      <a:solidFill>
+                        <a:srgbClr val="D5DEF0"/>
+                      </a:solidFill>
+                      <a:prstDash val="solid"/>
+                      <a:round/>
+                      <a:headEnd type="none" w="med" len="med"/>
+                      <a:tailEnd type="none" w="med" len="med"/>
+                    </a:lnT>
+                    <a:lnB w="9525" cap="flat" cmpd="sng" algn="ctr">
+                      <a:solidFill>
+                        <a:srgbClr val="D5DEF0"/>
+                      </a:solidFill>
+                      <a:prstDash val="solid"/>
+                      <a:round/>
+                      <a:headEnd type="none" w="med" len="med"/>
+                      <a:tailEnd type="none" w="med" len="med"/>
+                    </a:lnB>
+                    <a:solidFill>
+                      <a:srgbClr val="D64550"/>
+                    </a:solidFill>
+                  </a:tcPr>
+                </a:tc>
+                <a:tc>
+                  <a:txBody>
+                    <a:bodyPr/>
+                    <a:lstStyle/>
+                    <a:p>
+                      <a:pPr indent="0" marL="0">
+                        <a:buNone/>
+                      </a:pPr>
+                      <a:r>
+                        <a:rPr lang="en-US" sz="950" b="1" dirty="0">
+                          <a:solidFill>
+                            <a:srgbClr val="16224D"/>
+                          </a:solidFill>
+                          <a:latin typeface="Microsoft JhengHei" pitchFamily="34" charset="0"/>
+                          <a:ea typeface="Microsoft JhengHei" pitchFamily="34" charset="-122"/>
+                          <a:cs typeface="Microsoft JhengHei" pitchFamily="34" charset="-120"/>
+                        </a:rPr>
+                        <a:t>鏡 6 真實成交插卡</a:t>
+                      </a:r>
+                      <a:endParaRPr lang="en-US" sz="950" dirty="0">
+                        <a:latin typeface="Microsoft JhengHei" charset="0"/>
+                        <a:ea typeface="Microsoft JhengHei" charset="0"/>
+                        <a:cs typeface="Microsoft JhengHei" charset="0"/>
+                      </a:endParaRPr>
+                    </a:p>
+                  </a:txBody>
+                  <a:tcPr marL="45720" marR="45720" marT="45720" marB="45720" anchor="ctr">
+                    <a:lnL w="9525" cap="flat" cmpd="sng" algn="ctr">
+                      <a:solidFill>
+                        <a:srgbClr val="D5DEF0"/>
+                      </a:solidFill>
+                      <a:prstDash val="solid"/>
+                      <a:round/>
+                      <a:headEnd type="none" w="med" len="med"/>
+                      <a:tailEnd type="none" w="med" len="med"/>
+                    </a:lnL>
+                    <a:lnR w="9525" cap="flat" cmpd="sng" algn="ctr">
+                      <a:solidFill>
+                        <a:srgbClr val="D5DEF0"/>
+                      </a:solidFill>
+                      <a:prstDash val="solid"/>
+                      <a:round/>
+                      <a:headEnd type="none" w="med" len="med"/>
+                      <a:tailEnd type="none" w="med" len="med"/>
+                    </a:lnR>
+                    <a:lnT w="9525" cap="flat" cmpd="sng" algn="ctr">
+                      <a:solidFill>
+                        <a:srgbClr val="D5DEF0"/>
+                      </a:solidFill>
+                      <a:prstDash val="solid"/>
+                      <a:round/>
+                      <a:headEnd type="none" w="med" len="med"/>
+                      <a:tailEnd type="none" w="med" len="med"/>
+                    </a:lnT>
+                    <a:lnB w="9525" cap="flat" cmpd="sng" algn="ctr">
+                      <a:solidFill>
+                        <a:srgbClr val="D5DEF0"/>
+                      </a:solidFill>
+                      <a:prstDash val="solid"/>
+                      <a:round/>
+                      <a:headEnd type="none" w="med" len="med"/>
+                      <a:tailEnd type="none" w="med" len="med"/>
+                    </a:lnB>
+                  </a:tcPr>
+                </a:tc>
+                <a:tc>
+                  <a:txBody>
+                    <a:bodyPr/>
+                    <a:lstStyle/>
+                    <a:p>
+                      <a:pPr indent="0" marL="0">
+                        <a:buNone/>
+                      </a:pPr>
+                      <a:r>
+                        <a:rPr lang="en-US" sz="950" dirty="0">
+                          <a:solidFill>
+                            <a:srgbClr val="1F2937"/>
+                          </a:solidFill>
+                          <a:latin typeface="Microsoft JhengHei" pitchFamily="34" charset="0"/>
+                          <a:ea typeface="Microsoft JhengHei" pitchFamily="34" charset="-122"/>
+                          <a:cs typeface="Microsoft JhengHei" pitchFamily="34" charset="-120"/>
+                        </a:rPr>
+                        <a:t>MAX App 推播＋單號 #20720919534／#20721028463</a:t>
+                      </a:r>
+                      <a:endParaRPr lang="en-US" sz="950" dirty="0">
+                        <a:latin typeface="Microsoft JhengHei" charset="0"/>
+                        <a:ea typeface="Microsoft JhengHei" charset="0"/>
+                        <a:cs typeface="Microsoft JhengHei" charset="0"/>
+                      </a:endParaRPr>
+                    </a:p>
+                  </a:txBody>
+                  <a:tcPr marL="45720" marR="45720" marT="45720" marB="45720" anchor="ctr">
+                    <a:lnL w="9525" cap="flat" cmpd="sng" algn="ctr">
+                      <a:solidFill>
+                        <a:srgbClr val="D5DEF0"/>
+                      </a:solidFill>
+                      <a:prstDash val="solid"/>
+                      <a:round/>
+                      <a:headEnd type="none" w="med" len="med"/>
+                      <a:tailEnd type="none" w="med" len="med"/>
+                    </a:lnL>
+                    <a:lnR w="9525" cap="flat" cmpd="sng" algn="ctr">
+                      <a:solidFill>
+                        <a:srgbClr val="D5DEF0"/>
+                      </a:solidFill>
+                      <a:prstDash val="solid"/>
+                      <a:round/>
+                      <a:headEnd type="none" w="med" len="med"/>
+                      <a:tailEnd type="none" w="med" len="med"/>
+                    </a:lnR>
+                    <a:lnT w="9525" cap="flat" cmpd="sng" algn="ctr">
+                      <a:solidFill>
+                        <a:srgbClr val="D5DEF0"/>
+                      </a:solidFill>
+                      <a:prstDash val="solid"/>
+                      <a:round/>
+                      <a:headEnd type="none" w="med" len="med"/>
+                      <a:tailEnd type="none" w="med" len="med"/>
+                    </a:lnT>
+                    <a:lnB w="9525" cap="flat" cmpd="sng" algn="ctr">
+                      <a:solidFill>
+                        <a:srgbClr val="D5DEF0"/>
+                      </a:solidFill>
+                      <a:prstDash val="solid"/>
+                      <a:round/>
+                      <a:headEnd type="none" w="med" len="med"/>
+                      <a:tailEnd type="none" w="med" len="med"/>
+                    </a:lnB>
+                  </a:tcPr>
+                </a:tc>
+                <a:tc>
+                  <a:txBody>
+                    <a:bodyPr/>
+                    <a:lstStyle/>
+                    <a:p>
+                      <a:pPr indent="0" marL="0">
+                        <a:buNone/>
+                      </a:pPr>
+                      <a:r>
+                        <a:rPr lang="en-US" sz="950" b="1" dirty="0">
+                          <a:solidFill>
+                            <a:srgbClr val="E8A13A"/>
+                          </a:solidFill>
+                          <a:latin typeface="Microsoft JhengHei" pitchFamily="34" charset="0"/>
+                          <a:ea typeface="Microsoft JhengHei" pitchFamily="34" charset="-122"/>
+                          <a:cs typeface="Microsoft JhengHei" pitchFamily="34" charset="-120"/>
+                        </a:rPr>
+                        <a:t>Lv2 Private API +5</a:t>
+                      </a:r>
+                      <a:endParaRPr lang="en-US" sz="950" dirty="0">
+                        <a:latin typeface="Microsoft JhengHei" charset="0"/>
+                        <a:ea typeface="Microsoft JhengHei" charset="0"/>
+                        <a:cs typeface="Microsoft JhengHei" charset="0"/>
+                      </a:endParaRPr>
+                    </a:p>
+                  </a:txBody>
+                  <a:tcPr marL="45720" marR="45720" marT="45720" marB="45720" anchor="ctr">
+                    <a:lnL w="9525" cap="flat" cmpd="sng" algn="ctr">
+                      <a:solidFill>
+                        <a:srgbClr val="D5DEF0"/>
+                      </a:solidFill>
+                      <a:prstDash val="solid"/>
+                      <a:round/>
+                      <a:headEnd type="none" w="med" len="med"/>
+                      <a:tailEnd type="none" w="med" len="med"/>
+                    </a:lnL>
+                    <a:lnR w="9525" cap="flat" cmpd="sng" algn="ctr">
+                      <a:solidFill>
+                        <a:srgbClr val="D5DEF0"/>
+                      </a:solidFill>
+                      <a:prstDash val="solid"/>
+                      <a:round/>
+                      <a:headEnd type="none" w="med" len="med"/>
+                      <a:tailEnd type="none" w="med" len="med"/>
+                    </a:lnR>
+                    <a:lnT w="9525" cap="flat" cmpd="sng" algn="ctr">
+                      <a:solidFill>
+                        <a:srgbClr val="D5DEF0"/>
+                      </a:solidFill>
+                      <a:prstDash val="solid"/>
+                      <a:round/>
+                      <a:headEnd type="none" w="med" len="med"/>
+                      <a:tailEnd type="none" w="med" len="med"/>
+                    </a:lnT>
+                    <a:lnB w="9525" cap="flat" cmpd="sng" algn="ctr">
+                      <a:solidFill>
+                        <a:srgbClr val="D5DEF0"/>
+                      </a:solidFill>
+                      <a:prstDash val="solid"/>
+                      <a:round/>
+                      <a:headEnd type="none" w="med" len="med"/>
+                      <a:tailEnd type="none" w="med" len="med"/>
+                    </a:lnB>
+                  </a:tcPr>
+                </a:tc>
+              </a:tr>
+              <a:tr h="365760">
+                <a:tc>
+                  <a:txBody>
+                    <a:bodyPr/>
+                    <a:lstStyle/>
+                    <a:p>
+                      <a:pPr algn="ctr" indent="0" marL="0">
+                        <a:buNone/>
+                      </a:pPr>
+                      <a:r>
+                        <a:rPr lang="en-US" sz="950" b="1" dirty="0">
+                          <a:solidFill>
+                            <a:srgbClr val="FFFFFF"/>
+                          </a:solidFill>
+                          <a:latin typeface="Microsoft JhengHei" pitchFamily="34" charset="0"/>
+                          <a:ea typeface="Microsoft JhengHei" pitchFamily="34" charset="-122"/>
+                          <a:cs typeface="Microsoft JhengHei" pitchFamily="34" charset="-120"/>
+                        </a:rPr>
+                        <a:t>D</a:t>
+                      </a:r>
+                      <a:endParaRPr lang="en-US" sz="950" dirty="0">
+                        <a:latin typeface="Microsoft JhengHei" charset="0"/>
+                        <a:ea typeface="Microsoft JhengHei" charset="0"/>
+                        <a:cs typeface="Microsoft JhengHei" charset="0"/>
+                      </a:endParaRPr>
+                    </a:p>
+                  </a:txBody>
+                  <a:tcPr marL="45720" marR="45720" marT="45720" marB="45720" anchor="ctr">
+                    <a:lnL w="9525" cap="flat" cmpd="sng" algn="ctr">
+                      <a:solidFill>
+                        <a:srgbClr val="D5DEF0"/>
+                      </a:solidFill>
+                      <a:prstDash val="solid"/>
+                      <a:round/>
+                      <a:headEnd type="none" w="med" len="med"/>
+                      <a:tailEnd type="none" w="med" len="med"/>
+                    </a:lnL>
+                    <a:lnR w="9525" cap="flat" cmpd="sng" algn="ctr">
+                      <a:solidFill>
+                        <a:srgbClr val="D5DEF0"/>
+                      </a:solidFill>
+                      <a:prstDash val="solid"/>
+                      <a:round/>
+                      <a:headEnd type="none" w="med" len="med"/>
+                      <a:tailEnd type="none" w="med" len="med"/>
+                    </a:lnR>
+                    <a:lnT w="9525" cap="flat" cmpd="sng" algn="ctr">
+                      <a:solidFill>
+                        <a:srgbClr val="D5DEF0"/>
+                      </a:solidFill>
+                      <a:prstDash val="solid"/>
+                      <a:round/>
+                      <a:headEnd type="none" w="med" len="med"/>
+                      <a:tailEnd type="none" w="med" len="med"/>
+                    </a:lnT>
+                    <a:lnB w="9525" cap="flat" cmpd="sng" algn="ctr">
+                      <a:solidFill>
+                        <a:srgbClr val="D5DEF0"/>
+                      </a:solidFill>
+                      <a:prstDash val="solid"/>
+                      <a:round/>
+                      <a:headEnd type="none" w="med" len="med"/>
+                      <a:tailEnd type="none" w="med" len="med"/>
+                    </a:lnB>
+                    <a:solidFill>
+                      <a:srgbClr val="D64550"/>
+                    </a:solidFill>
+                  </a:tcPr>
+                </a:tc>
+                <a:tc>
+                  <a:txBody>
+                    <a:bodyPr/>
+                    <a:lstStyle/>
+                    <a:p>
+                      <a:pPr indent="0" marL="0">
+                        <a:buNone/>
+                      </a:pPr>
+                      <a:r>
+                        <a:rPr lang="en-US" sz="950" b="1" dirty="0">
+                          <a:solidFill>
+                            <a:srgbClr val="16224D"/>
+                          </a:solidFill>
+                          <a:latin typeface="Microsoft JhengHei" pitchFamily="34" charset="0"/>
+                          <a:ea typeface="Microsoft JhengHei" pitchFamily="34" charset="-122"/>
+                          <a:cs typeface="Microsoft JhengHei" pitchFamily="34" charset="-120"/>
+                        </a:rPr>
+                        <a:t>交付：影片存 Drive＋Kiro 證據</a:t>
+                      </a:r>
+                      <a:endParaRPr lang="en-US" sz="950" dirty="0">
+                        <a:latin typeface="Microsoft JhengHei" charset="0"/>
+                        <a:ea typeface="Microsoft JhengHei" charset="0"/>
+                        <a:cs typeface="Microsoft JhengHei" charset="0"/>
+                      </a:endParaRPr>
+                    </a:p>
+                  </a:txBody>
+                  <a:tcPr marL="45720" marR="45720" marT="45720" marB="45720" anchor="ctr">
+                    <a:lnL w="9525" cap="flat" cmpd="sng" algn="ctr">
+                      <a:solidFill>
+                        <a:srgbClr val="D5DEF0"/>
+                      </a:solidFill>
+                      <a:prstDash val="solid"/>
+                      <a:round/>
+                      <a:headEnd type="none" w="med" len="med"/>
+                      <a:tailEnd type="none" w="med" len="med"/>
+                    </a:lnL>
+                    <a:lnR w="9525" cap="flat" cmpd="sng" algn="ctr">
+                      <a:solidFill>
+                        <a:srgbClr val="D5DEF0"/>
+                      </a:solidFill>
+                      <a:prstDash val="solid"/>
+                      <a:round/>
+                      <a:headEnd type="none" w="med" len="med"/>
+                      <a:tailEnd type="none" w="med" len="med"/>
+                    </a:lnR>
+                    <a:lnT w="9525" cap="flat" cmpd="sng" algn="ctr">
+                      <a:solidFill>
+                        <a:srgbClr val="D5DEF0"/>
+                      </a:solidFill>
+                      <a:prstDash val="solid"/>
+                      <a:round/>
+                      <a:headEnd type="none" w="med" len="med"/>
+                      <a:tailEnd type="none" w="med" len="med"/>
+                    </a:lnT>
+                    <a:lnB w="9525" cap="flat" cmpd="sng" algn="ctr">
+                      <a:solidFill>
+                        <a:srgbClr val="D5DEF0"/>
+                      </a:solidFill>
+                      <a:prstDash val="solid"/>
+                      <a:round/>
+                      <a:headEnd type="none" w="med" len="med"/>
+                      <a:tailEnd type="none" w="med" len="med"/>
+                    </a:lnB>
+                  </a:tcPr>
+                </a:tc>
+                <a:tc>
+                  <a:txBody>
+                    <a:bodyPr/>
+                    <a:lstStyle/>
+                    <a:p>
+                      <a:pPr indent="0" marL="0">
+                        <a:buNone/>
+                      </a:pPr>
+                      <a:r>
+                        <a:rPr lang="en-US" sz="950" dirty="0">
+                          <a:solidFill>
+                            <a:srgbClr val="1F2937"/>
+                          </a:solidFill>
+                          <a:latin typeface="Microsoft JhengHei" pitchFamily="34" charset="0"/>
+                          <a:ea typeface="Microsoft JhengHei" pitchFamily="34" charset="-122"/>
+                          <a:cs typeface="Microsoft JhengHei" pitchFamily="34" charset="-120"/>
+                        </a:rPr>
+                        <a:t>「LIVE DEMO」資料夾＋連結入 #15；.kiro/specs 截圖</a:t>
+                      </a:r>
+                      <a:endParaRPr lang="en-US" sz="950" dirty="0">
+                        <a:latin typeface="Microsoft JhengHei" charset="0"/>
+                        <a:ea typeface="Microsoft JhengHei" charset="0"/>
+                        <a:cs typeface="Microsoft JhengHei" charset="0"/>
+                      </a:endParaRPr>
+                    </a:p>
+                  </a:txBody>
+                  <a:tcPr marL="45720" marR="45720" marT="45720" marB="45720" anchor="ctr">
+                    <a:lnL w="9525" cap="flat" cmpd="sng" algn="ctr">
+                      <a:solidFill>
+                        <a:srgbClr val="D5DEF0"/>
+                      </a:solidFill>
+                      <a:prstDash val="solid"/>
+                      <a:round/>
+                      <a:headEnd type="none" w="med" len="med"/>
+                      <a:tailEnd type="none" w="med" len="med"/>
+                    </a:lnL>
+                    <a:lnR w="9525" cap="flat" cmpd="sng" algn="ctr">
+                      <a:solidFill>
+                        <a:srgbClr val="D5DEF0"/>
+                      </a:solidFill>
+                      <a:prstDash val="solid"/>
+                      <a:round/>
+                      <a:headEnd type="none" w="med" len="med"/>
+                      <a:tailEnd type="none" w="med" len="med"/>
+                    </a:lnR>
+                    <a:lnT w="9525" cap="flat" cmpd="sng" algn="ctr">
+                      <a:solidFill>
+                        <a:srgbClr val="D5DEF0"/>
+                      </a:solidFill>
+                      <a:prstDash val="solid"/>
+                      <a:round/>
+                      <a:headEnd type="none" w="med" len="med"/>
+                      <a:tailEnd type="none" w="med" len="med"/>
+                    </a:lnT>
+                    <a:lnB w="9525" cap="flat" cmpd="sng" algn="ctr">
+                      <a:solidFill>
+                        <a:srgbClr val="D5DEF0"/>
+                      </a:solidFill>
+                      <a:prstDash val="solid"/>
+                      <a:round/>
+                      <a:headEnd type="none" w="med" len="med"/>
+                      <a:tailEnd type="none" w="med" len="med"/>
+                    </a:lnB>
+                  </a:tcPr>
+                </a:tc>
+                <a:tc>
+                  <a:txBody>
+                    <a:bodyPr/>
+                    <a:lstStyle/>
+                    <a:p>
+                      <a:pPr indent="0" marL="0">
+                        <a:buNone/>
+                      </a:pPr>
+                      <a:r>
+                        <a:rPr lang="en-US" sz="950" b="1" dirty="0">
+                          <a:solidFill>
+                            <a:srgbClr val="E8A13A"/>
+                          </a:solidFill>
+                          <a:latin typeface="Microsoft JhengHei" pitchFamily="34" charset="0"/>
+                          <a:ea typeface="Microsoft JhengHei" pitchFamily="34" charset="-122"/>
+                          <a:cs typeface="Microsoft JhengHei" pitchFamily="34" charset="-120"/>
+                        </a:rPr>
+                        <a:t>Kiro +5 ＋ 完成 10</a:t>
+                      </a:r>
+                      <a:endParaRPr lang="en-US" sz="950" dirty="0">
+                        <a:latin typeface="Microsoft JhengHei" charset="0"/>
+                        <a:ea typeface="Microsoft JhengHei" charset="0"/>
+                        <a:cs typeface="Microsoft JhengHei" charset="0"/>
+                      </a:endParaRPr>
+                    </a:p>
+                  </a:txBody>
+                  <a:tcPr marL="45720" marR="45720" marT="45720" marB="45720" anchor="ctr">
+                    <a:lnL w="9525" cap="flat" cmpd="sng" algn="ctr">
+                      <a:solidFill>
+                        <a:srgbClr val="D5DEF0"/>
+                      </a:solidFill>
+                      <a:prstDash val="solid"/>
+                      <a:round/>
+                      <a:headEnd type="none" w="med" len="med"/>
+                      <a:tailEnd type="none" w="med" len="med"/>
+                    </a:lnL>
+                    <a:lnR w="9525" cap="flat" cmpd="sng" algn="ctr">
+                      <a:solidFill>
+                        <a:srgbClr val="D5DEF0"/>
+                      </a:solidFill>
+                      <a:prstDash val="solid"/>
+                      <a:round/>
+                      <a:headEnd type="none" w="med" len="med"/>
+                      <a:tailEnd type="none" w="med" len="med"/>
+                    </a:lnR>
+                    <a:lnT w="9525" cap="flat" cmpd="sng" algn="ctr">
+                      <a:solidFill>
+                        <a:srgbClr val="D5DEF0"/>
+                      </a:solidFill>
+                      <a:prstDash val="solid"/>
+                      <a:round/>
+                      <a:headEnd type="none" w="med" len="med"/>
+                      <a:tailEnd type="none" w="med" len="med"/>
+                    </a:lnT>
+                    <a:lnB w="9525" cap="flat" cmpd="sng" algn="ctr">
+                      <a:solidFill>
+                        <a:srgbClr val="D5DEF0"/>
+                      </a:solidFill>
+                      <a:prstDash val="solid"/>
+                      <a:round/>
+                      <a:headEnd type="none" w="med" len="med"/>
+                      <a:tailEnd type="none" w="med" len="med"/>
+                    </a:lnB>
+                  </a:tcPr>
+                </a:tc>
+              </a:tr>
+            </a:tbl>
+          </a:graphicData>
+        </a:graphic>
+      </p:graphicFrame>
+      <p:sp>
+        <p:nvSpPr>
+          <p:cNvPr id="5" name="Text 2"/>
+          <p:cNvSpPr/>
+          <p:nvPr/>
+        </p:nvSpPr>
+        <p:spPr>
+          <a:xfrm>
+            <a:off x="548640" y="6172200"/>
+            <a:ext cx="11091672" cy="640080"/>
+          </a:xfrm>
+          <a:prstGeom prst="rect">
+            <a:avLst/>
+          </a:prstGeom>
+          <a:noFill/>
+          <a:ln/>
+        </p:spPr>
+        <p:txBody>
+          <a:bodyPr wrap="square" lIns="0" tIns="0" rIns="0" bIns="0" rtlCol="0" anchor="ctr"/>
+          <a:lstStyle/>
+          <a:p>
+            <a:pPr indent="0" marL="0">
+              <a:buNone/>
+            </a:pPr>
+            <a:r>
+              <a:rPr lang="en-US" sz="1100" dirty="0">
+                <a:solidFill>
+                  <a:srgbClr val="6B7280"/>
+                </a:solidFill>
+                <a:latin typeface="Microsoft JhengHei" pitchFamily="34" charset="0"/>
+                <a:ea typeface="Microsoft JhengHei" pitchFamily="34" charset="-122"/>
+                <a:cs typeface="Microsoft JhengHei" pitchFamily="34" charset="-120"/>
+              </a:rPr>
+              <a:t>兩個影片蓋不到的分數：商業 20 只能靠 C 的收尾字卡與簡報；Kiro +5 完全在影片之外，是「有交就給」的分，別漏交。</a:t>
+            </a:r>
+            <a:endParaRPr lang="en-US" sz="1100" dirty="0"/>
+          </a:p>
+          <a:p>
+            <a:pPr indent="0" marL="0">
+              <a:buNone/>
+            </a:pPr>
+            <a:r>
+              <a:rPr lang="en-US" sz="1100" dirty="0">
+                <a:solidFill>
+                  <a:srgbClr val="6B7280"/>
+                </a:solidFill>
+                <a:latin typeface="Microsoft JhengHei" pitchFamily="34" charset="0"/>
+                <a:ea typeface="Microsoft JhengHei" pitchFamily="34" charset="-122"/>
+                <a:cs typeface="Microsoft JhengHei" pitchFamily="34" charset="-120"/>
+              </a:rPr>
+              <a:t>鏡 7 只能在舊環境（us-east-1）拍——那筆真實成交的軌跡在舊帳號的 DynamoDB，官方環境查不到。</a:t>
+            </a:r>
+            <a:endParaRPr lang="en-US" sz="1100" dirty="0"/>
+          </a:p>
+        </p:txBody>
+      </p:sp>
+    </p:spTree>
+  </p:cSld>
+  <p:clrMapOvr>
+    <a:masterClrMapping/>
+  </p:clrMapOvr>
+</p:sld>
+</file>
+
+<file path=ppt/slides/slide16.xml><?xml version="1.0" encoding="utf-8"?>
+<p:sld xmlns:a="http://schemas.openxmlformats.org/drawingml/2006/main" xmlns:r="http://schemas.openxmlformats.org/officeDocument/2006/relationships" xmlns:p="http://schemas.openxmlformats.org/presentationml/2006/main">
+  <p:cSld name="Slide 16">
+    <p:bg>
+      <p:bgPr>
+        <a:solidFill>
+          <a:srgbClr val="FFFFFF"/>
+        </a:solidFill>
+      </p:bgPr>
+    </p:bg>
+    <p:spTree>
+      <p:nvGrpSpPr>
+        <p:cNvPr id="1" name=""/>
+        <p:cNvGrpSpPr/>
+        <p:nvPr/>
+      </p:nvGrpSpPr>
+      <p:grpSpPr>
+        <a:xfrm>
+          <a:off x="0" y="0"/>
+          <a:ext cx="0" cy="0"/>
+          <a:chOff x="0" y="0"/>
+          <a:chExt cx="0" cy="0"/>
+        </a:xfrm>
+      </p:grpSpPr>
+      <p:sp>
+        <p:nvSpPr>
+          <p:cNvPr id="2" name="Text 0"/>
+          <p:cNvSpPr/>
+          <p:nvPr/>
+        </p:nvSpPr>
+        <p:spPr>
+          <a:xfrm>
+            <a:off x="548640" y="411480"/>
+            <a:ext cx="11091672" cy="640080"/>
+          </a:xfrm>
+          <a:prstGeom prst="rect">
+            <a:avLst/>
+          </a:prstGeom>
+          <a:noFill/>
+          <a:ln/>
+        </p:spPr>
+        <p:txBody>
+          <a:bodyPr wrap="square" lIns="0" tIns="0" rIns="0" bIns="0" rtlCol="0" anchor="ctr"/>
+          <a:lstStyle/>
+          <a:p>
+            <a:pPr indent="0" marL="0">
+              <a:buNone/>
+            </a:pPr>
+            <a:r>
+              <a:rPr lang="en-US" sz="2700" b="1" dirty="0">
+                <a:solidFill>
+                  <a:srgbClr val="16224D"/>
+                </a:solidFill>
+                <a:latin typeface="Microsoft JhengHei" pitchFamily="34" charset="0"/>
+                <a:ea typeface="Microsoft JhengHei" pitchFamily="34" charset="-122"/>
+                <a:cs typeface="Microsoft JhengHei" pitchFamily="34" charset="-120"/>
+              </a:rPr>
               <a:t>系統架構成本明細：這套東西到底花多少錢</a:t>
             </a:r>
             <a:endParaRPr lang="en-US" sz="2700" dirty="0"/>
@@ -11174,7 +14915,7 @@
       </p:sp>
       <p:graphicFrame>
         <p:nvGraphicFramePr>
-          <p:cNvPr id="16" name="Table 0"/>
+          <p:cNvPr id="17" name="Table 0"/>
           <p:cNvGraphicFramePr>
             <a:graphicFrameLocks noGrp="1"/>
           </p:cNvGraphicFramePr>
@@ -13919,9 +17660,9 @@
 </p:sld>
 </file>
 
-<file path=ppt/slides/slide16.xml><?xml version="1.0" encoding="utf-8"?>
+<file path=ppt/slides/slide17.xml><?xml version="1.0" encoding="utf-8"?>
 <p:sld xmlns:a="http://schemas.openxmlformats.org/drawingml/2006/main" xmlns:r="http://schemas.openxmlformats.org/officeDocument/2006/relationships" xmlns:p="http://schemas.openxmlformats.org/presentationml/2006/main">
-  <p:cSld name="Slide 16">
+  <p:cSld name="Slide 17">
     <p:bg>
       <p:bgPr>
         <a:solidFill>
@@ -14476,9 +18217,9 @@
 </p:sld>
 </file>
 
-<file path=ppt/slides/slide17.xml><?xml version="1.0" encoding="utf-8"?>
+<file path=ppt/slides/slide18.xml><?xml version="1.0" encoding="utf-8"?>
 <p:sld xmlns:a="http://schemas.openxmlformats.org/drawingml/2006/main" xmlns:r="http://schemas.openxmlformats.org/officeDocument/2006/relationships" xmlns:p="http://schemas.openxmlformats.org/presentationml/2006/main">
-  <p:cSld name="Slide 17">
+  <p:cSld name="Slide 18">
     <p:bg>
       <p:bgPr>
         <a:solidFill>
@@ -15310,9 +19051,9 @@
 </p:sld>
 </file>
 
-<file path=ppt/slides/slide18.xml><?xml version="1.0" encoding="utf-8"?>
+<file path=ppt/slides/slide19.xml><?xml version="1.0" encoding="utf-8"?>
 <p:sld xmlns:a="http://schemas.openxmlformats.org/drawingml/2006/main" xmlns:r="http://schemas.openxmlformats.org/officeDocument/2006/relationships" xmlns:p="http://schemas.openxmlformats.org/presentationml/2006/main">
-  <p:cSld name="Slide 18">
+  <p:cSld name="Slide 19">
     <p:bg>
       <p:bgPr>
         <a:solidFill>
@@ -15876,9 +19617,750 @@
 </p:sld>
 </file>
 
-<file path=ppt/slides/slide19.xml><?xml version="1.0" encoding="utf-8"?>
+<file path=ppt/slides/slide2.xml><?xml version="1.0" encoding="utf-8"?>
 <p:sld xmlns:a="http://schemas.openxmlformats.org/drawingml/2006/main" xmlns:r="http://schemas.openxmlformats.org/officeDocument/2006/relationships" xmlns:p="http://schemas.openxmlformats.org/presentationml/2006/main">
-  <p:cSld name="Slide 19">
+  <p:cSld name="Slide 2">
+    <p:bg>
+      <p:bgPr>
+        <a:solidFill>
+          <a:srgbClr val="FFFFFF"/>
+        </a:solidFill>
+      </p:bgPr>
+    </p:bg>
+    <p:spTree>
+      <p:nvGrpSpPr>
+        <p:cNvPr id="1" name=""/>
+        <p:cNvGrpSpPr/>
+        <p:nvPr/>
+      </p:nvGrpSpPr>
+      <p:grpSpPr>
+        <a:xfrm>
+          <a:off x="0" y="0"/>
+          <a:ext cx="0" cy="0"/>
+          <a:chOff x="0" y="0"/>
+          <a:chExt cx="0" cy="0"/>
+        </a:xfrm>
+      </p:grpSpPr>
+      <p:sp>
+        <p:nvSpPr>
+          <p:cNvPr id="2" name="Text 0"/>
+          <p:cNvSpPr/>
+          <p:nvPr/>
+        </p:nvSpPr>
+        <p:spPr>
+          <a:xfrm>
+            <a:off x="548640" y="411480"/>
+            <a:ext cx="11091672" cy="640080"/>
+          </a:xfrm>
+          <a:prstGeom prst="rect">
+            <a:avLst/>
+          </a:prstGeom>
+          <a:noFill/>
+          <a:ln/>
+        </p:spPr>
+        <p:txBody>
+          <a:bodyPr wrap="square" lIns="0" tIns="0" rIns="0" bIns="0" rtlCol="0" anchor="ctr"/>
+          <a:lstStyle/>
+          <a:p>
+            <a:pPr indent="0" marL="0">
+              <a:buNone/>
+            </a:pPr>
+            <a:r>
+              <a:rPr lang="en-US" sz="2700" b="1" dirty="0">
+                <a:solidFill>
+                  <a:srgbClr val="16224D"/>
+                </a:solidFill>
+                <a:latin typeface="Microsoft JhengHei" pitchFamily="34" charset="0"/>
+                <a:ea typeface="Microsoft JhengHei" pitchFamily="34" charset="-122"/>
+                <a:cs typeface="Microsoft JhengHei" pitchFamily="34" charset="-120"/>
+              </a:rPr>
+              <a:t>總覽：下單鏈路已上線並自動驗過 21 項——但 RAG 知識庫在線上是掛的</a:t>
+            </a:r>
+            <a:endParaRPr lang="en-US" sz="2700" dirty="0"/>
+          </a:p>
+        </p:txBody>
+      </p:sp>
+      <p:sp>
+        <p:nvSpPr>
+          <p:cNvPr id="3" name="Shape 1"/>
+          <p:cNvSpPr/>
+          <p:nvPr/>
+        </p:nvSpPr>
+        <p:spPr>
+          <a:xfrm>
+            <a:off x="548640" y="1600200"/>
+            <a:ext cx="2606040" cy="2286000"/>
+          </a:xfrm>
+          <a:prstGeom prst="roundRect">
+            <a:avLst>
+              <a:gd name="adj" fmla="val 3600"/>
+            </a:avLst>
+          </a:prstGeom>
+          <a:solidFill>
+            <a:srgbClr val="EAF0FB"/>
+          </a:solidFill>
+          <a:ln/>
+        </p:spPr>
+      </p:sp>
+      <p:sp>
+        <p:nvSpPr>
+          <p:cNvPr id="4" name="Text 2"/>
+          <p:cNvSpPr/>
+          <p:nvPr/>
+        </p:nvSpPr>
+        <p:spPr>
+          <a:xfrm>
+            <a:off x="822960" y="1828800"/>
+            <a:ext cx="2103120" cy="914400"/>
+          </a:xfrm>
+          <a:prstGeom prst="rect">
+            <a:avLst/>
+          </a:prstGeom>
+          <a:noFill/>
+          <a:ln/>
+        </p:spPr>
+        <p:txBody>
+          <a:bodyPr wrap="square" lIns="0" tIns="0" rIns="0" bIns="0" rtlCol="0" anchor="ctr"/>
+          <a:lstStyle/>
+          <a:p>
+            <a:pPr indent="0" marL="0">
+              <a:buNone/>
+            </a:pPr>
+            <a:r>
+              <a:rPr lang="en-US" sz="5400" b="1" dirty="0">
+                <a:solidFill>
+                  <a:srgbClr val="1F9D66"/>
+                </a:solidFill>
+                <a:latin typeface="Microsoft JhengHei" pitchFamily="34" charset="0"/>
+                <a:ea typeface="Microsoft JhengHei" pitchFamily="34" charset="-122"/>
+                <a:cs typeface="Microsoft JhengHei" pitchFamily="34" charset="-120"/>
+              </a:rPr>
+              <a:t>17</a:t>
+            </a:r>
+            <a:endParaRPr lang="en-US" sz="5400" dirty="0"/>
+          </a:p>
+        </p:txBody>
+      </p:sp>
+      <p:sp>
+        <p:nvSpPr>
+          <p:cNvPr id="5" name="Text 3"/>
+          <p:cNvSpPr/>
+          <p:nvPr/>
+        </p:nvSpPr>
+        <p:spPr>
+          <a:xfrm>
+            <a:off x="822960" y="2788920"/>
+            <a:ext cx="2103120" cy="365760"/>
+          </a:xfrm>
+          <a:prstGeom prst="rect">
+            <a:avLst/>
+          </a:prstGeom>
+          <a:noFill/>
+          <a:ln/>
+        </p:spPr>
+        <p:txBody>
+          <a:bodyPr wrap="square" lIns="0" tIns="0" rIns="0" bIns="0" rtlCol="0" anchor="ctr"/>
+          <a:lstStyle/>
+          <a:p>
+            <a:pPr indent="0" marL="0">
+              <a:buNone/>
+            </a:pPr>
+            <a:r>
+              <a:rPr lang="en-US" sz="1400" b="1" dirty="0">
+                <a:solidFill>
+                  <a:srgbClr val="16224D"/>
+                </a:solidFill>
+                <a:latin typeface="Microsoft JhengHei" pitchFamily="34" charset="0"/>
+                <a:ea typeface="Microsoft JhengHei" pitchFamily="34" charset="-122"/>
+                <a:cs typeface="Microsoft JhengHei" pitchFamily="34" charset="-120"/>
+              </a:rPr>
+              <a:t>已完成並驗證</a:t>
+            </a:r>
+            <a:endParaRPr lang="en-US" sz="1400" dirty="0"/>
+          </a:p>
+        </p:txBody>
+      </p:sp>
+      <p:sp>
+        <p:nvSpPr>
+          <p:cNvPr id="6" name="Text 4"/>
+          <p:cNvSpPr/>
+          <p:nvPr/>
+        </p:nvSpPr>
+        <p:spPr>
+          <a:xfrm>
+            <a:off x="822960" y="3200400"/>
+            <a:ext cx="2148840" cy="548640"/>
+          </a:xfrm>
+          <a:prstGeom prst="rect">
+            <a:avLst/>
+          </a:prstGeom>
+          <a:noFill/>
+          <a:ln/>
+        </p:spPr>
+        <p:txBody>
+          <a:bodyPr wrap="square" lIns="0" tIns="0" rIns="0" bIns="0" rtlCol="0" anchor="ctr"/>
+          <a:lstStyle/>
+          <a:p>
+            <a:pPr indent="0" marL="0">
+              <a:buNone/>
+            </a:pPr>
+            <a:r>
+              <a:rPr lang="en-US" sz="1050" dirty="0">
+                <a:solidFill>
+                  <a:srgbClr val="6B7280"/>
+                </a:solidFill>
+                <a:latin typeface="Microsoft JhengHei" pitchFamily="34" charset="0"/>
+                <a:ea typeface="Microsoft JhengHei" pitchFamily="34" charset="-122"/>
+                <a:cs typeface="Microsoft JhengHei" pitchFamily="34" charset="-120"/>
+              </a:rPr>
+              <a:t>行為分析、Bedrock迴圈、MAX 簽章、確認卡、決策軌跡、程式層護欄…</a:t>
+            </a:r>
+            <a:endParaRPr lang="en-US" sz="1050" dirty="0"/>
+          </a:p>
+        </p:txBody>
+      </p:sp>
+      <p:sp>
+        <p:nvSpPr>
+          <p:cNvPr id="7" name="Shape 5"/>
+          <p:cNvSpPr/>
+          <p:nvPr/>
+        </p:nvSpPr>
+        <p:spPr>
+          <a:xfrm>
+            <a:off x="3383280" y="1600200"/>
+            <a:ext cx="2606040" cy="2286000"/>
+          </a:xfrm>
+          <a:prstGeom prst="roundRect">
+            <a:avLst>
+              <a:gd name="adj" fmla="val 3600"/>
+            </a:avLst>
+          </a:prstGeom>
+          <a:solidFill>
+            <a:srgbClr val="EAF0FB"/>
+          </a:solidFill>
+          <a:ln/>
+        </p:spPr>
+      </p:sp>
+      <p:sp>
+        <p:nvSpPr>
+          <p:cNvPr id="8" name="Text 6"/>
+          <p:cNvSpPr/>
+          <p:nvPr/>
+        </p:nvSpPr>
+        <p:spPr>
+          <a:xfrm>
+            <a:off x="3657600" y="1828800"/>
+            <a:ext cx="2103120" cy="914400"/>
+          </a:xfrm>
+          <a:prstGeom prst="rect">
+            <a:avLst/>
+          </a:prstGeom>
+          <a:noFill/>
+          <a:ln/>
+        </p:spPr>
+        <p:txBody>
+          <a:bodyPr wrap="square" lIns="0" tIns="0" rIns="0" bIns="0" rtlCol="0" anchor="ctr"/>
+          <a:lstStyle/>
+          <a:p>
+            <a:pPr indent="0" marL="0">
+              <a:buNone/>
+            </a:pPr>
+            <a:r>
+              <a:rPr lang="en-US" sz="5400" b="1" dirty="0">
+                <a:solidFill>
+                  <a:srgbClr val="E8A13A"/>
+                </a:solidFill>
+                <a:latin typeface="Microsoft JhengHei" pitchFamily="34" charset="0"/>
+                <a:ea typeface="Microsoft JhengHei" pitchFamily="34" charset="-122"/>
+                <a:cs typeface="Microsoft JhengHei" pitchFamily="34" charset="-120"/>
+              </a:rPr>
+              <a:t>12</a:t>
+            </a:r>
+            <a:endParaRPr lang="en-US" sz="5400" dirty="0"/>
+          </a:p>
+        </p:txBody>
+      </p:sp>
+      <p:sp>
+        <p:nvSpPr>
+          <p:cNvPr id="9" name="Text 7"/>
+          <p:cNvSpPr/>
+          <p:nvPr/>
+        </p:nvSpPr>
+        <p:spPr>
+          <a:xfrm>
+            <a:off x="3657600" y="2788920"/>
+            <a:ext cx="2103120" cy="365760"/>
+          </a:xfrm>
+          <a:prstGeom prst="rect">
+            <a:avLst/>
+          </a:prstGeom>
+          <a:noFill/>
+          <a:ln/>
+        </p:spPr>
+        <p:txBody>
+          <a:bodyPr wrap="square" lIns="0" tIns="0" rIns="0" bIns="0" rtlCol="0" anchor="ctr"/>
+          <a:lstStyle/>
+          <a:p>
+            <a:pPr indent="0" marL="0">
+              <a:buNone/>
+            </a:pPr>
+            <a:r>
+              <a:rPr lang="en-US" sz="1400" b="1" dirty="0">
+                <a:solidFill>
+                  <a:srgbClr val="16224D"/>
+                </a:solidFill>
+                <a:latin typeface="Microsoft JhengHei" pitchFamily="34" charset="0"/>
+                <a:ea typeface="Microsoft JhengHei" pitchFamily="34" charset="-122"/>
+                <a:cs typeface="Microsoft JhengHei" pitchFamily="34" charset="-120"/>
+              </a:rPr>
+              <a:t>寫好但沒測過</a:t>
+            </a:r>
+            <a:endParaRPr lang="en-US" sz="1400" dirty="0"/>
+          </a:p>
+        </p:txBody>
+      </p:sp>
+      <p:sp>
+        <p:nvSpPr>
+          <p:cNvPr id="10" name="Text 8"/>
+          <p:cNvSpPr/>
+          <p:nvPr/>
+        </p:nvSpPr>
+        <p:spPr>
+          <a:xfrm>
+            <a:off x="3657600" y="3200400"/>
+            <a:ext cx="2148840" cy="548640"/>
+          </a:xfrm>
+          <a:prstGeom prst="rect">
+            <a:avLst/>
+          </a:prstGeom>
+          <a:noFill/>
+          <a:ln/>
+        </p:spPr>
+        <p:txBody>
+          <a:bodyPr wrap="square" lIns="0" tIns="0" rIns="0" bIns="0" rtlCol="0" anchor="ctr"/>
+          <a:lstStyle/>
+          <a:p>
+            <a:pPr indent="0" marL="0">
+              <a:buNone/>
+            </a:pPr>
+            <a:r>
+              <a:rPr lang="en-US" sz="1050" dirty="0">
+                <a:solidFill>
+                  <a:srgbClr val="6B7280"/>
+                </a:solidFill>
+                <a:latin typeface="Microsoft JhengHei" pitchFamily="34" charset="0"/>
+                <a:ea typeface="Microsoft JhengHei" pitchFamily="34" charset="-122"/>
+                <a:cs typeface="Microsoft JhengHei" pitchFamily="34" charset="-120"/>
+              </a:rPr>
+              <a:t>Profile、路由、離線備援、RWD D5–D18、真實下單…</a:t>
+            </a:r>
+            <a:endParaRPr lang="en-US" sz="1050" dirty="0"/>
+          </a:p>
+        </p:txBody>
+      </p:sp>
+      <p:sp>
+        <p:nvSpPr>
+          <p:cNvPr id="11" name="Shape 9"/>
+          <p:cNvSpPr/>
+          <p:nvPr/>
+        </p:nvSpPr>
+        <p:spPr>
+          <a:xfrm>
+            <a:off x="6217920" y="1600200"/>
+            <a:ext cx="2606040" cy="2286000"/>
+          </a:xfrm>
+          <a:prstGeom prst="roundRect">
+            <a:avLst>
+              <a:gd name="adj" fmla="val 3600"/>
+            </a:avLst>
+          </a:prstGeom>
+          <a:solidFill>
+            <a:srgbClr val="EAF0FB"/>
+          </a:solidFill>
+          <a:ln/>
+        </p:spPr>
+      </p:sp>
+      <p:sp>
+        <p:nvSpPr>
+          <p:cNvPr id="12" name="Text 10"/>
+          <p:cNvSpPr/>
+          <p:nvPr/>
+        </p:nvSpPr>
+        <p:spPr>
+          <a:xfrm>
+            <a:off x="6492240" y="1828800"/>
+            <a:ext cx="2103120" cy="914400"/>
+          </a:xfrm>
+          <a:prstGeom prst="rect">
+            <a:avLst/>
+          </a:prstGeom>
+          <a:noFill/>
+          <a:ln/>
+        </p:spPr>
+        <p:txBody>
+          <a:bodyPr wrap="square" lIns="0" tIns="0" rIns="0" bIns="0" rtlCol="0" anchor="ctr"/>
+          <a:lstStyle/>
+          <a:p>
+            <a:pPr indent="0" marL="0">
+              <a:buNone/>
+            </a:pPr>
+            <a:r>
+              <a:rPr lang="en-US" sz="5400" b="1" dirty="0">
+                <a:solidFill>
+                  <a:srgbClr val="D64550"/>
+                </a:solidFill>
+                <a:latin typeface="Microsoft JhengHei" pitchFamily="34" charset="0"/>
+                <a:ea typeface="Microsoft JhengHei" pitchFamily="34" charset="-122"/>
+                <a:cs typeface="Microsoft JhengHei" pitchFamily="34" charset="-120"/>
+              </a:rPr>
+              <a:t>6</a:t>
+            </a:r>
+            <a:endParaRPr lang="en-US" sz="5400" dirty="0"/>
+          </a:p>
+        </p:txBody>
+      </p:sp>
+      <p:sp>
+        <p:nvSpPr>
+          <p:cNvPr id="13" name="Text 11"/>
+          <p:cNvSpPr/>
+          <p:nvPr/>
+        </p:nvSpPr>
+        <p:spPr>
+          <a:xfrm>
+            <a:off x="6492240" y="2788920"/>
+            <a:ext cx="2103120" cy="365760"/>
+          </a:xfrm>
+          <a:prstGeom prst="rect">
+            <a:avLst/>
+          </a:prstGeom>
+          <a:noFill/>
+          <a:ln/>
+        </p:spPr>
+        <p:txBody>
+          <a:bodyPr wrap="square" lIns="0" tIns="0" rIns="0" bIns="0" rtlCol="0" anchor="ctr"/>
+          <a:lstStyle/>
+          <a:p>
+            <a:pPr indent="0" marL="0">
+              <a:buNone/>
+            </a:pPr>
+            <a:r>
+              <a:rPr lang="en-US" sz="1400" b="1" dirty="0">
+                <a:solidFill>
+                  <a:srgbClr val="16224D"/>
+                </a:solidFill>
+                <a:latin typeface="Microsoft JhengHei" pitchFamily="34" charset="0"/>
+                <a:ea typeface="Microsoft JhengHei" pitchFamily="34" charset="-122"/>
+                <a:cs typeface="Microsoft JhengHei" pitchFamily="34" charset="-120"/>
+              </a:rPr>
+              <a:t>待做</a:t>
+            </a:r>
+            <a:endParaRPr lang="en-US" sz="1400" dirty="0"/>
+          </a:p>
+        </p:txBody>
+      </p:sp>
+      <p:sp>
+        <p:nvSpPr>
+          <p:cNvPr id="14" name="Text 12"/>
+          <p:cNvSpPr/>
+          <p:nvPr/>
+        </p:nvSpPr>
+        <p:spPr>
+          <a:xfrm>
+            <a:off x="6492240" y="3200400"/>
+            <a:ext cx="2148840" cy="548640"/>
+          </a:xfrm>
+          <a:prstGeom prst="rect">
+            <a:avLst/>
+          </a:prstGeom>
+          <a:noFill/>
+          <a:ln/>
+        </p:spPr>
+        <p:txBody>
+          <a:bodyPr wrap="square" lIns="0" tIns="0" rIns="0" bIns="0" rtlCol="0" anchor="ctr"/>
+          <a:lstStyle/>
+          <a:p>
+            <a:pPr indent="0" marL="0">
+              <a:buNone/>
+            </a:pPr>
+            <a:r>
+              <a:rPr lang="en-US" sz="1050" dirty="0">
+                <a:solidFill>
+                  <a:srgbClr val="6B7280"/>
+                </a:solidFill>
+                <a:latin typeface="Microsoft JhengHei" pitchFamily="34" charset="0"/>
+                <a:ea typeface="Microsoft JhengHei" pitchFamily="34" charset="-122"/>
+                <a:cs typeface="Microsoft JhengHei" pitchFamily="34" charset="-120"/>
+              </a:rPr>
+              <a:t>RAG KB 重建(#34)、Guardrails、全員 KYC、影片、簡報、Kiro 證據</a:t>
+            </a:r>
+            <a:endParaRPr lang="en-US" sz="1050" dirty="0"/>
+          </a:p>
+        </p:txBody>
+      </p:sp>
+      <p:sp>
+        <p:nvSpPr>
+          <p:cNvPr id="15" name="Shape 13"/>
+          <p:cNvSpPr/>
+          <p:nvPr/>
+        </p:nvSpPr>
+        <p:spPr>
+          <a:xfrm>
+            <a:off x="9052560" y="1600200"/>
+            <a:ext cx="2606040" cy="2286000"/>
+          </a:xfrm>
+          <a:prstGeom prst="roundRect">
+            <a:avLst>
+              <a:gd name="adj" fmla="val 3600"/>
+            </a:avLst>
+          </a:prstGeom>
+          <a:solidFill>
+            <a:srgbClr val="EAF0FB"/>
+          </a:solidFill>
+          <a:ln/>
+        </p:spPr>
+      </p:sp>
+      <p:sp>
+        <p:nvSpPr>
+          <p:cNvPr id="16" name="Text 14"/>
+          <p:cNvSpPr/>
+          <p:nvPr/>
+        </p:nvSpPr>
+        <p:spPr>
+          <a:xfrm>
+            <a:off x="9326880" y="1828800"/>
+            <a:ext cx="2103120" cy="914400"/>
+          </a:xfrm>
+          <a:prstGeom prst="rect">
+            <a:avLst/>
+          </a:prstGeom>
+          <a:noFill/>
+          <a:ln/>
+        </p:spPr>
+        <p:txBody>
+          <a:bodyPr wrap="square" lIns="0" tIns="0" rIns="0" bIns="0" rtlCol="0" anchor="ctr"/>
+          <a:lstStyle/>
+          <a:p>
+            <a:pPr indent="0" marL="0">
+              <a:buNone/>
+            </a:pPr>
+            <a:r>
+              <a:rPr lang="en-US" sz="5400" b="1" dirty="0">
+                <a:solidFill>
+                  <a:srgbClr val="2B6CB0"/>
+                </a:solidFill>
+                <a:latin typeface="Microsoft JhengHei" pitchFamily="34" charset="0"/>
+                <a:ea typeface="Microsoft JhengHei" pitchFamily="34" charset="-122"/>
+                <a:cs typeface="Microsoft JhengHei" pitchFamily="34" charset="-120"/>
+              </a:rPr>
+              <a:t>5</a:t>
+            </a:r>
+            <a:endParaRPr lang="en-US" sz="5400" dirty="0"/>
+          </a:p>
+        </p:txBody>
+      </p:sp>
+      <p:sp>
+        <p:nvSpPr>
+          <p:cNvPr id="17" name="Text 15"/>
+          <p:cNvSpPr/>
+          <p:nvPr/>
+        </p:nvSpPr>
+        <p:spPr>
+          <a:xfrm>
+            <a:off x="9326880" y="2788920"/>
+            <a:ext cx="2103120" cy="365760"/>
+          </a:xfrm>
+          <a:prstGeom prst="rect">
+            <a:avLst/>
+          </a:prstGeom>
+          <a:noFill/>
+          <a:ln/>
+        </p:spPr>
+        <p:txBody>
+          <a:bodyPr wrap="square" lIns="0" tIns="0" rIns="0" bIns="0" rtlCol="0" anchor="ctr"/>
+          <a:lstStyle/>
+          <a:p>
+            <a:pPr indent="0" marL="0">
+              <a:buNone/>
+            </a:pPr>
+            <a:r>
+              <a:rPr lang="en-US" sz="1400" b="1" dirty="0">
+                <a:solidFill>
+                  <a:srgbClr val="16224D"/>
+                </a:solidFill>
+                <a:latin typeface="Microsoft JhengHei" pitchFamily="34" charset="0"/>
+                <a:ea typeface="Microsoft JhengHei" pitchFamily="34" charset="-122"/>
+                <a:cs typeface="Microsoft JhengHei" pitchFamily="34" charset="-120"/>
+              </a:rPr>
+              <a:t>純測試項</a:t>
+            </a:r>
+            <a:endParaRPr lang="en-US" sz="1400" dirty="0"/>
+          </a:p>
+        </p:txBody>
+      </p:sp>
+      <p:sp>
+        <p:nvSpPr>
+          <p:cNvPr id="18" name="Text 16"/>
+          <p:cNvSpPr/>
+          <p:nvPr/>
+        </p:nvSpPr>
+        <p:spPr>
+          <a:xfrm>
+            <a:off x="9326880" y="3200400"/>
+            <a:ext cx="2148840" cy="548640"/>
+          </a:xfrm>
+          <a:prstGeom prst="rect">
+            <a:avLst/>
+          </a:prstGeom>
+          <a:noFill/>
+          <a:ln/>
+        </p:spPr>
+        <p:txBody>
+          <a:bodyPr wrap="square" lIns="0" tIns="0" rIns="0" bIns="0" rtlCol="0" anchor="ctr"/>
+          <a:lstStyle/>
+          <a:p>
+            <a:pPr indent="0" marL="0">
+              <a:buNone/>
+            </a:pPr>
+            <a:r>
+              <a:rPr lang="en-US" sz="1050" dirty="0">
+                <a:solidFill>
+                  <a:srgbClr val="6B7280"/>
+                </a:solidFill>
+                <a:latin typeface="Microsoft JhengHei" pitchFamily="34" charset="0"/>
+                <a:ea typeface="Microsoft JhengHei" pitchFamily="34" charset="-122"/>
+                <a:cs typeface="Microsoft JhengHei" pitchFamily="34" charset="-120"/>
+              </a:rPr>
+              <a:t>E2E、雙層護欄、部署計時…</a:t>
+            </a:r>
+            <a:endParaRPr lang="en-US" sz="1050" dirty="0"/>
+          </a:p>
+        </p:txBody>
+      </p:sp>
+      <p:sp>
+        <p:nvSpPr>
+          <p:cNvPr id="19" name="Shape 17"/>
+          <p:cNvSpPr/>
+          <p:nvPr/>
+        </p:nvSpPr>
+        <p:spPr>
+          <a:xfrm>
+            <a:off x="548640" y="4297680"/>
+            <a:ext cx="11091672" cy="914400"/>
+          </a:xfrm>
+          <a:prstGeom prst="roundRect">
+            <a:avLst>
+              <a:gd name="adj" fmla="val 9000"/>
+            </a:avLst>
+          </a:prstGeom>
+          <a:solidFill>
+            <a:srgbClr val="FDF0EF"/>
+          </a:solidFill>
+          <a:ln/>
+        </p:spPr>
+      </p:sp>
+      <p:sp>
+        <p:nvSpPr>
+          <p:cNvPr id="20" name="Text 18"/>
+          <p:cNvSpPr/>
+          <p:nvPr/>
+        </p:nvSpPr>
+        <p:spPr>
+          <a:xfrm>
+            <a:off x="822960" y="4434840"/>
+            <a:ext cx="10543032" cy="640080"/>
+          </a:xfrm>
+          <a:prstGeom prst="rect">
+            <a:avLst/>
+          </a:prstGeom>
+          <a:noFill/>
+          <a:ln/>
+        </p:spPr>
+        <p:txBody>
+          <a:bodyPr wrap="square" lIns="0" tIns="0" rIns="0" bIns="0" rtlCol="0" anchor="ctr"/>
+          <a:lstStyle/>
+          <a:p>
+            <a:pPr indent="0" marL="0">
+              <a:buNone/>
+            </a:pPr>
+            <a:r>
+              <a:rPr lang="en-US" sz="1400" b="1" dirty="0">
+                <a:solidFill>
+                  <a:srgbClr val="D64550"/>
+                </a:solidFill>
+                <a:latin typeface="Microsoft JhengHei" pitchFamily="34" charset="0"/>
+                <a:ea typeface="Microsoft JhengHei" pitchFamily="34" charset="-122"/>
+                <a:cs typeface="Microsoft JhengHei" pitchFamily="34" charset="-120"/>
+              </a:rPr>
+              <a:t>最大隱藏風險：</a:t>
+            </a:r>
+            <a:pPr indent="0" marL="0">
+              <a:buNone/>
+            </a:pPr>
+            <a:r>
+              <a:rPr lang="en-US" sz="1400" dirty="0">
+                <a:solidFill>
+                  <a:srgbClr val="1F2937"/>
+                </a:solidFill>
+                <a:latin typeface="Microsoft JhengHei" pitchFamily="34" charset="0"/>
+                <a:ea typeface="Microsoft JhengHei" pitchFamily="34" charset="-122"/>
+                <a:cs typeface="Microsoft JhengHei" pitchFamily="34" charset="-120"/>
+              </a:rPr>
+              <a:t>RAG 知識庫在線上是掛的（#34）：Bedrock 回「KB DSIYBVI1IX 不存在」，模型改用一般知識回答——**畫面看不出異常，只是安靜地少掉「附出處」這個賣點**，而 F3 是評分紅線。這種「優雅降級」的壞法最危險：不跑驗收就發現不了。修法要 B 包重建 KB 再帶參數部署。距 7/31 code freeze 剩 2 天。</a:t>
+            </a:r>
+            <a:endParaRPr lang="en-US" sz="1400" dirty="0"/>
+          </a:p>
+        </p:txBody>
+      </p:sp>
+      <p:sp>
+        <p:nvSpPr>
+          <p:cNvPr id="21" name="Text 19"/>
+          <p:cNvSpPr/>
+          <p:nvPr/>
+        </p:nvSpPr>
+        <p:spPr>
+          <a:xfrm>
+            <a:off x="548640" y="5486400"/>
+            <a:ext cx="11091672" cy="411480"/>
+          </a:xfrm>
+          <a:prstGeom prst="rect">
+            <a:avLst/>
+          </a:prstGeom>
+          <a:noFill/>
+          <a:ln/>
+        </p:spPr>
+        <p:txBody>
+          <a:bodyPr wrap="square" lIns="0" tIns="0" rIns="0" bIns="0" rtlCol="0" anchor="ctr"/>
+          <a:lstStyle/>
+          <a:p>
+            <a:pPr indent="0" marL="0">
+              <a:buNone/>
+            </a:pPr>
+            <a:r>
+              <a:rPr lang="en-US" sz="1500" b="1" dirty="0">
+                <a:solidFill>
+                  <a:srgbClr val="16224D"/>
+                </a:solidFill>
+                <a:latin typeface="Microsoft JhengHei" pitchFamily="34" charset="0"/>
+                <a:ea typeface="Microsoft JhengHei" pitchFamily="34" charset="-122"/>
+                <a:cs typeface="Microsoft JhengHei" pitchFamily="34" charset="-120"/>
+              </a:rPr>
+              <a:t>本週原則：先讓 🧪 變 ✅（把寫好的測到能動），再開 🔨 新工。</a:t>
+            </a:r>
+            <a:endParaRPr lang="en-US" sz="1500" dirty="0"/>
+          </a:p>
+        </p:txBody>
+      </p:sp>
+    </p:spTree>
+  </p:cSld>
+  <p:clrMapOvr>
+    <a:masterClrMapping/>
+  </p:clrMapOvr>
+</p:sld>
+</file>
+
+<file path=ppt/slides/slide20.xml><?xml version="1.0" encoding="utf-8"?>
+<p:sld xmlns:a="http://schemas.openxmlformats.org/drawingml/2006/main" xmlns:r="http://schemas.openxmlformats.org/officeDocument/2006/relationships" xmlns:p="http://schemas.openxmlformats.org/presentationml/2006/main">
+  <p:cSld name="Slide 20">
     <p:bg>
       <p:bgPr>
         <a:solidFill>
@@ -16707,750 +21189,9 @@
 </p:sld>
 </file>
 
-<file path=ppt/slides/slide2.xml><?xml version="1.0" encoding="utf-8"?>
+<file path=ppt/slides/slide21.xml><?xml version="1.0" encoding="utf-8"?>
 <p:sld xmlns:a="http://schemas.openxmlformats.org/drawingml/2006/main" xmlns:r="http://schemas.openxmlformats.org/officeDocument/2006/relationships" xmlns:p="http://schemas.openxmlformats.org/presentationml/2006/main">
-  <p:cSld name="Slide 2">
-    <p:bg>
-      <p:bgPr>
-        <a:solidFill>
-          <a:srgbClr val="FFFFFF"/>
-        </a:solidFill>
-      </p:bgPr>
-    </p:bg>
-    <p:spTree>
-      <p:nvGrpSpPr>
-        <p:cNvPr id="1" name=""/>
-        <p:cNvGrpSpPr/>
-        <p:nvPr/>
-      </p:nvGrpSpPr>
-      <p:grpSpPr>
-        <a:xfrm>
-          <a:off x="0" y="0"/>
-          <a:ext cx="0" cy="0"/>
-          <a:chOff x="0" y="0"/>
-          <a:chExt cx="0" cy="0"/>
-        </a:xfrm>
-      </p:grpSpPr>
-      <p:sp>
-        <p:nvSpPr>
-          <p:cNvPr id="2" name="Text 0"/>
-          <p:cNvSpPr/>
-          <p:nvPr/>
-        </p:nvSpPr>
-        <p:spPr>
-          <a:xfrm>
-            <a:off x="548640" y="411480"/>
-            <a:ext cx="11091672" cy="640080"/>
-          </a:xfrm>
-          <a:prstGeom prst="rect">
-            <a:avLst/>
-          </a:prstGeom>
-          <a:noFill/>
-          <a:ln/>
-        </p:spPr>
-        <p:txBody>
-          <a:bodyPr wrap="square" lIns="0" tIns="0" rIns="0" bIns="0" rtlCol="0" anchor="ctr"/>
-          <a:lstStyle/>
-          <a:p>
-            <a:pPr indent="0" marL="0">
-              <a:buNone/>
-            </a:pPr>
-            <a:r>
-              <a:rPr lang="en-US" sz="2700" b="1" dirty="0">
-                <a:solidFill>
-                  <a:srgbClr val="16224D"/>
-                </a:solidFill>
-                <a:latin typeface="Microsoft JhengHei" pitchFamily="34" charset="0"/>
-                <a:ea typeface="Microsoft JhengHei" pitchFamily="34" charset="-122"/>
-                <a:cs typeface="Microsoft JhengHei" pitchFamily="34" charset="-120"/>
-              </a:rPr>
-              <a:t>總覽：下單鏈路已上線並自動驗過 21 項——但 RAG 知識庫在線上是掛的</a:t>
-            </a:r>
-            <a:endParaRPr lang="en-US" sz="2700" dirty="0"/>
-          </a:p>
-        </p:txBody>
-      </p:sp>
-      <p:sp>
-        <p:nvSpPr>
-          <p:cNvPr id="3" name="Shape 1"/>
-          <p:cNvSpPr/>
-          <p:nvPr/>
-        </p:nvSpPr>
-        <p:spPr>
-          <a:xfrm>
-            <a:off x="548640" y="1600200"/>
-            <a:ext cx="2606040" cy="2286000"/>
-          </a:xfrm>
-          <a:prstGeom prst="roundRect">
-            <a:avLst>
-              <a:gd name="adj" fmla="val 3600"/>
-            </a:avLst>
-          </a:prstGeom>
-          <a:solidFill>
-            <a:srgbClr val="EAF0FB"/>
-          </a:solidFill>
-          <a:ln/>
-        </p:spPr>
-      </p:sp>
-      <p:sp>
-        <p:nvSpPr>
-          <p:cNvPr id="4" name="Text 2"/>
-          <p:cNvSpPr/>
-          <p:nvPr/>
-        </p:nvSpPr>
-        <p:spPr>
-          <a:xfrm>
-            <a:off x="822960" y="1828800"/>
-            <a:ext cx="2103120" cy="914400"/>
-          </a:xfrm>
-          <a:prstGeom prst="rect">
-            <a:avLst/>
-          </a:prstGeom>
-          <a:noFill/>
-          <a:ln/>
-        </p:spPr>
-        <p:txBody>
-          <a:bodyPr wrap="square" lIns="0" tIns="0" rIns="0" bIns="0" rtlCol="0" anchor="ctr"/>
-          <a:lstStyle/>
-          <a:p>
-            <a:pPr indent="0" marL="0">
-              <a:buNone/>
-            </a:pPr>
-            <a:r>
-              <a:rPr lang="en-US" sz="5400" b="1" dirty="0">
-                <a:solidFill>
-                  <a:srgbClr val="1F9D66"/>
-                </a:solidFill>
-                <a:latin typeface="Microsoft JhengHei" pitchFamily="34" charset="0"/>
-                <a:ea typeface="Microsoft JhengHei" pitchFamily="34" charset="-122"/>
-                <a:cs typeface="Microsoft JhengHei" pitchFamily="34" charset="-120"/>
-              </a:rPr>
-              <a:t>17</a:t>
-            </a:r>
-            <a:endParaRPr lang="en-US" sz="5400" dirty="0"/>
-          </a:p>
-        </p:txBody>
-      </p:sp>
-      <p:sp>
-        <p:nvSpPr>
-          <p:cNvPr id="5" name="Text 3"/>
-          <p:cNvSpPr/>
-          <p:nvPr/>
-        </p:nvSpPr>
-        <p:spPr>
-          <a:xfrm>
-            <a:off x="822960" y="2788920"/>
-            <a:ext cx="2103120" cy="365760"/>
-          </a:xfrm>
-          <a:prstGeom prst="rect">
-            <a:avLst/>
-          </a:prstGeom>
-          <a:noFill/>
-          <a:ln/>
-        </p:spPr>
-        <p:txBody>
-          <a:bodyPr wrap="square" lIns="0" tIns="0" rIns="0" bIns="0" rtlCol="0" anchor="ctr"/>
-          <a:lstStyle/>
-          <a:p>
-            <a:pPr indent="0" marL="0">
-              <a:buNone/>
-            </a:pPr>
-            <a:r>
-              <a:rPr lang="en-US" sz="1400" b="1" dirty="0">
-                <a:solidFill>
-                  <a:srgbClr val="16224D"/>
-                </a:solidFill>
-                <a:latin typeface="Microsoft JhengHei" pitchFamily="34" charset="0"/>
-                <a:ea typeface="Microsoft JhengHei" pitchFamily="34" charset="-122"/>
-                <a:cs typeface="Microsoft JhengHei" pitchFamily="34" charset="-120"/>
-              </a:rPr>
-              <a:t>已完成並驗證</a:t>
-            </a:r>
-            <a:endParaRPr lang="en-US" sz="1400" dirty="0"/>
-          </a:p>
-        </p:txBody>
-      </p:sp>
-      <p:sp>
-        <p:nvSpPr>
-          <p:cNvPr id="6" name="Text 4"/>
-          <p:cNvSpPr/>
-          <p:nvPr/>
-        </p:nvSpPr>
-        <p:spPr>
-          <a:xfrm>
-            <a:off x="822960" y="3200400"/>
-            <a:ext cx="2148840" cy="548640"/>
-          </a:xfrm>
-          <a:prstGeom prst="rect">
-            <a:avLst/>
-          </a:prstGeom>
-          <a:noFill/>
-          <a:ln/>
-        </p:spPr>
-        <p:txBody>
-          <a:bodyPr wrap="square" lIns="0" tIns="0" rIns="0" bIns="0" rtlCol="0" anchor="ctr"/>
-          <a:lstStyle/>
-          <a:p>
-            <a:pPr indent="0" marL="0">
-              <a:buNone/>
-            </a:pPr>
-            <a:r>
-              <a:rPr lang="en-US" sz="1050" dirty="0">
-                <a:solidFill>
-                  <a:srgbClr val="6B7280"/>
-                </a:solidFill>
-                <a:latin typeface="Microsoft JhengHei" pitchFamily="34" charset="0"/>
-                <a:ea typeface="Microsoft JhengHei" pitchFamily="34" charset="-122"/>
-                <a:cs typeface="Microsoft JhengHei" pitchFamily="34" charset="-120"/>
-              </a:rPr>
-              <a:t>行為分析、Bedrock迴圈、MAX 簽章、確認卡、決策軌跡、程式層護欄…</a:t>
-            </a:r>
-            <a:endParaRPr lang="en-US" sz="1050" dirty="0"/>
-          </a:p>
-        </p:txBody>
-      </p:sp>
-      <p:sp>
-        <p:nvSpPr>
-          <p:cNvPr id="7" name="Shape 5"/>
-          <p:cNvSpPr/>
-          <p:nvPr/>
-        </p:nvSpPr>
-        <p:spPr>
-          <a:xfrm>
-            <a:off x="3383280" y="1600200"/>
-            <a:ext cx="2606040" cy="2286000"/>
-          </a:xfrm>
-          <a:prstGeom prst="roundRect">
-            <a:avLst>
-              <a:gd name="adj" fmla="val 3600"/>
-            </a:avLst>
-          </a:prstGeom>
-          <a:solidFill>
-            <a:srgbClr val="EAF0FB"/>
-          </a:solidFill>
-          <a:ln/>
-        </p:spPr>
-      </p:sp>
-      <p:sp>
-        <p:nvSpPr>
-          <p:cNvPr id="8" name="Text 6"/>
-          <p:cNvSpPr/>
-          <p:nvPr/>
-        </p:nvSpPr>
-        <p:spPr>
-          <a:xfrm>
-            <a:off x="3657600" y="1828800"/>
-            <a:ext cx="2103120" cy="914400"/>
-          </a:xfrm>
-          <a:prstGeom prst="rect">
-            <a:avLst/>
-          </a:prstGeom>
-          <a:noFill/>
-          <a:ln/>
-        </p:spPr>
-        <p:txBody>
-          <a:bodyPr wrap="square" lIns="0" tIns="0" rIns="0" bIns="0" rtlCol="0" anchor="ctr"/>
-          <a:lstStyle/>
-          <a:p>
-            <a:pPr indent="0" marL="0">
-              <a:buNone/>
-            </a:pPr>
-            <a:r>
-              <a:rPr lang="en-US" sz="5400" b="1" dirty="0">
-                <a:solidFill>
-                  <a:srgbClr val="E8A13A"/>
-                </a:solidFill>
-                <a:latin typeface="Microsoft JhengHei" pitchFamily="34" charset="0"/>
-                <a:ea typeface="Microsoft JhengHei" pitchFamily="34" charset="-122"/>
-                <a:cs typeface="Microsoft JhengHei" pitchFamily="34" charset="-120"/>
-              </a:rPr>
-              <a:t>12</a:t>
-            </a:r>
-            <a:endParaRPr lang="en-US" sz="5400" dirty="0"/>
-          </a:p>
-        </p:txBody>
-      </p:sp>
-      <p:sp>
-        <p:nvSpPr>
-          <p:cNvPr id="9" name="Text 7"/>
-          <p:cNvSpPr/>
-          <p:nvPr/>
-        </p:nvSpPr>
-        <p:spPr>
-          <a:xfrm>
-            <a:off x="3657600" y="2788920"/>
-            <a:ext cx="2103120" cy="365760"/>
-          </a:xfrm>
-          <a:prstGeom prst="rect">
-            <a:avLst/>
-          </a:prstGeom>
-          <a:noFill/>
-          <a:ln/>
-        </p:spPr>
-        <p:txBody>
-          <a:bodyPr wrap="square" lIns="0" tIns="0" rIns="0" bIns="0" rtlCol="0" anchor="ctr"/>
-          <a:lstStyle/>
-          <a:p>
-            <a:pPr indent="0" marL="0">
-              <a:buNone/>
-            </a:pPr>
-            <a:r>
-              <a:rPr lang="en-US" sz="1400" b="1" dirty="0">
-                <a:solidFill>
-                  <a:srgbClr val="16224D"/>
-                </a:solidFill>
-                <a:latin typeface="Microsoft JhengHei" pitchFamily="34" charset="0"/>
-                <a:ea typeface="Microsoft JhengHei" pitchFamily="34" charset="-122"/>
-                <a:cs typeface="Microsoft JhengHei" pitchFamily="34" charset="-120"/>
-              </a:rPr>
-              <a:t>寫好但沒測過</a:t>
-            </a:r>
-            <a:endParaRPr lang="en-US" sz="1400" dirty="0"/>
-          </a:p>
-        </p:txBody>
-      </p:sp>
-      <p:sp>
-        <p:nvSpPr>
-          <p:cNvPr id="10" name="Text 8"/>
-          <p:cNvSpPr/>
-          <p:nvPr/>
-        </p:nvSpPr>
-        <p:spPr>
-          <a:xfrm>
-            <a:off x="3657600" y="3200400"/>
-            <a:ext cx="2148840" cy="548640"/>
-          </a:xfrm>
-          <a:prstGeom prst="rect">
-            <a:avLst/>
-          </a:prstGeom>
-          <a:noFill/>
-          <a:ln/>
-        </p:spPr>
-        <p:txBody>
-          <a:bodyPr wrap="square" lIns="0" tIns="0" rIns="0" bIns="0" rtlCol="0" anchor="ctr"/>
-          <a:lstStyle/>
-          <a:p>
-            <a:pPr indent="0" marL="0">
-              <a:buNone/>
-            </a:pPr>
-            <a:r>
-              <a:rPr lang="en-US" sz="1050" dirty="0">
-                <a:solidFill>
-                  <a:srgbClr val="6B7280"/>
-                </a:solidFill>
-                <a:latin typeface="Microsoft JhengHei" pitchFamily="34" charset="0"/>
-                <a:ea typeface="Microsoft JhengHei" pitchFamily="34" charset="-122"/>
-                <a:cs typeface="Microsoft JhengHei" pitchFamily="34" charset="-120"/>
-              </a:rPr>
-              <a:t>Profile、路由、離線備援、RWD D5–D18、真實下單…</a:t>
-            </a:r>
-            <a:endParaRPr lang="en-US" sz="1050" dirty="0"/>
-          </a:p>
-        </p:txBody>
-      </p:sp>
-      <p:sp>
-        <p:nvSpPr>
-          <p:cNvPr id="11" name="Shape 9"/>
-          <p:cNvSpPr/>
-          <p:nvPr/>
-        </p:nvSpPr>
-        <p:spPr>
-          <a:xfrm>
-            <a:off x="6217920" y="1600200"/>
-            <a:ext cx="2606040" cy="2286000"/>
-          </a:xfrm>
-          <a:prstGeom prst="roundRect">
-            <a:avLst>
-              <a:gd name="adj" fmla="val 3600"/>
-            </a:avLst>
-          </a:prstGeom>
-          <a:solidFill>
-            <a:srgbClr val="EAF0FB"/>
-          </a:solidFill>
-          <a:ln/>
-        </p:spPr>
-      </p:sp>
-      <p:sp>
-        <p:nvSpPr>
-          <p:cNvPr id="12" name="Text 10"/>
-          <p:cNvSpPr/>
-          <p:nvPr/>
-        </p:nvSpPr>
-        <p:spPr>
-          <a:xfrm>
-            <a:off x="6492240" y="1828800"/>
-            <a:ext cx="2103120" cy="914400"/>
-          </a:xfrm>
-          <a:prstGeom prst="rect">
-            <a:avLst/>
-          </a:prstGeom>
-          <a:noFill/>
-          <a:ln/>
-        </p:spPr>
-        <p:txBody>
-          <a:bodyPr wrap="square" lIns="0" tIns="0" rIns="0" bIns="0" rtlCol="0" anchor="ctr"/>
-          <a:lstStyle/>
-          <a:p>
-            <a:pPr indent="0" marL="0">
-              <a:buNone/>
-            </a:pPr>
-            <a:r>
-              <a:rPr lang="en-US" sz="5400" b="1" dirty="0">
-                <a:solidFill>
-                  <a:srgbClr val="D64550"/>
-                </a:solidFill>
-                <a:latin typeface="Microsoft JhengHei" pitchFamily="34" charset="0"/>
-                <a:ea typeface="Microsoft JhengHei" pitchFamily="34" charset="-122"/>
-                <a:cs typeface="Microsoft JhengHei" pitchFamily="34" charset="-120"/>
-              </a:rPr>
-              <a:t>6</a:t>
-            </a:r>
-            <a:endParaRPr lang="en-US" sz="5400" dirty="0"/>
-          </a:p>
-        </p:txBody>
-      </p:sp>
-      <p:sp>
-        <p:nvSpPr>
-          <p:cNvPr id="13" name="Text 11"/>
-          <p:cNvSpPr/>
-          <p:nvPr/>
-        </p:nvSpPr>
-        <p:spPr>
-          <a:xfrm>
-            <a:off x="6492240" y="2788920"/>
-            <a:ext cx="2103120" cy="365760"/>
-          </a:xfrm>
-          <a:prstGeom prst="rect">
-            <a:avLst/>
-          </a:prstGeom>
-          <a:noFill/>
-          <a:ln/>
-        </p:spPr>
-        <p:txBody>
-          <a:bodyPr wrap="square" lIns="0" tIns="0" rIns="0" bIns="0" rtlCol="0" anchor="ctr"/>
-          <a:lstStyle/>
-          <a:p>
-            <a:pPr indent="0" marL="0">
-              <a:buNone/>
-            </a:pPr>
-            <a:r>
-              <a:rPr lang="en-US" sz="1400" b="1" dirty="0">
-                <a:solidFill>
-                  <a:srgbClr val="16224D"/>
-                </a:solidFill>
-                <a:latin typeface="Microsoft JhengHei" pitchFamily="34" charset="0"/>
-                <a:ea typeface="Microsoft JhengHei" pitchFamily="34" charset="-122"/>
-                <a:cs typeface="Microsoft JhengHei" pitchFamily="34" charset="-120"/>
-              </a:rPr>
-              <a:t>待做</a:t>
-            </a:r>
-            <a:endParaRPr lang="en-US" sz="1400" dirty="0"/>
-          </a:p>
-        </p:txBody>
-      </p:sp>
-      <p:sp>
-        <p:nvSpPr>
-          <p:cNvPr id="14" name="Text 12"/>
-          <p:cNvSpPr/>
-          <p:nvPr/>
-        </p:nvSpPr>
-        <p:spPr>
-          <a:xfrm>
-            <a:off x="6492240" y="3200400"/>
-            <a:ext cx="2148840" cy="548640"/>
-          </a:xfrm>
-          <a:prstGeom prst="rect">
-            <a:avLst/>
-          </a:prstGeom>
-          <a:noFill/>
-          <a:ln/>
-        </p:spPr>
-        <p:txBody>
-          <a:bodyPr wrap="square" lIns="0" tIns="0" rIns="0" bIns="0" rtlCol="0" anchor="ctr"/>
-          <a:lstStyle/>
-          <a:p>
-            <a:pPr indent="0" marL="0">
-              <a:buNone/>
-            </a:pPr>
-            <a:r>
-              <a:rPr lang="en-US" sz="1050" dirty="0">
-                <a:solidFill>
-                  <a:srgbClr val="6B7280"/>
-                </a:solidFill>
-                <a:latin typeface="Microsoft JhengHei" pitchFamily="34" charset="0"/>
-                <a:ea typeface="Microsoft JhengHei" pitchFamily="34" charset="-122"/>
-                <a:cs typeface="Microsoft JhengHei" pitchFamily="34" charset="-120"/>
-              </a:rPr>
-              <a:t>RAG KB 重建(#34)、Guardrails、全員 KYC、影片、簡報、Kiro 證據</a:t>
-            </a:r>
-            <a:endParaRPr lang="en-US" sz="1050" dirty="0"/>
-          </a:p>
-        </p:txBody>
-      </p:sp>
-      <p:sp>
-        <p:nvSpPr>
-          <p:cNvPr id="15" name="Shape 13"/>
-          <p:cNvSpPr/>
-          <p:nvPr/>
-        </p:nvSpPr>
-        <p:spPr>
-          <a:xfrm>
-            <a:off x="9052560" y="1600200"/>
-            <a:ext cx="2606040" cy="2286000"/>
-          </a:xfrm>
-          <a:prstGeom prst="roundRect">
-            <a:avLst>
-              <a:gd name="adj" fmla="val 3600"/>
-            </a:avLst>
-          </a:prstGeom>
-          <a:solidFill>
-            <a:srgbClr val="EAF0FB"/>
-          </a:solidFill>
-          <a:ln/>
-        </p:spPr>
-      </p:sp>
-      <p:sp>
-        <p:nvSpPr>
-          <p:cNvPr id="16" name="Text 14"/>
-          <p:cNvSpPr/>
-          <p:nvPr/>
-        </p:nvSpPr>
-        <p:spPr>
-          <a:xfrm>
-            <a:off x="9326880" y="1828800"/>
-            <a:ext cx="2103120" cy="914400"/>
-          </a:xfrm>
-          <a:prstGeom prst="rect">
-            <a:avLst/>
-          </a:prstGeom>
-          <a:noFill/>
-          <a:ln/>
-        </p:spPr>
-        <p:txBody>
-          <a:bodyPr wrap="square" lIns="0" tIns="0" rIns="0" bIns="0" rtlCol="0" anchor="ctr"/>
-          <a:lstStyle/>
-          <a:p>
-            <a:pPr indent="0" marL="0">
-              <a:buNone/>
-            </a:pPr>
-            <a:r>
-              <a:rPr lang="en-US" sz="5400" b="1" dirty="0">
-                <a:solidFill>
-                  <a:srgbClr val="2B6CB0"/>
-                </a:solidFill>
-                <a:latin typeface="Microsoft JhengHei" pitchFamily="34" charset="0"/>
-                <a:ea typeface="Microsoft JhengHei" pitchFamily="34" charset="-122"/>
-                <a:cs typeface="Microsoft JhengHei" pitchFamily="34" charset="-120"/>
-              </a:rPr>
-              <a:t>5</a:t>
-            </a:r>
-            <a:endParaRPr lang="en-US" sz="5400" dirty="0"/>
-          </a:p>
-        </p:txBody>
-      </p:sp>
-      <p:sp>
-        <p:nvSpPr>
-          <p:cNvPr id="17" name="Text 15"/>
-          <p:cNvSpPr/>
-          <p:nvPr/>
-        </p:nvSpPr>
-        <p:spPr>
-          <a:xfrm>
-            <a:off x="9326880" y="2788920"/>
-            <a:ext cx="2103120" cy="365760"/>
-          </a:xfrm>
-          <a:prstGeom prst="rect">
-            <a:avLst/>
-          </a:prstGeom>
-          <a:noFill/>
-          <a:ln/>
-        </p:spPr>
-        <p:txBody>
-          <a:bodyPr wrap="square" lIns="0" tIns="0" rIns="0" bIns="0" rtlCol="0" anchor="ctr"/>
-          <a:lstStyle/>
-          <a:p>
-            <a:pPr indent="0" marL="0">
-              <a:buNone/>
-            </a:pPr>
-            <a:r>
-              <a:rPr lang="en-US" sz="1400" b="1" dirty="0">
-                <a:solidFill>
-                  <a:srgbClr val="16224D"/>
-                </a:solidFill>
-                <a:latin typeface="Microsoft JhengHei" pitchFamily="34" charset="0"/>
-                <a:ea typeface="Microsoft JhengHei" pitchFamily="34" charset="-122"/>
-                <a:cs typeface="Microsoft JhengHei" pitchFamily="34" charset="-120"/>
-              </a:rPr>
-              <a:t>純測試項</a:t>
-            </a:r>
-            <a:endParaRPr lang="en-US" sz="1400" dirty="0"/>
-          </a:p>
-        </p:txBody>
-      </p:sp>
-      <p:sp>
-        <p:nvSpPr>
-          <p:cNvPr id="18" name="Text 16"/>
-          <p:cNvSpPr/>
-          <p:nvPr/>
-        </p:nvSpPr>
-        <p:spPr>
-          <a:xfrm>
-            <a:off x="9326880" y="3200400"/>
-            <a:ext cx="2148840" cy="548640"/>
-          </a:xfrm>
-          <a:prstGeom prst="rect">
-            <a:avLst/>
-          </a:prstGeom>
-          <a:noFill/>
-          <a:ln/>
-        </p:spPr>
-        <p:txBody>
-          <a:bodyPr wrap="square" lIns="0" tIns="0" rIns="0" bIns="0" rtlCol="0" anchor="ctr"/>
-          <a:lstStyle/>
-          <a:p>
-            <a:pPr indent="0" marL="0">
-              <a:buNone/>
-            </a:pPr>
-            <a:r>
-              <a:rPr lang="en-US" sz="1050" dirty="0">
-                <a:solidFill>
-                  <a:srgbClr val="6B7280"/>
-                </a:solidFill>
-                <a:latin typeface="Microsoft JhengHei" pitchFamily="34" charset="0"/>
-                <a:ea typeface="Microsoft JhengHei" pitchFamily="34" charset="-122"/>
-                <a:cs typeface="Microsoft JhengHei" pitchFamily="34" charset="-120"/>
-              </a:rPr>
-              <a:t>E2E、雙層護欄、部署計時…</a:t>
-            </a:r>
-            <a:endParaRPr lang="en-US" sz="1050" dirty="0"/>
-          </a:p>
-        </p:txBody>
-      </p:sp>
-      <p:sp>
-        <p:nvSpPr>
-          <p:cNvPr id="19" name="Shape 17"/>
-          <p:cNvSpPr/>
-          <p:nvPr/>
-        </p:nvSpPr>
-        <p:spPr>
-          <a:xfrm>
-            <a:off x="548640" y="4297680"/>
-            <a:ext cx="11091672" cy="914400"/>
-          </a:xfrm>
-          <a:prstGeom prst="roundRect">
-            <a:avLst>
-              <a:gd name="adj" fmla="val 9000"/>
-            </a:avLst>
-          </a:prstGeom>
-          <a:solidFill>
-            <a:srgbClr val="FDF0EF"/>
-          </a:solidFill>
-          <a:ln/>
-        </p:spPr>
-      </p:sp>
-      <p:sp>
-        <p:nvSpPr>
-          <p:cNvPr id="20" name="Text 18"/>
-          <p:cNvSpPr/>
-          <p:nvPr/>
-        </p:nvSpPr>
-        <p:spPr>
-          <a:xfrm>
-            <a:off x="822960" y="4434840"/>
-            <a:ext cx="10543032" cy="640080"/>
-          </a:xfrm>
-          <a:prstGeom prst="rect">
-            <a:avLst/>
-          </a:prstGeom>
-          <a:noFill/>
-          <a:ln/>
-        </p:spPr>
-        <p:txBody>
-          <a:bodyPr wrap="square" lIns="0" tIns="0" rIns="0" bIns="0" rtlCol="0" anchor="ctr"/>
-          <a:lstStyle/>
-          <a:p>
-            <a:pPr indent="0" marL="0">
-              <a:buNone/>
-            </a:pPr>
-            <a:r>
-              <a:rPr lang="en-US" sz="1400" b="1" dirty="0">
-                <a:solidFill>
-                  <a:srgbClr val="D64550"/>
-                </a:solidFill>
-                <a:latin typeface="Microsoft JhengHei" pitchFamily="34" charset="0"/>
-                <a:ea typeface="Microsoft JhengHei" pitchFamily="34" charset="-122"/>
-                <a:cs typeface="Microsoft JhengHei" pitchFamily="34" charset="-120"/>
-              </a:rPr>
-              <a:t>最大隱藏風險：</a:t>
-            </a:r>
-            <a:pPr indent="0" marL="0">
-              <a:buNone/>
-            </a:pPr>
-            <a:r>
-              <a:rPr lang="en-US" sz="1400" dirty="0">
-                <a:solidFill>
-                  <a:srgbClr val="1F2937"/>
-                </a:solidFill>
-                <a:latin typeface="Microsoft JhengHei" pitchFamily="34" charset="0"/>
-                <a:ea typeface="Microsoft JhengHei" pitchFamily="34" charset="-122"/>
-                <a:cs typeface="Microsoft JhengHei" pitchFamily="34" charset="-120"/>
-              </a:rPr>
-              <a:t>RAG 知識庫在線上是掛的（#34）：Bedrock 回「KB DSIYBVI1IX 不存在」，模型改用一般知識回答——**畫面看不出異常，只是安靜地少掉「附出處」這個賣點**，而 F3 是評分紅線。這種「優雅降級」的壞法最危險：不跑驗收就發現不了。修法要 B 包重建 KB 再帶參數部署。距 7/31 code freeze 剩 2 天。</a:t>
-            </a:r>
-            <a:endParaRPr lang="en-US" sz="1400" dirty="0"/>
-          </a:p>
-        </p:txBody>
-      </p:sp>
-      <p:sp>
-        <p:nvSpPr>
-          <p:cNvPr id="21" name="Text 19"/>
-          <p:cNvSpPr/>
-          <p:nvPr/>
-        </p:nvSpPr>
-        <p:spPr>
-          <a:xfrm>
-            <a:off x="548640" y="5486400"/>
-            <a:ext cx="11091672" cy="411480"/>
-          </a:xfrm>
-          <a:prstGeom prst="rect">
-            <a:avLst/>
-          </a:prstGeom>
-          <a:noFill/>
-          <a:ln/>
-        </p:spPr>
-        <p:txBody>
-          <a:bodyPr wrap="square" lIns="0" tIns="0" rIns="0" bIns="0" rtlCol="0" anchor="ctr"/>
-          <a:lstStyle/>
-          <a:p>
-            <a:pPr indent="0" marL="0">
-              <a:buNone/>
-            </a:pPr>
-            <a:r>
-              <a:rPr lang="en-US" sz="1500" b="1" dirty="0">
-                <a:solidFill>
-                  <a:srgbClr val="16224D"/>
-                </a:solidFill>
-                <a:latin typeface="Microsoft JhengHei" pitchFamily="34" charset="0"/>
-                <a:ea typeface="Microsoft JhengHei" pitchFamily="34" charset="-122"/>
-                <a:cs typeface="Microsoft JhengHei" pitchFamily="34" charset="-120"/>
-              </a:rPr>
-              <a:t>本週原則：先讓 🧪 變 ✅（把寫好的測到能動），再開 🔨 新工。</a:t>
-            </a:r>
-            <a:endParaRPr lang="en-US" sz="1500" dirty="0"/>
-          </a:p>
-        </p:txBody>
-      </p:sp>
-    </p:spTree>
-  </p:cSld>
-  <p:clrMapOvr>
-    <a:masterClrMapping/>
-  </p:clrMapOvr>
-</p:sld>
-</file>
-
-<file path=ppt/slides/slide20.xml><?xml version="1.0" encoding="utf-8"?>
-<p:sld xmlns:a="http://schemas.openxmlformats.org/drawingml/2006/main" xmlns:r="http://schemas.openxmlformats.org/officeDocument/2006/relationships" xmlns:p="http://schemas.openxmlformats.org/presentationml/2006/main">
-  <p:cSld name="Slide 20">
+  <p:cSld name="Slide 21">
     <p:bg>
       <p:bgPr>
         <a:solidFill>
@@ -18125,9 +21866,9 @@
 </p:sld>
 </file>
 
-<file path=ppt/slides/slide21.xml><?xml version="1.0" encoding="utf-8"?>
+<file path=ppt/slides/slide22.xml><?xml version="1.0" encoding="utf-8"?>
 <p:sld xmlns:a="http://schemas.openxmlformats.org/drawingml/2006/main" xmlns:r="http://schemas.openxmlformats.org/officeDocument/2006/relationships" xmlns:p="http://schemas.openxmlformats.org/presentationml/2006/main">
-  <p:cSld name="Slide 21">
+  <p:cSld name="Slide 22">
     <p:bg>
       <p:bgPr>
         <a:solidFill>
@@ -18229,7 +21970,7 @@
       </p:sp>
       <p:graphicFrame>
         <p:nvGraphicFramePr>
-          <p:cNvPr id="22" name="Table 0"/>
+          <p:cNvPr id="23" name="Table 0"/>
           <p:cNvGraphicFramePr>
             <a:graphicFrameLocks noGrp="1"/>
           </p:cNvGraphicFramePr>
@@ -21161,9 +24902,9 @@
 </p:sld>
 </file>
 
-<file path=ppt/slides/slide22.xml><?xml version="1.0" encoding="utf-8"?>
+<file path=ppt/slides/slide23.xml><?xml version="1.0" encoding="utf-8"?>
 <p:sld xmlns:a="http://schemas.openxmlformats.org/drawingml/2006/main" xmlns:r="http://schemas.openxmlformats.org/officeDocument/2006/relationships" xmlns:p="http://schemas.openxmlformats.org/presentationml/2006/main">
-  <p:cSld name="Slide 22">
+  <p:cSld name="Slide 23">
     <p:bg>
       <p:bgPr>
         <a:solidFill>
@@ -21668,9 +25409,9 @@
 </p:sld>
 </file>
 
-<file path=ppt/slides/slide23.xml><?xml version="1.0" encoding="utf-8"?>
+<file path=ppt/slides/slide24.xml><?xml version="1.0" encoding="utf-8"?>
 <p:sld xmlns:a="http://schemas.openxmlformats.org/drawingml/2006/main" xmlns:r="http://schemas.openxmlformats.org/officeDocument/2006/relationships" xmlns:p="http://schemas.openxmlformats.org/presentationml/2006/main">
-  <p:cSld name="Slide 23">
+  <p:cSld name="Slide 24">
     <p:bg>
       <p:bgPr>
         <a:solidFill>

--- a/docs/MaiMate_開發手冊.pptx
+++ b/docs/MaiMate_開發手冊.pptx
@@ -8597,7 +8597,7 @@
       </p:sp>
       <p:pic>
         <p:nvPicPr>
-          <p:cNvPr id="4" name="Image 0" descr="/Users/hao/Documents/MaiMate/docs/mockups/screen1.png">    </p:cNvPr>
+          <p:cNvPr id="4" name="Image 0" descr="/private/tmp/claude-501/-Users-hao-Documents-MaiMate/4a0e4848-2a68-4adf-9f83-532991311895/scratchpad/hb-wt/docs/mockups/screen1.png">    </p:cNvPr>
           <p:cNvPicPr>
             <a:picLocks noChangeAspect="1"/>
           </p:cNvPicPr>
@@ -8699,7 +8699,7 @@
       </p:sp>
       <p:pic>
         <p:nvPicPr>
-          <p:cNvPr id="7" name="Image 1" descr="/Users/hao/Documents/MaiMate/docs/mockups/screen2.png">    </p:cNvPr>
+          <p:cNvPr id="7" name="Image 1" descr="/private/tmp/claude-501/-Users-hao-Documents-MaiMate/4a0e4848-2a68-4adf-9f83-532991311895/scratchpad/hb-wt/docs/mockups/screen2.png">    </p:cNvPr>
           <p:cNvPicPr>
             <a:picLocks noChangeAspect="1"/>
           </p:cNvPicPr>
@@ -8801,7 +8801,7 @@
       </p:sp>
       <p:pic>
         <p:nvPicPr>
-          <p:cNvPr id="10" name="Image 2" descr="/Users/hao/Documents/MaiMate/docs/mockups/screen3.png">    </p:cNvPr>
+          <p:cNvPr id="10" name="Image 2" descr="/private/tmp/claude-501/-Users-hao-Documents-MaiMate/4a0e4848-2a68-4adf-9f83-532991311895/scratchpad/hb-wt/docs/mockups/screen3.png">    </p:cNvPr>
           <p:cNvPicPr>
             <a:picLocks noChangeAspect="1"/>
           </p:cNvPicPr>
@@ -19674,7 +19674,7 @@
                 <a:ea typeface="Microsoft JhengHei" pitchFamily="34" charset="-122"/>
                 <a:cs typeface="Microsoft JhengHei" pitchFamily="34" charset="-120"/>
               </a:rPr>
-              <a:t>總覽：下單鏈路已上線並自動驗過 21 項——但 RAG 知識庫在線上是掛的</a:t>
+              <a:t>總覽：下單鏈路已真錢驗過，RAG 附出處已回復——剩護欄第五層未啟用</a:t>
             </a:r>
             <a:endParaRPr lang="en-US" sz="2700" dirty="0"/>
           </a:p>
@@ -20305,7 +20305,7 @@
                 <a:ea typeface="Microsoft JhengHei" pitchFamily="34" charset="-122"/>
                 <a:cs typeface="Microsoft JhengHei" pitchFamily="34" charset="-120"/>
               </a:rPr>
-              <a:t>RAG 知識庫在線上是掛的（#34）：Bedrock 回「KB DSIYBVI1IX 不存在」，模型改用一般知識回答——**畫面看不出異常，只是安靜地少掉「附出處」這個賣點**，而 F3 是評分紅線。這種「優雅降級」的壞法最危險：不跑驗收就發現不了。修法要 B 包重建 KB 再帶參數部署。距 7/31 code freeze 剩 2 天。</a:t>
+              <a:t>KB 是「帳號＋region」範圍的資源，模板管不到——換帳號不重建，RAG 就會**靜默失效**：畫面看不出異常，只是安靜地少掉「附出處」這個賣點，而 F3 是評分紅線。#34 踩過兩次後已重建並關單，並補了一鍵重建腳本 `scripts/setup_rag_kb.py`。這種「優雅降級」的壞法最危險：不跑驗收就發現不了。</a:t>
             </a:r>
             <a:endParaRPr lang="en-US" sz="1400" dirty="0"/>
           </a:p>
@@ -30740,13 +30740,13 @@
                       <a:r>
                         <a:rPr lang="en-US" sz="1100" b="1" dirty="0">
                           <a:solidFill>
-                            <a:srgbClr val="D64550"/>
-                          </a:solidFill>
-                          <a:latin typeface="Microsoft JhengHei" pitchFamily="34" charset="0"/>
-                          <a:ea typeface="Microsoft JhengHei" pitchFamily="34" charset="-122"/>
-                          <a:cs typeface="Microsoft JhengHei" pitchFamily="34" charset="-120"/>
-                        </a:rPr>
-                        <a:t>🔨 待做</a:t>
+                            <a:srgbClr val="1F9D66"/>
+                          </a:solidFill>
+                          <a:latin typeface="Microsoft JhengHei" pitchFamily="34" charset="0"/>
+                          <a:ea typeface="Microsoft JhengHei" pitchFamily="34" charset="-122"/>
+                          <a:cs typeface="Microsoft JhengHei" pitchFamily="34" charset="-120"/>
+                        </a:rPr>
+                        <a:t>✅ 已驗證</a:t>
                       </a:r>
                       <a:endParaRPr lang="en-US" sz="1100" dirty="0">
                         <a:latin typeface="Microsoft JhengHei" charset="0"/>
@@ -30811,7 +30811,7 @@
                           <a:ea typeface="Microsoft JhengHei" pitchFamily="34" charset="-122"/>
                           <a:cs typeface="Microsoft JhengHei" pitchFamily="34" charset="-120"/>
                         </a:rPr>
-                        <a:t>🚨 07/29 實測：KB DSIYBVI1IX 在帳號裡已不存在（Bedrock 回 ResourceNotFound）——07/22 建成後迴歸，需重建再帶 KnowledgeBaseId 部署（#34）</a:t>
+                        <a:t>#34 已修並關單：KB 重建、附出處回復。KB 隨帳號＋region，換環境必重建（scripts/setup_rag_kb.py 一鍵）</a:t>
                       </a:r>
                       <a:endParaRPr lang="en-US" sz="1100" dirty="0">
                         <a:latin typeface="Microsoft JhengHei" charset="0"/>
@@ -31002,13 +31002,13 @@
                       <a:r>
                         <a:rPr lang="en-US" sz="1100" b="1" dirty="0">
                           <a:solidFill>
-                            <a:srgbClr val="E8A13A"/>
-                          </a:solidFill>
-                          <a:latin typeface="Microsoft JhengHei" pitchFamily="34" charset="0"/>
-                          <a:ea typeface="Microsoft JhengHei" pitchFamily="34" charset="-122"/>
-                          <a:cs typeface="Microsoft JhengHei" pitchFamily="34" charset="-120"/>
-                        </a:rPr>
-                        <a:t>🧪 寫好待測</a:t>
+                            <a:srgbClr val="1F9D66"/>
+                          </a:solidFill>
+                          <a:latin typeface="Microsoft JhengHei" pitchFamily="34" charset="0"/>
+                          <a:ea typeface="Microsoft JhengHei" pitchFamily="34" charset="-122"/>
+                          <a:cs typeface="Microsoft JhengHei" pitchFamily="34" charset="-120"/>
+                        </a:rPr>
+                        <a:t>✅ 已驗證</a:t>
                       </a:r>
                       <a:endParaRPr lang="en-US" sz="1100" dirty="0">
                         <a:latin typeface="Microsoft JhengHei" charset="0"/>
@@ -31073,7 +31073,7 @@
                           <a:ea typeface="Microsoft JhengHei" pitchFamily="34" charset="-122"/>
                           <a:cs typeface="Microsoft JhengHei" pitchFamily="34" charset="-120"/>
                         </a:rPr>
-                        <a:t>程式正確（有註冊、模型也會呼叫），但線上因 KB 不存在而每次 error；KB 一補回來即通</a:t>
+                        <a:t>線上實測可用（F3／F4 通過）；KB_ID 未設時自動不註冊，不會假裝有出處</a:t>
                       </a:r>
                       <a:endParaRPr lang="en-US" sz="1100" dirty="0">
                         <a:latin typeface="Microsoft JhengHei" charset="0"/>
